--- a/assets/decks/episodio-03-metricflow-local.pptx
+++ b/assets/decks/episodio-03-metricflow-local.pptx
@@ -2,35 +2,35 @@
 <file path=ppt/presentation.xml><?xml version="1.0" encoding="utf-8"?>
 <p:presentation xmlns:p="http://schemas.openxmlformats.org/presentationml/2006/main">
   <p:sldMasterIdLst>
-    <p:sldMasterId xmlns:r="http://schemas.openxmlformats.org/officeDocument/2006/relationships" id="2147483648" r:id="Rb54f52fca56a4fa6"/>
-    <p:sldMasterId xmlns:r="http://schemas.openxmlformats.org/officeDocument/2006/relationships" id="2147483650" r:id="R1214a62a425b4d1f"/>
+    <p:sldMasterId xmlns:r="http://schemas.openxmlformats.org/officeDocument/2006/relationships" id="2147483648" r:id="Rfc5a9e0de5af43f0"/>
+    <p:sldMasterId xmlns:r="http://schemas.openxmlformats.org/officeDocument/2006/relationships" id="2147483650" r:id="R1b8454f48c974721"/>
   </p:sldMasterIdLst>
   <p:notesMasterIdLst>
-    <p:notesMasterId xmlns:r="http://schemas.openxmlformats.org/officeDocument/2006/relationships" r:id="Rfbd3f3b4e7854ee7"/>
+    <p:notesMasterId xmlns:r="http://schemas.openxmlformats.org/officeDocument/2006/relationships" r:id="Rb68d988972cb485b"/>
   </p:notesMasterIdLst>
   <p:sldIdLst>
-    <p:sldId xmlns:r="http://schemas.openxmlformats.org/officeDocument/2006/relationships" id="256" r:id="R042a4be9d2b74f49"/>
-    <p:sldId xmlns:r="http://schemas.openxmlformats.org/officeDocument/2006/relationships" id="257" r:id="R021ac8d323704479"/>
-    <p:sldId xmlns:r="http://schemas.openxmlformats.org/officeDocument/2006/relationships" id="258" r:id="Ref05bedd61134d2c"/>
-    <p:sldId xmlns:r="http://schemas.openxmlformats.org/officeDocument/2006/relationships" id="259" r:id="Re4f3efa0e050409c"/>
-    <p:sldId xmlns:r="http://schemas.openxmlformats.org/officeDocument/2006/relationships" id="260" r:id="Rcad71a2d4f04459a"/>
-    <p:sldId xmlns:r="http://schemas.openxmlformats.org/officeDocument/2006/relationships" id="261" r:id="R64448a467ffe44ff"/>
-    <p:sldId xmlns:r="http://schemas.openxmlformats.org/officeDocument/2006/relationships" id="262" r:id="Rda309de60451441c"/>
-    <p:sldId xmlns:r="http://schemas.openxmlformats.org/officeDocument/2006/relationships" id="263" r:id="Rca8c0df4b02a47d1"/>
-    <p:sldId xmlns:r="http://schemas.openxmlformats.org/officeDocument/2006/relationships" id="264" r:id="Red84954267f441e8"/>
-    <p:sldId xmlns:r="http://schemas.openxmlformats.org/officeDocument/2006/relationships" id="265" r:id="Rdf2eecc071f34cef"/>
-    <p:sldId xmlns:r="http://schemas.openxmlformats.org/officeDocument/2006/relationships" id="266" r:id="R49ea1ec684cf46ae"/>
-    <p:sldId xmlns:r="http://schemas.openxmlformats.org/officeDocument/2006/relationships" id="267" r:id="R47d39403e8f1400d"/>
-    <p:sldId xmlns:r="http://schemas.openxmlformats.org/officeDocument/2006/relationships" id="268" r:id="Rb6e32c2d55784f6b"/>
-    <p:sldId xmlns:r="http://schemas.openxmlformats.org/officeDocument/2006/relationships" id="269" r:id="R9598b50943bf4ebc"/>
-    <p:sldId xmlns:r="http://schemas.openxmlformats.org/officeDocument/2006/relationships" id="270" r:id="Re75454c3008a4068"/>
-    <p:sldId xmlns:r="http://schemas.openxmlformats.org/officeDocument/2006/relationships" id="271" r:id="Rb0bace32ebc442e0"/>
-    <p:sldId xmlns:r="http://schemas.openxmlformats.org/officeDocument/2006/relationships" id="272" r:id="Rb1106abe9c794217"/>
-    <p:sldId xmlns:r="http://schemas.openxmlformats.org/officeDocument/2006/relationships" id="273" r:id="Rd6ac1993040a49bd"/>
-    <p:sldId xmlns:r="http://schemas.openxmlformats.org/officeDocument/2006/relationships" id="274" r:id="Re1f81135f2c2490e"/>
-    <p:sldId xmlns:r="http://schemas.openxmlformats.org/officeDocument/2006/relationships" id="275" r:id="R822c7953e76947a9"/>
-    <p:sldId xmlns:r="http://schemas.openxmlformats.org/officeDocument/2006/relationships" id="276" r:id="R5cd2bd04937e4fa2"/>
-    <p:sldId xmlns:r="http://schemas.openxmlformats.org/officeDocument/2006/relationships" id="277" r:id="R2c2687f570fd46a2"/>
+    <p:sldId xmlns:r="http://schemas.openxmlformats.org/officeDocument/2006/relationships" id="256" r:id="R590aa0526995414b"/>
+    <p:sldId xmlns:r="http://schemas.openxmlformats.org/officeDocument/2006/relationships" id="257" r:id="R6a4bfcbf539d4992"/>
+    <p:sldId xmlns:r="http://schemas.openxmlformats.org/officeDocument/2006/relationships" id="258" r:id="Rd85def057c64472a"/>
+    <p:sldId xmlns:r="http://schemas.openxmlformats.org/officeDocument/2006/relationships" id="259" r:id="R087918ddc70947b5"/>
+    <p:sldId xmlns:r="http://schemas.openxmlformats.org/officeDocument/2006/relationships" id="260" r:id="R5c6e8e491b874c63"/>
+    <p:sldId xmlns:r="http://schemas.openxmlformats.org/officeDocument/2006/relationships" id="261" r:id="Rd22ba146db6b4f99"/>
+    <p:sldId xmlns:r="http://schemas.openxmlformats.org/officeDocument/2006/relationships" id="262" r:id="Ra475b24577bb4c3f"/>
+    <p:sldId xmlns:r="http://schemas.openxmlformats.org/officeDocument/2006/relationships" id="263" r:id="Rccc2ea716e5a4b79"/>
+    <p:sldId xmlns:r="http://schemas.openxmlformats.org/officeDocument/2006/relationships" id="264" r:id="Rb42f907b641343ae"/>
+    <p:sldId xmlns:r="http://schemas.openxmlformats.org/officeDocument/2006/relationships" id="265" r:id="R0416ae11d9c94676"/>
+    <p:sldId xmlns:r="http://schemas.openxmlformats.org/officeDocument/2006/relationships" id="266" r:id="Rb4264e310a6941b2"/>
+    <p:sldId xmlns:r="http://schemas.openxmlformats.org/officeDocument/2006/relationships" id="267" r:id="Rad33155cd736486d"/>
+    <p:sldId xmlns:r="http://schemas.openxmlformats.org/officeDocument/2006/relationships" id="268" r:id="R80a4c5d892374336"/>
+    <p:sldId xmlns:r="http://schemas.openxmlformats.org/officeDocument/2006/relationships" id="269" r:id="Reb4436602d8e413c"/>
+    <p:sldId xmlns:r="http://schemas.openxmlformats.org/officeDocument/2006/relationships" id="270" r:id="R4682acf6e6ee4f46"/>
+    <p:sldId xmlns:r="http://schemas.openxmlformats.org/officeDocument/2006/relationships" id="271" r:id="R87793ab35585495c"/>
+    <p:sldId xmlns:r="http://schemas.openxmlformats.org/officeDocument/2006/relationships" id="272" r:id="R7b46cca0d6534d2c"/>
+    <p:sldId xmlns:r="http://schemas.openxmlformats.org/officeDocument/2006/relationships" id="273" r:id="R2f2004c7902f4083"/>
+    <p:sldId xmlns:r="http://schemas.openxmlformats.org/officeDocument/2006/relationships" id="274" r:id="R0ebd668c9eca446c"/>
+    <p:sldId xmlns:r="http://schemas.openxmlformats.org/officeDocument/2006/relationships" id="275" r:id="R5706bcddf6004889"/>
+    <p:sldId xmlns:r="http://schemas.openxmlformats.org/officeDocument/2006/relationships" id="276" r:id="Rcc43c4cc69a34a60"/>
+    <p:sldId xmlns:r="http://schemas.openxmlformats.org/officeDocument/2006/relationships" id="277" r:id="R4c2d18769afd40bb"/>
   </p:sldIdLst>
   <p:sldSz cx="12192000" cy="6858000"/>
   <p:notesSz cx="6858000" cy="9144000"/>
@@ -464,7 +464,57 @@
           <a:lstStyle xmlns:a="http://schemas.openxmlformats.org/drawingml/2006/main"/>
           <a:p xmlns:a="http://schemas.openxmlformats.org/drawingml/2006/main">
             <a:r>
-              <a:t>Apresente o objetivo do EPISÓDIO 3 e conecte-o ao checkpoint executável. Uma métrica declarada uma vez pode gerar o mesmo SQL para todos os consumidores.</a:t>
+              <a:t>[Roteiro recomendado]</a:t>
+            </a:r>
+          </a:p>
+          <a:p xmlns:a="http://schemas.openxmlformats.org/drawingml/2006/main">
+            <a:r>
+              <a:t>[Tempo sugerido: 00:45]</a:t>
+            </a:r>
+          </a:p>
+          <a:p xmlns:a="http://schemas.openxmlformats.org/drawingml/2006/main">
+            <a:r>
+              <a:t/>
+            </a:r>
+          </a:p>
+          <a:p xmlns:a="http://schemas.openxmlformats.org/drawingml/2006/main">
+            <a:r>
+              <a:t>Fala sugerida:</a:t>
+            </a:r>
+          </a:p>
+          <a:p xmlns:a="http://schemas.openxmlformats.org/drawingml/2006/main">
+            <a:r>
+              <a:t>Bem-vindo ao episódio 3 do dbt Moderno na Prática. Hoje vamos trabalhar o tema “MetricFlow local: métricas como código”. Defina, valide, compile e execute sem conta dbt Platform. O objetivo não é apenas conhecer o conceito: vamos conectá-lo ao laboratório e terminar com uma evidência que você consegue reproduzir no seu próprio ambiente. Ao longo da aula, separe sempre o que é recurso aberto e estável daquilo que aparecerá apenas no Radar.</a:t>
+            </a:r>
+          </a:p>
+          <a:p xmlns:a="http://schemas.openxmlformats.org/drawingml/2006/main">
+            <a:r>
+              <a:t/>
+            </a:r>
+          </a:p>
+          <a:p xmlns:a="http://schemas.openxmlformats.org/drawingml/2006/main">
+            <a:r>
+              <a:t>O que destacar:</a:t>
+            </a:r>
+          </a:p>
+          <a:p xmlns:a="http://schemas.openxmlformats.org/drawingml/2006/main">
+            <a:r>
+              <a:t>- Apresente o título, situe o checkpoint 03 e deixe claro que a aula faz parte da trilha open/stable.</a:t>
+            </a:r>
+          </a:p>
+          <a:p xmlns:a="http://schemas.openxmlformats.org/drawingml/2006/main">
+            <a:r>
+              <a:t/>
+            </a:r>
+          </a:p>
+          <a:p xmlns:a="http://schemas.openxmlformats.org/drawingml/2006/main">
+            <a:r>
+              <a:t>Transição:</a:t>
+            </a:r>
+          </a:p>
+          <a:p xmlns:a="http://schemas.openxmlformats.org/drawingml/2006/main">
+            <a:r>
+              <a:t>Com esse ponto estabelecido, avance para “Uma métrica declarada uma vez pode gerar o mesmo SQL para todos os consumidores.”.</a:t>
             </a:r>
           </a:p>
           <a:p xmlns:a="http://schemas.openxmlformats.org/drawingml/2006/main">
@@ -579,7 +629,57 @@
           <a:lstStyle xmlns:a="http://schemas.openxmlformats.org/drawingml/2006/main"/>
           <a:p xmlns:a="http://schemas.openxmlformats.org/drawingml/2006/main">
             <a:r>
-              <a:t>Use a composição para explicar visualmente: A dimensão padrão precisa refletir a pergunta de negócio. order_purchase_date Granularidade diária Time spine para operações temporais</a:t>
+              <a:t>[Roteiro recomendado]</a:t>
+            </a:r>
+          </a:p>
+          <a:p xmlns:a="http://schemas.openxmlformats.org/drawingml/2006/main">
+            <a:r>
+              <a:t>[Tempo sugerido: 00:55]</a:t>
+            </a:r>
+          </a:p>
+          <a:p xmlns:a="http://schemas.openxmlformats.org/drawingml/2006/main">
+            <a:r>
+              <a:t/>
+            </a:r>
+          </a:p>
+          <a:p xmlns:a="http://schemas.openxmlformats.org/drawingml/2006/main">
+            <a:r>
+              <a:t>Fala sugerida:</a:t>
+            </a:r>
+          </a:p>
+          <a:p xmlns:a="http://schemas.openxmlformats.org/drawingml/2006/main">
+            <a:r>
+              <a:t>Agora vamos ler a ideia visualmente. A dimensão padrão precisa refletir a pergunta de negócio. Siga a composição na ordem mostrada e conecte evento, Grão, Calendário e Métrica. A imagem ou o fluxo não cria uma regra nova; ele torna visível a relação que acabamos de explicar. Use a disposição dos elementos para reforçar causa, dependência ou comparação.</a:t>
+            </a:r>
+          </a:p>
+          <a:p xmlns:a="http://schemas.openxmlformats.org/drawingml/2006/main">
+            <a:r>
+              <a:t/>
+            </a:r>
+          </a:p>
+          <a:p xmlns:a="http://schemas.openxmlformats.org/drawingml/2006/main">
+            <a:r>
+              <a:t>O que destacar:</a:t>
+            </a:r>
+          </a:p>
+          <a:p xmlns:a="http://schemas.openxmlformats.org/drawingml/2006/main">
+            <a:r>
+              <a:t>- Acompanhe o fluxo ou a comparação com o cursor e preserve a ordem de leitura do slide.</a:t>
+            </a:r>
+          </a:p>
+          <a:p xmlns:a="http://schemas.openxmlformats.org/drawingml/2006/main">
+            <a:r>
+              <a:t/>
+            </a:r>
+          </a:p>
+          <a:p xmlns:a="http://schemas.openxmlformats.org/drawingml/2006/main">
+            <a:r>
+              <a:t>Transição:</a:t>
+            </a:r>
+          </a:p>
+          <a:p xmlns:a="http://schemas.openxmlformats.org/drawingml/2006/main">
+            <a:r>
+              <a:t>Com esse ponto estabelecido, avance para “Métricas simples vivem perto do dado”.</a:t>
             </a:r>
           </a:p>
           <a:p xmlns:a="http://schemas.openxmlformats.org/drawingml/2006/main">
@@ -694,7 +794,57 @@
           <a:lstStyle xmlns:a="http://schemas.openxmlformats.org/drawingml/2006/main"/>
           <a:p xmlns:a="http://schemas.openxmlformats.org/drawingml/2006/main">
             <a:r>
-              <a:t>Contagem, soma e receita entregue reutilizam colunas já testadas. Desenvolva os pontos: orders: count_distinct; gross_revenue: sum; delivered_revenue: sum.</a:t>
+              <a:t>[Roteiro recomendado]</a:t>
+            </a:r>
+          </a:p>
+          <a:p xmlns:a="http://schemas.openxmlformats.org/drawingml/2006/main">
+            <a:r>
+              <a:t>[Tempo sugerido: 01:10]</a:t>
+            </a:r>
+          </a:p>
+          <a:p xmlns:a="http://schemas.openxmlformats.org/drawingml/2006/main">
+            <a:r>
+              <a:t/>
+            </a:r>
+          </a:p>
+          <a:p xmlns:a="http://schemas.openxmlformats.org/drawingml/2006/main">
+            <a:r>
+              <a:t>Fala sugerida:</a:t>
+            </a:r>
+          </a:p>
+          <a:p xmlns:a="http://schemas.openxmlformats.org/drawingml/2006/main">
+            <a:r>
+              <a:t>A mensagem principal deste slide é: Contagem, soma e receita entregue reutilizam colunas já testadas. Para tornar isso concreto, observe orders: count_distinct, gross_revenue: sum e delivered_revenue: sum. Esses pontos devem ser entendidos em conjunto; não são funcionalidades isoladas. No projeto, essa combinação transforma uma convenção informal em algo que pode ser revisado, testado ou consumido de maneira consistente.</a:t>
+            </a:r>
+          </a:p>
+          <a:p xmlns:a="http://schemas.openxmlformats.org/drawingml/2006/main">
+            <a:r>
+              <a:t/>
+            </a:r>
+          </a:p>
+          <a:p xmlns:a="http://schemas.openxmlformats.org/drawingml/2006/main">
+            <a:r>
+              <a:t>O que destacar:</a:t>
+            </a:r>
+          </a:p>
+          <a:p xmlns:a="http://schemas.openxmlformats.org/drawingml/2006/main">
+            <a:r>
+              <a:t>- Comece pelo título, leia a afirmação abaixo dele e depois desenvolva os itens sem repetir o texto palavra por palavra.</a:t>
+            </a:r>
+          </a:p>
+          <a:p xmlns:a="http://schemas.openxmlformats.org/drawingml/2006/main">
+            <a:r>
+              <a:t/>
+            </a:r>
+          </a:p>
+          <a:p xmlns:a="http://schemas.openxmlformats.org/drawingml/2006/main">
+            <a:r>
+              <a:t>Transição:</a:t>
+            </a:r>
+          </a:p>
+          <a:p xmlns:a="http://schemas.openxmlformats.org/drawingml/2006/main">
+            <a:r>
+              <a:t>Com esse ponto estabelecido, avance para “Métricas simples vivem perto do dado”.</a:t>
             </a:r>
           </a:p>
           <a:p xmlns:a="http://schemas.openxmlformats.org/drawingml/2006/main">
@@ -809,7 +959,57 @@
           <a:lstStyle xmlns:a="http://schemas.openxmlformats.org/drawingml/2006/main"/>
           <a:p xmlns:a="http://schemas.openxmlformats.org/drawingml/2006/main">
             <a:r>
-              <a:t>Use a composição para explicar visualmente: Contagem, soma e receita entregue reutilizam colunas já testadas. orders: count_distinct gross_revenue: sum delivered_revenue: sum</a:t>
+              <a:t>[Roteiro recomendado]</a:t>
+            </a:r>
+          </a:p>
+          <a:p xmlns:a="http://schemas.openxmlformats.org/drawingml/2006/main">
+            <a:r>
+              <a:t>[Tempo sugerido: 00:55]</a:t>
+            </a:r>
+          </a:p>
+          <a:p xmlns:a="http://schemas.openxmlformats.org/drawingml/2006/main">
+            <a:r>
+              <a:t/>
+            </a:r>
+          </a:p>
+          <a:p xmlns:a="http://schemas.openxmlformats.org/drawingml/2006/main">
+            <a:r>
+              <a:t>Fala sugerida:</a:t>
+            </a:r>
+          </a:p>
+          <a:p xmlns:a="http://schemas.openxmlformats.org/drawingml/2006/main">
+            <a:r>
+              <a:t>Agora vamos ler a ideia visualmente. Contagem, soma e receita entregue reutilizam colunas já testadas. Siga a composição na ordem mostrada e conecte os elementos principais. A imagem ou o fluxo não cria uma regra nova; ele torna visível a relação que acabamos de explicar. Use a disposição dos elementos para reforçar causa, dependência ou comparação.</a:t>
+            </a:r>
+          </a:p>
+          <a:p xmlns:a="http://schemas.openxmlformats.org/drawingml/2006/main">
+            <a:r>
+              <a:t/>
+            </a:r>
+          </a:p>
+          <a:p xmlns:a="http://schemas.openxmlformats.org/drawingml/2006/main">
+            <a:r>
+              <a:t>O que destacar:</a:t>
+            </a:r>
+          </a:p>
+          <a:p xmlns:a="http://schemas.openxmlformats.org/drawingml/2006/main">
+            <a:r>
+              <a:t>- Acompanhe o fluxo ou a comparação com o cursor e preserve a ordem de leitura do slide.</a:t>
+            </a:r>
+          </a:p>
+          <a:p xmlns:a="http://schemas.openxmlformats.org/drawingml/2006/main">
+            <a:r>
+              <a:t/>
+            </a:r>
+          </a:p>
+          <a:p xmlns:a="http://schemas.openxmlformats.org/drawingml/2006/main">
+            <a:r>
+              <a:t>Transição:</a:t>
+            </a:r>
+          </a:p>
+          <a:p xmlns:a="http://schemas.openxmlformats.org/drawingml/2006/main">
+            <a:r>
+              <a:t>Com esse ponto estabelecido, avance para “Razões reutilizam métricas nomeadas”.</a:t>
             </a:r>
           </a:p>
           <a:p xmlns:a="http://schemas.openxmlformats.org/drawingml/2006/main">
@@ -924,7 +1124,57 @@
           <a:lstStyle xmlns:a="http://schemas.openxmlformats.org/drawingml/2006/main"/>
           <a:p xmlns:a="http://schemas.openxmlformats.org/drawingml/2006/main">
             <a:r>
-              <a:t>Ticket médio compõe gross_revenue e orders sem copiar a fórmula. Desenvolva os pontos: Numerador governado; Denominador governado; Precisão e zero documentados.</a:t>
+              <a:t>[Roteiro recomendado]</a:t>
+            </a:r>
+          </a:p>
+          <a:p xmlns:a="http://schemas.openxmlformats.org/drawingml/2006/main">
+            <a:r>
+              <a:t>[Tempo sugerido: 01:10]</a:t>
+            </a:r>
+          </a:p>
+          <a:p xmlns:a="http://schemas.openxmlformats.org/drawingml/2006/main">
+            <a:r>
+              <a:t/>
+            </a:r>
+          </a:p>
+          <a:p xmlns:a="http://schemas.openxmlformats.org/drawingml/2006/main">
+            <a:r>
+              <a:t>Fala sugerida:</a:t>
+            </a:r>
+          </a:p>
+          <a:p xmlns:a="http://schemas.openxmlformats.org/drawingml/2006/main">
+            <a:r>
+              <a:t>A mensagem principal deste slide é: Ticket médio compõe gross_revenue e orders sem copiar a fórmula. Para tornar isso concreto, observe numerador governado, Denominador governado e Precisão e zero documentados. Esses pontos devem ser entendidos em conjunto; não são funcionalidades isoladas. No projeto, essa combinação transforma uma convenção informal em algo que pode ser revisado, testado ou consumido de maneira consistente.</a:t>
+            </a:r>
+          </a:p>
+          <a:p xmlns:a="http://schemas.openxmlformats.org/drawingml/2006/main">
+            <a:r>
+              <a:t/>
+            </a:r>
+          </a:p>
+          <a:p xmlns:a="http://schemas.openxmlformats.org/drawingml/2006/main">
+            <a:r>
+              <a:t>O que destacar:</a:t>
+            </a:r>
+          </a:p>
+          <a:p xmlns:a="http://schemas.openxmlformats.org/drawingml/2006/main">
+            <a:r>
+              <a:t>- Comece pelo título, leia a afirmação abaixo dele e depois desenvolva os itens sem repetir o texto palavra por palavra.</a:t>
+            </a:r>
+          </a:p>
+          <a:p xmlns:a="http://schemas.openxmlformats.org/drawingml/2006/main">
+            <a:r>
+              <a:t/>
+            </a:r>
+          </a:p>
+          <a:p xmlns:a="http://schemas.openxmlformats.org/drawingml/2006/main">
+            <a:r>
+              <a:t>Transição:</a:t>
+            </a:r>
+          </a:p>
+          <a:p xmlns:a="http://schemas.openxmlformats.org/drawingml/2006/main">
+            <a:r>
+              <a:t>Com esse ponto estabelecido, avance para “Razões reutilizam métricas nomeadas”.</a:t>
             </a:r>
           </a:p>
           <a:p xmlns:a="http://schemas.openxmlformats.org/drawingml/2006/main">
@@ -1039,7 +1289,57 @@
           <a:lstStyle xmlns:a="http://schemas.openxmlformats.org/drawingml/2006/main"/>
           <a:p xmlns:a="http://schemas.openxmlformats.org/drawingml/2006/main">
             <a:r>
-              <a:t>Use a composição para explicar visualmente: Ticket médio compõe gross_revenue e orders sem copiar a fórmula. Numerador governado Denominador governado Precisão e zero documentados</a:t>
+              <a:t>[Roteiro recomendado]</a:t>
+            </a:r>
+          </a:p>
+          <a:p xmlns:a="http://schemas.openxmlformats.org/drawingml/2006/main">
+            <a:r>
+              <a:t>[Tempo sugerido: 00:55]</a:t>
+            </a:r>
+          </a:p>
+          <a:p xmlns:a="http://schemas.openxmlformats.org/drawingml/2006/main">
+            <a:r>
+              <a:t/>
+            </a:r>
+          </a:p>
+          <a:p xmlns:a="http://schemas.openxmlformats.org/drawingml/2006/main">
+            <a:r>
+              <a:t>Fala sugerida:</a:t>
+            </a:r>
+          </a:p>
+          <a:p xmlns:a="http://schemas.openxmlformats.org/drawingml/2006/main">
+            <a:r>
+              <a:t>Agora vamos ler a ideia visualmente. Ticket médio compõe gross_revenue e orders sem copiar a fórmula. Siga a composição na ordem mostrada e conecte gross_revenue, ÷, orders e AOV. A imagem ou o fluxo não cria uma regra nova; ele torna visível a relação que acabamos de explicar. Use a disposição dos elementos para reforçar causa, dependência ou comparação.</a:t>
+            </a:r>
+          </a:p>
+          <a:p xmlns:a="http://schemas.openxmlformats.org/drawingml/2006/main">
+            <a:r>
+              <a:t/>
+            </a:r>
+          </a:p>
+          <a:p xmlns:a="http://schemas.openxmlformats.org/drawingml/2006/main">
+            <a:r>
+              <a:t>O que destacar:</a:t>
+            </a:r>
+          </a:p>
+          <a:p xmlns:a="http://schemas.openxmlformats.org/drawingml/2006/main">
+            <a:r>
+              <a:t>- Acompanhe o fluxo ou a comparação com o cursor e preserve a ordem de leitura do slide.</a:t>
+            </a:r>
+          </a:p>
+          <a:p xmlns:a="http://schemas.openxmlformats.org/drawingml/2006/main">
+            <a:r>
+              <a:t/>
+            </a:r>
+          </a:p>
+          <a:p xmlns:a="http://schemas.openxmlformats.org/drawingml/2006/main">
+            <a:r>
+              <a:t>Transição:</a:t>
+            </a:r>
+          </a:p>
+          <a:p xmlns:a="http://schemas.openxmlformats.org/drawingml/2006/main">
+            <a:r>
+              <a:t>Com esse ponto estabelecido, avance para “Demonstração — execute”.</a:t>
             </a:r>
           </a:p>
           <a:p xmlns:a="http://schemas.openxmlformats.org/drawingml/2006/main">
@@ -1154,7 +1454,57 @@
           <a:lstStyle xmlns:a="http://schemas.openxmlformats.org/drawingml/2006/main"/>
           <a:p xmlns:a="http://schemas.openxmlformats.org/drawingml/2006/main">
             <a:r>
-              <a:t>Execute python course.py checkpoint 03. Pause para o aluno acompanhar o terminal.</a:t>
+              <a:t>[Roteiro recomendado]</a:t>
+            </a:r>
+          </a:p>
+          <a:p xmlns:a="http://schemas.openxmlformats.org/drawingml/2006/main">
+            <a:r>
+              <a:t>[Tempo sugerido: 01:20]</a:t>
+            </a:r>
+          </a:p>
+          <a:p xmlns:a="http://schemas.openxmlformats.org/drawingml/2006/main">
+            <a:r>
+              <a:t/>
+            </a:r>
+          </a:p>
+          <a:p xmlns:a="http://schemas.openxmlformats.org/drawingml/2006/main">
+            <a:r>
+              <a:t>Fala sugerida:</a:t>
+            </a:r>
+          </a:p>
+          <a:p xmlns:a="http://schemas.openxmlformats.org/drawingml/2006/main">
+            <a:r>
+              <a:t>Agora vamos sair da explicação e comprovar o comportamento. Execute os comandos exatamente como aparecem: python course.py checkpoint 03. Não é necessário ativar o ambiente virtual manualmente; o launcher do curso seleciona o ambiente correto. Antes de avançar, confirme que o comando iniciou sem erro e dê tempo para o aluno acompanhar a mesma etapa.</a:t>
+            </a:r>
+          </a:p>
+          <a:p xmlns:a="http://schemas.openxmlformats.org/drawingml/2006/main">
+            <a:r>
+              <a:t/>
+            </a:r>
+          </a:p>
+          <a:p xmlns:a="http://schemas.openxmlformats.org/drawingml/2006/main">
+            <a:r>
+              <a:t>O que destacar:</a:t>
+            </a:r>
+          </a:p>
+          <a:p xmlns:a="http://schemas.openxmlformats.org/drawingml/2006/main">
+            <a:r>
+              <a:t>- Mostre o comando completo, execute uma linha por vez quando houver mais de uma e mantenha o terminal visível.</a:t>
+            </a:r>
+          </a:p>
+          <a:p xmlns:a="http://schemas.openxmlformats.org/drawingml/2006/main">
+            <a:r>
+              <a:t/>
+            </a:r>
+          </a:p>
+          <a:p xmlns:a="http://schemas.openxmlformats.org/drawingml/2006/main">
+            <a:r>
+              <a:t>Transição:</a:t>
+            </a:r>
+          </a:p>
+          <a:p xmlns:a="http://schemas.openxmlformats.org/drawingml/2006/main">
+            <a:r>
+              <a:t>Com esse ponto estabelecido, avance para “Demonstração — observe”.</a:t>
             </a:r>
           </a:p>
           <a:p xmlns:a="http://schemas.openxmlformats.org/drawingml/2006/main">
@@ -1269,7 +1619,57 @@
           <a:lstStyle xmlns:a="http://schemas.openxmlformats.org/drawingml/2006/main"/>
           <a:p xmlns:a="http://schemas.openxmlformats.org/drawingml/2006/main">
             <a:r>
-              <a:t>Durante a execução, destaque: mf validate-configs sem erro; Consulta mensal compilada; Janeiro a abril reconciliados.</a:t>
+              <a:t>[Roteiro recomendado]</a:t>
+            </a:r>
+          </a:p>
+          <a:p xmlns:a="http://schemas.openxmlformats.org/drawingml/2006/main">
+            <a:r>
+              <a:t>[Tempo sugerido: 01:10]</a:t>
+            </a:r>
+          </a:p>
+          <a:p xmlns:a="http://schemas.openxmlformats.org/drawingml/2006/main">
+            <a:r>
+              <a:t/>
+            </a:r>
+          </a:p>
+          <a:p xmlns:a="http://schemas.openxmlformats.org/drawingml/2006/main">
+            <a:r>
+              <a:t>Fala sugerida:</a:t>
+            </a:r>
+          </a:p>
+          <a:p xmlns:a="http://schemas.openxmlformats.org/drawingml/2006/main">
+            <a:r>
+              <a:t>Enquanto a execução acontece, não olhe apenas para a mensagem final. Observe mf validate-configs sem erro, Consulta mensal compilada e Janeiro a abril reconciliados. Cada sinal responde a uma pergunta diferente sobre o pipeline. Se um deles divergir, interrompa a demonstração e investigue; o objetivo do hands-on é produzir evidência, não apenas chegar rapidamente a uma tela verde.</a:t>
+            </a:r>
+          </a:p>
+          <a:p xmlns:a="http://schemas.openxmlformats.org/drawingml/2006/main">
+            <a:r>
+              <a:t/>
+            </a:r>
+          </a:p>
+          <a:p xmlns:a="http://schemas.openxmlformats.org/drawingml/2006/main">
+            <a:r>
+              <a:t>O que destacar:</a:t>
+            </a:r>
+          </a:p>
+          <a:p xmlns:a="http://schemas.openxmlformats.org/drawingml/2006/main">
+            <a:r>
+              <a:t>- Marque cada observação quando ela aparecer no terminal ou no artifact correspondente.</a:t>
+            </a:r>
+          </a:p>
+          <a:p xmlns:a="http://schemas.openxmlformats.org/drawingml/2006/main">
+            <a:r>
+              <a:t/>
+            </a:r>
+          </a:p>
+          <a:p xmlns:a="http://schemas.openxmlformats.org/drawingml/2006/main">
+            <a:r>
+              <a:t>Transição:</a:t>
+            </a:r>
+          </a:p>
+          <a:p xmlns:a="http://schemas.openxmlformats.org/drawingml/2006/main">
+            <a:r>
+              <a:t>Com esse ponto estabelecido, avance para “RESULTADO ESPERADO”.</a:t>
             </a:r>
           </a:p>
           <a:p xmlns:a="http://schemas.openxmlformats.org/drawingml/2006/main">
@@ -1384,7 +1784,57 @@
           <a:lstStyle xmlns:a="http://schemas.openxmlformats.org/drawingml/2006/main"/>
           <a:p xmlns:a="http://schemas.openxmlformats.org/drawingml/2006/main">
             <a:r>
-              <a:t>Confirme o resultado esperado: 8 pedidos · 740 bruto · 630 entregue · 92,50 AOV. Se o valor divergir, não avance sem investigar.</a:t>
+              <a:t>[Roteiro recomendado]</a:t>
+            </a:r>
+          </a:p>
+          <a:p xmlns:a="http://schemas.openxmlformats.org/drawingml/2006/main">
+            <a:r>
+              <a:t>[Tempo sugerido: 00:45]</a:t>
+            </a:r>
+          </a:p>
+          <a:p xmlns:a="http://schemas.openxmlformats.org/drawingml/2006/main">
+            <a:r>
+              <a:t/>
+            </a:r>
+          </a:p>
+          <a:p xmlns:a="http://schemas.openxmlformats.org/drawingml/2006/main">
+            <a:r>
+              <a:t>Fala sugerida:</a:t>
+            </a:r>
+          </a:p>
+          <a:p xmlns:a="http://schemas.openxmlformats.org/drawingml/2006/main">
+            <a:r>
+              <a:t>Este é o ponto de parada da demonstração: 8 pedidos · 740 bruto · 630 entregue · 92,50 AOV. Esse resultado confirma que a etapa executada produziu a evidência esperada para o checkpoint 03. Se o valor, o status ou o artifact estiver diferente, não trate a divergência como detalhe de ambiente. Use o diagnóstico do curso e só avance quando a causa estiver compreendida.</a:t>
+            </a:r>
+          </a:p>
+          <a:p xmlns:a="http://schemas.openxmlformats.org/drawingml/2006/main">
+            <a:r>
+              <a:t/>
+            </a:r>
+          </a:p>
+          <a:p xmlns:a="http://schemas.openxmlformats.org/drawingml/2006/main">
+            <a:r>
+              <a:t>O que destacar:</a:t>
+            </a:r>
+          </a:p>
+          <a:p xmlns:a="http://schemas.openxmlformats.org/drawingml/2006/main">
+            <a:r>
+              <a:t>- Compare o resultado do terminal com a frase central do slide e registre a evidência antes de continuar.</a:t>
+            </a:r>
+          </a:p>
+          <a:p xmlns:a="http://schemas.openxmlformats.org/drawingml/2006/main">
+            <a:r>
+              <a:t/>
+            </a:r>
+          </a:p>
+          <a:p xmlns:a="http://schemas.openxmlformats.org/drawingml/2006/main">
+            <a:r>
+              <a:t>Transição:</a:t>
+            </a:r>
+          </a:p>
+          <a:p xmlns:a="http://schemas.openxmlformats.org/drawingml/2006/main">
+            <a:r>
+              <a:t>Com esse ponto estabelecido, avance para “O mesmo recurso afeta três decisões”.</a:t>
             </a:r>
           </a:p>
           <a:p xmlns:a="http://schemas.openxmlformats.org/drawingml/2006/main">
@@ -1499,7 +1949,57 @@
           <a:lstStyle xmlns:a="http://schemas.openxmlformats.org/drawingml/2006/main"/>
           <a:p xmlns:a="http://schemas.openxmlformats.org/drawingml/2006/main">
             <a:r>
-              <a:t>Conecte a técnica aos efeitos: Governança: Git e ownership; FinOps: reuso com cardinalidade; IA: nomes em vez de joins inventados. Não prometa economia sem medição.</a:t>
+              <a:t>[Roteiro recomendado]</a:t>
+            </a:r>
+          </a:p>
+          <a:p xmlns:a="http://schemas.openxmlformats.org/drawingml/2006/main">
+            <a:r>
+              <a:t>[Tempo sugerido: 01:00]</a:t>
+            </a:r>
+          </a:p>
+          <a:p xmlns:a="http://schemas.openxmlformats.org/drawingml/2006/main">
+            <a:r>
+              <a:t/>
+            </a:r>
+          </a:p>
+          <a:p xmlns:a="http://schemas.openxmlformats.org/drawingml/2006/main">
+            <a:r>
+              <a:t>Fala sugerida:</a:t>
+            </a:r>
+          </a:p>
+          <a:p xmlns:a="http://schemas.openxmlformats.org/drawingml/2006/main">
+            <a:r>
+              <a:t>Antes de seguir, conecte a técnica às decisões que ela afeta: Governança: Git e ownership, FinOps: reuso com cardinalidade e IA: nomes em vez de joins inventados. Governança define responsabilidade e consistência; FinOps pergunta quanto trabalho estamos repetindo; e IA depende do contexto que decidimos expor. A mesma implementação pode melhorar os três eixos, mas os ganhos devem ser medidos separadamente.</a:t>
+            </a:r>
+          </a:p>
+          <a:p xmlns:a="http://schemas.openxmlformats.org/drawingml/2006/main">
+            <a:r>
+              <a:t/>
+            </a:r>
+          </a:p>
+          <a:p xmlns:a="http://schemas.openxmlformats.org/drawingml/2006/main">
+            <a:r>
+              <a:t>O que destacar:</a:t>
+            </a:r>
+          </a:p>
+          <a:p xmlns:a="http://schemas.openxmlformats.org/drawingml/2006/main">
+            <a:r>
+              <a:t>- Percorra os três eixos e evite apresentar economia ou acurácia como consequência automática.</a:t>
+            </a:r>
+          </a:p>
+          <a:p xmlns:a="http://schemas.openxmlformats.org/drawingml/2006/main">
+            <a:r>
+              <a:t/>
+            </a:r>
+          </a:p>
+          <a:p xmlns:a="http://schemas.openxmlformats.org/drawingml/2006/main">
+            <a:r>
+              <a:t>Transição:</a:t>
+            </a:r>
+          </a:p>
+          <a:p xmlns:a="http://schemas.openxmlformats.org/drawingml/2006/main">
+            <a:r>
+              <a:t>Com esse ponto estabelecido, avance para “2 → 13”.</a:t>
             </a:r>
           </a:p>
           <a:p xmlns:a="http://schemas.openxmlformats.org/drawingml/2006/main">
@@ -1614,7 +2114,57 @@
           <a:lstStyle xmlns:a="http://schemas.openxmlformats.org/drawingml/2006/main"/>
           <a:p xmlns:a="http://schemas.openxmlformats.org/drawingml/2006/main">
             <a:r>
-              <a:t>2 → 13: contribuidores reportados pela Inventa. O laboratório comprova apenas validação, SQL e reconciliação.</a:t>
+              <a:t>[Roteiro recomendado]</a:t>
+            </a:r>
+          </a:p>
+          <a:p xmlns:a="http://schemas.openxmlformats.org/drawingml/2006/main">
+            <a:r>
+              <a:t>[Tempo sugerido: 00:55]</a:t>
+            </a:r>
+          </a:p>
+          <a:p xmlns:a="http://schemas.openxmlformats.org/drawingml/2006/main">
+            <a:r>
+              <a:t/>
+            </a:r>
+          </a:p>
+          <a:p xmlns:a="http://schemas.openxmlformats.org/drawingml/2006/main">
+            <a:r>
+              <a:t>Fala sugerida:</a:t>
+            </a:r>
+          </a:p>
+          <a:p xmlns:a="http://schemas.openxmlformats.org/drawingml/2006/main">
+            <a:r>
+              <a:t>Aqui temos 2 → 13: contribuidores reportados pela Inventa. O número ajuda a dimensionar o exemplo, mas precisa ser lido com a ressalva correta. O laboratório comprova apenas validação, SQL e reconciliação. Use o case como evidência contextual e não como promessa de que outro projeto repetirá o mesmo resultado sem as mesmas condições.</a:t>
+            </a:r>
+          </a:p>
+          <a:p xmlns:a="http://schemas.openxmlformats.org/drawingml/2006/main">
+            <a:r>
+              <a:t/>
+            </a:r>
+          </a:p>
+          <a:p xmlns:a="http://schemas.openxmlformats.org/drawingml/2006/main">
+            <a:r>
+              <a:t>O que destacar:</a:t>
+            </a:r>
+          </a:p>
+          <a:p xmlns:a="http://schemas.openxmlformats.org/drawingml/2006/main">
+            <a:r>
+              <a:t>- Apresente primeiro o número, depois a definição e termine obrigatoriamente com a ressalva.</a:t>
+            </a:r>
+          </a:p>
+          <a:p xmlns:a="http://schemas.openxmlformats.org/drawingml/2006/main">
+            <a:r>
+              <a:t/>
+            </a:r>
+          </a:p>
+          <a:p xmlns:a="http://schemas.openxmlformats.org/drawingml/2006/main">
+            <a:r>
+              <a:t>Transição:</a:t>
+            </a:r>
+          </a:p>
+          <a:p xmlns:a="http://schemas.openxmlformats.org/drawingml/2006/main">
+            <a:r>
+              <a:t>Com esse ponto estabelecido, avance para “Limitações que precisam permanecer visíveis”.</a:t>
             </a:r>
           </a:p>
           <a:p xmlns:a="http://schemas.openxmlformats.org/drawingml/2006/main">
@@ -1729,7 +2279,57 @@
           <a:lstStyle xmlns:a="http://schemas.openxmlformats.org/drawingml/2006/main"/>
           <a:p xmlns:a="http://schemas.openxmlformats.org/drawingml/2006/main">
             <a:r>
-              <a:t>Uma métrica declarada uma vez pode gerar o mesmo SQL para todos os consumidores. Use o diagrama para antecipar o problema que será comprovado no laboratório.</a:t>
+              <a:t>[Roteiro recomendado]</a:t>
+            </a:r>
+          </a:p>
+          <a:p xmlns:a="http://schemas.openxmlformats.org/drawingml/2006/main">
+            <a:r>
+              <a:t>[Tempo sugerido: 01:00]</a:t>
+            </a:r>
+          </a:p>
+          <a:p xmlns:a="http://schemas.openxmlformats.org/drawingml/2006/main">
+            <a:r>
+              <a:t/>
+            </a:r>
+          </a:p>
+          <a:p xmlns:a="http://schemas.openxmlformats.org/drawingml/2006/main">
+            <a:r>
+              <a:t>Fala sugerida:</a:t>
+            </a:r>
+          </a:p>
+          <a:p xmlns:a="http://schemas.openxmlformats.org/drawingml/2006/main">
+            <a:r>
+              <a:t>Quero começar com uma provocação: Uma métrica declarada uma vez pode gerar o mesmo SQL para todos os consumidores. Essa pergunta orienta toda a aula. Em vez de aceitar uma afirmação porque ela parece correta, vamos procurar uma definição verificável e uma demonstração executável. Guarde essa tensão, porque voltaremos a ela quando compararmos o conceito com o resultado do laboratório.</a:t>
+            </a:r>
+          </a:p>
+          <a:p xmlns:a="http://schemas.openxmlformats.org/drawingml/2006/main">
+            <a:r>
+              <a:t/>
+            </a:r>
+          </a:p>
+          <a:p xmlns:a="http://schemas.openxmlformats.org/drawingml/2006/main">
+            <a:r>
+              <a:t>O que destacar:</a:t>
+            </a:r>
+          </a:p>
+          <a:p xmlns:a="http://schemas.openxmlformats.org/drawingml/2006/main">
+            <a:r>
+              <a:t>- Dê uma pausa depois da provocação e use o diagrama como mapa do problema, sem explicar todas as etapas ainda.</a:t>
+            </a:r>
+          </a:p>
+          <a:p xmlns:a="http://schemas.openxmlformats.org/drawingml/2006/main">
+            <a:r>
+              <a:t/>
+            </a:r>
+          </a:p>
+          <a:p xmlns:a="http://schemas.openxmlformats.org/drawingml/2006/main">
+            <a:r>
+              <a:t>Transição:</a:t>
+            </a:r>
+          </a:p>
+          <a:p xmlns:a="http://schemas.openxmlformats.org/drawingml/2006/main">
+            <a:r>
+              <a:t>Com esse ponto estabelecido, avance para “Ao final, você consegue...”.</a:t>
             </a:r>
           </a:p>
           <a:p xmlns:a="http://schemas.openxmlformats.org/drawingml/2006/main">
@@ -1844,7 +2444,57 @@
           <a:lstStyle xmlns:a="http://schemas.openxmlformats.org/drawingml/2006/main"/>
           <a:p xmlns:a="http://schemas.openxmlformats.org/drawingml/2006/main">
             <a:r>
-              <a:t>Apresente os limites sem minimizá-los: MetricFlow não decide a definição da métrica; Alta cardinalidade ainda custa; Biblioteca aberta não é o serviço hospedado.</a:t>
+              <a:t>[Roteiro recomendado]</a:t>
+            </a:r>
+          </a:p>
+          <a:p xmlns:a="http://schemas.openxmlformats.org/drawingml/2006/main">
+            <a:r>
+              <a:t>[Tempo sugerido: 01:00]</a:t>
+            </a:r>
+          </a:p>
+          <a:p xmlns:a="http://schemas.openxmlformats.org/drawingml/2006/main">
+            <a:r>
+              <a:t/>
+            </a:r>
+          </a:p>
+          <a:p xmlns:a="http://schemas.openxmlformats.org/drawingml/2006/main">
+            <a:r>
+              <a:t>Fala sugerida:</a:t>
+            </a:r>
+          </a:p>
+          <a:p xmlns:a="http://schemas.openxmlformats.org/drawingml/2006/main">
+            <a:r>
+              <a:t>Também precisamos declarar os limites da recomendação. Neste cenário, considere metricFlow não decide a definição da métrica, Alta cardinalidade ainda custa e Biblioteca aberta não é o serviço hospedado. Esses pontos não anulam a técnica; eles delimitam onde a demonstração é válida e quais condições precisam ser verificadas antes de levar o padrão para produção. Tratar limites como parte do design evita transformar uma boa prática em regra universal.</a:t>
+            </a:r>
+          </a:p>
+          <a:p xmlns:a="http://schemas.openxmlformats.org/drawingml/2006/main">
+            <a:r>
+              <a:t/>
+            </a:r>
+          </a:p>
+          <a:p xmlns:a="http://schemas.openxmlformats.org/drawingml/2006/main">
+            <a:r>
+              <a:t>O que destacar:</a:t>
+            </a:r>
+          </a:p>
+          <a:p xmlns:a="http://schemas.openxmlformats.org/drawingml/2006/main">
+            <a:r>
+              <a:t>- Leia os limites com o mesmo peso dado aos benefícios e diferencie restrição do laboratório de restrição do produto.</a:t>
+            </a:r>
+          </a:p>
+          <a:p xmlns:a="http://schemas.openxmlformats.org/drawingml/2006/main">
+            <a:r>
+              <a:t/>
+            </a:r>
+          </a:p>
+          <a:p xmlns:a="http://schemas.openxmlformats.org/drawingml/2006/main">
+            <a:r>
+              <a:t>Transição:</a:t>
+            </a:r>
+          </a:p>
+          <a:p xmlns:a="http://schemas.openxmlformats.org/drawingml/2006/main">
+            <a:r>
+              <a:t>Com esse ponto estabelecido, avance para “RADAR”.</a:t>
             </a:r>
           </a:p>
           <a:p xmlns:a="http://schemas.openxmlformats.org/drawingml/2006/main">
@@ -1959,7 +2609,57 @@
           <a:lstStyle xmlns:a="http://schemas.openxmlformats.org/drawingml/2006/main"/>
           <a:p xmlns:a="http://schemas.openxmlformats.org/drawingml/2006/main">
             <a:r>
-              <a:t>A matriz de suporte do Core 2.0/Fusion não é assumida igual ao Core 1.12. Reforce que beta e preview não fazem parte da aceitação.</a:t>
+              <a:t>[Roteiro recomendado]</a:t>
+            </a:r>
+          </a:p>
+          <a:p xmlns:a="http://schemas.openxmlformats.org/drawingml/2006/main">
+            <a:r>
+              <a:t>[Tempo sugerido: 00:55]</a:t>
+            </a:r>
+          </a:p>
+          <a:p xmlns:a="http://schemas.openxmlformats.org/drawingml/2006/main">
+            <a:r>
+              <a:t/>
+            </a:r>
+          </a:p>
+          <a:p xmlns:a="http://schemas.openxmlformats.org/drawingml/2006/main">
+            <a:r>
+              <a:t>Fala sugerida:</a:t>
+            </a:r>
+          </a:p>
+          <a:p xmlns:a="http://schemas.openxmlformats.org/drawingml/2006/main">
+            <a:r>
+              <a:t>Este é o nosso Radar: A matriz de suporte do Core 2.0/Fusion não é assumida igual ao Core 1.12. A intenção é mostrar a direção da ferramenta sem misturar preview com o caminho suportado da aula. Novidade observada não é recomendação de produção. Para adotar qualquer recurso futuro, confirme maturidade, adaptador, documentação e impacto sobre o projeto antes de alterar o baseline estável.</a:t>
+            </a:r>
+          </a:p>
+          <a:p xmlns:a="http://schemas.openxmlformats.org/drawingml/2006/main">
+            <a:r>
+              <a:t/>
+            </a:r>
+          </a:p>
+          <a:p xmlns:a="http://schemas.openxmlformats.org/drawingml/2006/main">
+            <a:r>
+              <a:t>O que destacar:</a:t>
+            </a:r>
+          </a:p>
+          <a:p xmlns:a="http://schemas.openxmlformats.org/drawingml/2006/main">
+            <a:r>
+              <a:t>- Reforce visualmente a regra do rodapé e não execute comandos beta ou preview como parte obrigatória da aula.</a:t>
+            </a:r>
+          </a:p>
+          <a:p xmlns:a="http://schemas.openxmlformats.org/drawingml/2006/main">
+            <a:r>
+              <a:t/>
+            </a:r>
+          </a:p>
+          <a:p xmlns:a="http://schemas.openxmlformats.org/drawingml/2006/main">
+            <a:r>
+              <a:t>Transição:</a:t>
+            </a:r>
+          </a:p>
+          <a:p xmlns:a="http://schemas.openxmlformats.org/drawingml/2006/main">
+            <a:r>
+              <a:t>Com esse ponto estabelecido, avance para “PRÓXIMO PASSO”.</a:t>
             </a:r>
           </a:p>
           <a:p xmlns:a="http://schemas.openxmlformats.org/drawingml/2006/main">
@@ -2074,7 +2774,57 @@
           <a:lstStyle xmlns:a="http://schemas.openxmlformats.org/drawingml/2006/main"/>
           <a:p xmlns:a="http://schemas.openxmlformats.org/drawingml/2006/main">
             <a:r>
-              <a:t>Implemente uma métrica simples e uma razão e reconcilie os valores. Encerre conectando a aula ao próximo checkpoint.</a:t>
+              <a:t>[Roteiro recomendado]</a:t>
+            </a:r>
+          </a:p>
+          <a:p xmlns:a="http://schemas.openxmlformats.org/drawingml/2006/main">
+            <a:r>
+              <a:t>[Tempo sugerido: 00:40]</a:t>
+            </a:r>
+          </a:p>
+          <a:p xmlns:a="http://schemas.openxmlformats.org/drawingml/2006/main">
+            <a:r>
+              <a:t/>
+            </a:r>
+          </a:p>
+          <a:p xmlns:a="http://schemas.openxmlformats.org/drawingml/2006/main">
+            <a:r>
+              <a:t>Fala sugerida:</a:t>
+            </a:r>
+          </a:p>
+          <a:p xmlns:a="http://schemas.openxmlformats.org/drawingml/2006/main">
+            <a:r>
+              <a:t>Implemente uma métrica simples e uma razão e reconcilie os valores. Faça essa etapa antes de seguir para o próximo episódio, porque o curso é cumulativo e o checkpoint atual se torna a base da aula seguinte. Se houver divergência, use o relatório de suporte e registre o que foi observado. O objetivo é avançar com um estado conhecido e reproduzível, não apenas assistir ao conteúdo.</a:t>
+            </a:r>
+          </a:p>
+          <a:p xmlns:a="http://schemas.openxmlformats.org/drawingml/2006/main">
+            <a:r>
+              <a:t/>
+            </a:r>
+          </a:p>
+          <a:p xmlns:a="http://schemas.openxmlformats.org/drawingml/2006/main">
+            <a:r>
+              <a:t>O que destacar:</a:t>
+            </a:r>
+          </a:p>
+          <a:p xmlns:a="http://schemas.openxmlformats.org/drawingml/2006/main">
+            <a:r>
+              <a:t>- Mostre o checkpoint e indique no repositório onde ficam o roteiro, os comandos e as referências da aula.</a:t>
+            </a:r>
+          </a:p>
+          <a:p xmlns:a="http://schemas.openxmlformats.org/drawingml/2006/main">
+            <a:r>
+              <a:t/>
+            </a:r>
+          </a:p>
+          <a:p xmlns:a="http://schemas.openxmlformats.org/drawingml/2006/main">
+            <a:r>
+              <a:t>Transição:</a:t>
+            </a:r>
+          </a:p>
+          <a:p xmlns:a="http://schemas.openxmlformats.org/drawingml/2006/main">
+            <a:r>
+              <a:t>Encerre retomando a pergunta inicial e confirme que o aluno sabe qual ação executar depois do episódio 3.</a:t>
             </a:r>
           </a:p>
           <a:p xmlns:a="http://schemas.openxmlformats.org/drawingml/2006/main">
@@ -2189,7 +2939,57 @@
           <a:lstStyle xmlns:a="http://schemas.openxmlformats.org/drawingml/2006/main"/>
           <a:p xmlns:a="http://schemas.openxmlformats.org/drawingml/2006/main">
             <a:r>
-              <a:t>Explique os três resultados observáveis da aula: Declarar entidades e dimensões; Criar métricas simples e razão; Reconciliar SQL com ground truth.</a:t>
+              <a:t>[Roteiro recomendado]</a:t>
+            </a:r>
+          </a:p>
+          <a:p xmlns:a="http://schemas.openxmlformats.org/drawingml/2006/main">
+            <a:r>
+              <a:t>[Tempo sugerido: 01:00]</a:t>
+            </a:r>
+          </a:p>
+          <a:p xmlns:a="http://schemas.openxmlformats.org/drawingml/2006/main">
+            <a:r>
+              <a:t/>
+            </a:r>
+          </a:p>
+          <a:p xmlns:a="http://schemas.openxmlformats.org/drawingml/2006/main">
+            <a:r>
+              <a:t>Fala sugerida:</a:t>
+            </a:r>
+          </a:p>
+          <a:p xmlns:a="http://schemas.openxmlformats.org/drawingml/2006/main">
+            <a:r>
+              <a:t>Ao final desta aula, você deverá conseguir declarar entidades e dimensões, Criar métricas simples e razão e Reconciliar SQL com ground truth. Esses resultados formam uma sequência: primeiro entendemos a regra, depois observamos sua representação no projeto e, por fim, comprovamos o comportamento no checkpoint. Se alguma dessas três partes não estiver clara, volte ao slide correspondente antes de executar a demonstração.</a:t>
+            </a:r>
+          </a:p>
+          <a:p xmlns:a="http://schemas.openxmlformats.org/drawingml/2006/main">
+            <a:r>
+              <a:t/>
+            </a:r>
+          </a:p>
+          <a:p xmlns:a="http://schemas.openxmlformats.org/drawingml/2006/main">
+            <a:r>
+              <a:t>O que destacar:</a:t>
+            </a:r>
+          </a:p>
+          <a:p xmlns:a="http://schemas.openxmlformats.org/drawingml/2006/main">
+            <a:r>
+              <a:t>- Percorra os objetivos da esquerda para a direita e apresente-os como resultados observáveis, não como uma agenda abstrata.</a:t>
+            </a:r>
+          </a:p>
+          <a:p xmlns:a="http://schemas.openxmlformats.org/drawingml/2006/main">
+            <a:r>
+              <a:t/>
+            </a:r>
+          </a:p>
+          <a:p xmlns:a="http://schemas.openxmlformats.org/drawingml/2006/main">
+            <a:r>
+              <a:t>Transição:</a:t>
+            </a:r>
+          </a:p>
+          <a:p xmlns:a="http://schemas.openxmlformats.org/drawingml/2006/main">
+            <a:r>
+              <a:t>Com esse ponto estabelecido, avance para “MetricFlow compila; não adivinha”.</a:t>
             </a:r>
           </a:p>
           <a:p xmlns:a="http://schemas.openxmlformats.org/drawingml/2006/main">
@@ -2304,7 +3104,57 @@
           <a:lstStyle xmlns:a="http://schemas.openxmlformats.org/drawingml/2006/main"/>
           <a:p xmlns:a="http://schemas.openxmlformats.org/drawingml/2006/main">
             <a:r>
-              <a:t>A força vem de definições explícitas, não de geração probabilística. Desenvolva os pontos: Consulta lógica; Grafo semântico; SQL executável.</a:t>
+              <a:t>[Roteiro recomendado]</a:t>
+            </a:r>
+          </a:p>
+          <a:p xmlns:a="http://schemas.openxmlformats.org/drawingml/2006/main">
+            <a:r>
+              <a:t>[Tempo sugerido: 01:10]</a:t>
+            </a:r>
+          </a:p>
+          <a:p xmlns:a="http://schemas.openxmlformats.org/drawingml/2006/main">
+            <a:r>
+              <a:t/>
+            </a:r>
+          </a:p>
+          <a:p xmlns:a="http://schemas.openxmlformats.org/drawingml/2006/main">
+            <a:r>
+              <a:t>Fala sugerida:</a:t>
+            </a:r>
+          </a:p>
+          <a:p xmlns:a="http://schemas.openxmlformats.org/drawingml/2006/main">
+            <a:r>
+              <a:t>A mensagem principal deste slide é: A força vem de definições explícitas, não de geração probabilística. Para tornar isso concreto, observe consulta lógica, Grafo semântico e SQL executável. Esses pontos devem ser entendidos em conjunto; não são funcionalidades isoladas. No projeto, essa combinação transforma uma convenção informal em algo que pode ser revisado, testado ou consumido de maneira consistente.</a:t>
+            </a:r>
+          </a:p>
+          <a:p xmlns:a="http://schemas.openxmlformats.org/drawingml/2006/main">
+            <a:r>
+              <a:t/>
+            </a:r>
+          </a:p>
+          <a:p xmlns:a="http://schemas.openxmlformats.org/drawingml/2006/main">
+            <a:r>
+              <a:t>O que destacar:</a:t>
+            </a:r>
+          </a:p>
+          <a:p xmlns:a="http://schemas.openxmlformats.org/drawingml/2006/main">
+            <a:r>
+              <a:t>- Comece pelo título, leia a afirmação abaixo dele e depois desenvolva os itens sem repetir o texto palavra por palavra.</a:t>
+            </a:r>
+          </a:p>
+          <a:p xmlns:a="http://schemas.openxmlformats.org/drawingml/2006/main">
+            <a:r>
+              <a:t/>
+            </a:r>
+          </a:p>
+          <a:p xmlns:a="http://schemas.openxmlformats.org/drawingml/2006/main">
+            <a:r>
+              <a:t>Transição:</a:t>
+            </a:r>
+          </a:p>
+          <a:p xmlns:a="http://schemas.openxmlformats.org/drawingml/2006/main">
+            <a:r>
+              <a:t>Com esse ponto estabelecido, avance para “Entidade começa pelo grão”.</a:t>
             </a:r>
           </a:p>
           <a:p xmlns:a="http://schemas.openxmlformats.org/drawingml/2006/main">
@@ -2419,7 +3269,57 @@
           <a:lstStyle xmlns:a="http://schemas.openxmlformats.org/drawingml/2006/main"/>
           <a:p xmlns:a="http://schemas.openxmlformats.org/drawingml/2006/main">
             <a:r>
-              <a:t>order_id só pode ser primary se o modelo tiver uma linha por pedido. Desenvolva os pontos: Primary: order; Foreign: customer; Unicidade testada antes da métrica.</a:t>
+              <a:t>[Roteiro recomendado]</a:t>
+            </a:r>
+          </a:p>
+          <a:p xmlns:a="http://schemas.openxmlformats.org/drawingml/2006/main">
+            <a:r>
+              <a:t>[Tempo sugerido: 01:10]</a:t>
+            </a:r>
+          </a:p>
+          <a:p xmlns:a="http://schemas.openxmlformats.org/drawingml/2006/main">
+            <a:r>
+              <a:t/>
+            </a:r>
+          </a:p>
+          <a:p xmlns:a="http://schemas.openxmlformats.org/drawingml/2006/main">
+            <a:r>
+              <a:t>Fala sugerida:</a:t>
+            </a:r>
+          </a:p>
+          <a:p xmlns:a="http://schemas.openxmlformats.org/drawingml/2006/main">
+            <a:r>
+              <a:t>A mensagem principal deste slide é: order_id só pode ser primary se o modelo tiver uma linha por pedido. Para tornar isso concreto, observe primary: order, Foreign: customer e Unicidade testada antes da métrica. Esses pontos devem ser entendidos em conjunto; não são funcionalidades isoladas. No projeto, essa combinação transforma uma convenção informal em algo que pode ser revisado, testado ou consumido de maneira consistente.</a:t>
+            </a:r>
+          </a:p>
+          <a:p xmlns:a="http://schemas.openxmlformats.org/drawingml/2006/main">
+            <a:r>
+              <a:t/>
+            </a:r>
+          </a:p>
+          <a:p xmlns:a="http://schemas.openxmlformats.org/drawingml/2006/main">
+            <a:r>
+              <a:t>O que destacar:</a:t>
+            </a:r>
+          </a:p>
+          <a:p xmlns:a="http://schemas.openxmlformats.org/drawingml/2006/main">
+            <a:r>
+              <a:t>- Comece pelo título, leia a afirmação abaixo dele e depois desenvolva os itens sem repetir o texto palavra por palavra.</a:t>
+            </a:r>
+          </a:p>
+          <a:p xmlns:a="http://schemas.openxmlformats.org/drawingml/2006/main">
+            <a:r>
+              <a:t/>
+            </a:r>
+          </a:p>
+          <a:p xmlns:a="http://schemas.openxmlformats.org/drawingml/2006/main">
+            <a:r>
+              <a:t>Transição:</a:t>
+            </a:r>
+          </a:p>
+          <a:p xmlns:a="http://schemas.openxmlformats.org/drawingml/2006/main">
+            <a:r>
+              <a:t>Com esse ponto estabelecido, avance para “Entidade começa pelo grão”.</a:t>
             </a:r>
           </a:p>
           <a:p xmlns:a="http://schemas.openxmlformats.org/drawingml/2006/main">
@@ -2534,7 +3434,57 @@
           <a:lstStyle xmlns:a="http://schemas.openxmlformats.org/drawingml/2006/main"/>
           <a:p xmlns:a="http://schemas.openxmlformats.org/drawingml/2006/main">
             <a:r>
-              <a:t>Use a composição para explicar visualmente: order_id só pode ser primary se o modelo tiver uma linha por pedido. Primary: order Foreign: customer Unicidade testada antes da métrica</a:t>
+              <a:t>[Roteiro recomendado]</a:t>
+            </a:r>
+          </a:p>
+          <a:p xmlns:a="http://schemas.openxmlformats.org/drawingml/2006/main">
+            <a:r>
+              <a:t>[Tempo sugerido: 00:55]</a:t>
+            </a:r>
+          </a:p>
+          <a:p xmlns:a="http://schemas.openxmlformats.org/drawingml/2006/main">
+            <a:r>
+              <a:t/>
+            </a:r>
+          </a:p>
+          <a:p xmlns:a="http://schemas.openxmlformats.org/drawingml/2006/main">
+            <a:r>
+              <a:t>Fala sugerida:</a:t>
+            </a:r>
+          </a:p>
+          <a:p xmlns:a="http://schemas.openxmlformats.org/drawingml/2006/main">
+            <a:r>
+              <a:t>Agora vamos ler a ideia visualmente. order_id só pode ser primary se o modelo tiver uma linha por pedido. Siga a composição na ordem mostrada e conecte entidade, Grão físico, Primary: order, Foreign: customer e Unicidade testada antes da métrica. A imagem ou o fluxo não cria uma regra nova; ele torna visível a relação que acabamos de explicar. Use a disposição dos elementos para reforçar causa, dependência ou comparação.</a:t>
+            </a:r>
+          </a:p>
+          <a:p xmlns:a="http://schemas.openxmlformats.org/drawingml/2006/main">
+            <a:r>
+              <a:t/>
+            </a:r>
+          </a:p>
+          <a:p xmlns:a="http://schemas.openxmlformats.org/drawingml/2006/main">
+            <a:r>
+              <a:t>O que destacar:</a:t>
+            </a:r>
+          </a:p>
+          <a:p xmlns:a="http://schemas.openxmlformats.org/drawingml/2006/main">
+            <a:r>
+              <a:t>- Acompanhe o fluxo ou a comparação com o cursor e preserve a ordem de leitura do slide.</a:t>
+            </a:r>
+          </a:p>
+          <a:p xmlns:a="http://schemas.openxmlformats.org/drawingml/2006/main">
+            <a:r>
+              <a:t/>
+            </a:r>
+          </a:p>
+          <a:p xmlns:a="http://schemas.openxmlformats.org/drawingml/2006/main">
+            <a:r>
+              <a:t>Transição:</a:t>
+            </a:r>
+          </a:p>
+          <a:p xmlns:a="http://schemas.openxmlformats.org/drawingml/2006/main">
+            <a:r>
+              <a:t>Com esse ponto estabelecido, avance para “O exemplo oficial conecta schema e métricas”.</a:t>
             </a:r>
           </a:p>
           <a:p xmlns:a="http://schemas.openxmlformats.org/drawingml/2006/main">
@@ -2649,7 +3599,57 @@
           <a:lstStyle xmlns:a="http://schemas.openxmlformats.org/drawingml/2006/main"/>
           <a:p xmlns:a="http://schemas.openxmlformats.org/drawingml/2006/main">
             <a:r>
-              <a:t>Chaves e tipos de coluna sustentam os caminhos do grafo. Desenvolva os pontos: PK e FK; Dimensões; Medidas.</a:t>
+              <a:t>[Roteiro recomendado]</a:t>
+            </a:r>
+          </a:p>
+          <a:p xmlns:a="http://schemas.openxmlformats.org/drawingml/2006/main">
+            <a:r>
+              <a:t>[Tempo sugerido: 01:10]</a:t>
+            </a:r>
+          </a:p>
+          <a:p xmlns:a="http://schemas.openxmlformats.org/drawingml/2006/main">
+            <a:r>
+              <a:t/>
+            </a:r>
+          </a:p>
+          <a:p xmlns:a="http://schemas.openxmlformats.org/drawingml/2006/main">
+            <a:r>
+              <a:t>Fala sugerida:</a:t>
+            </a:r>
+          </a:p>
+          <a:p xmlns:a="http://schemas.openxmlformats.org/drawingml/2006/main">
+            <a:r>
+              <a:t>A mensagem principal deste slide é: Chaves e tipos de coluna sustentam os caminhos do grafo. Para tornar isso concreto, observe PK e FK, Dimensões e Medidas. Esses pontos devem ser entendidos em conjunto; não são funcionalidades isoladas. No projeto, essa combinação transforma uma convenção informal em algo que pode ser revisado, testado ou consumido de maneira consistente.</a:t>
+            </a:r>
+          </a:p>
+          <a:p xmlns:a="http://schemas.openxmlformats.org/drawingml/2006/main">
+            <a:r>
+              <a:t/>
+            </a:r>
+          </a:p>
+          <a:p xmlns:a="http://schemas.openxmlformats.org/drawingml/2006/main">
+            <a:r>
+              <a:t>O que destacar:</a:t>
+            </a:r>
+          </a:p>
+          <a:p xmlns:a="http://schemas.openxmlformats.org/drawingml/2006/main">
+            <a:r>
+              <a:t>- Comece pelo título, leia a afirmação abaixo dele e depois desenvolva os itens sem repetir o texto palavra por palavra.</a:t>
+            </a:r>
+          </a:p>
+          <a:p xmlns:a="http://schemas.openxmlformats.org/drawingml/2006/main">
+            <a:r>
+              <a:t/>
+            </a:r>
+          </a:p>
+          <a:p xmlns:a="http://schemas.openxmlformats.org/drawingml/2006/main">
+            <a:r>
+              <a:t>Transição:</a:t>
+            </a:r>
+          </a:p>
+          <a:p xmlns:a="http://schemas.openxmlformats.org/drawingml/2006/main">
+            <a:r>
+              <a:t>Com esse ponto estabelecido, avance para “O exemplo oficial conecta schema e métricas”.</a:t>
             </a:r>
           </a:p>
           <a:p xmlns:a="http://schemas.openxmlformats.org/drawingml/2006/main">
@@ -2764,7 +3764,57 @@
           <a:lstStyle xmlns:a="http://schemas.openxmlformats.org/drawingml/2006/main"/>
           <a:p xmlns:a="http://schemas.openxmlformats.org/drawingml/2006/main">
             <a:r>
-              <a:t>Use a composição para explicar visualmente: Chaves e tipos de coluna sustentam os caminhos do grafo. PK e FK Dimensões Medidas</a:t>
+              <a:t>[Roteiro recomendado]</a:t>
+            </a:r>
+          </a:p>
+          <a:p xmlns:a="http://schemas.openxmlformats.org/drawingml/2006/main">
+            <a:r>
+              <a:t>[Tempo sugerido: 00:55]</a:t>
+            </a:r>
+          </a:p>
+          <a:p xmlns:a="http://schemas.openxmlformats.org/drawingml/2006/main">
+            <a:r>
+              <a:t/>
+            </a:r>
+          </a:p>
+          <a:p xmlns:a="http://schemas.openxmlformats.org/drawingml/2006/main">
+            <a:r>
+              <a:t>Fala sugerida:</a:t>
+            </a:r>
+          </a:p>
+          <a:p xmlns:a="http://schemas.openxmlformats.org/drawingml/2006/main">
+            <a:r>
+              <a:t>Agora vamos ler a ideia visualmente. Chaves e tipos de coluna sustentam os caminhos do grafo. Siga a composição na ordem mostrada e conecte os elementos principais. A imagem ou o fluxo não cria uma regra nova; ele torna visível a relação que acabamos de explicar. A figura é identificada como exemplo oficial dbt Labs — Apache 2.0</a:t>
+            </a:r>
+          </a:p>
+          <a:p xmlns:a="http://schemas.openxmlformats.org/drawingml/2006/main">
+            <a:r>
+              <a:t/>
+            </a:r>
+          </a:p>
+          <a:p xmlns:a="http://schemas.openxmlformats.org/drawingml/2006/main">
+            <a:r>
+              <a:t>O que destacar:</a:t>
+            </a:r>
+          </a:p>
+          <a:p xmlns:a="http://schemas.openxmlformats.org/drawingml/2006/main">
+            <a:r>
+              <a:t>- Aponte a legenda e deixe explícito quando a figura é oficial; as anotações do curso ficam fora da imagem.</a:t>
+            </a:r>
+          </a:p>
+          <a:p xmlns:a="http://schemas.openxmlformats.org/drawingml/2006/main">
+            <a:r>
+              <a:t/>
+            </a:r>
+          </a:p>
+          <a:p xmlns:a="http://schemas.openxmlformats.org/drawingml/2006/main">
+            <a:r>
+              <a:t>Transição:</a:t>
+            </a:r>
+          </a:p>
+          <a:p xmlns:a="http://schemas.openxmlformats.org/drawingml/2006/main">
+            <a:r>
+              <a:t>Com esse ponto estabelecido, avance para “Tempo também é contrato”.</a:t>
             </a:r>
           </a:p>
           <a:p xmlns:a="http://schemas.openxmlformats.org/drawingml/2006/main">
@@ -2884,7 +3934,57 @@
           <a:lstStyle xmlns:a="http://schemas.openxmlformats.org/drawingml/2006/main"/>
           <a:p xmlns:a="http://schemas.openxmlformats.org/drawingml/2006/main">
             <a:r>
-              <a:t>A dimensão padrão precisa refletir a pergunta de negócio. Desenvolva os pontos: order_purchase_date; Granularidade diária; Time spine para operações temporais.</a:t>
+              <a:t>[Roteiro recomendado]</a:t>
+            </a:r>
+          </a:p>
+          <a:p xmlns:a="http://schemas.openxmlformats.org/drawingml/2006/main">
+            <a:r>
+              <a:t>[Tempo sugerido: 01:10]</a:t>
+            </a:r>
+          </a:p>
+          <a:p xmlns:a="http://schemas.openxmlformats.org/drawingml/2006/main">
+            <a:r>
+              <a:t/>
+            </a:r>
+          </a:p>
+          <a:p xmlns:a="http://schemas.openxmlformats.org/drawingml/2006/main">
+            <a:r>
+              <a:t>Fala sugerida:</a:t>
+            </a:r>
+          </a:p>
+          <a:p xmlns:a="http://schemas.openxmlformats.org/drawingml/2006/main">
+            <a:r>
+              <a:t>A mensagem principal deste slide é: A dimensão padrão precisa refletir a pergunta de negócio. Para tornar isso concreto, observe order_purchase_date, Granularidade diária e Time spine para operações temporais. Esses pontos devem ser entendidos em conjunto; não são funcionalidades isoladas. No projeto, essa combinação transforma uma convenção informal em algo que pode ser revisado, testado ou consumido de maneira consistente.</a:t>
+            </a:r>
+          </a:p>
+          <a:p xmlns:a="http://schemas.openxmlformats.org/drawingml/2006/main">
+            <a:r>
+              <a:t/>
+            </a:r>
+          </a:p>
+          <a:p xmlns:a="http://schemas.openxmlformats.org/drawingml/2006/main">
+            <a:r>
+              <a:t>O que destacar:</a:t>
+            </a:r>
+          </a:p>
+          <a:p xmlns:a="http://schemas.openxmlformats.org/drawingml/2006/main">
+            <a:r>
+              <a:t>- Comece pelo título, leia a afirmação abaixo dele e depois desenvolva os itens sem repetir o texto palavra por palavra.</a:t>
+            </a:r>
+          </a:p>
+          <a:p xmlns:a="http://schemas.openxmlformats.org/drawingml/2006/main">
+            <a:r>
+              <a:t/>
+            </a:r>
+          </a:p>
+          <a:p xmlns:a="http://schemas.openxmlformats.org/drawingml/2006/main">
+            <a:r>
+              <a:t>Transição:</a:t>
+            </a:r>
+          </a:p>
+          <a:p xmlns:a="http://schemas.openxmlformats.org/drawingml/2006/main">
+            <a:r>
+              <a:t>Com esse ponto estabelecido, avance para “Tempo também é contrato”.</a:t>
             </a:r>
           </a:p>
           <a:p xmlns:a="http://schemas.openxmlformats.org/drawingml/2006/main">
@@ -3031,7 +4131,7 @@
   </p:cSld>
   <p:clrMap bg1="lt1" tx1="dk1" bg2="lt2" tx2="dk2" accent1="accent1" accent2="accent2" accent3="accent3" accent4="accent4" accent5="accent5" accent6="accent6" hlink="hlink" folHlink="folHlink"/>
   <p:sldLayoutIdLst>
-    <p:sldLayoutId xmlns:r="http://schemas.openxmlformats.org/officeDocument/2006/relationships" id="2147483649" r:id="Re9d5dfbd25cc401f"/>
+    <p:sldLayoutId xmlns:r="http://schemas.openxmlformats.org/officeDocument/2006/relationships" id="2147483649" r:id="R0a903fdc1e31433d"/>
   </p:sldLayoutIdLst>
   <p:txStyles>
     <p:titleStyle>
@@ -3329,8 +4429,8 @@
   </p:cSld>
   <p:clrMap bg1="lt1" tx1="dk1" bg2="lt2" tx2="dk2" accent1="accent1" accent2="accent2" accent3="accent3" accent4="accent4" accent5="accent5" accent6="accent6" hlink="hlink" folHlink="folHlink"/>
   <p:sldLayoutIdLst>
-    <p:sldLayoutId xmlns:r="http://schemas.openxmlformats.org/officeDocument/2006/relationships" id="2147483651" r:id="R2cdffa0bef8a4976"/>
-    <p:sldLayoutId xmlns:r="http://schemas.openxmlformats.org/officeDocument/2006/relationships" id="2147483652" r:id="R8c1c9cb3fbee41a2"/>
+    <p:sldLayoutId xmlns:r="http://schemas.openxmlformats.org/officeDocument/2006/relationships" id="2147483651" r:id="R63543122eb054f85"/>
+    <p:sldLayoutId xmlns:r="http://schemas.openxmlformats.org/officeDocument/2006/relationships" id="2147483652" r:id="R86ff41f084b24f8a"/>
   </p:sldLayoutIdLst>
 </p:sldMaster>
 </file>
@@ -3854,14 +4954,14 @@
       </p:grpSpPr>
       <p:pic>
         <p:nvPicPr>
-          <p:cNvPr id="9" name="" descr="Ilustração conceitual autoral da capa: EPISÓDIO 3 — MetricFlow local: métricas como código."/>
+          <p:cNvPr id="10" name="" descr="Ilustração conceitual autoral da capa: EPISÓDIO 3 — MetricFlow local: métricas como código."/>
           <p:cNvPicPr>
             <a:picLocks xmlns:a="http://schemas.openxmlformats.org/drawingml/2006/main" noChangeAspect="1"/>
           </p:cNvPicPr>
           <p:nvPr/>
         </p:nvPicPr>
         <p:blipFill>
-          <a:blip xmlns:r="http://schemas.openxmlformats.org/officeDocument/2006/relationships" xmlns:a="http://schemas.openxmlformats.org/drawingml/2006/main" r:embed="R864f0d6e03504115"/>
+          <a:blip xmlns:r="http://schemas.openxmlformats.org/officeDocument/2006/relationships" xmlns:a="http://schemas.openxmlformats.org/drawingml/2006/main" r:embed="R67f2a711b5cc46ea"/>
           <a:srcRect xmlns:a="http://schemas.openxmlformats.org/drawingml/2006/main" l="19785" t="0" r="19785" b="0"/>
           <a:stretch xmlns:a="http://schemas.openxmlformats.org/drawingml/2006/main">
             <a:fillRect l="0" t="0" r="0" b="0"/>
@@ -3974,6 +5074,7 @@
           <a:lstStyle xmlns:a="http://schemas.openxmlformats.org/drawingml/2006/main"/>
           <a:p xmlns:a="http://schemas.openxmlformats.org/drawingml/2006/main">
             <a:pPr>
+              <a:buNone/>
               <a:defRPr sz="1350" b="1">
                 <a:solidFill>
                   <a:srgbClr val="1EC5FF"/>
@@ -4024,6 +5125,7 @@
           <a:lstStyle xmlns:a="http://schemas.openxmlformats.org/drawingml/2006/main"/>
           <a:p xmlns:a="http://schemas.openxmlformats.org/drawingml/2006/main">
             <a:pPr>
+              <a:buNone/>
               <a:defRPr sz="3225" b="1">
                 <a:solidFill>
                   <a:srgbClr val="FFFFFF"/>
@@ -4074,6 +5176,7 @@
           <a:lstStyle xmlns:a="http://schemas.openxmlformats.org/drawingml/2006/main"/>
           <a:p xmlns:a="http://schemas.openxmlformats.org/drawingml/2006/main">
             <a:pPr>
+              <a:buNone/>
               <a:defRPr sz="1800">
                 <a:solidFill>
                   <a:srgbClr val="E2F2FF"/>
@@ -4155,6 +5258,7 @@
           <a:lstStyle xmlns:a="http://schemas.openxmlformats.org/drawingml/2006/main"/>
           <a:p xmlns:a="http://schemas.openxmlformats.org/drawingml/2006/main">
             <a:pPr>
+              <a:buNone/>
               <a:defRPr sz="1200" b="1">
                 <a:solidFill>
                   <a:srgbClr val="FFFFFF">
@@ -4246,6 +5350,7 @@
           <a:lstStyle xmlns:a="http://schemas.openxmlformats.org/drawingml/2006/main"/>
           <a:p xmlns:a="http://schemas.openxmlformats.org/drawingml/2006/main">
             <a:pPr>
+              <a:buNone/>
               <a:defRPr sz="2925" b="1">
                 <a:solidFill>
                   <a:srgbClr val="FFFFFF"/>
@@ -4296,6 +5401,7 @@
           <a:lstStyle xmlns:a="http://schemas.openxmlformats.org/drawingml/2006/main"/>
           <a:p xmlns:a="http://schemas.openxmlformats.org/drawingml/2006/main">
             <a:pPr>
+              <a:buNone/>
               <a:defRPr sz="3450" b="1">
                 <a:solidFill>
                   <a:srgbClr val="1EC5FF"/>
@@ -4346,6 +5452,7 @@
           <a:lstStyle xmlns:a="http://schemas.openxmlformats.org/drawingml/2006/main"/>
           <a:p xmlns:a="http://schemas.openxmlformats.org/drawingml/2006/main">
             <a:pPr>
+              <a:buNone/>
               <a:defRPr sz="1575" b="1">
                 <a:solidFill>
                   <a:srgbClr val="FFFFFF"/>
@@ -4427,6 +5534,7 @@
           <a:lstStyle xmlns:a="http://schemas.openxmlformats.org/drawingml/2006/main"/>
           <a:p xmlns:a="http://schemas.openxmlformats.org/drawingml/2006/main">
             <a:pPr>
+              <a:buNone/>
               <a:defRPr sz="3450" b="1">
                 <a:solidFill>
                   <a:srgbClr val="1EC5FF"/>
@@ -4477,6 +5585,7 @@
           <a:lstStyle xmlns:a="http://schemas.openxmlformats.org/drawingml/2006/main"/>
           <a:p xmlns:a="http://schemas.openxmlformats.org/drawingml/2006/main">
             <a:pPr>
+              <a:buNone/>
               <a:defRPr sz="1575" b="1">
                 <a:solidFill>
                   <a:srgbClr val="FFFFFF"/>
@@ -4558,6 +5667,7 @@
           <a:lstStyle xmlns:a="http://schemas.openxmlformats.org/drawingml/2006/main"/>
           <a:p xmlns:a="http://schemas.openxmlformats.org/drawingml/2006/main">
             <a:pPr>
+              <a:buNone/>
               <a:defRPr sz="3450" b="1">
                 <a:solidFill>
                   <a:srgbClr val="1EC5FF"/>
@@ -4608,6 +5718,7 @@
           <a:lstStyle xmlns:a="http://schemas.openxmlformats.org/drawingml/2006/main"/>
           <a:p xmlns:a="http://schemas.openxmlformats.org/drawingml/2006/main">
             <a:pPr>
+              <a:buNone/>
               <a:defRPr sz="1575" b="1">
                 <a:solidFill>
                   <a:srgbClr val="FFFFFF"/>
@@ -4689,6 +5800,7 @@
           <a:lstStyle xmlns:a="http://schemas.openxmlformats.org/drawingml/2006/main"/>
           <a:p xmlns:a="http://schemas.openxmlformats.org/drawingml/2006/main">
             <a:pPr>
+              <a:buNone/>
               <a:defRPr sz="3450" b="1">
                 <a:solidFill>
                   <a:srgbClr val="1EC5FF"/>
@@ -4739,6 +5851,7 @@
           <a:lstStyle xmlns:a="http://schemas.openxmlformats.org/drawingml/2006/main"/>
           <a:p xmlns:a="http://schemas.openxmlformats.org/drawingml/2006/main">
             <a:pPr>
+              <a:buNone/>
               <a:defRPr sz="1575" b="1">
                 <a:solidFill>
                   <a:srgbClr val="FFFFFF"/>
@@ -4789,6 +5902,7 @@
           <a:lstStyle xmlns:a="http://schemas.openxmlformats.org/drawingml/2006/main"/>
           <a:p xmlns:a="http://schemas.openxmlformats.org/drawingml/2006/main">
             <a:pPr>
+              <a:buNone/>
               <a:defRPr sz="1050" b="1">
                 <a:solidFill>
                   <a:srgbClr val="1EC5FF"/>
@@ -4872,6 +5986,7 @@
           <a:lstStyle xmlns:a="http://schemas.openxmlformats.org/drawingml/2006/main"/>
           <a:p xmlns:a="http://schemas.openxmlformats.org/drawingml/2006/main">
             <a:pPr>
+              <a:buNone/>
               <a:defRPr sz="825">
                 <a:solidFill>
                   <a:srgbClr val="FFFFFF">
@@ -4926,6 +6041,7 @@
           <a:lstStyle xmlns:a="http://schemas.openxmlformats.org/drawingml/2006/main"/>
           <a:p xmlns:a="http://schemas.openxmlformats.org/drawingml/2006/main">
             <a:pPr algn="r">
+              <a:buNone/>
               <a:defRPr sz="825" b="1">
                 <a:solidFill>
                   <a:srgbClr val="FFFFFF">
@@ -5017,6 +6133,7 @@
           <a:lstStyle xmlns:a="http://schemas.openxmlformats.org/drawingml/2006/main"/>
           <a:p xmlns:a="http://schemas.openxmlformats.org/drawingml/2006/main">
             <a:pPr>
+              <a:buNone/>
               <a:defRPr sz="2925" b="1">
                 <a:solidFill>
                   <a:srgbClr val="FFFFFF"/>
@@ -5067,6 +6184,7 @@
           <a:lstStyle xmlns:a="http://schemas.openxmlformats.org/drawingml/2006/main"/>
           <a:p xmlns:a="http://schemas.openxmlformats.org/drawingml/2006/main">
             <a:pPr>
+              <a:buNone/>
               <a:defRPr sz="1650">
                 <a:solidFill>
                   <a:srgbClr val="E2F2FF"/>
@@ -5117,6 +6235,7 @@
           <a:lstStyle xmlns:a="http://schemas.openxmlformats.org/drawingml/2006/main"/>
           <a:p xmlns:a="http://schemas.openxmlformats.org/drawingml/2006/main">
             <a:pPr>
+              <a:buNone/>
               <a:defRPr sz="1800">
                 <a:solidFill>
                   <a:srgbClr val="FFFFFF"/>
@@ -5134,6 +6253,7 @@
           </a:p>
           <a:p xmlns:a="http://schemas.openxmlformats.org/drawingml/2006/main">
             <a:pPr>
+              <a:buNone/>
               <a:defRPr sz="1800">
                 <a:solidFill>
                   <a:srgbClr val="FFFFFF"/>
@@ -5151,6 +6271,7 @@
           </a:p>
           <a:p xmlns:a="http://schemas.openxmlformats.org/drawingml/2006/main">
             <a:pPr>
+              <a:buNone/>
               <a:defRPr sz="1800">
                 <a:solidFill>
                   <a:srgbClr val="FFFFFF"/>
@@ -5275,6 +6396,7 @@
           <a:lstStyle xmlns:a="http://schemas.openxmlformats.org/drawingml/2006/main"/>
           <a:p xmlns:a="http://schemas.openxmlformats.org/drawingml/2006/main">
             <a:pPr algn="ctr">
+              <a:buNone/>
               <a:defRPr sz="4650" b="1">
                 <a:solidFill>
                   <a:srgbClr val="1EC5FF"/>
@@ -5325,6 +6447,7 @@
           <a:lstStyle xmlns:a="http://schemas.openxmlformats.org/drawingml/2006/main"/>
           <a:p xmlns:a="http://schemas.openxmlformats.org/drawingml/2006/main">
             <a:pPr>
+              <a:buNone/>
               <a:defRPr sz="1050" b="1">
                 <a:solidFill>
                   <a:srgbClr val="1EC5FF"/>
@@ -5408,6 +6531,7 @@
           <a:lstStyle xmlns:a="http://schemas.openxmlformats.org/drawingml/2006/main"/>
           <a:p xmlns:a="http://schemas.openxmlformats.org/drawingml/2006/main">
             <a:pPr>
+              <a:buNone/>
               <a:defRPr sz="825">
                 <a:solidFill>
                   <a:srgbClr val="FFFFFF">
@@ -5462,6 +6586,7 @@
           <a:lstStyle xmlns:a="http://schemas.openxmlformats.org/drawingml/2006/main"/>
           <a:p xmlns:a="http://schemas.openxmlformats.org/drawingml/2006/main">
             <a:pPr algn="r">
+              <a:buNone/>
               <a:defRPr sz="825" b="1">
                 <a:solidFill>
                   <a:srgbClr val="FFFFFF">
@@ -5545,6 +6670,7 @@
           <a:lstStyle xmlns:a="http://schemas.openxmlformats.org/drawingml/2006/main"/>
           <a:p xmlns:a="http://schemas.openxmlformats.org/drawingml/2006/main">
             <a:pPr>
+              <a:buNone/>
               <a:defRPr sz="2925" b="1">
                 <a:solidFill>
                   <a:srgbClr val="0B1F3A"/>
@@ -5595,6 +6721,7 @@
           <a:lstStyle xmlns:a="http://schemas.openxmlformats.org/drawingml/2006/main"/>
           <a:p xmlns:a="http://schemas.openxmlformats.org/drawingml/2006/main">
             <a:pPr algn="ctr">
+              <a:buNone/>
               <a:defRPr sz="3600" b="1">
                 <a:solidFill>
                   <a:srgbClr val="1565C0"/>
@@ -5645,6 +6772,7 @@
           <a:lstStyle xmlns:a="http://schemas.openxmlformats.org/drawingml/2006/main"/>
           <a:p xmlns:a="http://schemas.openxmlformats.org/drawingml/2006/main">
             <a:pPr algn="ctr">
+              <a:buNone/>
               <a:defRPr sz="2250" b="1">
                 <a:solidFill>
                   <a:srgbClr val="0B1F3A"/>
@@ -5726,6 +6854,7 @@
           <a:lstStyle xmlns:a="http://schemas.openxmlformats.org/drawingml/2006/main"/>
           <a:p xmlns:a="http://schemas.openxmlformats.org/drawingml/2006/main">
             <a:pPr>
+              <a:buNone/>
               <a:defRPr sz="1050" b="1">
                 <a:solidFill>
                   <a:srgbClr val="1565C0"/>
@@ -5809,6 +6938,7 @@
           <a:lstStyle xmlns:a="http://schemas.openxmlformats.org/drawingml/2006/main"/>
           <a:p xmlns:a="http://schemas.openxmlformats.org/drawingml/2006/main">
             <a:pPr>
+              <a:buNone/>
               <a:defRPr sz="825">
                 <a:solidFill>
                   <a:srgbClr val="0B1F3A">
@@ -5863,6 +6993,7 @@
           <a:lstStyle xmlns:a="http://schemas.openxmlformats.org/drawingml/2006/main"/>
           <a:p xmlns:a="http://schemas.openxmlformats.org/drawingml/2006/main">
             <a:pPr algn="r">
+              <a:buNone/>
               <a:defRPr sz="825" b="1">
                 <a:solidFill>
                   <a:srgbClr val="0B1F3A">
@@ -5946,6 +7077,7 @@
           <a:lstStyle xmlns:a="http://schemas.openxmlformats.org/drawingml/2006/main"/>
           <a:p xmlns:a="http://schemas.openxmlformats.org/drawingml/2006/main">
             <a:pPr>
+              <a:buNone/>
               <a:defRPr sz="2925" b="1">
                 <a:solidFill>
                   <a:srgbClr val="0B1F3A"/>
@@ -5996,6 +7128,7 @@
           <a:lstStyle xmlns:a="http://schemas.openxmlformats.org/drawingml/2006/main"/>
           <a:p xmlns:a="http://schemas.openxmlformats.org/drawingml/2006/main">
             <a:pPr>
+              <a:buNone/>
               <a:defRPr sz="1650">
                 <a:solidFill>
                   <a:srgbClr val="5C6F86"/>
@@ -6046,6 +7179,7 @@
           <a:lstStyle xmlns:a="http://schemas.openxmlformats.org/drawingml/2006/main"/>
           <a:p xmlns:a="http://schemas.openxmlformats.org/drawingml/2006/main">
             <a:pPr>
+              <a:buNone/>
               <a:defRPr sz="1800">
                 <a:solidFill>
                   <a:srgbClr val="0B1F3A"/>
@@ -6063,6 +7197,7 @@
           </a:p>
           <a:p xmlns:a="http://schemas.openxmlformats.org/drawingml/2006/main">
             <a:pPr>
+              <a:buNone/>
               <a:defRPr sz="1800">
                 <a:solidFill>
                   <a:srgbClr val="0B1F3A"/>
@@ -6080,6 +7215,7 @@
           </a:p>
           <a:p xmlns:a="http://schemas.openxmlformats.org/drawingml/2006/main">
             <a:pPr>
+              <a:buNone/>
               <a:defRPr sz="1800">
                 <a:solidFill>
                   <a:srgbClr val="0B1F3A"/>
@@ -6204,6 +7340,7 @@
           <a:lstStyle xmlns:a="http://schemas.openxmlformats.org/drawingml/2006/main"/>
           <a:p xmlns:a="http://schemas.openxmlformats.org/drawingml/2006/main">
             <a:pPr algn="ctr">
+              <a:buNone/>
               <a:defRPr sz="4650" b="1">
                 <a:solidFill>
                   <a:srgbClr val="1565C0"/>
@@ -6254,6 +7391,7 @@
           <a:lstStyle xmlns:a="http://schemas.openxmlformats.org/drawingml/2006/main"/>
           <a:p xmlns:a="http://schemas.openxmlformats.org/drawingml/2006/main">
             <a:pPr>
+              <a:buNone/>
               <a:defRPr sz="1050" b="1">
                 <a:solidFill>
                   <a:srgbClr val="1565C0"/>
@@ -6337,6 +7475,7 @@
           <a:lstStyle xmlns:a="http://schemas.openxmlformats.org/drawingml/2006/main"/>
           <a:p xmlns:a="http://schemas.openxmlformats.org/drawingml/2006/main">
             <a:pPr>
+              <a:buNone/>
               <a:defRPr sz="825">
                 <a:solidFill>
                   <a:srgbClr val="0B1F3A">
@@ -6391,6 +7530,7 @@
           <a:lstStyle xmlns:a="http://schemas.openxmlformats.org/drawingml/2006/main"/>
           <a:p xmlns:a="http://schemas.openxmlformats.org/drawingml/2006/main">
             <a:pPr algn="r">
+              <a:buNone/>
               <a:defRPr sz="825" b="1">
                 <a:solidFill>
                   <a:srgbClr val="0B1F3A">
@@ -6482,6 +7622,7 @@
           <a:lstStyle xmlns:a="http://schemas.openxmlformats.org/drawingml/2006/main"/>
           <a:p xmlns:a="http://schemas.openxmlformats.org/drawingml/2006/main">
             <a:pPr>
+              <a:buNone/>
               <a:defRPr sz="2925" b="1">
                 <a:solidFill>
                   <a:srgbClr val="FFFFFF"/>
@@ -6538,6 +7679,7 @@
           <a:lstStyle xmlns:a="http://schemas.openxmlformats.org/drawingml/2006/main"/>
           <a:p xmlns:a="http://schemas.openxmlformats.org/drawingml/2006/main">
             <a:pPr algn="ctr">
+              <a:buNone/>
               <a:defRPr sz="1575" b="1">
                 <a:solidFill>
                   <a:srgbClr val="FFFFFF"/>
@@ -6594,6 +7736,7 @@
           <a:lstStyle xmlns:a="http://schemas.openxmlformats.org/drawingml/2006/main"/>
           <a:p xmlns:a="http://schemas.openxmlformats.org/drawingml/2006/main">
             <a:pPr algn="ctr">
+              <a:buNone/>
               <a:defRPr sz="1575" b="1">
                 <a:solidFill>
                   <a:srgbClr val="FFFFFF"/>
@@ -6650,6 +7793,7 @@
           <a:lstStyle xmlns:a="http://schemas.openxmlformats.org/drawingml/2006/main"/>
           <a:p xmlns:a="http://schemas.openxmlformats.org/drawingml/2006/main">
             <a:pPr algn="ctr">
+              <a:buNone/>
               <a:defRPr sz="1575" b="1">
                 <a:solidFill>
                   <a:srgbClr val="FFFFFF"/>
@@ -6706,6 +7850,7 @@
           <a:lstStyle xmlns:a="http://schemas.openxmlformats.org/drawingml/2006/main"/>
           <a:p xmlns:a="http://schemas.openxmlformats.org/drawingml/2006/main">
             <a:pPr algn="ctr">
+              <a:buNone/>
               <a:defRPr sz="1575" b="1">
                 <a:solidFill>
                   <a:srgbClr val="FFFFFF"/>
@@ -6725,7 +7870,7 @@
       </p:sp>
       <p:cxnSp>
         <p:nvCxnSpPr>
-          <p:cNvPr id="18" name=""/>
+          <p:cNvPr id="26" name=""/>
           <p:cNvCxnSpPr>
             <a:stCxn xmlns:a="http://schemas.openxmlformats.org/drawingml/2006/main" id="2" idx="3"/>
             <a:endCxn xmlns:a="http://schemas.openxmlformats.org/drawingml/2006/main" id="3" idx="1"/>
@@ -6751,7 +7896,7 @@
       </p:cxnSp>
       <p:cxnSp>
         <p:nvCxnSpPr>
-          <p:cNvPr id="19" name=""/>
+          <p:cNvPr id="27" name=""/>
           <p:cNvCxnSpPr>
             <a:stCxn xmlns:a="http://schemas.openxmlformats.org/drawingml/2006/main" id="3" idx="3"/>
             <a:endCxn xmlns:a="http://schemas.openxmlformats.org/drawingml/2006/main" id="4" idx="1"/>
@@ -6777,7 +7922,7 @@
       </p:cxnSp>
       <p:cxnSp>
         <p:nvCxnSpPr>
-          <p:cNvPr id="20" name=""/>
+          <p:cNvPr id="28" name=""/>
           <p:cNvCxnSpPr>
             <a:stCxn xmlns:a="http://schemas.openxmlformats.org/drawingml/2006/main" id="4" idx="3"/>
             <a:endCxn xmlns:a="http://schemas.openxmlformats.org/drawingml/2006/main" id="5" idx="1"/>
@@ -6834,6 +7979,7 @@
           <a:lstStyle xmlns:a="http://schemas.openxmlformats.org/drawingml/2006/main"/>
           <a:p xmlns:a="http://schemas.openxmlformats.org/drawingml/2006/main">
             <a:pPr>
+              <a:buNone/>
               <a:defRPr sz="1050" b="1">
                 <a:solidFill>
                   <a:srgbClr val="1EC5FF"/>
@@ -6917,6 +8063,7 @@
           <a:lstStyle xmlns:a="http://schemas.openxmlformats.org/drawingml/2006/main"/>
           <a:p xmlns:a="http://schemas.openxmlformats.org/drawingml/2006/main">
             <a:pPr>
+              <a:buNone/>
               <a:defRPr sz="825">
                 <a:solidFill>
                   <a:srgbClr val="FFFFFF">
@@ -6971,6 +8118,7 @@
           <a:lstStyle xmlns:a="http://schemas.openxmlformats.org/drawingml/2006/main"/>
           <a:p xmlns:a="http://schemas.openxmlformats.org/drawingml/2006/main">
             <a:pPr algn="r">
+              <a:buNone/>
               <a:defRPr sz="825" b="1">
                 <a:solidFill>
                   <a:srgbClr val="FFFFFF">
@@ -7062,6 +8210,7 @@
           <a:lstStyle xmlns:a="http://schemas.openxmlformats.org/drawingml/2006/main"/>
           <a:p xmlns:a="http://schemas.openxmlformats.org/drawingml/2006/main">
             <a:pPr>
+              <a:buNone/>
               <a:defRPr sz="2925" b="1">
                 <a:solidFill>
                   <a:srgbClr val="FFFFFF"/>
@@ -7147,6 +8296,7 @@
           <a:lstStyle xmlns:a="http://schemas.openxmlformats.org/drawingml/2006/main"/>
           <a:p xmlns:a="http://schemas.openxmlformats.org/drawingml/2006/main">
             <a:pPr>
+              <a:buNone/>
               <a:defRPr sz="1875" b="1">
                 <a:solidFill>
                   <a:srgbClr val="1EC5FF"/>
@@ -7197,6 +8347,7 @@
           <a:lstStyle xmlns:a="http://schemas.openxmlformats.org/drawingml/2006/main"/>
           <a:p xmlns:a="http://schemas.openxmlformats.org/drawingml/2006/main">
             <a:pPr>
+              <a:buNone/>
               <a:defRPr sz="1425">
                 <a:solidFill>
                   <a:srgbClr val="E2F2FF"/>
@@ -7247,6 +8398,7 @@
           <a:lstStyle xmlns:a="http://schemas.openxmlformats.org/drawingml/2006/main"/>
           <a:p xmlns:a="http://schemas.openxmlformats.org/drawingml/2006/main">
             <a:pPr>
+              <a:buNone/>
               <a:defRPr sz="1050" b="1">
                 <a:solidFill>
                   <a:srgbClr val="1EC5FF"/>
@@ -7330,6 +8482,7 @@
           <a:lstStyle xmlns:a="http://schemas.openxmlformats.org/drawingml/2006/main"/>
           <a:p xmlns:a="http://schemas.openxmlformats.org/drawingml/2006/main">
             <a:pPr>
+              <a:buNone/>
               <a:defRPr sz="825">
                 <a:solidFill>
                   <a:srgbClr val="FFFFFF">
@@ -7384,6 +8537,7 @@
           <a:lstStyle xmlns:a="http://schemas.openxmlformats.org/drawingml/2006/main"/>
           <a:p xmlns:a="http://schemas.openxmlformats.org/drawingml/2006/main">
             <a:pPr algn="r">
+              <a:buNone/>
               <a:defRPr sz="825" b="1">
                 <a:solidFill>
                   <a:srgbClr val="FFFFFF">
@@ -7467,6 +8621,7 @@
           <a:lstStyle xmlns:a="http://schemas.openxmlformats.org/drawingml/2006/main"/>
           <a:p xmlns:a="http://schemas.openxmlformats.org/drawingml/2006/main">
             <a:pPr>
+              <a:buNone/>
               <a:defRPr sz="2925" b="1">
                 <a:solidFill>
                   <a:srgbClr val="0B1F3A"/>
@@ -7517,6 +8672,7 @@
           <a:lstStyle xmlns:a="http://schemas.openxmlformats.org/drawingml/2006/main"/>
           <a:p xmlns:a="http://schemas.openxmlformats.org/drawingml/2006/main">
             <a:pPr>
+              <a:buNone/>
               <a:defRPr sz="3450" b="1">
                 <a:solidFill>
                   <a:srgbClr val="1565C0"/>
@@ -7567,6 +8723,7 @@
           <a:lstStyle xmlns:a="http://schemas.openxmlformats.org/drawingml/2006/main"/>
           <a:p xmlns:a="http://schemas.openxmlformats.org/drawingml/2006/main">
             <a:pPr>
+              <a:buNone/>
               <a:defRPr sz="1575" b="1">
                 <a:solidFill>
                   <a:srgbClr val="0B1F3A"/>
@@ -7648,6 +8805,7 @@
           <a:lstStyle xmlns:a="http://schemas.openxmlformats.org/drawingml/2006/main"/>
           <a:p xmlns:a="http://schemas.openxmlformats.org/drawingml/2006/main">
             <a:pPr>
+              <a:buNone/>
               <a:defRPr sz="3450" b="1">
                 <a:solidFill>
                   <a:srgbClr val="1565C0"/>
@@ -7698,6 +8856,7 @@
           <a:lstStyle xmlns:a="http://schemas.openxmlformats.org/drawingml/2006/main"/>
           <a:p xmlns:a="http://schemas.openxmlformats.org/drawingml/2006/main">
             <a:pPr>
+              <a:buNone/>
               <a:defRPr sz="1575" b="1">
                 <a:solidFill>
                   <a:srgbClr val="0B1F3A"/>
@@ -7779,6 +8938,7 @@
           <a:lstStyle xmlns:a="http://schemas.openxmlformats.org/drawingml/2006/main"/>
           <a:p xmlns:a="http://schemas.openxmlformats.org/drawingml/2006/main">
             <a:pPr>
+              <a:buNone/>
               <a:defRPr sz="3450" b="1">
                 <a:solidFill>
                   <a:srgbClr val="1565C0"/>
@@ -7829,6 +8989,7 @@
           <a:lstStyle xmlns:a="http://schemas.openxmlformats.org/drawingml/2006/main"/>
           <a:p xmlns:a="http://schemas.openxmlformats.org/drawingml/2006/main">
             <a:pPr>
+              <a:buNone/>
               <a:defRPr sz="1575" b="1">
                 <a:solidFill>
                   <a:srgbClr val="0B1F3A"/>
@@ -7879,6 +9040,7 @@
           <a:lstStyle xmlns:a="http://schemas.openxmlformats.org/drawingml/2006/main"/>
           <a:p xmlns:a="http://schemas.openxmlformats.org/drawingml/2006/main">
             <a:pPr>
+              <a:buNone/>
               <a:defRPr sz="1050" b="1">
                 <a:solidFill>
                   <a:srgbClr val="1565C0"/>
@@ -7962,6 +9124,7 @@
           <a:lstStyle xmlns:a="http://schemas.openxmlformats.org/drawingml/2006/main"/>
           <a:p xmlns:a="http://schemas.openxmlformats.org/drawingml/2006/main">
             <a:pPr>
+              <a:buNone/>
               <a:defRPr sz="825">
                 <a:solidFill>
                   <a:srgbClr val="0B1F3A">
@@ -8016,6 +9179,7 @@
           <a:lstStyle xmlns:a="http://schemas.openxmlformats.org/drawingml/2006/main"/>
           <a:p xmlns:a="http://schemas.openxmlformats.org/drawingml/2006/main">
             <a:pPr algn="r">
+              <a:buNone/>
               <a:defRPr sz="825" b="1">
                 <a:solidFill>
                   <a:srgbClr val="0B1F3A">
@@ -8107,6 +9271,7 @@
           <a:lstStyle xmlns:a="http://schemas.openxmlformats.org/drawingml/2006/main"/>
           <a:p xmlns:a="http://schemas.openxmlformats.org/drawingml/2006/main">
             <a:pPr>
+              <a:buNone/>
               <a:defRPr sz="1350" b="1">
                 <a:solidFill>
                   <a:srgbClr val="1EC5FF"/>
@@ -8157,6 +9322,7 @@
           <a:lstStyle xmlns:a="http://schemas.openxmlformats.org/drawingml/2006/main"/>
           <a:p xmlns:a="http://schemas.openxmlformats.org/drawingml/2006/main">
             <a:pPr>
+              <a:buNone/>
               <a:defRPr sz="3450" b="1">
                 <a:solidFill>
                   <a:srgbClr val="FFFFFF"/>
@@ -8207,6 +9373,7 @@
           <a:lstStyle xmlns:a="http://schemas.openxmlformats.org/drawingml/2006/main"/>
           <a:p xmlns:a="http://schemas.openxmlformats.org/drawingml/2006/main">
             <a:pPr>
+              <a:buNone/>
               <a:defRPr sz="1650">
                 <a:solidFill>
                   <a:srgbClr val="E2F2FF"/>
@@ -8331,6 +9498,7 @@
           <a:lstStyle xmlns:a="http://schemas.openxmlformats.org/drawingml/2006/main"/>
           <a:p xmlns:a="http://schemas.openxmlformats.org/drawingml/2006/main">
             <a:pPr>
+              <a:buNone/>
               <a:defRPr sz="1050" b="1">
                 <a:solidFill>
                   <a:srgbClr val="1EC5FF"/>
@@ -8414,6 +9582,7 @@
           <a:lstStyle xmlns:a="http://schemas.openxmlformats.org/drawingml/2006/main"/>
           <a:p xmlns:a="http://schemas.openxmlformats.org/drawingml/2006/main">
             <a:pPr>
+              <a:buNone/>
               <a:defRPr sz="825">
                 <a:solidFill>
                   <a:srgbClr val="FFFFFF">
@@ -8468,6 +9637,7 @@
           <a:lstStyle xmlns:a="http://schemas.openxmlformats.org/drawingml/2006/main"/>
           <a:p xmlns:a="http://schemas.openxmlformats.org/drawingml/2006/main">
             <a:pPr algn="r">
+              <a:buNone/>
               <a:defRPr sz="825" b="1">
                 <a:solidFill>
                   <a:srgbClr val="FFFFFF">
@@ -8551,6 +9721,7 @@
           <a:lstStyle xmlns:a="http://schemas.openxmlformats.org/drawingml/2006/main"/>
           <a:p xmlns:a="http://schemas.openxmlformats.org/drawingml/2006/main">
             <a:pPr>
+              <a:buNone/>
               <a:defRPr sz="2925" b="1">
                 <a:solidFill>
                   <a:srgbClr val="0B1F3A"/>
@@ -8601,6 +9772,7 @@
           <a:lstStyle xmlns:a="http://schemas.openxmlformats.org/drawingml/2006/main"/>
           <a:p xmlns:a="http://schemas.openxmlformats.org/drawingml/2006/main">
             <a:pPr>
+              <a:buNone/>
               <a:defRPr sz="3450" b="1">
                 <a:solidFill>
                   <a:srgbClr val="1565C0"/>
@@ -8651,6 +9823,7 @@
           <a:lstStyle xmlns:a="http://schemas.openxmlformats.org/drawingml/2006/main"/>
           <a:p xmlns:a="http://schemas.openxmlformats.org/drawingml/2006/main">
             <a:pPr>
+              <a:buNone/>
               <a:defRPr sz="1575" b="1">
                 <a:solidFill>
                   <a:srgbClr val="0B1F3A"/>
@@ -8732,6 +9905,7 @@
           <a:lstStyle xmlns:a="http://schemas.openxmlformats.org/drawingml/2006/main"/>
           <a:p xmlns:a="http://schemas.openxmlformats.org/drawingml/2006/main">
             <a:pPr>
+              <a:buNone/>
               <a:defRPr sz="3450" b="1">
                 <a:solidFill>
                   <a:srgbClr val="1565C0"/>
@@ -8782,6 +9956,7 @@
           <a:lstStyle xmlns:a="http://schemas.openxmlformats.org/drawingml/2006/main"/>
           <a:p xmlns:a="http://schemas.openxmlformats.org/drawingml/2006/main">
             <a:pPr>
+              <a:buNone/>
               <a:defRPr sz="1575" b="1">
                 <a:solidFill>
                   <a:srgbClr val="0B1F3A"/>
@@ -8863,6 +10038,7 @@
           <a:lstStyle xmlns:a="http://schemas.openxmlformats.org/drawingml/2006/main"/>
           <a:p xmlns:a="http://schemas.openxmlformats.org/drawingml/2006/main">
             <a:pPr>
+              <a:buNone/>
               <a:defRPr sz="3450" b="1">
                 <a:solidFill>
                   <a:srgbClr val="1565C0"/>
@@ -8913,6 +10089,7 @@
           <a:lstStyle xmlns:a="http://schemas.openxmlformats.org/drawingml/2006/main"/>
           <a:p xmlns:a="http://schemas.openxmlformats.org/drawingml/2006/main">
             <a:pPr>
+              <a:buNone/>
               <a:defRPr sz="1575" b="1">
                 <a:solidFill>
                   <a:srgbClr val="0B1F3A"/>
@@ -8963,6 +10140,7 @@
           <a:lstStyle xmlns:a="http://schemas.openxmlformats.org/drawingml/2006/main"/>
           <a:p xmlns:a="http://schemas.openxmlformats.org/drawingml/2006/main">
             <a:pPr>
+              <a:buNone/>
               <a:defRPr sz="1050" b="1">
                 <a:solidFill>
                   <a:srgbClr val="1565C0"/>
@@ -9046,6 +10224,7 @@
           <a:lstStyle xmlns:a="http://schemas.openxmlformats.org/drawingml/2006/main"/>
           <a:p xmlns:a="http://schemas.openxmlformats.org/drawingml/2006/main">
             <a:pPr>
+              <a:buNone/>
               <a:defRPr sz="825">
                 <a:solidFill>
                   <a:srgbClr val="0B1F3A">
@@ -9100,6 +10279,7 @@
           <a:lstStyle xmlns:a="http://schemas.openxmlformats.org/drawingml/2006/main"/>
           <a:p xmlns:a="http://schemas.openxmlformats.org/drawingml/2006/main">
             <a:pPr algn="r">
+              <a:buNone/>
               <a:defRPr sz="825" b="1">
                 <a:solidFill>
                   <a:srgbClr val="0B1F3A">
@@ -9191,6 +10371,7 @@
           <a:lstStyle xmlns:a="http://schemas.openxmlformats.org/drawingml/2006/main"/>
           <a:p xmlns:a="http://schemas.openxmlformats.org/drawingml/2006/main">
             <a:pPr>
+              <a:buNone/>
               <a:defRPr sz="5550" b="1">
                 <a:solidFill>
                   <a:srgbClr val="1EC5FF"/>
@@ -9241,6 +10422,7 @@
           <a:lstStyle xmlns:a="http://schemas.openxmlformats.org/drawingml/2006/main"/>
           <a:p xmlns:a="http://schemas.openxmlformats.org/drawingml/2006/main">
             <a:pPr>
+              <a:buNone/>
               <a:defRPr sz="2250" b="1">
                 <a:solidFill>
                   <a:srgbClr val="FFFFFF"/>
@@ -9324,6 +10506,7 @@
           <a:lstStyle xmlns:a="http://schemas.openxmlformats.org/drawingml/2006/main"/>
           <a:p xmlns:a="http://schemas.openxmlformats.org/drawingml/2006/main">
             <a:pPr>
+              <a:buNone/>
               <a:defRPr sz="1800">
                 <a:solidFill>
                   <a:srgbClr val="E2F2FF"/>
@@ -9374,6 +10557,7 @@
           <a:lstStyle xmlns:a="http://schemas.openxmlformats.org/drawingml/2006/main"/>
           <a:p xmlns:a="http://schemas.openxmlformats.org/drawingml/2006/main">
             <a:pPr>
+              <a:buNone/>
               <a:defRPr sz="1050" b="1">
                 <a:solidFill>
                   <a:srgbClr val="1EC5FF"/>
@@ -9457,6 +10641,7 @@
           <a:lstStyle xmlns:a="http://schemas.openxmlformats.org/drawingml/2006/main"/>
           <a:p xmlns:a="http://schemas.openxmlformats.org/drawingml/2006/main">
             <a:pPr>
+              <a:buNone/>
               <a:defRPr sz="825">
                 <a:solidFill>
                   <a:srgbClr val="FFFFFF">
@@ -9511,6 +10696,7 @@
           <a:lstStyle xmlns:a="http://schemas.openxmlformats.org/drawingml/2006/main"/>
           <a:p xmlns:a="http://schemas.openxmlformats.org/drawingml/2006/main">
             <a:pPr algn="r">
+              <a:buNone/>
               <a:defRPr sz="825" b="1">
                 <a:solidFill>
                   <a:srgbClr val="FFFFFF">
@@ -9594,6 +10780,7 @@
           <a:lstStyle xmlns:a="http://schemas.openxmlformats.org/drawingml/2006/main"/>
           <a:p xmlns:a="http://schemas.openxmlformats.org/drawingml/2006/main">
             <a:pPr>
+              <a:buNone/>
               <a:defRPr sz="2850" b="1">
                 <a:solidFill>
                   <a:srgbClr val="0B1F3A"/>
@@ -9675,6 +10862,7 @@
           <a:lstStyle xmlns:a="http://schemas.openxmlformats.org/drawingml/2006/main"/>
           <a:p xmlns:a="http://schemas.openxmlformats.org/drawingml/2006/main">
             <a:pPr>
+              <a:buNone/>
               <a:defRPr sz="1425" b="1">
                 <a:solidFill>
                   <a:srgbClr val="1565C0"/>
@@ -9729,14 +10917,14 @@
       </p:sp>
       <p:pic>
         <p:nvPicPr>
-          <p:cNvPr id="14" name="" descr="Diagrama didático autoral que apresenta: Uma métrica declarada uma vez pode gerar o mesmo SQL para todos os consumidores. — A pergunta que guia a aula."/>
+          <p:cNvPr id="16" name="" descr="Diagrama didático autoral que apresenta: Uma métrica declarada uma vez pode gerar o mesmo SQL para todos os consumidores. — A pergunta que guia a aula."/>
           <p:cNvPicPr>
             <a:picLocks xmlns:a="http://schemas.openxmlformats.org/drawingml/2006/main" noChangeAspect="1"/>
           </p:cNvPicPr>
           <p:nvPr/>
         </p:nvPicPr>
         <p:blipFill>
-          <a:blip xmlns:r="http://schemas.openxmlformats.org/officeDocument/2006/relationships" xmlns:a="http://schemas.openxmlformats.org/drawingml/2006/main" r:embed="R99b293e45d2e4058"/>
+          <a:blip xmlns:r="http://schemas.openxmlformats.org/officeDocument/2006/relationships" xmlns:a="http://schemas.openxmlformats.org/drawingml/2006/main" r:embed="Rc44280a881de4edc"/>
           <a:stretch xmlns:a="http://schemas.openxmlformats.org/drawingml/2006/main"/>
         </p:blipFill>
         <p:spPr>
@@ -9782,6 +10970,7 @@
           <a:lstStyle xmlns:a="http://schemas.openxmlformats.org/drawingml/2006/main"/>
           <a:p xmlns:a="http://schemas.openxmlformats.org/drawingml/2006/main">
             <a:pPr>
+              <a:buNone/>
               <a:defRPr sz="1050" b="1">
                 <a:solidFill>
                   <a:srgbClr val="1565C0"/>
@@ -9865,6 +11054,7 @@
           <a:lstStyle xmlns:a="http://schemas.openxmlformats.org/drawingml/2006/main"/>
           <a:p xmlns:a="http://schemas.openxmlformats.org/drawingml/2006/main">
             <a:pPr>
+              <a:buNone/>
               <a:defRPr sz="825">
                 <a:solidFill>
                   <a:srgbClr val="0B1F3A">
@@ -9919,6 +11109,7 @@
           <a:lstStyle xmlns:a="http://schemas.openxmlformats.org/drawingml/2006/main"/>
           <a:p xmlns:a="http://schemas.openxmlformats.org/drawingml/2006/main">
             <a:pPr algn="r">
+              <a:buNone/>
               <a:defRPr sz="825" b="1">
                 <a:solidFill>
                   <a:srgbClr val="0B1F3A">
@@ -10002,6 +11193,7 @@
           <a:lstStyle xmlns:a="http://schemas.openxmlformats.org/drawingml/2006/main"/>
           <a:p xmlns:a="http://schemas.openxmlformats.org/drawingml/2006/main">
             <a:pPr>
+              <a:buNone/>
               <a:defRPr sz="2925" b="1">
                 <a:solidFill>
                   <a:srgbClr val="0B1F3A"/>
@@ -10052,6 +11244,7 @@
           <a:lstStyle xmlns:a="http://schemas.openxmlformats.org/drawingml/2006/main"/>
           <a:p xmlns:a="http://schemas.openxmlformats.org/drawingml/2006/main">
             <a:pPr>
+              <a:buNone/>
               <a:defRPr sz="1950">
                 <a:solidFill>
                   <a:srgbClr val="0B1F3A"/>
@@ -10069,6 +11262,7 @@
           </a:p>
           <a:p xmlns:a="http://schemas.openxmlformats.org/drawingml/2006/main">
             <a:pPr>
+              <a:buNone/>
               <a:defRPr sz="1950">
                 <a:solidFill>
                   <a:srgbClr val="0B1F3A"/>
@@ -10086,6 +11280,7 @@
           </a:p>
           <a:p xmlns:a="http://schemas.openxmlformats.org/drawingml/2006/main">
             <a:pPr>
+              <a:buNone/>
               <a:defRPr sz="1950">
                 <a:solidFill>
                   <a:srgbClr val="0B1F3A"/>
@@ -10136,6 +11331,7 @@
           <a:lstStyle xmlns:a="http://schemas.openxmlformats.org/drawingml/2006/main"/>
           <a:p xmlns:a="http://schemas.openxmlformats.org/drawingml/2006/main">
             <a:pPr>
+              <a:buNone/>
               <a:defRPr sz="1050" b="1">
                 <a:solidFill>
                   <a:srgbClr val="1565C0"/>
@@ -10219,6 +11415,7 @@
           <a:lstStyle xmlns:a="http://schemas.openxmlformats.org/drawingml/2006/main"/>
           <a:p xmlns:a="http://schemas.openxmlformats.org/drawingml/2006/main">
             <a:pPr>
+              <a:buNone/>
               <a:defRPr sz="825">
                 <a:solidFill>
                   <a:srgbClr val="0B1F3A">
@@ -10273,6 +11470,7 @@
           <a:lstStyle xmlns:a="http://schemas.openxmlformats.org/drawingml/2006/main"/>
           <a:p xmlns:a="http://schemas.openxmlformats.org/drawingml/2006/main">
             <a:pPr algn="r">
+              <a:buNone/>
               <a:defRPr sz="825" b="1">
                 <a:solidFill>
                   <a:srgbClr val="0B1F3A">
@@ -10364,6 +11562,7 @@
           <a:lstStyle xmlns:a="http://schemas.openxmlformats.org/drawingml/2006/main"/>
           <a:p xmlns:a="http://schemas.openxmlformats.org/drawingml/2006/main">
             <a:pPr>
+              <a:buNone/>
               <a:defRPr sz="1500" b="1">
                 <a:solidFill>
                   <a:srgbClr val="1EC5FF"/>
@@ -10414,6 +11613,7 @@
           <a:lstStyle xmlns:a="http://schemas.openxmlformats.org/drawingml/2006/main"/>
           <a:p xmlns:a="http://schemas.openxmlformats.org/drawingml/2006/main">
             <a:pPr>
+              <a:buNone/>
               <a:defRPr sz="2850" b="1">
                 <a:solidFill>
                   <a:srgbClr val="FFFFFF"/>
@@ -10464,6 +11664,7 @@
           <a:lstStyle xmlns:a="http://schemas.openxmlformats.org/drawingml/2006/main"/>
           <a:p xmlns:a="http://schemas.openxmlformats.org/drawingml/2006/main">
             <a:pPr>
+              <a:buNone/>
               <a:defRPr sz="1500">
                 <a:solidFill>
                   <a:srgbClr val="E2F2FF"/>
@@ -10588,6 +11789,7 @@
           <a:lstStyle xmlns:a="http://schemas.openxmlformats.org/drawingml/2006/main"/>
           <a:p xmlns:a="http://schemas.openxmlformats.org/drawingml/2006/main">
             <a:pPr>
+              <a:buNone/>
               <a:defRPr sz="1050" b="1">
                 <a:solidFill>
                   <a:srgbClr val="1EC5FF"/>
@@ -10671,6 +11873,7 @@
           <a:lstStyle xmlns:a="http://schemas.openxmlformats.org/drawingml/2006/main"/>
           <a:p xmlns:a="http://schemas.openxmlformats.org/drawingml/2006/main">
             <a:pPr>
+              <a:buNone/>
               <a:defRPr sz="825">
                 <a:solidFill>
                   <a:srgbClr val="FFFFFF">
@@ -10725,6 +11928,7 @@
           <a:lstStyle xmlns:a="http://schemas.openxmlformats.org/drawingml/2006/main"/>
           <a:p xmlns:a="http://schemas.openxmlformats.org/drawingml/2006/main">
             <a:pPr algn="r">
+              <a:buNone/>
               <a:defRPr sz="825" b="1">
                 <a:solidFill>
                   <a:srgbClr val="FFFFFF">
@@ -10808,6 +12012,7 @@
           <a:lstStyle xmlns:a="http://schemas.openxmlformats.org/drawingml/2006/main"/>
           <a:p xmlns:a="http://schemas.openxmlformats.org/drawingml/2006/main">
             <a:pPr>
+              <a:buNone/>
               <a:defRPr sz="1350" b="1">
                 <a:solidFill>
                   <a:srgbClr val="1565C0"/>
@@ -10858,6 +12063,7 @@
           <a:lstStyle xmlns:a="http://schemas.openxmlformats.org/drawingml/2006/main"/>
           <a:p xmlns:a="http://schemas.openxmlformats.org/drawingml/2006/main">
             <a:pPr>
+              <a:buNone/>
               <a:defRPr sz="3300" b="1">
                 <a:solidFill>
                   <a:srgbClr val="0B1F3A"/>
@@ -10908,6 +12114,7 @@
           <a:lstStyle xmlns:a="http://schemas.openxmlformats.org/drawingml/2006/main"/>
           <a:p xmlns:a="http://schemas.openxmlformats.org/drawingml/2006/main">
             <a:pPr>
+              <a:buNone/>
               <a:defRPr sz="1500">
                 <a:solidFill>
                   <a:srgbClr val="5C6F86"/>
@@ -10958,6 +12165,7 @@
           <a:lstStyle xmlns:a="http://schemas.openxmlformats.org/drawingml/2006/main"/>
           <a:p xmlns:a="http://schemas.openxmlformats.org/drawingml/2006/main">
             <a:pPr>
+              <a:buNone/>
               <a:defRPr sz="1050" b="1">
                 <a:solidFill>
                   <a:srgbClr val="1565C0"/>
@@ -11041,6 +12249,7 @@
           <a:lstStyle xmlns:a="http://schemas.openxmlformats.org/drawingml/2006/main"/>
           <a:p xmlns:a="http://schemas.openxmlformats.org/drawingml/2006/main">
             <a:pPr>
+              <a:buNone/>
               <a:defRPr sz="825">
                 <a:solidFill>
                   <a:srgbClr val="0B1F3A">
@@ -11095,6 +12304,7 @@
           <a:lstStyle xmlns:a="http://schemas.openxmlformats.org/drawingml/2006/main"/>
           <a:p xmlns:a="http://schemas.openxmlformats.org/drawingml/2006/main">
             <a:pPr algn="r">
+              <a:buNone/>
               <a:defRPr sz="825" b="1">
                 <a:solidFill>
                   <a:srgbClr val="0B1F3A">
@@ -11186,6 +12396,7 @@
           <a:lstStyle xmlns:a="http://schemas.openxmlformats.org/drawingml/2006/main"/>
           <a:p xmlns:a="http://schemas.openxmlformats.org/drawingml/2006/main">
             <a:pPr>
+              <a:buNone/>
               <a:defRPr sz="2925" b="1">
                 <a:solidFill>
                   <a:srgbClr val="FFFFFF"/>
@@ -11236,6 +12447,7 @@
           <a:lstStyle xmlns:a="http://schemas.openxmlformats.org/drawingml/2006/main"/>
           <a:p xmlns:a="http://schemas.openxmlformats.org/drawingml/2006/main">
             <a:pPr>
+              <a:buNone/>
               <a:defRPr sz="3450" b="1">
                 <a:solidFill>
                   <a:srgbClr val="1EC5FF"/>
@@ -11286,6 +12498,7 @@
           <a:lstStyle xmlns:a="http://schemas.openxmlformats.org/drawingml/2006/main"/>
           <a:p xmlns:a="http://schemas.openxmlformats.org/drawingml/2006/main">
             <a:pPr>
+              <a:buNone/>
               <a:defRPr sz="1575" b="1">
                 <a:solidFill>
                   <a:srgbClr val="FFFFFF"/>
@@ -11367,6 +12580,7 @@
           <a:lstStyle xmlns:a="http://schemas.openxmlformats.org/drawingml/2006/main"/>
           <a:p xmlns:a="http://schemas.openxmlformats.org/drawingml/2006/main">
             <a:pPr>
+              <a:buNone/>
               <a:defRPr sz="3450" b="1">
                 <a:solidFill>
                   <a:srgbClr val="1EC5FF"/>
@@ -11417,6 +12631,7 @@
           <a:lstStyle xmlns:a="http://schemas.openxmlformats.org/drawingml/2006/main"/>
           <a:p xmlns:a="http://schemas.openxmlformats.org/drawingml/2006/main">
             <a:pPr>
+              <a:buNone/>
               <a:defRPr sz="1575" b="1">
                 <a:solidFill>
                   <a:srgbClr val="FFFFFF"/>
@@ -11498,6 +12713,7 @@
           <a:lstStyle xmlns:a="http://schemas.openxmlformats.org/drawingml/2006/main"/>
           <a:p xmlns:a="http://schemas.openxmlformats.org/drawingml/2006/main">
             <a:pPr>
+              <a:buNone/>
               <a:defRPr sz="3450" b="1">
                 <a:solidFill>
                   <a:srgbClr val="1EC5FF"/>
@@ -11548,6 +12764,7 @@
           <a:lstStyle xmlns:a="http://schemas.openxmlformats.org/drawingml/2006/main"/>
           <a:p xmlns:a="http://schemas.openxmlformats.org/drawingml/2006/main">
             <a:pPr>
+              <a:buNone/>
               <a:defRPr sz="1575" b="1">
                 <a:solidFill>
                   <a:srgbClr val="FFFFFF"/>
@@ -11598,6 +12815,7 @@
           <a:lstStyle xmlns:a="http://schemas.openxmlformats.org/drawingml/2006/main"/>
           <a:p xmlns:a="http://schemas.openxmlformats.org/drawingml/2006/main">
             <a:pPr>
+              <a:buNone/>
               <a:defRPr sz="1050" b="1">
                 <a:solidFill>
                   <a:srgbClr val="1EC5FF"/>
@@ -11681,6 +12899,7 @@
           <a:lstStyle xmlns:a="http://schemas.openxmlformats.org/drawingml/2006/main"/>
           <a:p xmlns:a="http://schemas.openxmlformats.org/drawingml/2006/main">
             <a:pPr>
+              <a:buNone/>
               <a:defRPr sz="825">
                 <a:solidFill>
                   <a:srgbClr val="FFFFFF">
@@ -11735,6 +12954,7 @@
           <a:lstStyle xmlns:a="http://schemas.openxmlformats.org/drawingml/2006/main"/>
           <a:p xmlns:a="http://schemas.openxmlformats.org/drawingml/2006/main">
             <a:pPr algn="r">
+              <a:buNone/>
               <a:defRPr sz="825" b="1">
                 <a:solidFill>
                   <a:srgbClr val="FFFFFF">
@@ -11826,6 +13046,7 @@
           <a:lstStyle xmlns:a="http://schemas.openxmlformats.org/drawingml/2006/main"/>
           <a:p xmlns:a="http://schemas.openxmlformats.org/drawingml/2006/main">
             <a:pPr>
+              <a:buNone/>
               <a:defRPr sz="2925" b="1">
                 <a:solidFill>
                   <a:srgbClr val="FFFFFF"/>
@@ -11876,6 +13097,7 @@
           <a:lstStyle xmlns:a="http://schemas.openxmlformats.org/drawingml/2006/main"/>
           <a:p xmlns:a="http://schemas.openxmlformats.org/drawingml/2006/main">
             <a:pPr>
+              <a:buNone/>
               <a:defRPr sz="1650">
                 <a:solidFill>
                   <a:srgbClr val="E2F2FF"/>
@@ -11926,6 +13148,7 @@
           <a:lstStyle xmlns:a="http://schemas.openxmlformats.org/drawingml/2006/main"/>
           <a:p xmlns:a="http://schemas.openxmlformats.org/drawingml/2006/main">
             <a:pPr>
+              <a:buNone/>
               <a:defRPr sz="1800">
                 <a:solidFill>
                   <a:srgbClr val="FFFFFF"/>
@@ -11943,6 +13166,7 @@
           </a:p>
           <a:p xmlns:a="http://schemas.openxmlformats.org/drawingml/2006/main">
             <a:pPr>
+              <a:buNone/>
               <a:defRPr sz="1800">
                 <a:solidFill>
                   <a:srgbClr val="FFFFFF"/>
@@ -11960,6 +13184,7 @@
           </a:p>
           <a:p xmlns:a="http://schemas.openxmlformats.org/drawingml/2006/main">
             <a:pPr>
+              <a:buNone/>
               <a:defRPr sz="1800">
                 <a:solidFill>
                   <a:srgbClr val="FFFFFF"/>
@@ -12084,6 +13309,7 @@
           <a:lstStyle xmlns:a="http://schemas.openxmlformats.org/drawingml/2006/main"/>
           <a:p xmlns:a="http://schemas.openxmlformats.org/drawingml/2006/main">
             <a:pPr algn="ctr">
+              <a:buNone/>
               <a:defRPr sz="4650" b="1">
                 <a:solidFill>
                   <a:srgbClr val="1EC5FF"/>
@@ -12134,6 +13360,7 @@
           <a:lstStyle xmlns:a="http://schemas.openxmlformats.org/drawingml/2006/main"/>
           <a:p xmlns:a="http://schemas.openxmlformats.org/drawingml/2006/main">
             <a:pPr>
+              <a:buNone/>
               <a:defRPr sz="1050" b="1">
                 <a:solidFill>
                   <a:srgbClr val="1EC5FF"/>
@@ -12217,6 +13444,7 @@
           <a:lstStyle xmlns:a="http://schemas.openxmlformats.org/drawingml/2006/main"/>
           <a:p xmlns:a="http://schemas.openxmlformats.org/drawingml/2006/main">
             <a:pPr>
+              <a:buNone/>
               <a:defRPr sz="825">
                 <a:solidFill>
                   <a:srgbClr val="FFFFFF">
@@ -12271,6 +13499,7 @@
           <a:lstStyle xmlns:a="http://schemas.openxmlformats.org/drawingml/2006/main"/>
           <a:p xmlns:a="http://schemas.openxmlformats.org/drawingml/2006/main">
             <a:pPr algn="r">
+              <a:buNone/>
               <a:defRPr sz="825" b="1">
                 <a:solidFill>
                   <a:srgbClr val="FFFFFF">
@@ -12354,6 +13583,7 @@
           <a:lstStyle xmlns:a="http://schemas.openxmlformats.org/drawingml/2006/main"/>
           <a:p xmlns:a="http://schemas.openxmlformats.org/drawingml/2006/main">
             <a:pPr>
+              <a:buNone/>
               <a:defRPr sz="2925" b="1">
                 <a:solidFill>
                   <a:srgbClr val="0B1F3A"/>
@@ -12404,6 +13634,7 @@
           <a:lstStyle xmlns:a="http://schemas.openxmlformats.org/drawingml/2006/main"/>
           <a:p xmlns:a="http://schemas.openxmlformats.org/drawingml/2006/main">
             <a:pPr>
+              <a:buNone/>
               <a:defRPr sz="1650">
                 <a:solidFill>
                   <a:srgbClr val="5C6F86"/>
@@ -12454,6 +13685,7 @@
           <a:lstStyle xmlns:a="http://schemas.openxmlformats.org/drawingml/2006/main"/>
           <a:p xmlns:a="http://schemas.openxmlformats.org/drawingml/2006/main">
             <a:pPr>
+              <a:buNone/>
               <a:defRPr sz="1800">
                 <a:solidFill>
                   <a:srgbClr val="0B1F3A"/>
@@ -12471,6 +13703,7 @@
           </a:p>
           <a:p xmlns:a="http://schemas.openxmlformats.org/drawingml/2006/main">
             <a:pPr>
+              <a:buNone/>
               <a:defRPr sz="1800">
                 <a:solidFill>
                   <a:srgbClr val="0B1F3A"/>
@@ -12488,6 +13721,7 @@
           </a:p>
           <a:p xmlns:a="http://schemas.openxmlformats.org/drawingml/2006/main">
             <a:pPr>
+              <a:buNone/>
               <a:defRPr sz="1800">
                 <a:solidFill>
                   <a:srgbClr val="0B1F3A"/>
@@ -12612,6 +13846,7 @@
           <a:lstStyle xmlns:a="http://schemas.openxmlformats.org/drawingml/2006/main"/>
           <a:p xmlns:a="http://schemas.openxmlformats.org/drawingml/2006/main">
             <a:pPr algn="ctr">
+              <a:buNone/>
               <a:defRPr sz="4650" b="1">
                 <a:solidFill>
                   <a:srgbClr val="1565C0"/>
@@ -12662,6 +13897,7 @@
           <a:lstStyle xmlns:a="http://schemas.openxmlformats.org/drawingml/2006/main"/>
           <a:p xmlns:a="http://schemas.openxmlformats.org/drawingml/2006/main">
             <a:pPr>
+              <a:buNone/>
               <a:defRPr sz="1050" b="1">
                 <a:solidFill>
                   <a:srgbClr val="1565C0"/>
@@ -12745,6 +13981,7 @@
           <a:lstStyle xmlns:a="http://schemas.openxmlformats.org/drawingml/2006/main"/>
           <a:p xmlns:a="http://schemas.openxmlformats.org/drawingml/2006/main">
             <a:pPr>
+              <a:buNone/>
               <a:defRPr sz="825">
                 <a:solidFill>
                   <a:srgbClr val="0B1F3A">
@@ -12799,6 +14036,7 @@
           <a:lstStyle xmlns:a="http://schemas.openxmlformats.org/drawingml/2006/main"/>
           <a:p xmlns:a="http://schemas.openxmlformats.org/drawingml/2006/main">
             <a:pPr algn="r">
+              <a:buNone/>
               <a:defRPr sz="825" b="1">
                 <a:solidFill>
                   <a:srgbClr val="0B1F3A">
@@ -12890,6 +14128,7 @@
           <a:lstStyle xmlns:a="http://schemas.openxmlformats.org/drawingml/2006/main"/>
           <a:p xmlns:a="http://schemas.openxmlformats.org/drawingml/2006/main">
             <a:pPr>
+              <a:buNone/>
               <a:defRPr sz="2925" b="1">
                 <a:solidFill>
                   <a:srgbClr val="FFFFFF"/>
@@ -12940,6 +14179,7 @@
           <a:lstStyle xmlns:a="http://schemas.openxmlformats.org/drawingml/2006/main"/>
           <a:p xmlns:a="http://schemas.openxmlformats.org/drawingml/2006/main">
             <a:pPr>
+              <a:buNone/>
               <a:defRPr sz="2100" b="1">
                 <a:solidFill>
                   <a:srgbClr val="1EC5FF"/>
@@ -12990,6 +14230,7 @@
           <a:lstStyle xmlns:a="http://schemas.openxmlformats.org/drawingml/2006/main"/>
           <a:p xmlns:a="http://schemas.openxmlformats.org/drawingml/2006/main">
             <a:pPr>
+              <a:buNone/>
               <a:defRPr sz="2100" b="1">
                 <a:solidFill>
                   <a:srgbClr val="2DBE8C"/>
@@ -13073,6 +14314,7 @@
           <a:lstStyle xmlns:a="http://schemas.openxmlformats.org/drawingml/2006/main"/>
           <a:p xmlns:a="http://schemas.openxmlformats.org/drawingml/2006/main">
             <a:pPr>
+              <a:buNone/>
               <a:defRPr sz="1650">
                 <a:solidFill>
                   <a:srgbClr val="FFFFFF"/>
@@ -13090,6 +14332,7 @@
           </a:p>
           <a:p xmlns:a="http://schemas.openxmlformats.org/drawingml/2006/main">
             <a:pPr>
+              <a:buNone/>
               <a:defRPr sz="1650">
                 <a:solidFill>
                   <a:srgbClr val="FFFFFF"/>
@@ -13140,6 +14383,7 @@
           <a:lstStyle xmlns:a="http://schemas.openxmlformats.org/drawingml/2006/main"/>
           <a:p xmlns:a="http://schemas.openxmlformats.org/drawingml/2006/main">
             <a:pPr>
+              <a:buNone/>
               <a:defRPr sz="1650">
                 <a:solidFill>
                   <a:srgbClr val="FFFFFF"/>
@@ -13190,6 +14434,7 @@
           <a:lstStyle xmlns:a="http://schemas.openxmlformats.org/drawingml/2006/main"/>
           <a:p xmlns:a="http://schemas.openxmlformats.org/drawingml/2006/main">
             <a:pPr>
+              <a:buNone/>
               <a:defRPr sz="1050" b="1">
                 <a:solidFill>
                   <a:srgbClr val="1EC5FF"/>
@@ -13273,6 +14518,7 @@
           <a:lstStyle xmlns:a="http://schemas.openxmlformats.org/drawingml/2006/main"/>
           <a:p xmlns:a="http://schemas.openxmlformats.org/drawingml/2006/main">
             <a:pPr>
+              <a:buNone/>
               <a:defRPr sz="825">
                 <a:solidFill>
                   <a:srgbClr val="FFFFFF">
@@ -13327,6 +14573,7 @@
           <a:lstStyle xmlns:a="http://schemas.openxmlformats.org/drawingml/2006/main"/>
           <a:p xmlns:a="http://schemas.openxmlformats.org/drawingml/2006/main">
             <a:pPr algn="r">
+              <a:buNone/>
               <a:defRPr sz="825" b="1">
                 <a:solidFill>
                   <a:srgbClr val="FFFFFF">
@@ -13418,6 +14665,7 @@
           <a:lstStyle xmlns:a="http://schemas.openxmlformats.org/drawingml/2006/main"/>
           <a:p xmlns:a="http://schemas.openxmlformats.org/drawingml/2006/main">
             <a:pPr>
+              <a:buNone/>
               <a:defRPr sz="2925" b="1">
                 <a:solidFill>
                   <a:srgbClr val="FFFFFF"/>
@@ -13468,6 +14716,7 @@
           <a:lstStyle xmlns:a="http://schemas.openxmlformats.org/drawingml/2006/main"/>
           <a:p xmlns:a="http://schemas.openxmlformats.org/drawingml/2006/main">
             <a:pPr>
+              <a:buNone/>
               <a:defRPr sz="1650">
                 <a:solidFill>
                   <a:srgbClr val="E2F2FF"/>
@@ -13518,6 +14767,7 @@
           <a:lstStyle xmlns:a="http://schemas.openxmlformats.org/drawingml/2006/main"/>
           <a:p xmlns:a="http://schemas.openxmlformats.org/drawingml/2006/main">
             <a:pPr>
+              <a:buNone/>
               <a:defRPr sz="1800">
                 <a:solidFill>
                   <a:srgbClr val="FFFFFF"/>
@@ -13535,6 +14785,7 @@
           </a:p>
           <a:p xmlns:a="http://schemas.openxmlformats.org/drawingml/2006/main">
             <a:pPr>
+              <a:buNone/>
               <a:defRPr sz="1800">
                 <a:solidFill>
                   <a:srgbClr val="FFFFFF"/>
@@ -13552,6 +14803,7 @@
           </a:p>
           <a:p xmlns:a="http://schemas.openxmlformats.org/drawingml/2006/main">
             <a:pPr>
+              <a:buNone/>
               <a:defRPr sz="1800">
                 <a:solidFill>
                   <a:srgbClr val="FFFFFF"/>
@@ -13676,6 +14928,7 @@
           <a:lstStyle xmlns:a="http://schemas.openxmlformats.org/drawingml/2006/main"/>
           <a:p xmlns:a="http://schemas.openxmlformats.org/drawingml/2006/main">
             <a:pPr algn="ctr">
+              <a:buNone/>
               <a:defRPr sz="4650" b="1">
                 <a:solidFill>
                   <a:srgbClr val="1EC5FF"/>
@@ -13726,6 +14979,7 @@
           <a:lstStyle xmlns:a="http://schemas.openxmlformats.org/drawingml/2006/main"/>
           <a:p xmlns:a="http://schemas.openxmlformats.org/drawingml/2006/main">
             <a:pPr>
+              <a:buNone/>
               <a:defRPr sz="1050" b="1">
                 <a:solidFill>
                   <a:srgbClr val="1EC5FF"/>
@@ -13809,6 +15063,7 @@
           <a:lstStyle xmlns:a="http://schemas.openxmlformats.org/drawingml/2006/main"/>
           <a:p xmlns:a="http://schemas.openxmlformats.org/drawingml/2006/main">
             <a:pPr>
+              <a:buNone/>
               <a:defRPr sz="825">
                 <a:solidFill>
                   <a:srgbClr val="FFFFFF">
@@ -13863,6 +15118,7 @@
           <a:lstStyle xmlns:a="http://schemas.openxmlformats.org/drawingml/2006/main"/>
           <a:p xmlns:a="http://schemas.openxmlformats.org/drawingml/2006/main">
             <a:pPr algn="r">
+              <a:buNone/>
               <a:defRPr sz="825" b="1">
                 <a:solidFill>
                   <a:srgbClr val="FFFFFF">
@@ -13946,6 +15202,7 @@
           <a:lstStyle xmlns:a="http://schemas.openxmlformats.org/drawingml/2006/main"/>
           <a:p xmlns:a="http://schemas.openxmlformats.org/drawingml/2006/main">
             <a:pPr>
+              <a:buNone/>
               <a:defRPr sz="2925" b="1">
                 <a:solidFill>
                   <a:srgbClr val="0B1F3A"/>
@@ -13996,6 +15253,7 @@
           <a:lstStyle xmlns:a="http://schemas.openxmlformats.org/drawingml/2006/main"/>
           <a:p xmlns:a="http://schemas.openxmlformats.org/drawingml/2006/main">
             <a:pPr>
+              <a:buNone/>
               <a:defRPr sz="1950" b="1">
                 <a:solidFill>
                   <a:srgbClr val="0B1F3A"/>
@@ -14050,14 +15308,14 @@
       </p:sp>
       <p:pic>
         <p:nvPicPr>
-          <p:cNvPr id="13" name="" descr="Figura oficial da documentação dbt usada para explicar: O exemplo oficial conecta schema e métricas — Chaves e tipos de coluna sustentam os caminhos do grafo.."/>
+          <p:cNvPr id="15" name="" descr="Figura oficial da documentação dbt usada para explicar: O exemplo oficial conecta schema e métricas — Chaves e tipos de coluna sustentam os caminhos do grafo.."/>
           <p:cNvPicPr>
             <a:picLocks xmlns:a="http://schemas.openxmlformats.org/drawingml/2006/main" noChangeAspect="1"/>
           </p:cNvPicPr>
           <p:nvPr/>
         </p:nvPicPr>
         <p:blipFill>
-          <a:blip xmlns:r="http://schemas.openxmlformats.org/officeDocument/2006/relationships" xmlns:a="http://schemas.openxmlformats.org/drawingml/2006/main" r:embed="Rd5ebff58068d4597"/>
+          <a:blip xmlns:r="http://schemas.openxmlformats.org/officeDocument/2006/relationships" xmlns:a="http://schemas.openxmlformats.org/drawingml/2006/main" r:embed="R80a541c2a01b47d3"/>
           <a:stretch xmlns:a="http://schemas.openxmlformats.org/drawingml/2006/main"/>
         </p:blipFill>
         <p:spPr>
@@ -14103,6 +15361,7 @@
           <a:lstStyle xmlns:a="http://schemas.openxmlformats.org/drawingml/2006/main"/>
           <a:p xmlns:a="http://schemas.openxmlformats.org/drawingml/2006/main">
             <a:pPr>
+              <a:buNone/>
               <a:defRPr sz="900" i="1">
                 <a:solidFill>
                   <a:srgbClr val="5C6F86"/>
@@ -14153,6 +15412,7 @@
           <a:lstStyle xmlns:a="http://schemas.openxmlformats.org/drawingml/2006/main"/>
           <a:p xmlns:a="http://schemas.openxmlformats.org/drawingml/2006/main">
             <a:pPr>
+              <a:buNone/>
               <a:defRPr sz="1050" b="1">
                 <a:solidFill>
                   <a:srgbClr val="1565C0"/>
@@ -14236,6 +15496,7 @@
           <a:lstStyle xmlns:a="http://schemas.openxmlformats.org/drawingml/2006/main"/>
           <a:p xmlns:a="http://schemas.openxmlformats.org/drawingml/2006/main">
             <a:pPr>
+              <a:buNone/>
               <a:defRPr sz="825">
                 <a:solidFill>
                   <a:srgbClr val="0B1F3A">
@@ -14290,6 +15551,7 @@
           <a:lstStyle xmlns:a="http://schemas.openxmlformats.org/drawingml/2006/main"/>
           <a:p xmlns:a="http://schemas.openxmlformats.org/drawingml/2006/main">
             <a:pPr algn="r">
+              <a:buNone/>
               <a:defRPr sz="825" b="1">
                 <a:solidFill>
                   <a:srgbClr val="0B1F3A">
@@ -14373,6 +15635,7 @@
           <a:lstStyle xmlns:a="http://schemas.openxmlformats.org/drawingml/2006/main"/>
           <a:p xmlns:a="http://schemas.openxmlformats.org/drawingml/2006/main">
             <a:pPr>
+              <a:buNone/>
               <a:defRPr sz="2925" b="1">
                 <a:solidFill>
                   <a:srgbClr val="0B1F3A"/>
@@ -14423,6 +15686,7 @@
           <a:lstStyle xmlns:a="http://schemas.openxmlformats.org/drawingml/2006/main"/>
           <a:p xmlns:a="http://schemas.openxmlformats.org/drawingml/2006/main">
             <a:pPr>
+              <a:buNone/>
               <a:defRPr sz="1650">
                 <a:solidFill>
                   <a:srgbClr val="5C6F86"/>
@@ -14473,6 +15737,7 @@
           <a:lstStyle xmlns:a="http://schemas.openxmlformats.org/drawingml/2006/main"/>
           <a:p xmlns:a="http://schemas.openxmlformats.org/drawingml/2006/main">
             <a:pPr>
+              <a:buNone/>
               <a:defRPr sz="1800">
                 <a:solidFill>
                   <a:srgbClr val="0B1F3A"/>
@@ -14490,6 +15755,7 @@
           </a:p>
           <a:p xmlns:a="http://schemas.openxmlformats.org/drawingml/2006/main">
             <a:pPr>
+              <a:buNone/>
               <a:defRPr sz="1800">
                 <a:solidFill>
                   <a:srgbClr val="0B1F3A"/>
@@ -14507,6 +15773,7 @@
           </a:p>
           <a:p xmlns:a="http://schemas.openxmlformats.org/drawingml/2006/main">
             <a:pPr>
+              <a:buNone/>
               <a:defRPr sz="1800">
                 <a:solidFill>
                   <a:srgbClr val="0B1F3A"/>
@@ -14631,6 +15898,7 @@
           <a:lstStyle xmlns:a="http://schemas.openxmlformats.org/drawingml/2006/main"/>
           <a:p xmlns:a="http://schemas.openxmlformats.org/drawingml/2006/main">
             <a:pPr algn="ctr">
+              <a:buNone/>
               <a:defRPr sz="4650" b="1">
                 <a:solidFill>
                   <a:srgbClr val="1565C0"/>
@@ -14681,6 +15949,7 @@
           <a:lstStyle xmlns:a="http://schemas.openxmlformats.org/drawingml/2006/main"/>
           <a:p xmlns:a="http://schemas.openxmlformats.org/drawingml/2006/main">
             <a:pPr>
+              <a:buNone/>
               <a:defRPr sz="1050" b="1">
                 <a:solidFill>
                   <a:srgbClr val="1565C0"/>
@@ -14764,6 +16033,7 @@
           <a:lstStyle xmlns:a="http://schemas.openxmlformats.org/drawingml/2006/main"/>
           <a:p xmlns:a="http://schemas.openxmlformats.org/drawingml/2006/main">
             <a:pPr>
+              <a:buNone/>
               <a:defRPr sz="825">
                 <a:solidFill>
                   <a:srgbClr val="0B1F3A">
@@ -14818,6 +16088,7 @@
           <a:lstStyle xmlns:a="http://schemas.openxmlformats.org/drawingml/2006/main"/>
           <a:p xmlns:a="http://schemas.openxmlformats.org/drawingml/2006/main">
             <a:pPr algn="r">
+              <a:buNone/>
               <a:defRPr sz="825" b="1">
                 <a:solidFill>
                   <a:srgbClr val="0B1F3A">

--- a/assets/decks/episodio-03-metricflow-local.pptx
+++ b/assets/decks/episodio-03-metricflow-local.pptx
@@ -2,35 +2,35 @@
 <file path=ppt/presentation.xml><?xml version="1.0" encoding="utf-8"?>
 <p:presentation xmlns:p="http://schemas.openxmlformats.org/presentationml/2006/main">
   <p:sldMasterIdLst>
-    <p:sldMasterId xmlns:r="http://schemas.openxmlformats.org/officeDocument/2006/relationships" id="2147483648" r:id="Rfc5a9e0de5af43f0"/>
-    <p:sldMasterId xmlns:r="http://schemas.openxmlformats.org/officeDocument/2006/relationships" id="2147483650" r:id="R1b8454f48c974721"/>
+    <p:sldMasterId xmlns:r="http://schemas.openxmlformats.org/officeDocument/2006/relationships" id="2147483648" r:id="R337b751531c44341"/>
+    <p:sldMasterId xmlns:r="http://schemas.openxmlformats.org/officeDocument/2006/relationships" id="2147483650" r:id="R639be4c784134cb8"/>
   </p:sldMasterIdLst>
   <p:notesMasterIdLst>
-    <p:notesMasterId xmlns:r="http://schemas.openxmlformats.org/officeDocument/2006/relationships" r:id="Rb68d988972cb485b"/>
+    <p:notesMasterId xmlns:r="http://schemas.openxmlformats.org/officeDocument/2006/relationships" r:id="Rb7ded96661bb4cac"/>
   </p:notesMasterIdLst>
   <p:sldIdLst>
-    <p:sldId xmlns:r="http://schemas.openxmlformats.org/officeDocument/2006/relationships" id="256" r:id="R590aa0526995414b"/>
-    <p:sldId xmlns:r="http://schemas.openxmlformats.org/officeDocument/2006/relationships" id="257" r:id="R6a4bfcbf539d4992"/>
-    <p:sldId xmlns:r="http://schemas.openxmlformats.org/officeDocument/2006/relationships" id="258" r:id="Rd85def057c64472a"/>
-    <p:sldId xmlns:r="http://schemas.openxmlformats.org/officeDocument/2006/relationships" id="259" r:id="R087918ddc70947b5"/>
-    <p:sldId xmlns:r="http://schemas.openxmlformats.org/officeDocument/2006/relationships" id="260" r:id="R5c6e8e491b874c63"/>
-    <p:sldId xmlns:r="http://schemas.openxmlformats.org/officeDocument/2006/relationships" id="261" r:id="Rd22ba146db6b4f99"/>
-    <p:sldId xmlns:r="http://schemas.openxmlformats.org/officeDocument/2006/relationships" id="262" r:id="Ra475b24577bb4c3f"/>
-    <p:sldId xmlns:r="http://schemas.openxmlformats.org/officeDocument/2006/relationships" id="263" r:id="Rccc2ea716e5a4b79"/>
-    <p:sldId xmlns:r="http://schemas.openxmlformats.org/officeDocument/2006/relationships" id="264" r:id="Rb42f907b641343ae"/>
-    <p:sldId xmlns:r="http://schemas.openxmlformats.org/officeDocument/2006/relationships" id="265" r:id="R0416ae11d9c94676"/>
-    <p:sldId xmlns:r="http://schemas.openxmlformats.org/officeDocument/2006/relationships" id="266" r:id="Rb4264e310a6941b2"/>
-    <p:sldId xmlns:r="http://schemas.openxmlformats.org/officeDocument/2006/relationships" id="267" r:id="Rad33155cd736486d"/>
-    <p:sldId xmlns:r="http://schemas.openxmlformats.org/officeDocument/2006/relationships" id="268" r:id="R80a4c5d892374336"/>
-    <p:sldId xmlns:r="http://schemas.openxmlformats.org/officeDocument/2006/relationships" id="269" r:id="Reb4436602d8e413c"/>
-    <p:sldId xmlns:r="http://schemas.openxmlformats.org/officeDocument/2006/relationships" id="270" r:id="R4682acf6e6ee4f46"/>
-    <p:sldId xmlns:r="http://schemas.openxmlformats.org/officeDocument/2006/relationships" id="271" r:id="R87793ab35585495c"/>
-    <p:sldId xmlns:r="http://schemas.openxmlformats.org/officeDocument/2006/relationships" id="272" r:id="R7b46cca0d6534d2c"/>
-    <p:sldId xmlns:r="http://schemas.openxmlformats.org/officeDocument/2006/relationships" id="273" r:id="R2f2004c7902f4083"/>
-    <p:sldId xmlns:r="http://schemas.openxmlformats.org/officeDocument/2006/relationships" id="274" r:id="R0ebd668c9eca446c"/>
-    <p:sldId xmlns:r="http://schemas.openxmlformats.org/officeDocument/2006/relationships" id="275" r:id="R5706bcddf6004889"/>
-    <p:sldId xmlns:r="http://schemas.openxmlformats.org/officeDocument/2006/relationships" id="276" r:id="Rcc43c4cc69a34a60"/>
-    <p:sldId xmlns:r="http://schemas.openxmlformats.org/officeDocument/2006/relationships" id="277" r:id="R4c2d18769afd40bb"/>
+    <p:sldId xmlns:r="http://schemas.openxmlformats.org/officeDocument/2006/relationships" id="256" r:id="R929c52748e8e4ad5"/>
+    <p:sldId xmlns:r="http://schemas.openxmlformats.org/officeDocument/2006/relationships" id="257" r:id="Re36622c3052f4cb2"/>
+    <p:sldId xmlns:r="http://schemas.openxmlformats.org/officeDocument/2006/relationships" id="258" r:id="Rfb438b2f13774b25"/>
+    <p:sldId xmlns:r="http://schemas.openxmlformats.org/officeDocument/2006/relationships" id="259" r:id="R5b93f0e6cb5e4c70"/>
+    <p:sldId xmlns:r="http://schemas.openxmlformats.org/officeDocument/2006/relationships" id="260" r:id="R6a946ec81b934cea"/>
+    <p:sldId xmlns:r="http://schemas.openxmlformats.org/officeDocument/2006/relationships" id="261" r:id="R6eb8cd497616461a"/>
+    <p:sldId xmlns:r="http://schemas.openxmlformats.org/officeDocument/2006/relationships" id="262" r:id="R2dc29499dc1743c9"/>
+    <p:sldId xmlns:r="http://schemas.openxmlformats.org/officeDocument/2006/relationships" id="263" r:id="Rc79659d37cea4fe4"/>
+    <p:sldId xmlns:r="http://schemas.openxmlformats.org/officeDocument/2006/relationships" id="264" r:id="R458cc73d37be445f"/>
+    <p:sldId xmlns:r="http://schemas.openxmlformats.org/officeDocument/2006/relationships" id="265" r:id="Rba5eea055ed74f6b"/>
+    <p:sldId xmlns:r="http://schemas.openxmlformats.org/officeDocument/2006/relationships" id="266" r:id="R26ae36616252402c"/>
+    <p:sldId xmlns:r="http://schemas.openxmlformats.org/officeDocument/2006/relationships" id="267" r:id="Rc3ba0ec627c74416"/>
+    <p:sldId xmlns:r="http://schemas.openxmlformats.org/officeDocument/2006/relationships" id="268" r:id="Rb90eeec78a2a4ef3"/>
+    <p:sldId xmlns:r="http://schemas.openxmlformats.org/officeDocument/2006/relationships" id="269" r:id="R7970b371efc444b2"/>
+    <p:sldId xmlns:r="http://schemas.openxmlformats.org/officeDocument/2006/relationships" id="270" r:id="Raaf3bdbd497549b5"/>
+    <p:sldId xmlns:r="http://schemas.openxmlformats.org/officeDocument/2006/relationships" id="271" r:id="Rab89a78ac58749bf"/>
+    <p:sldId xmlns:r="http://schemas.openxmlformats.org/officeDocument/2006/relationships" id="272" r:id="Rfc1fa283d28241e5"/>
+    <p:sldId xmlns:r="http://schemas.openxmlformats.org/officeDocument/2006/relationships" id="273" r:id="Re198823f1437440e"/>
+    <p:sldId xmlns:r="http://schemas.openxmlformats.org/officeDocument/2006/relationships" id="274" r:id="Re486acb2dcb84065"/>
+    <p:sldId xmlns:r="http://schemas.openxmlformats.org/officeDocument/2006/relationships" id="275" r:id="Rb54892d5d50e48c5"/>
+    <p:sldId xmlns:r="http://schemas.openxmlformats.org/officeDocument/2006/relationships" id="276" r:id="R5ddf3061f1954780"/>
+    <p:sldId xmlns:r="http://schemas.openxmlformats.org/officeDocument/2006/relationships" id="277" r:id="Rb5cb63b643674d0b"/>
   </p:sldIdLst>
   <p:sldSz cx="12192000" cy="6858000"/>
   <p:notesSz cx="6858000" cy="9144000"/>
@@ -544,6 +544,11 @@
           </a:p>
           <a:p xmlns:a="http://schemas.openxmlformats.org/drawingml/2006/main">
             <a:r>
+              <a:t>- https://rescuepoint.com.br/assets/img/logo.png</a:t>
+            </a:r>
+          </a:p>
+          <a:p xmlns:a="http://schemas.openxmlformats.org/drawingml/2006/main">
+            <a:r>
               <a:t>- https://github.com/AnselmoBorges/dbt-moderno-na-pratica/blob/main/roteiros/03-metricflow-local.md</a:t>
             </a:r>
           </a:p>
@@ -709,6 +714,11 @@
           </a:p>
           <a:p xmlns:a="http://schemas.openxmlformats.org/drawingml/2006/main">
             <a:r>
+              <a:t>- https://rescuepoint.com.br/assets/img/logo.png</a:t>
+            </a:r>
+          </a:p>
+          <a:p xmlns:a="http://schemas.openxmlformats.org/drawingml/2006/main">
+            <a:r>
               <a:t>- https://github.com/AnselmoBorges/dbt-moderno-na-pratica/blob/main/roteiros/03-metricflow-local.md</a:t>
             </a:r>
           </a:p>
@@ -874,6 +884,11 @@
           </a:p>
           <a:p xmlns:a="http://schemas.openxmlformats.org/drawingml/2006/main">
             <a:r>
+              <a:t>- https://rescuepoint.com.br/assets/img/logo.png</a:t>
+            </a:r>
+          </a:p>
+          <a:p xmlns:a="http://schemas.openxmlformats.org/drawingml/2006/main">
+            <a:r>
               <a:t>- https://github.com/AnselmoBorges/dbt-moderno-na-pratica/blob/main/roteiros/03-metricflow-local.md</a:t>
             </a:r>
           </a:p>
@@ -1039,6 +1054,11 @@
           </a:p>
           <a:p xmlns:a="http://schemas.openxmlformats.org/drawingml/2006/main">
             <a:r>
+              <a:t>- https://rescuepoint.com.br/assets/img/logo.png</a:t>
+            </a:r>
+          </a:p>
+          <a:p xmlns:a="http://schemas.openxmlformats.org/drawingml/2006/main">
+            <a:r>
               <a:t>- https://github.com/AnselmoBorges/dbt-moderno-na-pratica/blob/main/roteiros/03-metricflow-local.md</a:t>
             </a:r>
           </a:p>
@@ -1204,6 +1224,11 @@
           </a:p>
           <a:p xmlns:a="http://schemas.openxmlformats.org/drawingml/2006/main">
             <a:r>
+              <a:t>- https://rescuepoint.com.br/assets/img/logo.png</a:t>
+            </a:r>
+          </a:p>
+          <a:p xmlns:a="http://schemas.openxmlformats.org/drawingml/2006/main">
+            <a:r>
               <a:t>- https://github.com/AnselmoBorges/dbt-moderno-na-pratica/blob/main/roteiros/03-metricflow-local.md</a:t>
             </a:r>
           </a:p>
@@ -1369,6 +1394,11 @@
           </a:p>
           <a:p xmlns:a="http://schemas.openxmlformats.org/drawingml/2006/main">
             <a:r>
+              <a:t>- https://rescuepoint.com.br/assets/img/logo.png</a:t>
+            </a:r>
+          </a:p>
+          <a:p xmlns:a="http://schemas.openxmlformats.org/drawingml/2006/main">
+            <a:r>
               <a:t>- https://github.com/AnselmoBorges/dbt-moderno-na-pratica/blob/main/roteiros/03-metricflow-local.md</a:t>
             </a:r>
           </a:p>
@@ -1534,6 +1564,11 @@
           </a:p>
           <a:p xmlns:a="http://schemas.openxmlformats.org/drawingml/2006/main">
             <a:r>
+              <a:t>- https://rescuepoint.com.br/assets/img/logo.png</a:t>
+            </a:r>
+          </a:p>
+          <a:p xmlns:a="http://schemas.openxmlformats.org/drawingml/2006/main">
+            <a:r>
               <a:t>- https://github.com/AnselmoBorges/dbt-moderno-na-pratica/blob/main/roteiros/03-metricflow-local.md</a:t>
             </a:r>
           </a:p>
@@ -1699,6 +1734,11 @@
           </a:p>
           <a:p xmlns:a="http://schemas.openxmlformats.org/drawingml/2006/main">
             <a:r>
+              <a:t>- https://rescuepoint.com.br/assets/img/logo.png</a:t>
+            </a:r>
+          </a:p>
+          <a:p xmlns:a="http://schemas.openxmlformats.org/drawingml/2006/main">
+            <a:r>
               <a:t>- https://github.com/AnselmoBorges/dbt-moderno-na-pratica/blob/main/roteiros/03-metricflow-local.md</a:t>
             </a:r>
           </a:p>
@@ -1864,6 +1904,11 @@
           </a:p>
           <a:p xmlns:a="http://schemas.openxmlformats.org/drawingml/2006/main">
             <a:r>
+              <a:t>- https://rescuepoint.com.br/assets/img/logo.png</a:t>
+            </a:r>
+          </a:p>
+          <a:p xmlns:a="http://schemas.openxmlformats.org/drawingml/2006/main">
+            <a:r>
               <a:t>- https://github.com/AnselmoBorges/dbt-moderno-na-pratica/blob/main/roteiros/03-metricflow-local.md</a:t>
             </a:r>
           </a:p>
@@ -2029,6 +2074,11 @@
           </a:p>
           <a:p xmlns:a="http://schemas.openxmlformats.org/drawingml/2006/main">
             <a:r>
+              <a:t>- https://rescuepoint.com.br/assets/img/logo.png</a:t>
+            </a:r>
+          </a:p>
+          <a:p xmlns:a="http://schemas.openxmlformats.org/drawingml/2006/main">
+            <a:r>
               <a:t>- https://github.com/AnselmoBorges/dbt-moderno-na-pratica/blob/main/roteiros/03-metricflow-local.md</a:t>
             </a:r>
           </a:p>
@@ -2194,6 +2244,11 @@
           </a:p>
           <a:p xmlns:a="http://schemas.openxmlformats.org/drawingml/2006/main">
             <a:r>
+              <a:t>- https://rescuepoint.com.br/assets/img/logo.png</a:t>
+            </a:r>
+          </a:p>
+          <a:p xmlns:a="http://schemas.openxmlformats.org/drawingml/2006/main">
+            <a:r>
               <a:t>- https://github.com/AnselmoBorges/dbt-moderno-na-pratica/blob/main/roteiros/03-metricflow-local.md</a:t>
             </a:r>
           </a:p>
@@ -2359,6 +2414,11 @@
           </a:p>
           <a:p xmlns:a="http://schemas.openxmlformats.org/drawingml/2006/main">
             <a:r>
+              <a:t>- https://rescuepoint.com.br/assets/img/logo.png</a:t>
+            </a:r>
+          </a:p>
+          <a:p xmlns:a="http://schemas.openxmlformats.org/drawingml/2006/main">
+            <a:r>
               <a:t>- https://github.com/AnselmoBorges/dbt-moderno-na-pratica/blob/main/roteiros/03-metricflow-local.md</a:t>
             </a:r>
           </a:p>
@@ -2524,6 +2584,11 @@
           </a:p>
           <a:p xmlns:a="http://schemas.openxmlformats.org/drawingml/2006/main">
             <a:r>
+              <a:t>- https://rescuepoint.com.br/assets/img/logo.png</a:t>
+            </a:r>
+          </a:p>
+          <a:p xmlns:a="http://schemas.openxmlformats.org/drawingml/2006/main">
+            <a:r>
               <a:t>- https://github.com/AnselmoBorges/dbt-moderno-na-pratica/blob/main/roteiros/03-metricflow-local.md</a:t>
             </a:r>
           </a:p>
@@ -2689,6 +2754,11 @@
           </a:p>
           <a:p xmlns:a="http://schemas.openxmlformats.org/drawingml/2006/main">
             <a:r>
+              <a:t>- https://rescuepoint.com.br/assets/img/logo.png</a:t>
+            </a:r>
+          </a:p>
+          <a:p xmlns:a="http://schemas.openxmlformats.org/drawingml/2006/main">
+            <a:r>
               <a:t>- https://github.com/AnselmoBorges/dbt-moderno-na-pratica/blob/main/roteiros/03-metricflow-local.md</a:t>
             </a:r>
           </a:p>
@@ -2854,6 +2924,11 @@
           </a:p>
           <a:p xmlns:a="http://schemas.openxmlformats.org/drawingml/2006/main">
             <a:r>
+              <a:t>- https://rescuepoint.com.br/assets/img/logo.png</a:t>
+            </a:r>
+          </a:p>
+          <a:p xmlns:a="http://schemas.openxmlformats.org/drawingml/2006/main">
+            <a:r>
               <a:t>- https://github.com/AnselmoBorges/dbt-moderno-na-pratica/blob/main/roteiros/03-metricflow-local.md</a:t>
             </a:r>
           </a:p>
@@ -3019,6 +3094,11 @@
           </a:p>
           <a:p xmlns:a="http://schemas.openxmlformats.org/drawingml/2006/main">
             <a:r>
+              <a:t>- https://rescuepoint.com.br/assets/img/logo.png</a:t>
+            </a:r>
+          </a:p>
+          <a:p xmlns:a="http://schemas.openxmlformats.org/drawingml/2006/main">
+            <a:r>
               <a:t>- https://github.com/AnselmoBorges/dbt-moderno-na-pratica/blob/main/roteiros/03-metricflow-local.md</a:t>
             </a:r>
           </a:p>
@@ -3184,6 +3264,11 @@
           </a:p>
           <a:p xmlns:a="http://schemas.openxmlformats.org/drawingml/2006/main">
             <a:r>
+              <a:t>- https://rescuepoint.com.br/assets/img/logo.png</a:t>
+            </a:r>
+          </a:p>
+          <a:p xmlns:a="http://schemas.openxmlformats.org/drawingml/2006/main">
+            <a:r>
               <a:t>- https://github.com/AnselmoBorges/dbt-moderno-na-pratica/blob/main/roteiros/03-metricflow-local.md</a:t>
             </a:r>
           </a:p>
@@ -3349,6 +3434,11 @@
           </a:p>
           <a:p xmlns:a="http://schemas.openxmlformats.org/drawingml/2006/main">
             <a:r>
+              <a:t>- https://rescuepoint.com.br/assets/img/logo.png</a:t>
+            </a:r>
+          </a:p>
+          <a:p xmlns:a="http://schemas.openxmlformats.org/drawingml/2006/main">
+            <a:r>
               <a:t>- https://github.com/AnselmoBorges/dbt-moderno-na-pratica/blob/main/roteiros/03-metricflow-local.md</a:t>
             </a:r>
           </a:p>
@@ -3514,6 +3604,11 @@
           </a:p>
           <a:p xmlns:a="http://schemas.openxmlformats.org/drawingml/2006/main">
             <a:r>
+              <a:t>- https://rescuepoint.com.br/assets/img/logo.png</a:t>
+            </a:r>
+          </a:p>
+          <a:p xmlns:a="http://schemas.openxmlformats.org/drawingml/2006/main">
+            <a:r>
               <a:t>- https://github.com/AnselmoBorges/dbt-moderno-na-pratica/blob/main/roteiros/03-metricflow-local.md</a:t>
             </a:r>
           </a:p>
@@ -3679,6 +3774,11 @@
           </a:p>
           <a:p xmlns:a="http://schemas.openxmlformats.org/drawingml/2006/main">
             <a:r>
+              <a:t>- https://rescuepoint.com.br/assets/img/logo.png</a:t>
+            </a:r>
+          </a:p>
+          <a:p xmlns:a="http://schemas.openxmlformats.org/drawingml/2006/main">
+            <a:r>
               <a:t>- https://github.com/AnselmoBorges/dbt-moderno-na-pratica/blob/main/roteiros/03-metricflow-local.md</a:t>
             </a:r>
           </a:p>
@@ -3844,6 +3944,11 @@
           </a:p>
           <a:p xmlns:a="http://schemas.openxmlformats.org/drawingml/2006/main">
             <a:r>
+              <a:t>- https://rescuepoint.com.br/assets/img/logo.png</a:t>
+            </a:r>
+          </a:p>
+          <a:p xmlns:a="http://schemas.openxmlformats.org/drawingml/2006/main">
+            <a:r>
               <a:t>- https://github.com/AnselmoBorges/dbt-moderno-na-pratica/blob/main/roteiros/03-metricflow-local.md</a:t>
             </a:r>
           </a:p>
@@ -4010,6 +4115,11 @@
           <a:p xmlns:a="http://schemas.openxmlformats.org/drawingml/2006/main">
             <a:r>
               <a:t>- https://www.getdbt.com/case-studies/inventa</a:t>
+            </a:r>
+          </a:p>
+          <a:p xmlns:a="http://schemas.openxmlformats.org/drawingml/2006/main">
+            <a:r>
+              <a:t>- https://rescuepoint.com.br/assets/img/logo.png</a:t>
             </a:r>
           </a:p>
           <a:p xmlns:a="http://schemas.openxmlformats.org/drawingml/2006/main">
@@ -4131,7 +4241,7 @@
   </p:cSld>
   <p:clrMap bg1="lt1" tx1="dk1" bg2="lt2" tx2="dk2" accent1="accent1" accent2="accent2" accent3="accent3" accent4="accent4" accent5="accent5" accent6="accent6" hlink="hlink" folHlink="folHlink"/>
   <p:sldLayoutIdLst>
-    <p:sldLayoutId xmlns:r="http://schemas.openxmlformats.org/officeDocument/2006/relationships" id="2147483649" r:id="R0a903fdc1e31433d"/>
+    <p:sldLayoutId xmlns:r="http://schemas.openxmlformats.org/officeDocument/2006/relationships" id="2147483649" r:id="R91e6cfeda1a345d8"/>
   </p:sldLayoutIdLst>
   <p:txStyles>
     <p:titleStyle>
@@ -4429,8 +4539,8 @@
   </p:cSld>
   <p:clrMap bg1="lt1" tx1="dk1" bg2="lt2" tx2="dk2" accent1="accent1" accent2="accent2" accent3="accent3" accent4="accent4" accent5="accent5" accent6="accent6" hlink="hlink" folHlink="folHlink"/>
   <p:sldLayoutIdLst>
-    <p:sldLayoutId xmlns:r="http://schemas.openxmlformats.org/officeDocument/2006/relationships" id="2147483651" r:id="R63543122eb054f85"/>
-    <p:sldLayoutId xmlns:r="http://schemas.openxmlformats.org/officeDocument/2006/relationships" id="2147483652" r:id="R86ff41f084b24f8a"/>
+    <p:sldLayoutId xmlns:r="http://schemas.openxmlformats.org/officeDocument/2006/relationships" id="2147483651" r:id="R577b3ce5c215438b"/>
+    <p:sldLayoutId xmlns:r="http://schemas.openxmlformats.org/officeDocument/2006/relationships" id="2147483652" r:id="R842b980205b0448f"/>
   </p:sldLayoutIdLst>
 </p:sldMaster>
 </file>
@@ -4954,14 +5064,14 @@
       </p:grpSpPr>
       <p:pic>
         <p:nvPicPr>
-          <p:cNvPr id="10" name="" descr="Ilustração conceitual autoral da capa: EPISÓDIO 3 — MetricFlow local: métricas como código."/>
+          <p:cNvPr id="13" name="" descr="Ilustração conceitual autoral da capa: EPISÓDIO 3 — MetricFlow local: métricas como código."/>
           <p:cNvPicPr>
             <a:picLocks xmlns:a="http://schemas.openxmlformats.org/drawingml/2006/main" noChangeAspect="1"/>
           </p:cNvPicPr>
           <p:nvPr/>
         </p:nvPicPr>
         <p:blipFill>
-          <a:blip xmlns:r="http://schemas.openxmlformats.org/officeDocument/2006/relationships" xmlns:a="http://schemas.openxmlformats.org/drawingml/2006/main" r:embed="R67f2a711b5cc46ea"/>
+          <a:blip xmlns:r="http://schemas.openxmlformats.org/officeDocument/2006/relationships" xmlns:a="http://schemas.openxmlformats.org/drawingml/2006/main" r:embed="R3ab02444a51545f6"/>
           <a:srcRect xmlns:a="http://schemas.openxmlformats.org/drawingml/2006/main" l="19785" t="0" r="19785" b="0"/>
           <a:stretch xmlns:a="http://schemas.openxmlformats.org/drawingml/2006/main">
             <a:fillRect l="0" t="0" r="0" b="0"/>
@@ -4982,7 +5092,7 @@
           <p:cNvPr id="2" name="cover-text-surface">
             <a:extLst xmlns:a="http://schemas.openxmlformats.org/drawingml/2006/main">
               <a:ext uri="{FF2B5EF4-FFF2-40B4-BE49-F238E27FC236}">
-                <a16:creationId xmlns:a16="http://schemas.microsoft.com/office/drawing/2014/main" id="{1AD9F2BD-6434-4C3A-858F-25285B4D72AC}"/>
+                <a16:creationId xmlns:a16="http://schemas.microsoft.com/office/drawing/2014/main" id="{BD6264A0-7F7F-4C0B-B838-38C7CE6E1AFA}"/>
               </a:ext>
             </a:extLst>
           </p:cNvPr>
@@ -5015,7 +5125,7 @@
           <p:cNvPr id="3" name="cover-divider">
             <a:extLst xmlns:a="http://schemas.openxmlformats.org/drawingml/2006/main">
               <a:ext uri="{FF2B5EF4-FFF2-40B4-BE49-F238E27FC236}">
-                <a16:creationId xmlns:a16="http://schemas.microsoft.com/office/drawing/2014/main" id="{490D8C7F-41D5-4F97-99B5-41674340CC30}"/>
+                <a16:creationId xmlns:a16="http://schemas.microsoft.com/office/drawing/2014/main" id="{F4AE317C-1D6D-463B-89D7-210F275EF49C}"/>
               </a:ext>
             </a:extLst>
           </p:cNvPr>
@@ -5046,7 +5156,7 @@
           <p:cNvPr id="4" name="cover-episode">
             <a:extLst xmlns:a="http://schemas.openxmlformats.org/drawingml/2006/main">
               <a:ext uri="{FF2B5EF4-FFF2-40B4-BE49-F238E27FC236}">
-                <a16:creationId xmlns:a16="http://schemas.microsoft.com/office/drawing/2014/main" id="{C4BE8FC9-B245-4CBF-9F81-24115AABF800}"/>
+                <a16:creationId xmlns:a16="http://schemas.microsoft.com/office/drawing/2014/main" id="{588DD414-E14D-42FF-9407-60D81E72EB19}"/>
               </a:ext>
             </a:extLst>
           </p:cNvPr>
@@ -5094,10 +5204,69 @@
       </p:sp>
       <p:sp>
         <p:nvSpPr>
-          <p:cNvPr id="5" name="cover-title">
-            <a:extLst xmlns:a="http://schemas.openxmlformats.org/drawingml/2006/main">
-              <a:ext uri="{FF2B5EF4-FFF2-40B4-BE49-F238E27FC236}">
-                <a16:creationId xmlns:a16="http://schemas.microsoft.com/office/drawing/2014/main" id="{AA519CEA-B7DE-41B9-B296-AB8AED011F27}"/>
+          <p:cNvPr id="5" name="rescue-point-logo-background">
+            <a:extLst xmlns:a="http://schemas.openxmlformats.org/drawingml/2006/main">
+              <a:ext uri="{FF2B5EF4-FFF2-40B4-BE49-F238E27FC236}">
+                <a16:creationId xmlns:a16="http://schemas.microsoft.com/office/drawing/2014/main" id="{94089301-EFC3-428E-9156-A1A8199C1174}"/>
+              </a:ext>
+            </a:extLst>
+          </p:cNvPr>
+          <p:cNvSpPr>
+            <a:spLocks xmlns:a="http://schemas.openxmlformats.org/drawingml/2006/main" noGrp="1"/>
+          </p:cNvSpPr>
+          <p:nvPr/>
+        </p:nvSpPr>
+        <p:spPr>
+          <a:xfrm xmlns:a="http://schemas.openxmlformats.org/drawingml/2006/main">
+            <a:off x="9772650" y="133350"/>
+            <a:ext cx="1733550" cy="457200"/>
+          </a:xfrm>
+          <a:prstGeom xmlns:a="http://schemas.openxmlformats.org/drawingml/2006/main" prst="roundRect">
+            <a:avLst>
+              <a:gd name="adj" fmla="val 16667"/>
+            </a:avLst>
+          </a:prstGeom>
+          <a:solidFill xmlns:a="http://schemas.openxmlformats.org/drawingml/2006/main">
+            <a:srgbClr val="06142E"/>
+          </a:solidFill>
+          <a:ln xmlns:a="http://schemas.openxmlformats.org/drawingml/2006/main" w="9525">
+            <a:solidFill>
+              <a:srgbClr val="1EC5FF">
+                <a:alpha val="33333"/>
+              </a:srgbClr>
+            </a:solidFill>
+            <a:prstDash val="solid"/>
+          </a:ln>
+        </p:spPr>
+      </p:sp>
+      <p:pic>
+        <p:nvPicPr>
+          <p:cNvPr id="18" name="" descr="Ilustração conceitual autoral da capa: EPISÓDIO 3 — MetricFlow local: métricas como código."/>
+          <p:cNvPicPr>
+            <a:picLocks xmlns:a="http://schemas.openxmlformats.org/drawingml/2006/main" noChangeAspect="1"/>
+          </p:cNvPicPr>
+          <p:nvPr/>
+        </p:nvPicPr>
+        <p:blipFill>
+          <a:blip xmlns:r="http://schemas.openxmlformats.org/officeDocument/2006/relationships" xmlns:a="http://schemas.openxmlformats.org/drawingml/2006/main" r:embed="R1a3787cb93e549b8"/>
+          <a:stretch xmlns:a="http://schemas.openxmlformats.org/drawingml/2006/main"/>
+        </p:blipFill>
+        <p:spPr>
+          <a:xfrm xmlns:a="http://schemas.openxmlformats.org/drawingml/2006/main">
+            <a:off x="9893718" y="209550"/>
+            <a:ext cx="1491414" cy="323850"/>
+          </a:xfrm>
+          <a:prstGeom xmlns:a="http://schemas.openxmlformats.org/drawingml/2006/main" prst="rect">
+            <a:avLst/>
+          </a:prstGeom>
+        </p:spPr>
+      </p:pic>
+      <p:sp>
+        <p:nvSpPr>
+          <p:cNvPr id="7" name="cover-title">
+            <a:extLst xmlns:a="http://schemas.openxmlformats.org/drawingml/2006/main">
+              <a:ext uri="{FF2B5EF4-FFF2-40B4-BE49-F238E27FC236}">
+                <a16:creationId xmlns:a16="http://schemas.microsoft.com/office/drawing/2014/main" id="{307D3014-72EB-41A7-9148-A3EE74791B0E}"/>
               </a:ext>
             </a:extLst>
           </p:cNvPr>
@@ -5145,10 +5314,10 @@
       </p:sp>
       <p:sp>
         <p:nvSpPr>
-          <p:cNvPr id="6" name="cover-subtitle">
-            <a:extLst xmlns:a="http://schemas.openxmlformats.org/drawingml/2006/main">
-              <a:ext uri="{FF2B5EF4-FFF2-40B4-BE49-F238E27FC236}">
-                <a16:creationId xmlns:a16="http://schemas.microsoft.com/office/drawing/2014/main" id="{6A1E423B-CE24-4F5F-AE7A-FD046408A38E}"/>
+          <p:cNvPr id="8" name="cover-subtitle">
+            <a:extLst xmlns:a="http://schemas.openxmlformats.org/drawingml/2006/main">
+              <a:ext uri="{FF2B5EF4-FFF2-40B4-BE49-F238E27FC236}">
+                <a16:creationId xmlns:a16="http://schemas.microsoft.com/office/drawing/2014/main" id="{71982BE9-4FA9-4D5D-B9D7-7FC0EB6D20BC}"/>
               </a:ext>
             </a:extLst>
           </p:cNvPr>
@@ -5196,10 +5365,10 @@
       </p:sp>
       <p:sp>
         <p:nvSpPr>
-          <p:cNvPr id="7" name="cover-accent">
-            <a:extLst xmlns:a="http://schemas.openxmlformats.org/drawingml/2006/main">
-              <a:ext uri="{FF2B5EF4-FFF2-40B4-BE49-F238E27FC236}">
-                <a16:creationId xmlns:a16="http://schemas.microsoft.com/office/drawing/2014/main" id="{3175F452-D016-41FC-96E4-C6A04346A4B4}"/>
+          <p:cNvPr id="9" name="cover-accent">
+            <a:extLst xmlns:a="http://schemas.openxmlformats.org/drawingml/2006/main">
+              <a:ext uri="{FF2B5EF4-FFF2-40B4-BE49-F238E27FC236}">
+                <a16:creationId xmlns:a16="http://schemas.microsoft.com/office/drawing/2014/main" id="{A53AB770-076C-4F60-94F3-BD09C5732298}"/>
               </a:ext>
             </a:extLst>
           </p:cNvPr>
@@ -5227,10 +5396,10 @@
       </p:sp>
       <p:sp>
         <p:nvSpPr>
-          <p:cNvPr id="8" name="cover-meta">
-            <a:extLst xmlns:a="http://schemas.openxmlformats.org/drawingml/2006/main">
-              <a:ext uri="{FF2B5EF4-FFF2-40B4-BE49-F238E27FC236}">
-                <a16:creationId xmlns:a16="http://schemas.microsoft.com/office/drawing/2014/main" id="{CB94BF37-1C14-4049-85AF-FC456E32A5FC}"/>
+          <p:cNvPr id="10" name="cover-meta">
+            <a:extLst xmlns:a="http://schemas.openxmlformats.org/drawingml/2006/main">
+              <a:ext uri="{FF2B5EF4-FFF2-40B4-BE49-F238E27FC236}">
+                <a16:creationId xmlns:a16="http://schemas.microsoft.com/office/drawing/2014/main" id="{3C75D1BF-CFD7-4952-BF34-89BA35561568}"/>
               </a:ext>
             </a:extLst>
           </p:cNvPr>
@@ -5283,7 +5452,7 @@
     </p:spTree>
     <p:extLst>
       <p:ext uri="{BB962C8B-B14F-4D97-AF65-F5344CB8AC3E}">
-        <p14:creationId xmlns:p14="http://schemas.microsoft.com/office/powerpoint/2010/main" val="623659799"/>
+        <p14:creationId xmlns:p14="http://schemas.microsoft.com/office/powerpoint/2010/main" val="1608925615"/>
       </p:ext>
     </p:extLst>
   </p:cSld>
@@ -5319,10 +5488,10 @@
       </p:grpSpPr>
       <p:sp>
         <p:nvSpPr>
-          <p:cNvPr id="17" name="slide-title">
-            <a:extLst xmlns:a="http://schemas.openxmlformats.org/drawingml/2006/main">
-              <a:ext uri="{FF2B5EF4-FFF2-40B4-BE49-F238E27FC236}">
-                <a16:creationId xmlns:a16="http://schemas.microsoft.com/office/drawing/2014/main" id="{4D1BAEB8-D9D2-4171-AE29-CED64D35AA1C}"/>
+          <p:cNvPr id="19" name="slide-title">
+            <a:extLst xmlns:a="http://schemas.openxmlformats.org/drawingml/2006/main">
+              <a:ext uri="{FF2B5EF4-FFF2-40B4-BE49-F238E27FC236}">
+                <a16:creationId xmlns:a16="http://schemas.microsoft.com/office/drawing/2014/main" id="{16CFE7B0-B9BB-42B0-BE0A-B30CED49F069}"/>
               </a:ext>
             </a:extLst>
           </p:cNvPr>
@@ -5373,7 +5542,7 @@
           <p:cNvPr id="2" name="step-num-1">
             <a:extLst xmlns:a="http://schemas.openxmlformats.org/drawingml/2006/main">
               <a:ext uri="{FF2B5EF4-FFF2-40B4-BE49-F238E27FC236}">
-                <a16:creationId xmlns:a16="http://schemas.microsoft.com/office/drawing/2014/main" id="{C9297246-F91C-4D20-A086-CCEB8D068CAA}"/>
+                <a16:creationId xmlns:a16="http://schemas.microsoft.com/office/drawing/2014/main" id="{A1306697-4059-4276-9785-1441726CFC76}"/>
               </a:ext>
             </a:extLst>
           </p:cNvPr>
@@ -5424,7 +5593,7 @@
           <p:cNvPr id="3" name="step-label-1">
             <a:extLst xmlns:a="http://schemas.openxmlformats.org/drawingml/2006/main">
               <a:ext uri="{FF2B5EF4-FFF2-40B4-BE49-F238E27FC236}">
-                <a16:creationId xmlns:a16="http://schemas.microsoft.com/office/drawing/2014/main" id="{B6458D3E-1625-4412-A9FB-D2433985D7CC}"/>
+                <a16:creationId xmlns:a16="http://schemas.microsoft.com/office/drawing/2014/main" id="{F6A98717-1B30-4F61-820F-68F68EA6C720}"/>
               </a:ext>
             </a:extLst>
           </p:cNvPr>
@@ -5475,7 +5644,7 @@
           <p:cNvPr id="4" name="step-line-1">
             <a:extLst xmlns:a="http://schemas.openxmlformats.org/drawingml/2006/main">
               <a:ext uri="{FF2B5EF4-FFF2-40B4-BE49-F238E27FC236}">
-                <a16:creationId xmlns:a16="http://schemas.microsoft.com/office/drawing/2014/main" id="{48E6FE6B-742C-433C-BECB-FBE861AD031B}"/>
+                <a16:creationId xmlns:a16="http://schemas.microsoft.com/office/drawing/2014/main" id="{35CE899D-AB9F-441F-9BF6-8CEFBD947D01}"/>
               </a:ext>
             </a:extLst>
           </p:cNvPr>
@@ -5506,7 +5675,7 @@
           <p:cNvPr id="5" name="step-num-2">
             <a:extLst xmlns:a="http://schemas.openxmlformats.org/drawingml/2006/main">
               <a:ext uri="{FF2B5EF4-FFF2-40B4-BE49-F238E27FC236}">
-                <a16:creationId xmlns:a16="http://schemas.microsoft.com/office/drawing/2014/main" id="{E15E67F5-DD24-4E77-A313-E65D08B3A42F}"/>
+                <a16:creationId xmlns:a16="http://schemas.microsoft.com/office/drawing/2014/main" id="{BA9C5779-3FAB-46B8-A598-BCA4E24B8907}"/>
               </a:ext>
             </a:extLst>
           </p:cNvPr>
@@ -5557,7 +5726,7 @@
           <p:cNvPr id="6" name="step-label-2">
             <a:extLst xmlns:a="http://schemas.openxmlformats.org/drawingml/2006/main">
               <a:ext uri="{FF2B5EF4-FFF2-40B4-BE49-F238E27FC236}">
-                <a16:creationId xmlns:a16="http://schemas.microsoft.com/office/drawing/2014/main" id="{46D04FD2-7D16-4F35-A1C6-5B57663C7AB4}"/>
+                <a16:creationId xmlns:a16="http://schemas.microsoft.com/office/drawing/2014/main" id="{BFB03C3B-1377-481B-BEF7-B8AD101002CE}"/>
               </a:ext>
             </a:extLst>
           </p:cNvPr>
@@ -5608,7 +5777,7 @@
           <p:cNvPr id="7" name="step-line-2">
             <a:extLst xmlns:a="http://schemas.openxmlformats.org/drawingml/2006/main">
               <a:ext uri="{FF2B5EF4-FFF2-40B4-BE49-F238E27FC236}">
-                <a16:creationId xmlns:a16="http://schemas.microsoft.com/office/drawing/2014/main" id="{6381FA9E-5ABF-4E73-B6EC-A1BC73E9E821}"/>
+                <a16:creationId xmlns:a16="http://schemas.microsoft.com/office/drawing/2014/main" id="{893CC305-9C0F-4680-9198-DCA6A132D0CE}"/>
               </a:ext>
             </a:extLst>
           </p:cNvPr>
@@ -5639,7 +5808,7 @@
           <p:cNvPr id="8" name="step-num-3">
             <a:extLst xmlns:a="http://schemas.openxmlformats.org/drawingml/2006/main">
               <a:ext uri="{FF2B5EF4-FFF2-40B4-BE49-F238E27FC236}">
-                <a16:creationId xmlns:a16="http://schemas.microsoft.com/office/drawing/2014/main" id="{7281EAA4-8CD0-43BE-9D9C-5B03804646C6}"/>
+                <a16:creationId xmlns:a16="http://schemas.microsoft.com/office/drawing/2014/main" id="{3A812F66-FA88-4CC7-ADCE-040037DFC000}"/>
               </a:ext>
             </a:extLst>
           </p:cNvPr>
@@ -5690,7 +5859,7 @@
           <p:cNvPr id="9" name="step-label-3">
             <a:extLst xmlns:a="http://schemas.openxmlformats.org/drawingml/2006/main">
               <a:ext uri="{FF2B5EF4-FFF2-40B4-BE49-F238E27FC236}">
-                <a16:creationId xmlns:a16="http://schemas.microsoft.com/office/drawing/2014/main" id="{3B1FB2AF-7EC4-48E2-B1F6-7CFB02E95CE4}"/>
+                <a16:creationId xmlns:a16="http://schemas.microsoft.com/office/drawing/2014/main" id="{FC9E3926-4B18-4B52-BAC1-F577C77B9418}"/>
               </a:ext>
             </a:extLst>
           </p:cNvPr>
@@ -5741,7 +5910,7 @@
           <p:cNvPr id="10" name="step-line-3">
             <a:extLst xmlns:a="http://schemas.openxmlformats.org/drawingml/2006/main">
               <a:ext uri="{FF2B5EF4-FFF2-40B4-BE49-F238E27FC236}">
-                <a16:creationId xmlns:a16="http://schemas.microsoft.com/office/drawing/2014/main" id="{E1F0949D-889D-4017-82B9-8D8C5272ED2D}"/>
+                <a16:creationId xmlns:a16="http://schemas.microsoft.com/office/drawing/2014/main" id="{F0D5B5AD-A515-4A71-B400-353EE9294C38}"/>
               </a:ext>
             </a:extLst>
           </p:cNvPr>
@@ -5772,7 +5941,7 @@
           <p:cNvPr id="11" name="step-num-4">
             <a:extLst xmlns:a="http://schemas.openxmlformats.org/drawingml/2006/main">
               <a:ext uri="{FF2B5EF4-FFF2-40B4-BE49-F238E27FC236}">
-                <a16:creationId xmlns:a16="http://schemas.microsoft.com/office/drawing/2014/main" id="{E9CF2E91-9FD9-4828-93FD-178F5E18EEF8}"/>
+                <a16:creationId xmlns:a16="http://schemas.microsoft.com/office/drawing/2014/main" id="{36BE57E4-68D4-4396-A02A-9EF14AB11C64}"/>
               </a:ext>
             </a:extLst>
           </p:cNvPr>
@@ -5823,7 +5992,7 @@
           <p:cNvPr id="12" name="step-label-4">
             <a:extLst xmlns:a="http://schemas.openxmlformats.org/drawingml/2006/main">
               <a:ext uri="{FF2B5EF4-FFF2-40B4-BE49-F238E27FC236}">
-                <a16:creationId xmlns:a16="http://schemas.microsoft.com/office/drawing/2014/main" id="{DEEE884B-A978-4F10-AF9A-C92D8B56B4F0}"/>
+                <a16:creationId xmlns:a16="http://schemas.microsoft.com/office/drawing/2014/main" id="{3B9CE732-1CED-4BD0-AE99-8879FAA1A019}"/>
               </a:ext>
             </a:extLst>
           </p:cNvPr>
@@ -5874,7 +6043,7 @@
           <p:cNvPr id="13" name="eyebrow">
             <a:extLst xmlns:a="http://schemas.openxmlformats.org/drawingml/2006/main">
               <a:ext uri="{FF2B5EF4-FFF2-40B4-BE49-F238E27FC236}">
-                <a16:creationId xmlns:a16="http://schemas.microsoft.com/office/drawing/2014/main" id="{057F8844-C547-4519-84FC-76B46247EFEC}"/>
+                <a16:creationId xmlns:a16="http://schemas.microsoft.com/office/drawing/2014/main" id="{642FD753-171C-4453-B4F9-7A2FEB87F5B2}"/>
               </a:ext>
             </a:extLst>
           </p:cNvPr>
@@ -5922,10 +6091,69 @@
       </p:sp>
       <p:sp>
         <p:nvSpPr>
-          <p:cNvPr id="14" name="footer-rule">
-            <a:extLst xmlns:a="http://schemas.openxmlformats.org/drawingml/2006/main">
-              <a:ext uri="{FF2B5EF4-FFF2-40B4-BE49-F238E27FC236}">
-                <a16:creationId xmlns:a16="http://schemas.microsoft.com/office/drawing/2014/main" id="{FAE7E6DC-7058-4A41-B683-B85003E9F4E6}"/>
+          <p:cNvPr id="14" name="rescue-point-logo-background">
+            <a:extLst xmlns:a="http://schemas.openxmlformats.org/drawingml/2006/main">
+              <a:ext uri="{FF2B5EF4-FFF2-40B4-BE49-F238E27FC236}">
+                <a16:creationId xmlns:a16="http://schemas.microsoft.com/office/drawing/2014/main" id="{A4F2682C-26AB-4339-B2FF-2828BF60F475}"/>
+              </a:ext>
+            </a:extLst>
+          </p:cNvPr>
+          <p:cNvSpPr>
+            <a:spLocks xmlns:a="http://schemas.openxmlformats.org/drawingml/2006/main" noGrp="1"/>
+          </p:cNvSpPr>
+          <p:nvPr/>
+        </p:nvSpPr>
+        <p:spPr>
+          <a:xfrm xmlns:a="http://schemas.openxmlformats.org/drawingml/2006/main">
+            <a:off x="9772650" y="133350"/>
+            <a:ext cx="1733550" cy="457200"/>
+          </a:xfrm>
+          <a:prstGeom xmlns:a="http://schemas.openxmlformats.org/drawingml/2006/main" prst="roundRect">
+            <a:avLst>
+              <a:gd name="adj" fmla="val 16667"/>
+            </a:avLst>
+          </a:prstGeom>
+          <a:solidFill xmlns:a="http://schemas.openxmlformats.org/drawingml/2006/main">
+            <a:srgbClr val="06142E"/>
+          </a:solidFill>
+          <a:ln xmlns:a="http://schemas.openxmlformats.org/drawingml/2006/main" w="9525">
+            <a:solidFill>
+              <a:srgbClr val="1EC5FF">
+                <a:alpha val="33333"/>
+              </a:srgbClr>
+            </a:solidFill>
+            <a:prstDash val="solid"/>
+          </a:ln>
+        </p:spPr>
+      </p:sp>
+      <p:pic>
+        <p:nvPicPr>
+          <p:cNvPr id="35" name="" descr="Figura oficial da documentação dbt usada para explicar: Tempo também é contrato — 01."/>
+          <p:cNvPicPr>
+            <a:picLocks xmlns:a="http://schemas.openxmlformats.org/drawingml/2006/main" noChangeAspect="1"/>
+          </p:cNvPicPr>
+          <p:nvPr/>
+        </p:nvPicPr>
+        <p:blipFill>
+          <a:blip xmlns:r="http://schemas.openxmlformats.org/officeDocument/2006/relationships" xmlns:a="http://schemas.openxmlformats.org/drawingml/2006/main" r:embed="R216ee26e9f124c98"/>
+          <a:stretch xmlns:a="http://schemas.openxmlformats.org/drawingml/2006/main"/>
+        </p:blipFill>
+        <p:spPr>
+          <a:xfrm xmlns:a="http://schemas.openxmlformats.org/drawingml/2006/main">
+            <a:off x="9893718" y="209550"/>
+            <a:ext cx="1491414" cy="323850"/>
+          </a:xfrm>
+          <a:prstGeom xmlns:a="http://schemas.openxmlformats.org/drawingml/2006/main" prst="rect">
+            <a:avLst/>
+          </a:prstGeom>
+        </p:spPr>
+      </p:pic>
+      <p:sp>
+        <p:nvSpPr>
+          <p:cNvPr id="16" name="footer-rule">
+            <a:extLst xmlns:a="http://schemas.openxmlformats.org/drawingml/2006/main">
+              <a:ext uri="{FF2B5EF4-FFF2-40B4-BE49-F238E27FC236}">
+                <a16:creationId xmlns:a16="http://schemas.microsoft.com/office/drawing/2014/main" id="{D7D044CB-8633-4D5E-9D29-F04F3881DB17}"/>
               </a:ext>
             </a:extLst>
           </p:cNvPr>
@@ -5955,10 +6183,10 @@
       </p:sp>
       <p:sp>
         <p:nvSpPr>
-          <p:cNvPr id="15" name="footer">
-            <a:extLst xmlns:a="http://schemas.openxmlformats.org/drawingml/2006/main">
-              <a:ext uri="{FF2B5EF4-FFF2-40B4-BE49-F238E27FC236}">
-                <a16:creationId xmlns:a16="http://schemas.microsoft.com/office/drawing/2014/main" id="{68E727C7-994A-4383-AD87-2CA031675BA1}"/>
+          <p:cNvPr id="17" name="footer">
+            <a:extLst xmlns:a="http://schemas.openxmlformats.org/drawingml/2006/main">
+              <a:ext uri="{FF2B5EF4-FFF2-40B4-BE49-F238E27FC236}">
+                <a16:creationId xmlns:a16="http://schemas.microsoft.com/office/drawing/2014/main" id="{1A004974-9CE8-4FFA-97D4-22DAFDE1B541}"/>
               </a:ext>
             </a:extLst>
           </p:cNvPr>
@@ -6010,10 +6238,10 @@
       </p:sp>
       <p:sp>
         <p:nvSpPr>
-          <p:cNvPr id="16" name="page-number">
-            <a:extLst xmlns:a="http://schemas.openxmlformats.org/drawingml/2006/main">
-              <a:ext uri="{FF2B5EF4-FFF2-40B4-BE49-F238E27FC236}">
-                <a16:creationId xmlns:a16="http://schemas.microsoft.com/office/drawing/2014/main" id="{C6B35054-D18B-4F43-9D10-5C0E8A28AEAD}"/>
+          <p:cNvPr id="18" name="page-number">
+            <a:extLst xmlns:a="http://schemas.openxmlformats.org/drawingml/2006/main">
+              <a:ext uri="{FF2B5EF4-FFF2-40B4-BE49-F238E27FC236}">
+                <a16:creationId xmlns:a16="http://schemas.microsoft.com/office/drawing/2014/main" id="{4C82F19C-EF20-4D08-B911-C9EDE1028589}"/>
               </a:ext>
             </a:extLst>
           </p:cNvPr>
@@ -6066,7 +6294,7 @@
     </p:spTree>
     <p:extLst>
       <p:ext uri="{BB962C8B-B14F-4D97-AF65-F5344CB8AC3E}">
-        <p14:creationId xmlns:p14="http://schemas.microsoft.com/office/powerpoint/2010/main" val="879929287"/>
+        <p14:creationId xmlns:p14="http://schemas.microsoft.com/office/powerpoint/2010/main" val="317860302"/>
       </p:ext>
     </p:extLst>
   </p:cSld>
@@ -6102,10 +6330,10 @@
       </p:grpSpPr>
       <p:sp>
         <p:nvSpPr>
-          <p:cNvPr id="11" name="slide-title">
-            <a:extLst xmlns:a="http://schemas.openxmlformats.org/drawingml/2006/main">
-              <a:ext uri="{FF2B5EF4-FFF2-40B4-BE49-F238E27FC236}">
-                <a16:creationId xmlns:a16="http://schemas.microsoft.com/office/drawing/2014/main" id="{7A0D3FDD-A8C2-4110-9AE6-B9BFCF0F7F4A}"/>
+          <p:cNvPr id="13" name="slide-title">
+            <a:extLst xmlns:a="http://schemas.openxmlformats.org/drawingml/2006/main">
+              <a:ext uri="{FF2B5EF4-FFF2-40B4-BE49-F238E27FC236}">
+                <a16:creationId xmlns:a16="http://schemas.microsoft.com/office/drawing/2014/main" id="{9C0F981E-9CD7-463A-B012-46A3032914A7}"/>
               </a:ext>
             </a:extLst>
           </p:cNvPr>
@@ -6156,7 +6384,7 @@
           <p:cNvPr id="2" name="slide-subtitle">
             <a:extLst xmlns:a="http://schemas.openxmlformats.org/drawingml/2006/main">
               <a:ext uri="{FF2B5EF4-FFF2-40B4-BE49-F238E27FC236}">
-                <a16:creationId xmlns:a16="http://schemas.microsoft.com/office/drawing/2014/main" id="{08F17726-5881-4EA2-B9D4-04BB270DD11A}"/>
+                <a16:creationId xmlns:a16="http://schemas.microsoft.com/office/drawing/2014/main" id="{77EB15C2-7254-4588-9BB8-604F2DC7D971}"/>
               </a:ext>
             </a:extLst>
           </p:cNvPr>
@@ -6207,7 +6435,7 @@
           <p:cNvPr id="3" name="bullets">
             <a:extLst xmlns:a="http://schemas.openxmlformats.org/drawingml/2006/main">
               <a:ext uri="{FF2B5EF4-FFF2-40B4-BE49-F238E27FC236}">
-                <a16:creationId xmlns:a16="http://schemas.microsoft.com/office/drawing/2014/main" id="{0D9D7883-38BC-465C-A1DA-15DD8EEE2D53}"/>
+                <a16:creationId xmlns:a16="http://schemas.microsoft.com/office/drawing/2014/main" id="{CC6F1A00-A0E5-4F2E-B169-A418AA151574}"/>
               </a:ext>
             </a:extLst>
           </p:cNvPr>
@@ -6294,7 +6522,7 @@
           <p:cNvPr id="4" name="ambient-glow">
             <a:extLst xmlns:a="http://schemas.openxmlformats.org/drawingml/2006/main">
               <a:ext uri="{FF2B5EF4-FFF2-40B4-BE49-F238E27FC236}">
-                <a16:creationId xmlns:a16="http://schemas.microsoft.com/office/drawing/2014/main" id="{6FE94218-F612-406D-B83B-1DF919D08D93}"/>
+                <a16:creationId xmlns:a16="http://schemas.microsoft.com/office/drawing/2014/main" id="{E19ACB3A-9C9C-4FD4-9971-B04083F5ED88}"/>
               </a:ext>
             </a:extLst>
           </p:cNvPr>
@@ -6331,7 +6559,7 @@
           <p:cNvPr id="5" name="ambient-core">
             <a:extLst xmlns:a="http://schemas.openxmlformats.org/drawingml/2006/main">
               <a:ext uri="{FF2B5EF4-FFF2-40B4-BE49-F238E27FC236}">
-                <a16:creationId xmlns:a16="http://schemas.microsoft.com/office/drawing/2014/main" id="{122DE5B6-4364-4706-8703-7AA614661D0F}"/>
+                <a16:creationId xmlns:a16="http://schemas.microsoft.com/office/drawing/2014/main" id="{39CA6BFE-4BE6-4B1B-998F-ABDC65693D99}"/>
               </a:ext>
             </a:extLst>
           </p:cNvPr>
@@ -6368,7 +6596,7 @@
           <p:cNvPr id="6" name="section-number">
             <a:extLst xmlns:a="http://schemas.openxmlformats.org/drawingml/2006/main">
               <a:ext uri="{FF2B5EF4-FFF2-40B4-BE49-F238E27FC236}">
-                <a16:creationId xmlns:a16="http://schemas.microsoft.com/office/drawing/2014/main" id="{13B0C487-4885-40B7-8565-8A5BCD90E0E1}"/>
+                <a16:creationId xmlns:a16="http://schemas.microsoft.com/office/drawing/2014/main" id="{4906DFCE-BCC9-4470-A569-091F189C9140}"/>
               </a:ext>
             </a:extLst>
           </p:cNvPr>
@@ -6419,7 +6647,7 @@
           <p:cNvPr id="7" name="eyebrow">
             <a:extLst xmlns:a="http://schemas.openxmlformats.org/drawingml/2006/main">
               <a:ext uri="{FF2B5EF4-FFF2-40B4-BE49-F238E27FC236}">
-                <a16:creationId xmlns:a16="http://schemas.microsoft.com/office/drawing/2014/main" id="{6B9F75C5-3C2E-4353-8731-67F204E1D649}"/>
+                <a16:creationId xmlns:a16="http://schemas.microsoft.com/office/drawing/2014/main" id="{CAD79B5A-DB3C-4756-B8A4-8746D732A531}"/>
               </a:ext>
             </a:extLst>
           </p:cNvPr>
@@ -6467,10 +6695,69 @@
       </p:sp>
       <p:sp>
         <p:nvSpPr>
-          <p:cNvPr id="8" name="footer-rule">
-            <a:extLst xmlns:a="http://schemas.openxmlformats.org/drawingml/2006/main">
-              <a:ext uri="{FF2B5EF4-FFF2-40B4-BE49-F238E27FC236}">
-                <a16:creationId xmlns:a16="http://schemas.microsoft.com/office/drawing/2014/main" id="{ED34D801-6F0C-45FD-A6BA-85C1F2DCAEBA}"/>
+          <p:cNvPr id="8" name="rescue-point-logo-background">
+            <a:extLst xmlns:a="http://schemas.openxmlformats.org/drawingml/2006/main">
+              <a:ext uri="{FF2B5EF4-FFF2-40B4-BE49-F238E27FC236}">
+                <a16:creationId xmlns:a16="http://schemas.microsoft.com/office/drawing/2014/main" id="{D7163D15-773C-4CD4-82DC-A5F067725832}"/>
+              </a:ext>
+            </a:extLst>
+          </p:cNvPr>
+          <p:cNvSpPr>
+            <a:spLocks xmlns:a="http://schemas.openxmlformats.org/drawingml/2006/main" noGrp="1"/>
+          </p:cNvSpPr>
+          <p:nvPr/>
+        </p:nvSpPr>
+        <p:spPr>
+          <a:xfrm xmlns:a="http://schemas.openxmlformats.org/drawingml/2006/main">
+            <a:off x="9772650" y="133350"/>
+            <a:ext cx="1733550" cy="457200"/>
+          </a:xfrm>
+          <a:prstGeom xmlns:a="http://schemas.openxmlformats.org/drawingml/2006/main" prst="roundRect">
+            <a:avLst>
+              <a:gd name="adj" fmla="val 16667"/>
+            </a:avLst>
+          </a:prstGeom>
+          <a:solidFill xmlns:a="http://schemas.openxmlformats.org/drawingml/2006/main">
+            <a:srgbClr val="06142E"/>
+          </a:solidFill>
+          <a:ln xmlns:a="http://schemas.openxmlformats.org/drawingml/2006/main" w="9525">
+            <a:solidFill>
+              <a:srgbClr val="1EC5FF">
+                <a:alpha val="33333"/>
+              </a:srgbClr>
+            </a:solidFill>
+            <a:prstDash val="solid"/>
+          </a:ln>
+        </p:spPr>
+      </p:sp>
+      <p:pic>
+        <p:nvPicPr>
+          <p:cNvPr id="23" name="" descr="Figura oficial da documentação dbt usada para explicar: Métricas simples vivem perto do dado — Contagem, soma e receita entregue reutilizam colunas já testadas.."/>
+          <p:cNvPicPr>
+            <a:picLocks xmlns:a="http://schemas.openxmlformats.org/drawingml/2006/main" noChangeAspect="1"/>
+          </p:cNvPicPr>
+          <p:nvPr/>
+        </p:nvPicPr>
+        <p:blipFill>
+          <a:blip xmlns:r="http://schemas.openxmlformats.org/officeDocument/2006/relationships" xmlns:a="http://schemas.openxmlformats.org/drawingml/2006/main" r:embed="R1d2b50f2e0a2472b"/>
+          <a:stretch xmlns:a="http://schemas.openxmlformats.org/drawingml/2006/main"/>
+        </p:blipFill>
+        <p:spPr>
+          <a:xfrm xmlns:a="http://schemas.openxmlformats.org/drawingml/2006/main">
+            <a:off x="9893718" y="209550"/>
+            <a:ext cx="1491414" cy="323850"/>
+          </a:xfrm>
+          <a:prstGeom xmlns:a="http://schemas.openxmlformats.org/drawingml/2006/main" prst="rect">
+            <a:avLst/>
+          </a:prstGeom>
+        </p:spPr>
+      </p:pic>
+      <p:sp>
+        <p:nvSpPr>
+          <p:cNvPr id="10" name="footer-rule">
+            <a:extLst xmlns:a="http://schemas.openxmlformats.org/drawingml/2006/main">
+              <a:ext uri="{FF2B5EF4-FFF2-40B4-BE49-F238E27FC236}">
+                <a16:creationId xmlns:a16="http://schemas.microsoft.com/office/drawing/2014/main" id="{F9A84C7E-1609-411B-B48D-D970CBF4006F}"/>
               </a:ext>
             </a:extLst>
           </p:cNvPr>
@@ -6500,10 +6787,10 @@
       </p:sp>
       <p:sp>
         <p:nvSpPr>
-          <p:cNvPr id="9" name="footer">
-            <a:extLst xmlns:a="http://schemas.openxmlformats.org/drawingml/2006/main">
-              <a:ext uri="{FF2B5EF4-FFF2-40B4-BE49-F238E27FC236}">
-                <a16:creationId xmlns:a16="http://schemas.microsoft.com/office/drawing/2014/main" id="{3784D6B2-EE8B-48B4-891F-1841EE4EDF8D}"/>
+          <p:cNvPr id="11" name="footer">
+            <a:extLst xmlns:a="http://schemas.openxmlformats.org/drawingml/2006/main">
+              <a:ext uri="{FF2B5EF4-FFF2-40B4-BE49-F238E27FC236}">
+                <a16:creationId xmlns:a16="http://schemas.microsoft.com/office/drawing/2014/main" id="{C44AFC84-065D-4ACD-99BE-D6CB61BC8C33}"/>
               </a:ext>
             </a:extLst>
           </p:cNvPr>
@@ -6555,10 +6842,10 @@
       </p:sp>
       <p:sp>
         <p:nvSpPr>
-          <p:cNvPr id="10" name="page-number">
-            <a:extLst xmlns:a="http://schemas.openxmlformats.org/drawingml/2006/main">
-              <a:ext uri="{FF2B5EF4-FFF2-40B4-BE49-F238E27FC236}">
-                <a16:creationId xmlns:a16="http://schemas.microsoft.com/office/drawing/2014/main" id="{4EC31D13-D344-4E20-9A44-E28594A0188C}"/>
+          <p:cNvPr id="12" name="page-number">
+            <a:extLst xmlns:a="http://schemas.openxmlformats.org/drawingml/2006/main">
+              <a:ext uri="{FF2B5EF4-FFF2-40B4-BE49-F238E27FC236}">
+                <a16:creationId xmlns:a16="http://schemas.microsoft.com/office/drawing/2014/main" id="{58903B66-B2C2-4B3A-AF30-F5E37AFAC0F3}"/>
               </a:ext>
             </a:extLst>
           </p:cNvPr>
@@ -6611,7 +6898,7 @@
     </p:spTree>
     <p:extLst>
       <p:ext uri="{BB962C8B-B14F-4D97-AF65-F5344CB8AC3E}">
-        <p14:creationId xmlns:p14="http://schemas.microsoft.com/office/powerpoint/2010/main" val="823412503"/>
+        <p14:creationId xmlns:p14="http://schemas.microsoft.com/office/powerpoint/2010/main" val="149456428"/>
       </p:ext>
     </p:extLst>
   </p:cSld>
@@ -6639,10 +6926,10 @@
       </p:grpSpPr>
       <p:sp>
         <p:nvSpPr>
-          <p:cNvPr id="9" name="slide-title">
-            <a:extLst xmlns:a="http://schemas.openxmlformats.org/drawingml/2006/main">
-              <a:ext uri="{FF2B5EF4-FFF2-40B4-BE49-F238E27FC236}">
-                <a16:creationId xmlns:a16="http://schemas.microsoft.com/office/drawing/2014/main" id="{52463B8E-39A9-4598-8F6A-5256C930342E}"/>
+          <p:cNvPr id="11" name="slide-title">
+            <a:extLst xmlns:a="http://schemas.openxmlformats.org/drawingml/2006/main">
+              <a:ext uri="{FF2B5EF4-FFF2-40B4-BE49-F238E27FC236}">
+                <a16:creationId xmlns:a16="http://schemas.microsoft.com/office/drawing/2014/main" id="{EDF09F65-F666-4BED-B19D-71AF870F89BA}"/>
               </a:ext>
             </a:extLst>
           </p:cNvPr>
@@ -6693,7 +6980,7 @@
           <p:cNvPr id="2" name="metric-primary">
             <a:extLst xmlns:a="http://schemas.openxmlformats.org/drawingml/2006/main">
               <a:ext uri="{FF2B5EF4-FFF2-40B4-BE49-F238E27FC236}">
-                <a16:creationId xmlns:a16="http://schemas.microsoft.com/office/drawing/2014/main" id="{C0524591-2A5B-4E9C-BF0B-71191FE13565}"/>
+                <a16:creationId xmlns:a16="http://schemas.microsoft.com/office/drawing/2014/main" id="{4CAFC622-4536-4088-A7E4-1F0956584FA5}"/>
               </a:ext>
             </a:extLst>
           </p:cNvPr>
@@ -6744,7 +7031,7 @@
           <p:cNvPr id="3" name="metric-inputs">
             <a:extLst xmlns:a="http://schemas.openxmlformats.org/drawingml/2006/main">
               <a:ext uri="{FF2B5EF4-FFF2-40B4-BE49-F238E27FC236}">
-                <a16:creationId xmlns:a16="http://schemas.microsoft.com/office/drawing/2014/main" id="{B3A15207-5637-42C5-AADF-BC4D3AB05D1C}"/>
+                <a16:creationId xmlns:a16="http://schemas.microsoft.com/office/drawing/2014/main" id="{0ABC9507-D003-446A-B86C-3F813D653EC3}"/>
               </a:ext>
             </a:extLst>
           </p:cNvPr>
@@ -6795,7 +7082,7 @@
           <p:cNvPr id="4" name="metric-arrow">
             <a:extLst xmlns:a="http://schemas.openxmlformats.org/drawingml/2006/main">
               <a:ext uri="{FF2B5EF4-FFF2-40B4-BE49-F238E27FC236}">
-                <a16:creationId xmlns:a16="http://schemas.microsoft.com/office/drawing/2014/main" id="{AF1364D0-B9B5-4A9D-8C51-B697194780B6}"/>
+                <a16:creationId xmlns:a16="http://schemas.microsoft.com/office/drawing/2014/main" id="{55133FA4-0285-4590-AE50-1714D8990297}"/>
               </a:ext>
             </a:extLst>
           </p:cNvPr>
@@ -6826,7 +7113,7 @@
           <p:cNvPr id="5" name="eyebrow">
             <a:extLst xmlns:a="http://schemas.openxmlformats.org/drawingml/2006/main">
               <a:ext uri="{FF2B5EF4-FFF2-40B4-BE49-F238E27FC236}">
-                <a16:creationId xmlns:a16="http://schemas.microsoft.com/office/drawing/2014/main" id="{D0D30943-1803-4A56-8D2C-88761F90CF93}"/>
+                <a16:creationId xmlns:a16="http://schemas.microsoft.com/office/drawing/2014/main" id="{D2DE2D8C-393F-4DEF-91E0-7E4A93C988AC}"/>
               </a:ext>
             </a:extLst>
           </p:cNvPr>
@@ -6874,10 +7161,69 @@
       </p:sp>
       <p:sp>
         <p:nvSpPr>
-          <p:cNvPr id="6" name="footer-rule">
-            <a:extLst xmlns:a="http://schemas.openxmlformats.org/drawingml/2006/main">
-              <a:ext uri="{FF2B5EF4-FFF2-40B4-BE49-F238E27FC236}">
-                <a16:creationId xmlns:a16="http://schemas.microsoft.com/office/drawing/2014/main" id="{35640186-23CB-4522-8CC1-7E1B47B418C9}"/>
+          <p:cNvPr id="6" name="rescue-point-logo-background">
+            <a:extLst xmlns:a="http://schemas.openxmlformats.org/drawingml/2006/main">
+              <a:ext uri="{FF2B5EF4-FFF2-40B4-BE49-F238E27FC236}">
+                <a16:creationId xmlns:a16="http://schemas.microsoft.com/office/drawing/2014/main" id="{1F3BC4AC-3C04-4144-8ED0-E1A2E211AD72}"/>
+              </a:ext>
+            </a:extLst>
+          </p:cNvPr>
+          <p:cNvSpPr>
+            <a:spLocks xmlns:a="http://schemas.openxmlformats.org/drawingml/2006/main" noGrp="1"/>
+          </p:cNvSpPr>
+          <p:nvPr/>
+        </p:nvSpPr>
+        <p:spPr>
+          <a:xfrm xmlns:a="http://schemas.openxmlformats.org/drawingml/2006/main">
+            <a:off x="9772650" y="133350"/>
+            <a:ext cx="1733550" cy="457200"/>
+          </a:xfrm>
+          <a:prstGeom xmlns:a="http://schemas.openxmlformats.org/drawingml/2006/main" prst="roundRect">
+            <a:avLst>
+              <a:gd name="adj" fmla="val 16667"/>
+            </a:avLst>
+          </a:prstGeom>
+          <a:solidFill xmlns:a="http://schemas.openxmlformats.org/drawingml/2006/main">
+            <a:srgbClr val="06142E"/>
+          </a:solidFill>
+          <a:ln xmlns:a="http://schemas.openxmlformats.org/drawingml/2006/main" w="9525">
+            <a:solidFill>
+              <a:srgbClr val="1EC5FF">
+                <a:alpha val="33333"/>
+              </a:srgbClr>
+            </a:solidFill>
+            <a:prstDash val="solid"/>
+          </a:ln>
+        </p:spPr>
+      </p:sp>
+      <p:pic>
+        <p:nvPicPr>
+          <p:cNvPr id="19" name="" descr="Figura oficial da documentação dbt usada para explicar: Métricas simples vivem perto do dado — 630 entregue."/>
+          <p:cNvPicPr>
+            <a:picLocks xmlns:a="http://schemas.openxmlformats.org/drawingml/2006/main" noChangeAspect="1"/>
+          </p:cNvPicPr>
+          <p:nvPr/>
+        </p:nvPicPr>
+        <p:blipFill>
+          <a:blip xmlns:r="http://schemas.openxmlformats.org/officeDocument/2006/relationships" xmlns:a="http://schemas.openxmlformats.org/drawingml/2006/main" r:embed="R9a64f4bdd8254892"/>
+          <a:stretch xmlns:a="http://schemas.openxmlformats.org/drawingml/2006/main"/>
+        </p:blipFill>
+        <p:spPr>
+          <a:xfrm xmlns:a="http://schemas.openxmlformats.org/drawingml/2006/main">
+            <a:off x="9893718" y="209550"/>
+            <a:ext cx="1491414" cy="323850"/>
+          </a:xfrm>
+          <a:prstGeom xmlns:a="http://schemas.openxmlformats.org/drawingml/2006/main" prst="rect">
+            <a:avLst/>
+          </a:prstGeom>
+        </p:spPr>
+      </p:pic>
+      <p:sp>
+        <p:nvSpPr>
+          <p:cNvPr id="8" name="footer-rule">
+            <a:extLst xmlns:a="http://schemas.openxmlformats.org/drawingml/2006/main">
+              <a:ext uri="{FF2B5EF4-FFF2-40B4-BE49-F238E27FC236}">
+                <a16:creationId xmlns:a16="http://schemas.microsoft.com/office/drawing/2014/main" id="{C092DE7B-784D-4338-9941-4869875C9561}"/>
               </a:ext>
             </a:extLst>
           </p:cNvPr>
@@ -6907,10 +7253,10 @@
       </p:sp>
       <p:sp>
         <p:nvSpPr>
-          <p:cNvPr id="7" name="footer">
-            <a:extLst xmlns:a="http://schemas.openxmlformats.org/drawingml/2006/main">
-              <a:ext uri="{FF2B5EF4-FFF2-40B4-BE49-F238E27FC236}">
-                <a16:creationId xmlns:a16="http://schemas.microsoft.com/office/drawing/2014/main" id="{68A8D600-A102-45E0-BA16-8F87A1BCFCCF}"/>
+          <p:cNvPr id="9" name="footer">
+            <a:extLst xmlns:a="http://schemas.openxmlformats.org/drawingml/2006/main">
+              <a:ext uri="{FF2B5EF4-FFF2-40B4-BE49-F238E27FC236}">
+                <a16:creationId xmlns:a16="http://schemas.microsoft.com/office/drawing/2014/main" id="{D48A84B9-DBCE-4EF0-8E09-3BAD0ECCD4BB}"/>
               </a:ext>
             </a:extLst>
           </p:cNvPr>
@@ -6962,10 +7308,10 @@
       </p:sp>
       <p:sp>
         <p:nvSpPr>
-          <p:cNvPr id="8" name="page-number">
-            <a:extLst xmlns:a="http://schemas.openxmlformats.org/drawingml/2006/main">
-              <a:ext uri="{FF2B5EF4-FFF2-40B4-BE49-F238E27FC236}">
-                <a16:creationId xmlns:a16="http://schemas.microsoft.com/office/drawing/2014/main" id="{12EDFA0B-2CF0-4EAE-9056-6D1FCF7EEBB0}"/>
+          <p:cNvPr id="10" name="page-number">
+            <a:extLst xmlns:a="http://schemas.openxmlformats.org/drawingml/2006/main">
+              <a:ext uri="{FF2B5EF4-FFF2-40B4-BE49-F238E27FC236}">
+                <a16:creationId xmlns:a16="http://schemas.microsoft.com/office/drawing/2014/main" id="{66C3716D-D965-4041-8FFB-C9D80D83E3C2}"/>
               </a:ext>
             </a:extLst>
           </p:cNvPr>
@@ -7018,7 +7364,7 @@
     </p:spTree>
     <p:extLst>
       <p:ext uri="{BB962C8B-B14F-4D97-AF65-F5344CB8AC3E}">
-        <p14:creationId xmlns:p14="http://schemas.microsoft.com/office/powerpoint/2010/main" val="2053530877"/>
+        <p14:creationId xmlns:p14="http://schemas.microsoft.com/office/powerpoint/2010/main" val="1450462360"/>
       </p:ext>
     </p:extLst>
   </p:cSld>
@@ -7046,10 +7392,10 @@
       </p:grpSpPr>
       <p:sp>
         <p:nvSpPr>
-          <p:cNvPr id="11" name="slide-title">
-            <a:extLst xmlns:a="http://schemas.openxmlformats.org/drawingml/2006/main">
-              <a:ext uri="{FF2B5EF4-FFF2-40B4-BE49-F238E27FC236}">
-                <a16:creationId xmlns:a16="http://schemas.microsoft.com/office/drawing/2014/main" id="{EA53DC4F-8778-4970-A1C2-78495827D33C}"/>
+          <p:cNvPr id="13" name="slide-title">
+            <a:extLst xmlns:a="http://schemas.openxmlformats.org/drawingml/2006/main">
+              <a:ext uri="{FF2B5EF4-FFF2-40B4-BE49-F238E27FC236}">
+                <a16:creationId xmlns:a16="http://schemas.microsoft.com/office/drawing/2014/main" id="{19191AC3-9767-4203-A414-F54EF8D4EA20}"/>
               </a:ext>
             </a:extLst>
           </p:cNvPr>
@@ -7100,7 +7446,7 @@
           <p:cNvPr id="2" name="slide-subtitle">
             <a:extLst xmlns:a="http://schemas.openxmlformats.org/drawingml/2006/main">
               <a:ext uri="{FF2B5EF4-FFF2-40B4-BE49-F238E27FC236}">
-                <a16:creationId xmlns:a16="http://schemas.microsoft.com/office/drawing/2014/main" id="{D14D6880-9BE0-4DA4-A0A9-2A0242D9596F}"/>
+                <a16:creationId xmlns:a16="http://schemas.microsoft.com/office/drawing/2014/main" id="{348367C7-6C5F-44C3-8D72-EEB23E08EB96}"/>
               </a:ext>
             </a:extLst>
           </p:cNvPr>
@@ -7151,7 +7497,7 @@
           <p:cNvPr id="3" name="bullets">
             <a:extLst xmlns:a="http://schemas.openxmlformats.org/drawingml/2006/main">
               <a:ext uri="{FF2B5EF4-FFF2-40B4-BE49-F238E27FC236}">
-                <a16:creationId xmlns:a16="http://schemas.microsoft.com/office/drawing/2014/main" id="{F651EEF7-36CF-4D24-9716-8BE5E6F6CBC4}"/>
+                <a16:creationId xmlns:a16="http://schemas.microsoft.com/office/drawing/2014/main" id="{0737A929-708A-4811-906F-3EF46333D85A}"/>
               </a:ext>
             </a:extLst>
           </p:cNvPr>
@@ -7238,7 +7584,7 @@
           <p:cNvPr id="4" name="ambient-glow">
             <a:extLst xmlns:a="http://schemas.openxmlformats.org/drawingml/2006/main">
               <a:ext uri="{FF2B5EF4-FFF2-40B4-BE49-F238E27FC236}">
-                <a16:creationId xmlns:a16="http://schemas.microsoft.com/office/drawing/2014/main" id="{B7F4B7C8-ED7B-41BC-BBA0-C05EA7BFC752}"/>
+                <a16:creationId xmlns:a16="http://schemas.microsoft.com/office/drawing/2014/main" id="{0FF3969D-871A-4FEA-8BD5-021186BF6642}"/>
               </a:ext>
             </a:extLst>
           </p:cNvPr>
@@ -7275,7 +7621,7 @@
           <p:cNvPr id="5" name="ambient-core">
             <a:extLst xmlns:a="http://schemas.openxmlformats.org/drawingml/2006/main">
               <a:ext uri="{FF2B5EF4-FFF2-40B4-BE49-F238E27FC236}">
-                <a16:creationId xmlns:a16="http://schemas.microsoft.com/office/drawing/2014/main" id="{7C7796FD-DC8D-4DFA-8F2E-444B06956929}"/>
+                <a16:creationId xmlns:a16="http://schemas.microsoft.com/office/drawing/2014/main" id="{42C88322-B817-4472-8092-46D5C676CE4B}"/>
               </a:ext>
             </a:extLst>
           </p:cNvPr>
@@ -7312,7 +7658,7 @@
           <p:cNvPr id="6" name="section-number">
             <a:extLst xmlns:a="http://schemas.openxmlformats.org/drawingml/2006/main">
               <a:ext uri="{FF2B5EF4-FFF2-40B4-BE49-F238E27FC236}">
-                <a16:creationId xmlns:a16="http://schemas.microsoft.com/office/drawing/2014/main" id="{F571D871-1218-4033-8D24-0CD5F6CA1D69}"/>
+                <a16:creationId xmlns:a16="http://schemas.microsoft.com/office/drawing/2014/main" id="{A266776C-E4C9-44BE-9779-AB0B8E47368F}"/>
               </a:ext>
             </a:extLst>
           </p:cNvPr>
@@ -7363,7 +7709,7 @@
           <p:cNvPr id="7" name="eyebrow">
             <a:extLst xmlns:a="http://schemas.openxmlformats.org/drawingml/2006/main">
               <a:ext uri="{FF2B5EF4-FFF2-40B4-BE49-F238E27FC236}">
-                <a16:creationId xmlns:a16="http://schemas.microsoft.com/office/drawing/2014/main" id="{BC12CD27-E733-48DF-BE40-5811E4DF5FF6}"/>
+                <a16:creationId xmlns:a16="http://schemas.microsoft.com/office/drawing/2014/main" id="{2CF2A2D8-DDFB-4AC7-8CD6-49E30AC0CF15}"/>
               </a:ext>
             </a:extLst>
           </p:cNvPr>
@@ -7411,10 +7757,69 @@
       </p:sp>
       <p:sp>
         <p:nvSpPr>
-          <p:cNvPr id="8" name="footer-rule">
-            <a:extLst xmlns:a="http://schemas.openxmlformats.org/drawingml/2006/main">
-              <a:ext uri="{FF2B5EF4-FFF2-40B4-BE49-F238E27FC236}">
-                <a16:creationId xmlns:a16="http://schemas.microsoft.com/office/drawing/2014/main" id="{74CCFE13-00D0-489E-88B2-453D74F7F292}"/>
+          <p:cNvPr id="8" name="rescue-point-logo-background">
+            <a:extLst xmlns:a="http://schemas.openxmlformats.org/drawingml/2006/main">
+              <a:ext uri="{FF2B5EF4-FFF2-40B4-BE49-F238E27FC236}">
+                <a16:creationId xmlns:a16="http://schemas.microsoft.com/office/drawing/2014/main" id="{BF1083DA-2C52-4771-ADC4-E894E606580C}"/>
+              </a:ext>
+            </a:extLst>
+          </p:cNvPr>
+          <p:cNvSpPr>
+            <a:spLocks xmlns:a="http://schemas.openxmlformats.org/drawingml/2006/main" noGrp="1"/>
+          </p:cNvSpPr>
+          <p:nvPr/>
+        </p:nvSpPr>
+        <p:spPr>
+          <a:xfrm xmlns:a="http://schemas.openxmlformats.org/drawingml/2006/main">
+            <a:off x="9772650" y="133350"/>
+            <a:ext cx="1733550" cy="457200"/>
+          </a:xfrm>
+          <a:prstGeom xmlns:a="http://schemas.openxmlformats.org/drawingml/2006/main" prst="roundRect">
+            <a:avLst>
+              <a:gd name="adj" fmla="val 16667"/>
+            </a:avLst>
+          </a:prstGeom>
+          <a:solidFill xmlns:a="http://schemas.openxmlformats.org/drawingml/2006/main">
+            <a:srgbClr val="06142E"/>
+          </a:solidFill>
+          <a:ln xmlns:a="http://schemas.openxmlformats.org/drawingml/2006/main" w="9525">
+            <a:solidFill>
+              <a:srgbClr val="1EC5FF">
+                <a:alpha val="33333"/>
+              </a:srgbClr>
+            </a:solidFill>
+            <a:prstDash val="solid"/>
+          </a:ln>
+        </p:spPr>
+      </p:sp>
+      <p:pic>
+        <p:nvPicPr>
+          <p:cNvPr id="23" name="" descr="Figura oficial da documentação dbt usada para explicar: Razões reutilizam métricas nomeadas — Ticket médio compõe gross_revenue e orders sem copiar a fórmula.."/>
+          <p:cNvPicPr>
+            <a:picLocks xmlns:a="http://schemas.openxmlformats.org/drawingml/2006/main" noChangeAspect="1"/>
+          </p:cNvPicPr>
+          <p:nvPr/>
+        </p:nvPicPr>
+        <p:blipFill>
+          <a:blip xmlns:r="http://schemas.openxmlformats.org/officeDocument/2006/relationships" xmlns:a="http://schemas.openxmlformats.org/drawingml/2006/main" r:embed="Rad7097b0b82e4df7"/>
+          <a:stretch xmlns:a="http://schemas.openxmlformats.org/drawingml/2006/main"/>
+        </p:blipFill>
+        <p:spPr>
+          <a:xfrm xmlns:a="http://schemas.openxmlformats.org/drawingml/2006/main">
+            <a:off x="9893718" y="209550"/>
+            <a:ext cx="1491414" cy="323850"/>
+          </a:xfrm>
+          <a:prstGeom xmlns:a="http://schemas.openxmlformats.org/drawingml/2006/main" prst="rect">
+            <a:avLst/>
+          </a:prstGeom>
+        </p:spPr>
+      </p:pic>
+      <p:sp>
+        <p:nvSpPr>
+          <p:cNvPr id="10" name="footer-rule">
+            <a:extLst xmlns:a="http://schemas.openxmlformats.org/drawingml/2006/main">
+              <a:ext uri="{FF2B5EF4-FFF2-40B4-BE49-F238E27FC236}">
+                <a16:creationId xmlns:a16="http://schemas.microsoft.com/office/drawing/2014/main" id="{04A0356B-9394-423A-B0A9-1003ED4451DD}"/>
               </a:ext>
             </a:extLst>
           </p:cNvPr>
@@ -7444,10 +7849,10 @@
       </p:sp>
       <p:sp>
         <p:nvSpPr>
-          <p:cNvPr id="9" name="footer">
-            <a:extLst xmlns:a="http://schemas.openxmlformats.org/drawingml/2006/main">
-              <a:ext uri="{FF2B5EF4-FFF2-40B4-BE49-F238E27FC236}">
-                <a16:creationId xmlns:a16="http://schemas.microsoft.com/office/drawing/2014/main" id="{C476BE93-AB79-4975-812E-46898E8A9CE8}"/>
+          <p:cNvPr id="11" name="footer">
+            <a:extLst xmlns:a="http://schemas.openxmlformats.org/drawingml/2006/main">
+              <a:ext uri="{FF2B5EF4-FFF2-40B4-BE49-F238E27FC236}">
+                <a16:creationId xmlns:a16="http://schemas.microsoft.com/office/drawing/2014/main" id="{4575A5C7-7AC1-4596-8B8E-A5D98942E20F}"/>
               </a:ext>
             </a:extLst>
           </p:cNvPr>
@@ -7499,10 +7904,10 @@
       </p:sp>
       <p:sp>
         <p:nvSpPr>
-          <p:cNvPr id="10" name="page-number">
-            <a:extLst xmlns:a="http://schemas.openxmlformats.org/drawingml/2006/main">
-              <a:ext uri="{FF2B5EF4-FFF2-40B4-BE49-F238E27FC236}">
-                <a16:creationId xmlns:a16="http://schemas.microsoft.com/office/drawing/2014/main" id="{6A7F03E3-A3F9-403D-9580-296F6786E561}"/>
+          <p:cNvPr id="12" name="page-number">
+            <a:extLst xmlns:a="http://schemas.openxmlformats.org/drawingml/2006/main">
+              <a:ext uri="{FF2B5EF4-FFF2-40B4-BE49-F238E27FC236}">
+                <a16:creationId xmlns:a16="http://schemas.microsoft.com/office/drawing/2014/main" id="{3B0AF545-D08B-4459-8733-65F981209957}"/>
               </a:ext>
             </a:extLst>
           </p:cNvPr>
@@ -7555,7 +7960,7 @@
     </p:spTree>
     <p:extLst>
       <p:ext uri="{BB962C8B-B14F-4D97-AF65-F5344CB8AC3E}">
-        <p14:creationId xmlns:p14="http://schemas.microsoft.com/office/powerpoint/2010/main" val="1479572517"/>
+        <p14:creationId xmlns:p14="http://schemas.microsoft.com/office/powerpoint/2010/main" val="1939180121"/>
       </p:ext>
     </p:extLst>
   </p:cSld>
@@ -7591,10 +7996,10 @@
       </p:grpSpPr>
       <p:sp>
         <p:nvSpPr>
-          <p:cNvPr id="13" name="slide-title">
-            <a:extLst xmlns:a="http://schemas.openxmlformats.org/drawingml/2006/main">
-              <a:ext uri="{FF2B5EF4-FFF2-40B4-BE49-F238E27FC236}">
-                <a16:creationId xmlns:a16="http://schemas.microsoft.com/office/drawing/2014/main" id="{95291985-5B2E-4679-9657-E461E65B1CA8}"/>
+          <p:cNvPr id="15" name="slide-title">
+            <a:extLst xmlns:a="http://schemas.openxmlformats.org/drawingml/2006/main">
+              <a:ext uri="{FF2B5EF4-FFF2-40B4-BE49-F238E27FC236}">
+                <a16:creationId xmlns:a16="http://schemas.microsoft.com/office/drawing/2014/main" id="{F1364AFA-CC6F-44F7-81AA-C47459FCF496}"/>
               </a:ext>
             </a:extLst>
           </p:cNvPr>
@@ -7645,7 +8050,7 @@
           <p:cNvPr id="2" name="flow-1">
             <a:extLst xmlns:a="http://schemas.openxmlformats.org/drawingml/2006/main">
               <a:ext uri="{FF2B5EF4-FFF2-40B4-BE49-F238E27FC236}">
-                <a16:creationId xmlns:a16="http://schemas.microsoft.com/office/drawing/2014/main" id="{29B16B47-360C-48AF-8A30-BF0FF3BB98FA}"/>
+                <a16:creationId xmlns:a16="http://schemas.microsoft.com/office/drawing/2014/main" id="{B69313C3-54D5-482F-8045-E959854AADA8}"/>
               </a:ext>
             </a:extLst>
           </p:cNvPr>
@@ -7702,7 +8107,7 @@
           <p:cNvPr id="3" name="flow-2">
             <a:extLst xmlns:a="http://schemas.openxmlformats.org/drawingml/2006/main">
               <a:ext uri="{FF2B5EF4-FFF2-40B4-BE49-F238E27FC236}">
-                <a16:creationId xmlns:a16="http://schemas.microsoft.com/office/drawing/2014/main" id="{5D86F81F-1B2C-44C2-A1E6-BC5F0EDC0F79}"/>
+                <a16:creationId xmlns:a16="http://schemas.microsoft.com/office/drawing/2014/main" id="{00120A58-7A51-4CBA-A43E-5B142E4ED346}"/>
               </a:ext>
             </a:extLst>
           </p:cNvPr>
@@ -7759,7 +8164,7 @@
           <p:cNvPr id="4" name="flow-3">
             <a:extLst xmlns:a="http://schemas.openxmlformats.org/drawingml/2006/main">
               <a:ext uri="{FF2B5EF4-FFF2-40B4-BE49-F238E27FC236}">
-                <a16:creationId xmlns:a16="http://schemas.microsoft.com/office/drawing/2014/main" id="{369EF5D0-F958-4CC0-9197-470F312CEBD1}"/>
+                <a16:creationId xmlns:a16="http://schemas.microsoft.com/office/drawing/2014/main" id="{F69DCAB9-FD3A-46B2-9367-4B1183E29558}"/>
               </a:ext>
             </a:extLst>
           </p:cNvPr>
@@ -7816,7 +8221,7 @@
           <p:cNvPr id="5" name="flow-4">
             <a:extLst xmlns:a="http://schemas.openxmlformats.org/drawingml/2006/main">
               <a:ext uri="{FF2B5EF4-FFF2-40B4-BE49-F238E27FC236}">
-                <a16:creationId xmlns:a16="http://schemas.microsoft.com/office/drawing/2014/main" id="{70007307-9168-4F5D-84B8-9CA65E972AB2}"/>
+                <a16:creationId xmlns:a16="http://schemas.microsoft.com/office/drawing/2014/main" id="{247A0432-E43D-481C-B6CF-C31C87385189}"/>
               </a:ext>
             </a:extLst>
           </p:cNvPr>
@@ -7870,7 +8275,7 @@
       </p:sp>
       <p:cxnSp>
         <p:nvCxnSpPr>
-          <p:cNvPr id="26" name=""/>
+          <p:cNvPr id="29" name=""/>
           <p:cNvCxnSpPr>
             <a:stCxn xmlns:a="http://schemas.openxmlformats.org/drawingml/2006/main" id="2" idx="3"/>
             <a:endCxn xmlns:a="http://schemas.openxmlformats.org/drawingml/2006/main" id="3" idx="1"/>
@@ -7896,7 +8301,7 @@
       </p:cxnSp>
       <p:cxnSp>
         <p:nvCxnSpPr>
-          <p:cNvPr id="27" name=""/>
+          <p:cNvPr id="30" name=""/>
           <p:cNvCxnSpPr>
             <a:stCxn xmlns:a="http://schemas.openxmlformats.org/drawingml/2006/main" id="3" idx="3"/>
             <a:endCxn xmlns:a="http://schemas.openxmlformats.org/drawingml/2006/main" id="4" idx="1"/>
@@ -7922,7 +8327,7 @@
       </p:cxnSp>
       <p:cxnSp>
         <p:nvCxnSpPr>
-          <p:cNvPr id="28" name=""/>
+          <p:cNvPr id="31" name=""/>
           <p:cNvCxnSpPr>
             <a:stCxn xmlns:a="http://schemas.openxmlformats.org/drawingml/2006/main" id="4" idx="3"/>
             <a:endCxn xmlns:a="http://schemas.openxmlformats.org/drawingml/2006/main" id="5" idx="1"/>
@@ -7951,7 +8356,7 @@
           <p:cNvPr id="9" name="eyebrow">
             <a:extLst xmlns:a="http://schemas.openxmlformats.org/drawingml/2006/main">
               <a:ext uri="{FF2B5EF4-FFF2-40B4-BE49-F238E27FC236}">
-                <a16:creationId xmlns:a16="http://schemas.microsoft.com/office/drawing/2014/main" id="{1BD7FA4E-0BD1-4E8F-9B10-5942D9D6C96C}"/>
+                <a16:creationId xmlns:a16="http://schemas.microsoft.com/office/drawing/2014/main" id="{F9177F0B-E98A-4D43-A44E-0724479EE03C}"/>
               </a:ext>
             </a:extLst>
           </p:cNvPr>
@@ -7999,10 +8404,69 @@
       </p:sp>
       <p:sp>
         <p:nvSpPr>
-          <p:cNvPr id="10" name="footer-rule">
-            <a:extLst xmlns:a="http://schemas.openxmlformats.org/drawingml/2006/main">
-              <a:ext uri="{FF2B5EF4-FFF2-40B4-BE49-F238E27FC236}">
-                <a16:creationId xmlns:a16="http://schemas.microsoft.com/office/drawing/2014/main" id="{A2B766AC-ED29-409C-BF98-94C38480E717}"/>
+          <p:cNvPr id="10" name="rescue-point-logo-background">
+            <a:extLst xmlns:a="http://schemas.openxmlformats.org/drawingml/2006/main">
+              <a:ext uri="{FF2B5EF4-FFF2-40B4-BE49-F238E27FC236}">
+                <a16:creationId xmlns:a16="http://schemas.microsoft.com/office/drawing/2014/main" id="{B50E2932-13E1-4E8F-B52B-AB90D27BD10D}"/>
+              </a:ext>
+            </a:extLst>
+          </p:cNvPr>
+          <p:cNvSpPr>
+            <a:spLocks xmlns:a="http://schemas.openxmlformats.org/drawingml/2006/main" noGrp="1"/>
+          </p:cNvSpPr>
+          <p:nvPr/>
+        </p:nvSpPr>
+        <p:spPr>
+          <a:xfrm xmlns:a="http://schemas.openxmlformats.org/drawingml/2006/main">
+            <a:off x="9772650" y="133350"/>
+            <a:ext cx="1733550" cy="457200"/>
+          </a:xfrm>
+          <a:prstGeom xmlns:a="http://schemas.openxmlformats.org/drawingml/2006/main" prst="roundRect">
+            <a:avLst>
+              <a:gd name="adj" fmla="val 16667"/>
+            </a:avLst>
+          </a:prstGeom>
+          <a:solidFill xmlns:a="http://schemas.openxmlformats.org/drawingml/2006/main">
+            <a:srgbClr val="06142E"/>
+          </a:solidFill>
+          <a:ln xmlns:a="http://schemas.openxmlformats.org/drawingml/2006/main" w="9525">
+            <a:solidFill>
+              <a:srgbClr val="1EC5FF">
+                <a:alpha val="33333"/>
+              </a:srgbClr>
+            </a:solidFill>
+            <a:prstDash val="solid"/>
+          </a:ln>
+        </p:spPr>
+      </p:sp>
+      <p:pic>
+        <p:nvPicPr>
+          <p:cNvPr id="34" name="" descr="Figura oficial da documentação dbt usada para explicar: Razões reutilizam métricas nomeadas — gross_revenue."/>
+          <p:cNvPicPr>
+            <a:picLocks xmlns:a="http://schemas.openxmlformats.org/drawingml/2006/main" noChangeAspect="1"/>
+          </p:cNvPicPr>
+          <p:nvPr/>
+        </p:nvPicPr>
+        <p:blipFill>
+          <a:blip xmlns:r="http://schemas.openxmlformats.org/officeDocument/2006/relationships" xmlns:a="http://schemas.openxmlformats.org/drawingml/2006/main" r:embed="R29781b39b1484606"/>
+          <a:stretch xmlns:a="http://schemas.openxmlformats.org/drawingml/2006/main"/>
+        </p:blipFill>
+        <p:spPr>
+          <a:xfrm xmlns:a="http://schemas.openxmlformats.org/drawingml/2006/main">
+            <a:off x="9893718" y="209550"/>
+            <a:ext cx="1491414" cy="323850"/>
+          </a:xfrm>
+          <a:prstGeom xmlns:a="http://schemas.openxmlformats.org/drawingml/2006/main" prst="rect">
+            <a:avLst/>
+          </a:prstGeom>
+        </p:spPr>
+      </p:pic>
+      <p:sp>
+        <p:nvSpPr>
+          <p:cNvPr id="12" name="footer-rule">
+            <a:extLst xmlns:a="http://schemas.openxmlformats.org/drawingml/2006/main">
+              <a:ext uri="{FF2B5EF4-FFF2-40B4-BE49-F238E27FC236}">
+                <a16:creationId xmlns:a16="http://schemas.microsoft.com/office/drawing/2014/main" id="{6BB4663F-A3C6-416F-AC9F-533D584801C7}"/>
               </a:ext>
             </a:extLst>
           </p:cNvPr>
@@ -8032,10 +8496,10 @@
       </p:sp>
       <p:sp>
         <p:nvSpPr>
-          <p:cNvPr id="11" name="footer">
-            <a:extLst xmlns:a="http://schemas.openxmlformats.org/drawingml/2006/main">
-              <a:ext uri="{FF2B5EF4-FFF2-40B4-BE49-F238E27FC236}">
-                <a16:creationId xmlns:a16="http://schemas.microsoft.com/office/drawing/2014/main" id="{C3AE047E-AE20-4794-A187-A27810546EC1}"/>
+          <p:cNvPr id="13" name="footer">
+            <a:extLst xmlns:a="http://schemas.openxmlformats.org/drawingml/2006/main">
+              <a:ext uri="{FF2B5EF4-FFF2-40B4-BE49-F238E27FC236}">
+                <a16:creationId xmlns:a16="http://schemas.microsoft.com/office/drawing/2014/main" id="{479C837D-AA34-4253-A9FE-F274D9095D93}"/>
               </a:ext>
             </a:extLst>
           </p:cNvPr>
@@ -8087,10 +8551,10 @@
       </p:sp>
       <p:sp>
         <p:nvSpPr>
-          <p:cNvPr id="12" name="page-number">
-            <a:extLst xmlns:a="http://schemas.openxmlformats.org/drawingml/2006/main">
-              <a:ext uri="{FF2B5EF4-FFF2-40B4-BE49-F238E27FC236}">
-                <a16:creationId xmlns:a16="http://schemas.microsoft.com/office/drawing/2014/main" id="{530E1D34-739B-4333-895C-2507213BC182}"/>
+          <p:cNvPr id="14" name="page-number">
+            <a:extLst xmlns:a="http://schemas.openxmlformats.org/drawingml/2006/main">
+              <a:ext uri="{FF2B5EF4-FFF2-40B4-BE49-F238E27FC236}">
+                <a16:creationId xmlns:a16="http://schemas.microsoft.com/office/drawing/2014/main" id="{4F2B62ED-EF69-4060-9ACC-751A463B2D5B}"/>
               </a:ext>
             </a:extLst>
           </p:cNvPr>
@@ -8143,7 +8607,7 @@
     </p:spTree>
     <p:extLst>
       <p:ext uri="{BB962C8B-B14F-4D97-AF65-F5344CB8AC3E}">
-        <p14:creationId xmlns:p14="http://schemas.microsoft.com/office/powerpoint/2010/main" val="1605583867"/>
+        <p14:creationId xmlns:p14="http://schemas.microsoft.com/office/powerpoint/2010/main" val="803303187"/>
       </p:ext>
     </p:extLst>
   </p:cSld>
@@ -8179,10 +8643,10 @@
       </p:grpSpPr>
       <p:sp>
         <p:nvSpPr>
-          <p:cNvPr id="9" name="slide-title">
-            <a:extLst xmlns:a="http://schemas.openxmlformats.org/drawingml/2006/main">
-              <a:ext uri="{FF2B5EF4-FFF2-40B4-BE49-F238E27FC236}">
-                <a16:creationId xmlns:a16="http://schemas.microsoft.com/office/drawing/2014/main" id="{1698B489-A678-4057-B77A-D4D3545A9566}"/>
+          <p:cNvPr id="11" name="slide-title">
+            <a:extLst xmlns:a="http://schemas.openxmlformats.org/drawingml/2006/main">
+              <a:ext uri="{FF2B5EF4-FFF2-40B4-BE49-F238E27FC236}">
+                <a16:creationId xmlns:a16="http://schemas.microsoft.com/office/drawing/2014/main" id="{8B816819-D28E-4259-B27E-3BF0F95C199D}"/>
               </a:ext>
             </a:extLst>
           </p:cNvPr>
@@ -8233,7 +8697,7 @@
           <p:cNvPr id="2" name="code-surface">
             <a:extLst xmlns:a="http://schemas.openxmlformats.org/drawingml/2006/main">
               <a:ext uri="{FF2B5EF4-FFF2-40B4-BE49-F238E27FC236}">
-                <a16:creationId xmlns:a16="http://schemas.microsoft.com/office/drawing/2014/main" id="{5F4322F3-221B-4E19-9D21-B3790CA5CEE3}"/>
+                <a16:creationId xmlns:a16="http://schemas.microsoft.com/office/drawing/2014/main" id="{9215F7CF-8B8A-4ACD-BB1D-BE46135A5075}"/>
               </a:ext>
             </a:extLst>
           </p:cNvPr>
@@ -8268,7 +8732,7 @@
           <p:cNvPr id="3" name="command">
             <a:extLst xmlns:a="http://schemas.openxmlformats.org/drawingml/2006/main">
               <a:ext uri="{FF2B5EF4-FFF2-40B4-BE49-F238E27FC236}">
-                <a16:creationId xmlns:a16="http://schemas.microsoft.com/office/drawing/2014/main" id="{7458D863-5A6C-48C1-B78D-BCD5B7928664}"/>
+                <a16:creationId xmlns:a16="http://schemas.microsoft.com/office/drawing/2014/main" id="{41AFF3E1-4C8D-4083-802D-F22C2B2438DF}"/>
               </a:ext>
             </a:extLst>
           </p:cNvPr>
@@ -8319,7 +8783,7 @@
           <p:cNvPr id="4" name="command-help">
             <a:extLst xmlns:a="http://schemas.openxmlformats.org/drawingml/2006/main">
               <a:ext uri="{FF2B5EF4-FFF2-40B4-BE49-F238E27FC236}">
-                <a16:creationId xmlns:a16="http://schemas.microsoft.com/office/drawing/2014/main" id="{06689659-3C68-491B-BC28-5DA2F12CC2F5}"/>
+                <a16:creationId xmlns:a16="http://schemas.microsoft.com/office/drawing/2014/main" id="{547C3D0F-47B8-436D-8EDC-3406E103D74B}"/>
               </a:ext>
             </a:extLst>
           </p:cNvPr>
@@ -8370,7 +8834,7 @@
           <p:cNvPr id="5" name="eyebrow">
             <a:extLst xmlns:a="http://schemas.openxmlformats.org/drawingml/2006/main">
               <a:ext uri="{FF2B5EF4-FFF2-40B4-BE49-F238E27FC236}">
-                <a16:creationId xmlns:a16="http://schemas.microsoft.com/office/drawing/2014/main" id="{DDC5B770-B87E-4DF7-8C99-C5B80BCEF46D}"/>
+                <a16:creationId xmlns:a16="http://schemas.microsoft.com/office/drawing/2014/main" id="{18B163E5-2675-4539-8C07-C682D2282B2A}"/>
               </a:ext>
             </a:extLst>
           </p:cNvPr>
@@ -8418,10 +8882,69 @@
       </p:sp>
       <p:sp>
         <p:nvSpPr>
-          <p:cNvPr id="6" name="footer-rule">
-            <a:extLst xmlns:a="http://schemas.openxmlformats.org/drawingml/2006/main">
-              <a:ext uri="{FF2B5EF4-FFF2-40B4-BE49-F238E27FC236}">
-                <a16:creationId xmlns:a16="http://schemas.microsoft.com/office/drawing/2014/main" id="{7DED1FC5-E55A-4B18-967C-DE1E9AB4660E}"/>
+          <p:cNvPr id="6" name="rescue-point-logo-background">
+            <a:extLst xmlns:a="http://schemas.openxmlformats.org/drawingml/2006/main">
+              <a:ext uri="{FF2B5EF4-FFF2-40B4-BE49-F238E27FC236}">
+                <a16:creationId xmlns:a16="http://schemas.microsoft.com/office/drawing/2014/main" id="{D4DFC539-D53A-46E8-AA83-2F879F748977}"/>
+              </a:ext>
+            </a:extLst>
+          </p:cNvPr>
+          <p:cNvSpPr>
+            <a:spLocks xmlns:a="http://schemas.openxmlformats.org/drawingml/2006/main" noGrp="1"/>
+          </p:cNvSpPr>
+          <p:nvPr/>
+        </p:nvSpPr>
+        <p:spPr>
+          <a:xfrm xmlns:a="http://schemas.openxmlformats.org/drawingml/2006/main">
+            <a:off x="9772650" y="133350"/>
+            <a:ext cx="1733550" cy="457200"/>
+          </a:xfrm>
+          <a:prstGeom xmlns:a="http://schemas.openxmlformats.org/drawingml/2006/main" prst="roundRect">
+            <a:avLst>
+              <a:gd name="adj" fmla="val 16667"/>
+            </a:avLst>
+          </a:prstGeom>
+          <a:solidFill xmlns:a="http://schemas.openxmlformats.org/drawingml/2006/main">
+            <a:srgbClr val="06142E"/>
+          </a:solidFill>
+          <a:ln xmlns:a="http://schemas.openxmlformats.org/drawingml/2006/main" w="9525">
+            <a:solidFill>
+              <a:srgbClr val="1EC5FF">
+                <a:alpha val="33333"/>
+              </a:srgbClr>
+            </a:solidFill>
+            <a:prstDash val="solid"/>
+          </a:ln>
+        </p:spPr>
+      </p:sp>
+      <p:pic>
+        <p:nvPicPr>
+          <p:cNvPr id="19" name="" descr="Figura oficial da documentação dbt usada para explicar: Demonstração — execute — python course.py checkpoint 03."/>
+          <p:cNvPicPr>
+            <a:picLocks xmlns:a="http://schemas.openxmlformats.org/drawingml/2006/main" noChangeAspect="1"/>
+          </p:cNvPicPr>
+          <p:nvPr/>
+        </p:nvPicPr>
+        <p:blipFill>
+          <a:blip xmlns:r="http://schemas.openxmlformats.org/officeDocument/2006/relationships" xmlns:a="http://schemas.openxmlformats.org/drawingml/2006/main" r:embed="Rbb01c9737ddb41de"/>
+          <a:stretch xmlns:a="http://schemas.openxmlformats.org/drawingml/2006/main"/>
+        </p:blipFill>
+        <p:spPr>
+          <a:xfrm xmlns:a="http://schemas.openxmlformats.org/drawingml/2006/main">
+            <a:off x="9893718" y="209550"/>
+            <a:ext cx="1491414" cy="323850"/>
+          </a:xfrm>
+          <a:prstGeom xmlns:a="http://schemas.openxmlformats.org/drawingml/2006/main" prst="rect">
+            <a:avLst/>
+          </a:prstGeom>
+        </p:spPr>
+      </p:pic>
+      <p:sp>
+        <p:nvSpPr>
+          <p:cNvPr id="8" name="footer-rule">
+            <a:extLst xmlns:a="http://schemas.openxmlformats.org/drawingml/2006/main">
+              <a:ext uri="{FF2B5EF4-FFF2-40B4-BE49-F238E27FC236}">
+                <a16:creationId xmlns:a16="http://schemas.microsoft.com/office/drawing/2014/main" id="{A94FC264-9525-4BD7-92E1-E8A4AED57A30}"/>
               </a:ext>
             </a:extLst>
           </p:cNvPr>
@@ -8451,10 +8974,10 @@
       </p:sp>
       <p:sp>
         <p:nvSpPr>
-          <p:cNvPr id="7" name="footer">
-            <a:extLst xmlns:a="http://schemas.openxmlformats.org/drawingml/2006/main">
-              <a:ext uri="{FF2B5EF4-FFF2-40B4-BE49-F238E27FC236}">
-                <a16:creationId xmlns:a16="http://schemas.microsoft.com/office/drawing/2014/main" id="{DF1C1B34-6669-44A7-8AE3-C0AD055A9B48}"/>
+          <p:cNvPr id="9" name="footer">
+            <a:extLst xmlns:a="http://schemas.openxmlformats.org/drawingml/2006/main">
+              <a:ext uri="{FF2B5EF4-FFF2-40B4-BE49-F238E27FC236}">
+                <a16:creationId xmlns:a16="http://schemas.microsoft.com/office/drawing/2014/main" id="{96C212B0-E72A-4A92-8DF5-9CCAC97EC520}"/>
               </a:ext>
             </a:extLst>
           </p:cNvPr>
@@ -8506,10 +9029,10 @@
       </p:sp>
       <p:sp>
         <p:nvSpPr>
-          <p:cNvPr id="8" name="page-number">
-            <a:extLst xmlns:a="http://schemas.openxmlformats.org/drawingml/2006/main">
-              <a:ext uri="{FF2B5EF4-FFF2-40B4-BE49-F238E27FC236}">
-                <a16:creationId xmlns:a16="http://schemas.microsoft.com/office/drawing/2014/main" id="{FCDDB8FA-EFF6-49D8-BE84-B3F3924FA3F6}"/>
+          <p:cNvPr id="10" name="page-number">
+            <a:extLst xmlns:a="http://schemas.openxmlformats.org/drawingml/2006/main">
+              <a:ext uri="{FF2B5EF4-FFF2-40B4-BE49-F238E27FC236}">
+                <a16:creationId xmlns:a16="http://schemas.microsoft.com/office/drawing/2014/main" id="{51873F13-90C7-4A9D-9777-125B37F99114}"/>
               </a:ext>
             </a:extLst>
           </p:cNvPr>
@@ -8562,7 +9085,7 @@
     </p:spTree>
     <p:extLst>
       <p:ext uri="{BB962C8B-B14F-4D97-AF65-F5344CB8AC3E}">
-        <p14:creationId xmlns:p14="http://schemas.microsoft.com/office/powerpoint/2010/main" val="1633683149"/>
+        <p14:creationId xmlns:p14="http://schemas.microsoft.com/office/powerpoint/2010/main" val="608783856"/>
       </p:ext>
     </p:extLst>
   </p:cSld>
@@ -8590,10 +9113,10 @@
       </p:grpSpPr>
       <p:sp>
         <p:nvSpPr>
-          <p:cNvPr id="14" name="slide-title">
-            <a:extLst xmlns:a="http://schemas.openxmlformats.org/drawingml/2006/main">
-              <a:ext uri="{FF2B5EF4-FFF2-40B4-BE49-F238E27FC236}">
-                <a16:creationId xmlns:a16="http://schemas.microsoft.com/office/drawing/2014/main" id="{02D36AE9-25C4-4738-BC9A-EE1B459AAA12}"/>
+          <p:cNvPr id="16" name="slide-title">
+            <a:extLst xmlns:a="http://schemas.openxmlformats.org/drawingml/2006/main">
+              <a:ext uri="{FF2B5EF4-FFF2-40B4-BE49-F238E27FC236}">
+                <a16:creationId xmlns:a16="http://schemas.microsoft.com/office/drawing/2014/main" id="{981AA634-F6B1-4364-BAB8-022CC633C58E}"/>
               </a:ext>
             </a:extLst>
           </p:cNvPr>
@@ -8644,7 +9167,7 @@
           <p:cNvPr id="2" name="step-num-1">
             <a:extLst xmlns:a="http://schemas.openxmlformats.org/drawingml/2006/main">
               <a:ext uri="{FF2B5EF4-FFF2-40B4-BE49-F238E27FC236}">
-                <a16:creationId xmlns:a16="http://schemas.microsoft.com/office/drawing/2014/main" id="{A1106228-5836-48AD-9BD7-7ECA6F3959E7}"/>
+                <a16:creationId xmlns:a16="http://schemas.microsoft.com/office/drawing/2014/main" id="{C58F3D8F-3D4E-47B6-880D-DED4CA03C8F9}"/>
               </a:ext>
             </a:extLst>
           </p:cNvPr>
@@ -8695,7 +9218,7 @@
           <p:cNvPr id="3" name="step-label-1">
             <a:extLst xmlns:a="http://schemas.openxmlformats.org/drawingml/2006/main">
               <a:ext uri="{FF2B5EF4-FFF2-40B4-BE49-F238E27FC236}">
-                <a16:creationId xmlns:a16="http://schemas.microsoft.com/office/drawing/2014/main" id="{386787C7-64FC-4530-8840-08CAA232589C}"/>
+                <a16:creationId xmlns:a16="http://schemas.microsoft.com/office/drawing/2014/main" id="{5DEA8B52-8B0D-4D76-87BF-24CB5CAB0C18}"/>
               </a:ext>
             </a:extLst>
           </p:cNvPr>
@@ -8746,7 +9269,7 @@
           <p:cNvPr id="4" name="step-line-1">
             <a:extLst xmlns:a="http://schemas.openxmlformats.org/drawingml/2006/main">
               <a:ext uri="{FF2B5EF4-FFF2-40B4-BE49-F238E27FC236}">
-                <a16:creationId xmlns:a16="http://schemas.microsoft.com/office/drawing/2014/main" id="{D1DA067A-9CC8-4314-A8C6-1FDB96D7CB15}"/>
+                <a16:creationId xmlns:a16="http://schemas.microsoft.com/office/drawing/2014/main" id="{527433FB-5165-4C27-8723-F3811DE8116E}"/>
               </a:ext>
             </a:extLst>
           </p:cNvPr>
@@ -8777,7 +9300,7 @@
           <p:cNvPr id="5" name="step-num-2">
             <a:extLst xmlns:a="http://schemas.openxmlformats.org/drawingml/2006/main">
               <a:ext uri="{FF2B5EF4-FFF2-40B4-BE49-F238E27FC236}">
-                <a16:creationId xmlns:a16="http://schemas.microsoft.com/office/drawing/2014/main" id="{96843623-8D5B-4607-BD10-307E54034712}"/>
+                <a16:creationId xmlns:a16="http://schemas.microsoft.com/office/drawing/2014/main" id="{D11D55BC-E4CD-4930-8A4F-2609AB167271}"/>
               </a:ext>
             </a:extLst>
           </p:cNvPr>
@@ -8828,7 +9351,7 @@
           <p:cNvPr id="6" name="step-label-2">
             <a:extLst xmlns:a="http://schemas.openxmlformats.org/drawingml/2006/main">
               <a:ext uri="{FF2B5EF4-FFF2-40B4-BE49-F238E27FC236}">
-                <a16:creationId xmlns:a16="http://schemas.microsoft.com/office/drawing/2014/main" id="{E8D3CDE0-55DC-4D84-8583-862324F820ED}"/>
+                <a16:creationId xmlns:a16="http://schemas.microsoft.com/office/drawing/2014/main" id="{74B01D51-FF1B-4DAE-A397-8FFC9032F457}"/>
               </a:ext>
             </a:extLst>
           </p:cNvPr>
@@ -8879,7 +9402,7 @@
           <p:cNvPr id="7" name="step-line-2">
             <a:extLst xmlns:a="http://schemas.openxmlformats.org/drawingml/2006/main">
               <a:ext uri="{FF2B5EF4-FFF2-40B4-BE49-F238E27FC236}">
-                <a16:creationId xmlns:a16="http://schemas.microsoft.com/office/drawing/2014/main" id="{A7F54A1F-E5DF-4F80-8E0A-1E9885F726B7}"/>
+                <a16:creationId xmlns:a16="http://schemas.microsoft.com/office/drawing/2014/main" id="{2D09A96C-8951-45C8-9112-BB6C6440E581}"/>
               </a:ext>
             </a:extLst>
           </p:cNvPr>
@@ -8910,7 +9433,7 @@
           <p:cNvPr id="8" name="step-num-3">
             <a:extLst xmlns:a="http://schemas.openxmlformats.org/drawingml/2006/main">
               <a:ext uri="{FF2B5EF4-FFF2-40B4-BE49-F238E27FC236}">
-                <a16:creationId xmlns:a16="http://schemas.microsoft.com/office/drawing/2014/main" id="{8F85F3B6-91F6-491B-8402-79479C6B47CC}"/>
+                <a16:creationId xmlns:a16="http://schemas.microsoft.com/office/drawing/2014/main" id="{34C294A3-C183-4210-ACEA-4DBBB7330FF4}"/>
               </a:ext>
             </a:extLst>
           </p:cNvPr>
@@ -8961,7 +9484,7 @@
           <p:cNvPr id="9" name="step-label-3">
             <a:extLst xmlns:a="http://schemas.openxmlformats.org/drawingml/2006/main">
               <a:ext uri="{FF2B5EF4-FFF2-40B4-BE49-F238E27FC236}">
-                <a16:creationId xmlns:a16="http://schemas.microsoft.com/office/drawing/2014/main" id="{58075528-34AA-4AB2-BE19-1C58D714DD2D}"/>
+                <a16:creationId xmlns:a16="http://schemas.microsoft.com/office/drawing/2014/main" id="{EFE25676-246E-43FE-983E-316BEE1F10E8}"/>
               </a:ext>
             </a:extLst>
           </p:cNvPr>
@@ -9012,7 +9535,7 @@
           <p:cNvPr id="10" name="eyebrow">
             <a:extLst xmlns:a="http://schemas.openxmlformats.org/drawingml/2006/main">
               <a:ext uri="{FF2B5EF4-FFF2-40B4-BE49-F238E27FC236}">
-                <a16:creationId xmlns:a16="http://schemas.microsoft.com/office/drawing/2014/main" id="{AB8481EA-B79F-452B-AD26-5F2D52F82EA5}"/>
+                <a16:creationId xmlns:a16="http://schemas.microsoft.com/office/drawing/2014/main" id="{A95D6CE3-4BB9-4376-AC44-25C4BF827498}"/>
               </a:ext>
             </a:extLst>
           </p:cNvPr>
@@ -9060,10 +9583,69 @@
       </p:sp>
       <p:sp>
         <p:nvSpPr>
-          <p:cNvPr id="11" name="footer-rule">
-            <a:extLst xmlns:a="http://schemas.openxmlformats.org/drawingml/2006/main">
-              <a:ext uri="{FF2B5EF4-FFF2-40B4-BE49-F238E27FC236}">
-                <a16:creationId xmlns:a16="http://schemas.microsoft.com/office/drawing/2014/main" id="{2BE97B12-C71F-4837-8076-36823AD8220C}"/>
+          <p:cNvPr id="11" name="rescue-point-logo-background">
+            <a:extLst xmlns:a="http://schemas.openxmlformats.org/drawingml/2006/main">
+              <a:ext uri="{FF2B5EF4-FFF2-40B4-BE49-F238E27FC236}">
+                <a16:creationId xmlns:a16="http://schemas.microsoft.com/office/drawing/2014/main" id="{892EEBCA-059D-4877-9436-0B6ABC98231C}"/>
+              </a:ext>
+            </a:extLst>
+          </p:cNvPr>
+          <p:cNvSpPr>
+            <a:spLocks xmlns:a="http://schemas.openxmlformats.org/drawingml/2006/main" noGrp="1"/>
+          </p:cNvSpPr>
+          <p:nvPr/>
+        </p:nvSpPr>
+        <p:spPr>
+          <a:xfrm xmlns:a="http://schemas.openxmlformats.org/drawingml/2006/main">
+            <a:off x="9772650" y="133350"/>
+            <a:ext cx="1733550" cy="457200"/>
+          </a:xfrm>
+          <a:prstGeom xmlns:a="http://schemas.openxmlformats.org/drawingml/2006/main" prst="roundRect">
+            <a:avLst>
+              <a:gd name="adj" fmla="val 16667"/>
+            </a:avLst>
+          </a:prstGeom>
+          <a:solidFill xmlns:a="http://schemas.openxmlformats.org/drawingml/2006/main">
+            <a:srgbClr val="06142E"/>
+          </a:solidFill>
+          <a:ln xmlns:a="http://schemas.openxmlformats.org/drawingml/2006/main" w="9525">
+            <a:solidFill>
+              <a:srgbClr val="1EC5FF">
+                <a:alpha val="33333"/>
+              </a:srgbClr>
+            </a:solidFill>
+            <a:prstDash val="solid"/>
+          </a:ln>
+        </p:spPr>
+      </p:sp>
+      <p:pic>
+        <p:nvPicPr>
+          <p:cNvPr id="29" name="" descr="Figura oficial da documentação dbt usada para explicar: Demonstração — observe — 01."/>
+          <p:cNvPicPr>
+            <a:picLocks xmlns:a="http://schemas.openxmlformats.org/drawingml/2006/main" noChangeAspect="1"/>
+          </p:cNvPicPr>
+          <p:nvPr/>
+        </p:nvPicPr>
+        <p:blipFill>
+          <a:blip xmlns:r="http://schemas.openxmlformats.org/officeDocument/2006/relationships" xmlns:a="http://schemas.openxmlformats.org/drawingml/2006/main" r:embed="Re7f776a8abf54887"/>
+          <a:stretch xmlns:a="http://schemas.openxmlformats.org/drawingml/2006/main"/>
+        </p:blipFill>
+        <p:spPr>
+          <a:xfrm xmlns:a="http://schemas.openxmlformats.org/drawingml/2006/main">
+            <a:off x="9893718" y="209550"/>
+            <a:ext cx="1491414" cy="323850"/>
+          </a:xfrm>
+          <a:prstGeom xmlns:a="http://schemas.openxmlformats.org/drawingml/2006/main" prst="rect">
+            <a:avLst/>
+          </a:prstGeom>
+        </p:spPr>
+      </p:pic>
+      <p:sp>
+        <p:nvSpPr>
+          <p:cNvPr id="13" name="footer-rule">
+            <a:extLst xmlns:a="http://schemas.openxmlformats.org/drawingml/2006/main">
+              <a:ext uri="{FF2B5EF4-FFF2-40B4-BE49-F238E27FC236}">
+                <a16:creationId xmlns:a16="http://schemas.microsoft.com/office/drawing/2014/main" id="{365F8B4F-6016-4CF8-A8A1-B51B039BA188}"/>
               </a:ext>
             </a:extLst>
           </p:cNvPr>
@@ -9093,10 +9675,10 @@
       </p:sp>
       <p:sp>
         <p:nvSpPr>
-          <p:cNvPr id="12" name="footer">
-            <a:extLst xmlns:a="http://schemas.openxmlformats.org/drawingml/2006/main">
-              <a:ext uri="{FF2B5EF4-FFF2-40B4-BE49-F238E27FC236}">
-                <a16:creationId xmlns:a16="http://schemas.microsoft.com/office/drawing/2014/main" id="{E616B752-C003-40F2-8148-C846DD9371E0}"/>
+          <p:cNvPr id="14" name="footer">
+            <a:extLst xmlns:a="http://schemas.openxmlformats.org/drawingml/2006/main">
+              <a:ext uri="{FF2B5EF4-FFF2-40B4-BE49-F238E27FC236}">
+                <a16:creationId xmlns:a16="http://schemas.microsoft.com/office/drawing/2014/main" id="{061E478C-F977-4FAF-93A4-F8E308AAAB6F}"/>
               </a:ext>
             </a:extLst>
           </p:cNvPr>
@@ -9148,10 +9730,10 @@
       </p:sp>
       <p:sp>
         <p:nvSpPr>
-          <p:cNvPr id="13" name="page-number">
-            <a:extLst xmlns:a="http://schemas.openxmlformats.org/drawingml/2006/main">
-              <a:ext uri="{FF2B5EF4-FFF2-40B4-BE49-F238E27FC236}">
-                <a16:creationId xmlns:a16="http://schemas.microsoft.com/office/drawing/2014/main" id="{AA383DC1-3409-4A4E-9EA8-9F5F50FAF21B}"/>
+          <p:cNvPr id="15" name="page-number">
+            <a:extLst xmlns:a="http://schemas.openxmlformats.org/drawingml/2006/main">
+              <a:ext uri="{FF2B5EF4-FFF2-40B4-BE49-F238E27FC236}">
+                <a16:creationId xmlns:a16="http://schemas.microsoft.com/office/drawing/2014/main" id="{BE0158C7-5273-4FE6-8C79-C7092694463E}"/>
               </a:ext>
             </a:extLst>
           </p:cNvPr>
@@ -9204,7 +9786,7 @@
     </p:spTree>
     <p:extLst>
       <p:ext uri="{BB962C8B-B14F-4D97-AF65-F5344CB8AC3E}">
-        <p14:creationId xmlns:p14="http://schemas.microsoft.com/office/powerpoint/2010/main" val="1653939127"/>
+        <p14:creationId xmlns:p14="http://schemas.microsoft.com/office/powerpoint/2010/main" val="1040121196"/>
       </p:ext>
     </p:extLst>
   </p:cSld>
@@ -9240,10 +9822,10 @@
       </p:grpSpPr>
       <p:sp>
         <p:nvSpPr>
-          <p:cNvPr id="10" name="result-label">
-            <a:extLst xmlns:a="http://schemas.openxmlformats.org/drawingml/2006/main">
-              <a:ext uri="{FF2B5EF4-FFF2-40B4-BE49-F238E27FC236}">
-                <a16:creationId xmlns:a16="http://schemas.microsoft.com/office/drawing/2014/main" id="{C379BC46-3DD4-4B80-AA72-2713205F1AC4}"/>
+          <p:cNvPr id="12" name="result-label">
+            <a:extLst xmlns:a="http://schemas.openxmlformats.org/drawingml/2006/main">
+              <a:ext uri="{FF2B5EF4-FFF2-40B4-BE49-F238E27FC236}">
+                <a16:creationId xmlns:a16="http://schemas.microsoft.com/office/drawing/2014/main" id="{8F10B116-E077-4D59-AF75-6C318ECFCEFC}"/>
               </a:ext>
             </a:extLst>
           </p:cNvPr>
@@ -9294,7 +9876,7 @@
           <p:cNvPr id="2" name="result">
             <a:extLst xmlns:a="http://schemas.openxmlformats.org/drawingml/2006/main">
               <a:ext uri="{FF2B5EF4-FFF2-40B4-BE49-F238E27FC236}">
-                <a16:creationId xmlns:a16="http://schemas.microsoft.com/office/drawing/2014/main" id="{0D585866-B9A0-4DCA-B65C-CA6A52281926}"/>
+                <a16:creationId xmlns:a16="http://schemas.microsoft.com/office/drawing/2014/main" id="{CFBA303A-6E8D-4323-A592-C69D818867BB}"/>
               </a:ext>
             </a:extLst>
           </p:cNvPr>
@@ -9345,7 +9927,7 @@
           <p:cNvPr id="3" name="result-meta">
             <a:extLst xmlns:a="http://schemas.openxmlformats.org/drawingml/2006/main">
               <a:ext uri="{FF2B5EF4-FFF2-40B4-BE49-F238E27FC236}">
-                <a16:creationId xmlns:a16="http://schemas.microsoft.com/office/drawing/2014/main" id="{04B5A7A5-EE64-4413-B3D4-A166A3EA9CED}"/>
+                <a16:creationId xmlns:a16="http://schemas.microsoft.com/office/drawing/2014/main" id="{9809AE41-FD56-4EDE-886D-5F7AA4AD9498}"/>
               </a:ext>
             </a:extLst>
           </p:cNvPr>
@@ -9396,7 +9978,7 @@
           <p:cNvPr id="4" name="ambient-glow">
             <a:extLst xmlns:a="http://schemas.openxmlformats.org/drawingml/2006/main">
               <a:ext uri="{FF2B5EF4-FFF2-40B4-BE49-F238E27FC236}">
-                <a16:creationId xmlns:a16="http://schemas.microsoft.com/office/drawing/2014/main" id="{E5943844-BF68-4D95-A484-0A934ED9C9F5}"/>
+                <a16:creationId xmlns:a16="http://schemas.microsoft.com/office/drawing/2014/main" id="{DA398145-2256-412D-8976-3CF317A498D9}"/>
               </a:ext>
             </a:extLst>
           </p:cNvPr>
@@ -9433,7 +10015,7 @@
           <p:cNvPr id="5" name="ambient-core">
             <a:extLst xmlns:a="http://schemas.openxmlformats.org/drawingml/2006/main">
               <a:ext uri="{FF2B5EF4-FFF2-40B4-BE49-F238E27FC236}">
-                <a16:creationId xmlns:a16="http://schemas.microsoft.com/office/drawing/2014/main" id="{3ACF8646-1D76-4B82-9C5E-06FEDBD26E7E}"/>
+                <a16:creationId xmlns:a16="http://schemas.microsoft.com/office/drawing/2014/main" id="{F069315B-984E-43C6-9680-A22D50C8F666}"/>
               </a:ext>
             </a:extLst>
           </p:cNvPr>
@@ -9470,7 +10052,7 @@
           <p:cNvPr id="6" name="eyebrow">
             <a:extLst xmlns:a="http://schemas.openxmlformats.org/drawingml/2006/main">
               <a:ext uri="{FF2B5EF4-FFF2-40B4-BE49-F238E27FC236}">
-                <a16:creationId xmlns:a16="http://schemas.microsoft.com/office/drawing/2014/main" id="{E326917D-0F83-4081-A001-26CF48FC9FB7}"/>
+                <a16:creationId xmlns:a16="http://schemas.microsoft.com/office/drawing/2014/main" id="{737B118B-FE5A-4F9F-AF4B-94B6775D501F}"/>
               </a:ext>
             </a:extLst>
           </p:cNvPr>
@@ -9518,10 +10100,69 @@
       </p:sp>
       <p:sp>
         <p:nvSpPr>
-          <p:cNvPr id="7" name="footer-rule">
-            <a:extLst xmlns:a="http://schemas.openxmlformats.org/drawingml/2006/main">
-              <a:ext uri="{FF2B5EF4-FFF2-40B4-BE49-F238E27FC236}">
-                <a16:creationId xmlns:a16="http://schemas.microsoft.com/office/drawing/2014/main" id="{B7B1320F-2255-4F8F-8022-9581E7DCCE47}"/>
+          <p:cNvPr id="7" name="rescue-point-logo-background">
+            <a:extLst xmlns:a="http://schemas.openxmlformats.org/drawingml/2006/main">
+              <a:ext uri="{FF2B5EF4-FFF2-40B4-BE49-F238E27FC236}">
+                <a16:creationId xmlns:a16="http://schemas.microsoft.com/office/drawing/2014/main" id="{D058973A-DD3F-44B2-AAD8-FBCADCA8DFA3}"/>
+              </a:ext>
+            </a:extLst>
+          </p:cNvPr>
+          <p:cNvSpPr>
+            <a:spLocks xmlns:a="http://schemas.openxmlformats.org/drawingml/2006/main" noGrp="1"/>
+          </p:cNvSpPr>
+          <p:nvPr/>
+        </p:nvSpPr>
+        <p:spPr>
+          <a:xfrm xmlns:a="http://schemas.openxmlformats.org/drawingml/2006/main">
+            <a:off x="9772650" y="133350"/>
+            <a:ext cx="1733550" cy="457200"/>
+          </a:xfrm>
+          <a:prstGeom xmlns:a="http://schemas.openxmlformats.org/drawingml/2006/main" prst="roundRect">
+            <a:avLst>
+              <a:gd name="adj" fmla="val 16667"/>
+            </a:avLst>
+          </a:prstGeom>
+          <a:solidFill xmlns:a="http://schemas.openxmlformats.org/drawingml/2006/main">
+            <a:srgbClr val="06142E"/>
+          </a:solidFill>
+          <a:ln xmlns:a="http://schemas.openxmlformats.org/drawingml/2006/main" w="9525">
+            <a:solidFill>
+              <a:srgbClr val="1EC5FF">
+                <a:alpha val="33333"/>
+              </a:srgbClr>
+            </a:solidFill>
+            <a:prstDash val="solid"/>
+          </a:ln>
+        </p:spPr>
+      </p:sp>
+      <p:pic>
+        <p:nvPicPr>
+          <p:cNvPr id="21" name="" descr="Figura oficial da documentação dbt usada para explicar: RESULTADO ESPERADO — 8 pedidos · 740 bruto · 630 entregue · 92,50 AOV."/>
+          <p:cNvPicPr>
+            <a:picLocks xmlns:a="http://schemas.openxmlformats.org/drawingml/2006/main" noChangeAspect="1"/>
+          </p:cNvPicPr>
+          <p:nvPr/>
+        </p:nvPicPr>
+        <p:blipFill>
+          <a:blip xmlns:r="http://schemas.openxmlformats.org/officeDocument/2006/relationships" xmlns:a="http://schemas.openxmlformats.org/drawingml/2006/main" r:embed="R188d11ca8a2e478d"/>
+          <a:stretch xmlns:a="http://schemas.openxmlformats.org/drawingml/2006/main"/>
+        </p:blipFill>
+        <p:spPr>
+          <a:xfrm xmlns:a="http://schemas.openxmlformats.org/drawingml/2006/main">
+            <a:off x="9893718" y="209550"/>
+            <a:ext cx="1491414" cy="323850"/>
+          </a:xfrm>
+          <a:prstGeom xmlns:a="http://schemas.openxmlformats.org/drawingml/2006/main" prst="rect">
+            <a:avLst/>
+          </a:prstGeom>
+        </p:spPr>
+      </p:pic>
+      <p:sp>
+        <p:nvSpPr>
+          <p:cNvPr id="9" name="footer-rule">
+            <a:extLst xmlns:a="http://schemas.openxmlformats.org/drawingml/2006/main">
+              <a:ext uri="{FF2B5EF4-FFF2-40B4-BE49-F238E27FC236}">
+                <a16:creationId xmlns:a16="http://schemas.microsoft.com/office/drawing/2014/main" id="{60E680CD-7D2C-49C6-A760-41D5B525E1EB}"/>
               </a:ext>
             </a:extLst>
           </p:cNvPr>
@@ -9551,10 +10192,10 @@
       </p:sp>
       <p:sp>
         <p:nvSpPr>
-          <p:cNvPr id="8" name="footer">
-            <a:extLst xmlns:a="http://schemas.openxmlformats.org/drawingml/2006/main">
-              <a:ext uri="{FF2B5EF4-FFF2-40B4-BE49-F238E27FC236}">
-                <a16:creationId xmlns:a16="http://schemas.microsoft.com/office/drawing/2014/main" id="{AED8A690-4645-40A9-8A3B-84BC976B080A}"/>
+          <p:cNvPr id="10" name="footer">
+            <a:extLst xmlns:a="http://schemas.openxmlformats.org/drawingml/2006/main">
+              <a:ext uri="{FF2B5EF4-FFF2-40B4-BE49-F238E27FC236}">
+                <a16:creationId xmlns:a16="http://schemas.microsoft.com/office/drawing/2014/main" id="{82AC9452-21D2-497F-A5FA-D758B94B0E62}"/>
               </a:ext>
             </a:extLst>
           </p:cNvPr>
@@ -9606,10 +10247,10 @@
       </p:sp>
       <p:sp>
         <p:nvSpPr>
-          <p:cNvPr id="9" name="page-number">
-            <a:extLst xmlns:a="http://schemas.openxmlformats.org/drawingml/2006/main">
-              <a:ext uri="{FF2B5EF4-FFF2-40B4-BE49-F238E27FC236}">
-                <a16:creationId xmlns:a16="http://schemas.microsoft.com/office/drawing/2014/main" id="{FD4476E9-E1CA-4210-BAD8-5453AED2CBCD}"/>
+          <p:cNvPr id="11" name="page-number">
+            <a:extLst xmlns:a="http://schemas.openxmlformats.org/drawingml/2006/main">
+              <a:ext uri="{FF2B5EF4-FFF2-40B4-BE49-F238E27FC236}">
+                <a16:creationId xmlns:a16="http://schemas.microsoft.com/office/drawing/2014/main" id="{7C46BFF0-7940-4003-818D-12820EC00152}"/>
               </a:ext>
             </a:extLst>
           </p:cNvPr>
@@ -9662,7 +10303,7 @@
     </p:spTree>
     <p:extLst>
       <p:ext uri="{BB962C8B-B14F-4D97-AF65-F5344CB8AC3E}">
-        <p14:creationId xmlns:p14="http://schemas.microsoft.com/office/powerpoint/2010/main" val="53838081"/>
+        <p14:creationId xmlns:p14="http://schemas.microsoft.com/office/powerpoint/2010/main" val="145952033"/>
       </p:ext>
     </p:extLst>
   </p:cSld>
@@ -9690,10 +10331,10 @@
       </p:grpSpPr>
       <p:sp>
         <p:nvSpPr>
-          <p:cNvPr id="14" name="slide-title">
-            <a:extLst xmlns:a="http://schemas.openxmlformats.org/drawingml/2006/main">
-              <a:ext uri="{FF2B5EF4-FFF2-40B4-BE49-F238E27FC236}">
-                <a16:creationId xmlns:a16="http://schemas.microsoft.com/office/drawing/2014/main" id="{E39F8A58-06BD-4BE7-81A5-F408C8C9BC4B}"/>
+          <p:cNvPr id="16" name="slide-title">
+            <a:extLst xmlns:a="http://schemas.openxmlformats.org/drawingml/2006/main">
+              <a:ext uri="{FF2B5EF4-FFF2-40B4-BE49-F238E27FC236}">
+                <a16:creationId xmlns:a16="http://schemas.microsoft.com/office/drawing/2014/main" id="{5A820214-3520-4F2A-8C11-F2A5DE7F9C86}"/>
               </a:ext>
             </a:extLst>
           </p:cNvPr>
@@ -9744,7 +10385,7 @@
           <p:cNvPr id="2" name="step-num-1">
             <a:extLst xmlns:a="http://schemas.openxmlformats.org/drawingml/2006/main">
               <a:ext uri="{FF2B5EF4-FFF2-40B4-BE49-F238E27FC236}">
-                <a16:creationId xmlns:a16="http://schemas.microsoft.com/office/drawing/2014/main" id="{D9536C50-305E-482E-ADDB-07F043CBAE95}"/>
+                <a16:creationId xmlns:a16="http://schemas.microsoft.com/office/drawing/2014/main" id="{38BCE394-313A-4261-9714-D7DF3C79B076}"/>
               </a:ext>
             </a:extLst>
           </p:cNvPr>
@@ -9795,7 +10436,7 @@
           <p:cNvPr id="3" name="step-label-1">
             <a:extLst xmlns:a="http://schemas.openxmlformats.org/drawingml/2006/main">
               <a:ext uri="{FF2B5EF4-FFF2-40B4-BE49-F238E27FC236}">
-                <a16:creationId xmlns:a16="http://schemas.microsoft.com/office/drawing/2014/main" id="{32158F37-6D5B-495F-87EE-5383FAA76F10}"/>
+                <a16:creationId xmlns:a16="http://schemas.microsoft.com/office/drawing/2014/main" id="{D284646D-9382-447F-9F4E-E8821F7EFAE1}"/>
               </a:ext>
             </a:extLst>
           </p:cNvPr>
@@ -9846,7 +10487,7 @@
           <p:cNvPr id="4" name="step-line-1">
             <a:extLst xmlns:a="http://schemas.openxmlformats.org/drawingml/2006/main">
               <a:ext uri="{FF2B5EF4-FFF2-40B4-BE49-F238E27FC236}">
-                <a16:creationId xmlns:a16="http://schemas.microsoft.com/office/drawing/2014/main" id="{6903B79F-064E-48D2-B917-3AD24583F220}"/>
+                <a16:creationId xmlns:a16="http://schemas.microsoft.com/office/drawing/2014/main" id="{076F9EA7-B522-4C0B-BDA0-EF1C155BB95C}"/>
               </a:ext>
             </a:extLst>
           </p:cNvPr>
@@ -9877,7 +10518,7 @@
           <p:cNvPr id="5" name="step-num-2">
             <a:extLst xmlns:a="http://schemas.openxmlformats.org/drawingml/2006/main">
               <a:ext uri="{FF2B5EF4-FFF2-40B4-BE49-F238E27FC236}">
-                <a16:creationId xmlns:a16="http://schemas.microsoft.com/office/drawing/2014/main" id="{544FB529-27F9-4202-844D-A0720594B705}"/>
+                <a16:creationId xmlns:a16="http://schemas.microsoft.com/office/drawing/2014/main" id="{DF923D14-874B-4E44-B08D-ED838CBEBBE2}"/>
               </a:ext>
             </a:extLst>
           </p:cNvPr>
@@ -9928,7 +10569,7 @@
           <p:cNvPr id="6" name="step-label-2">
             <a:extLst xmlns:a="http://schemas.openxmlformats.org/drawingml/2006/main">
               <a:ext uri="{FF2B5EF4-FFF2-40B4-BE49-F238E27FC236}">
-                <a16:creationId xmlns:a16="http://schemas.microsoft.com/office/drawing/2014/main" id="{7AEC00F7-35B3-4A79-8457-F8DCB0858633}"/>
+                <a16:creationId xmlns:a16="http://schemas.microsoft.com/office/drawing/2014/main" id="{1DDE0744-18FE-4AC1-B69C-B226050908A8}"/>
               </a:ext>
             </a:extLst>
           </p:cNvPr>
@@ -9979,7 +10620,7 @@
           <p:cNvPr id="7" name="step-line-2">
             <a:extLst xmlns:a="http://schemas.openxmlformats.org/drawingml/2006/main">
               <a:ext uri="{FF2B5EF4-FFF2-40B4-BE49-F238E27FC236}">
-                <a16:creationId xmlns:a16="http://schemas.microsoft.com/office/drawing/2014/main" id="{10D5E179-C4D0-4E11-A8C0-C11B56CE7ADF}"/>
+                <a16:creationId xmlns:a16="http://schemas.microsoft.com/office/drawing/2014/main" id="{31B79C32-BBFD-4332-AB0F-54FE1C8F32BF}"/>
               </a:ext>
             </a:extLst>
           </p:cNvPr>
@@ -10010,7 +10651,7 @@
           <p:cNvPr id="8" name="step-num-3">
             <a:extLst xmlns:a="http://schemas.openxmlformats.org/drawingml/2006/main">
               <a:ext uri="{FF2B5EF4-FFF2-40B4-BE49-F238E27FC236}">
-                <a16:creationId xmlns:a16="http://schemas.microsoft.com/office/drawing/2014/main" id="{389D769A-2272-477F-B593-E19B1500A16B}"/>
+                <a16:creationId xmlns:a16="http://schemas.microsoft.com/office/drawing/2014/main" id="{DAFFC1BC-49C8-4970-8DFB-F2C8415416F3}"/>
               </a:ext>
             </a:extLst>
           </p:cNvPr>
@@ -10061,7 +10702,7 @@
           <p:cNvPr id="9" name="step-label-3">
             <a:extLst xmlns:a="http://schemas.openxmlformats.org/drawingml/2006/main">
               <a:ext uri="{FF2B5EF4-FFF2-40B4-BE49-F238E27FC236}">
-                <a16:creationId xmlns:a16="http://schemas.microsoft.com/office/drawing/2014/main" id="{5A722950-B6FE-46CD-BC19-2817555B736D}"/>
+                <a16:creationId xmlns:a16="http://schemas.microsoft.com/office/drawing/2014/main" id="{E2758247-3368-44FD-8BBD-BB0F4174420E}"/>
               </a:ext>
             </a:extLst>
           </p:cNvPr>
@@ -10112,7 +10753,7 @@
           <p:cNvPr id="10" name="eyebrow">
             <a:extLst xmlns:a="http://schemas.openxmlformats.org/drawingml/2006/main">
               <a:ext uri="{FF2B5EF4-FFF2-40B4-BE49-F238E27FC236}">
-                <a16:creationId xmlns:a16="http://schemas.microsoft.com/office/drawing/2014/main" id="{24302542-113C-43B6-900D-619BDD26EC3E}"/>
+                <a16:creationId xmlns:a16="http://schemas.microsoft.com/office/drawing/2014/main" id="{CD7DA0B8-C315-48DB-9CEB-430ECB9BF694}"/>
               </a:ext>
             </a:extLst>
           </p:cNvPr>
@@ -10160,10 +10801,69 @@
       </p:sp>
       <p:sp>
         <p:nvSpPr>
-          <p:cNvPr id="11" name="footer-rule">
-            <a:extLst xmlns:a="http://schemas.openxmlformats.org/drawingml/2006/main">
-              <a:ext uri="{FF2B5EF4-FFF2-40B4-BE49-F238E27FC236}">
-                <a16:creationId xmlns:a16="http://schemas.microsoft.com/office/drawing/2014/main" id="{E89F2A4C-A37F-4D80-AA6B-79A81A8AB5CB}"/>
+          <p:cNvPr id="11" name="rescue-point-logo-background">
+            <a:extLst xmlns:a="http://schemas.openxmlformats.org/drawingml/2006/main">
+              <a:ext uri="{FF2B5EF4-FFF2-40B4-BE49-F238E27FC236}">
+                <a16:creationId xmlns:a16="http://schemas.microsoft.com/office/drawing/2014/main" id="{FFF10EAD-64DB-4032-B9BD-F708E0313473}"/>
+              </a:ext>
+            </a:extLst>
+          </p:cNvPr>
+          <p:cNvSpPr>
+            <a:spLocks xmlns:a="http://schemas.openxmlformats.org/drawingml/2006/main" noGrp="1"/>
+          </p:cNvSpPr>
+          <p:nvPr/>
+        </p:nvSpPr>
+        <p:spPr>
+          <a:xfrm xmlns:a="http://schemas.openxmlformats.org/drawingml/2006/main">
+            <a:off x="9772650" y="133350"/>
+            <a:ext cx="1733550" cy="457200"/>
+          </a:xfrm>
+          <a:prstGeom xmlns:a="http://schemas.openxmlformats.org/drawingml/2006/main" prst="roundRect">
+            <a:avLst>
+              <a:gd name="adj" fmla="val 16667"/>
+            </a:avLst>
+          </a:prstGeom>
+          <a:solidFill xmlns:a="http://schemas.openxmlformats.org/drawingml/2006/main">
+            <a:srgbClr val="06142E"/>
+          </a:solidFill>
+          <a:ln xmlns:a="http://schemas.openxmlformats.org/drawingml/2006/main" w="9525">
+            <a:solidFill>
+              <a:srgbClr val="1EC5FF">
+                <a:alpha val="33333"/>
+              </a:srgbClr>
+            </a:solidFill>
+            <a:prstDash val="solid"/>
+          </a:ln>
+        </p:spPr>
+      </p:sp>
+      <p:pic>
+        <p:nvPicPr>
+          <p:cNvPr id="29" name="" descr="Figura oficial da documentação dbt usada para explicar: O mesmo recurso afeta três decisões — 01."/>
+          <p:cNvPicPr>
+            <a:picLocks xmlns:a="http://schemas.openxmlformats.org/drawingml/2006/main" noChangeAspect="1"/>
+          </p:cNvPicPr>
+          <p:nvPr/>
+        </p:nvPicPr>
+        <p:blipFill>
+          <a:blip xmlns:r="http://schemas.openxmlformats.org/officeDocument/2006/relationships" xmlns:a="http://schemas.openxmlformats.org/drawingml/2006/main" r:embed="Rfaa7c2b75c8543bf"/>
+          <a:stretch xmlns:a="http://schemas.openxmlformats.org/drawingml/2006/main"/>
+        </p:blipFill>
+        <p:spPr>
+          <a:xfrm xmlns:a="http://schemas.openxmlformats.org/drawingml/2006/main">
+            <a:off x="9893718" y="209550"/>
+            <a:ext cx="1491414" cy="323850"/>
+          </a:xfrm>
+          <a:prstGeom xmlns:a="http://schemas.openxmlformats.org/drawingml/2006/main" prst="rect">
+            <a:avLst/>
+          </a:prstGeom>
+        </p:spPr>
+      </p:pic>
+      <p:sp>
+        <p:nvSpPr>
+          <p:cNvPr id="13" name="footer-rule">
+            <a:extLst xmlns:a="http://schemas.openxmlformats.org/drawingml/2006/main">
+              <a:ext uri="{FF2B5EF4-FFF2-40B4-BE49-F238E27FC236}">
+                <a16:creationId xmlns:a16="http://schemas.microsoft.com/office/drawing/2014/main" id="{4CBC6ECB-1C16-44A9-934A-A9CD19F42CC8}"/>
               </a:ext>
             </a:extLst>
           </p:cNvPr>
@@ -10193,10 +10893,10 @@
       </p:sp>
       <p:sp>
         <p:nvSpPr>
-          <p:cNvPr id="12" name="footer">
-            <a:extLst xmlns:a="http://schemas.openxmlformats.org/drawingml/2006/main">
-              <a:ext uri="{FF2B5EF4-FFF2-40B4-BE49-F238E27FC236}">
-                <a16:creationId xmlns:a16="http://schemas.microsoft.com/office/drawing/2014/main" id="{ADD5DCCF-3B6A-4BF4-8C1A-FB29BA427310}"/>
+          <p:cNvPr id="14" name="footer">
+            <a:extLst xmlns:a="http://schemas.openxmlformats.org/drawingml/2006/main">
+              <a:ext uri="{FF2B5EF4-FFF2-40B4-BE49-F238E27FC236}">
+                <a16:creationId xmlns:a16="http://schemas.microsoft.com/office/drawing/2014/main" id="{A54ABCC9-6932-489A-AC72-2A0B66706C05}"/>
               </a:ext>
             </a:extLst>
           </p:cNvPr>
@@ -10248,10 +10948,10 @@
       </p:sp>
       <p:sp>
         <p:nvSpPr>
-          <p:cNvPr id="13" name="page-number">
-            <a:extLst xmlns:a="http://schemas.openxmlformats.org/drawingml/2006/main">
-              <a:ext uri="{FF2B5EF4-FFF2-40B4-BE49-F238E27FC236}">
-                <a16:creationId xmlns:a16="http://schemas.microsoft.com/office/drawing/2014/main" id="{AEC45FEA-CFE0-41E8-A8A4-DBAAAC59C97C}"/>
+          <p:cNvPr id="15" name="page-number">
+            <a:extLst xmlns:a="http://schemas.openxmlformats.org/drawingml/2006/main">
+              <a:ext uri="{FF2B5EF4-FFF2-40B4-BE49-F238E27FC236}">
+                <a16:creationId xmlns:a16="http://schemas.microsoft.com/office/drawing/2014/main" id="{31E449AB-F1F2-4843-BC16-A7BA7496E55E}"/>
               </a:ext>
             </a:extLst>
           </p:cNvPr>
@@ -10304,7 +11004,7 @@
     </p:spTree>
     <p:extLst>
       <p:ext uri="{BB962C8B-B14F-4D97-AF65-F5344CB8AC3E}">
-        <p14:creationId xmlns:p14="http://schemas.microsoft.com/office/powerpoint/2010/main" val="1124408388"/>
+        <p14:creationId xmlns:p14="http://schemas.microsoft.com/office/powerpoint/2010/main" val="1110178542"/>
       </p:ext>
     </p:extLst>
   </p:cSld>
@@ -10340,10 +11040,10 @@
       </p:grpSpPr>
       <p:sp>
         <p:nvSpPr>
-          <p:cNvPr id="9" name="case-number">
-            <a:extLst xmlns:a="http://schemas.openxmlformats.org/drawingml/2006/main">
-              <a:ext uri="{FF2B5EF4-FFF2-40B4-BE49-F238E27FC236}">
-                <a16:creationId xmlns:a16="http://schemas.microsoft.com/office/drawing/2014/main" id="{6CDBC90F-8D38-4566-BE68-9EF269B3A80E}"/>
+          <p:cNvPr id="11" name="case-number">
+            <a:extLst xmlns:a="http://schemas.openxmlformats.org/drawingml/2006/main">
+              <a:ext uri="{FF2B5EF4-FFF2-40B4-BE49-F238E27FC236}">
+                <a16:creationId xmlns:a16="http://schemas.microsoft.com/office/drawing/2014/main" id="{06429655-CE97-48D4-85C4-28A9F0D7F809}"/>
               </a:ext>
             </a:extLst>
           </p:cNvPr>
@@ -10394,7 +11094,7 @@
           <p:cNvPr id="2" name="case-label">
             <a:extLst xmlns:a="http://schemas.openxmlformats.org/drawingml/2006/main">
               <a:ext uri="{FF2B5EF4-FFF2-40B4-BE49-F238E27FC236}">
-                <a16:creationId xmlns:a16="http://schemas.microsoft.com/office/drawing/2014/main" id="{3127B889-0B5E-4BB0-BB99-668B71BDE5D3}"/>
+                <a16:creationId xmlns:a16="http://schemas.microsoft.com/office/drawing/2014/main" id="{ADF9E89C-D32E-443E-BC05-C211548FF881}"/>
               </a:ext>
             </a:extLst>
           </p:cNvPr>
@@ -10445,7 +11145,7 @@
           <p:cNvPr id="3" name="case-divider">
             <a:extLst xmlns:a="http://schemas.openxmlformats.org/drawingml/2006/main">
               <a:ext uri="{FF2B5EF4-FFF2-40B4-BE49-F238E27FC236}">
-                <a16:creationId xmlns:a16="http://schemas.microsoft.com/office/drawing/2014/main" id="{147B4A15-B110-4C3B-9326-68E4BF3B30E2}"/>
+                <a16:creationId xmlns:a16="http://schemas.microsoft.com/office/drawing/2014/main" id="{661C45A4-1C45-4AA7-A71A-31B68F6BB03D}"/>
               </a:ext>
             </a:extLst>
           </p:cNvPr>
@@ -10478,7 +11178,7 @@
           <p:cNvPr id="4" name="case-caveat">
             <a:extLst xmlns:a="http://schemas.openxmlformats.org/drawingml/2006/main">
               <a:ext uri="{FF2B5EF4-FFF2-40B4-BE49-F238E27FC236}">
-                <a16:creationId xmlns:a16="http://schemas.microsoft.com/office/drawing/2014/main" id="{EE5348F1-98E2-473E-8EEA-56662025415D}"/>
+                <a16:creationId xmlns:a16="http://schemas.microsoft.com/office/drawing/2014/main" id="{6E7CB407-BCB9-49E5-AF41-1447C9D50BD6}"/>
               </a:ext>
             </a:extLst>
           </p:cNvPr>
@@ -10529,7 +11229,7 @@
           <p:cNvPr id="5" name="eyebrow">
             <a:extLst xmlns:a="http://schemas.openxmlformats.org/drawingml/2006/main">
               <a:ext uri="{FF2B5EF4-FFF2-40B4-BE49-F238E27FC236}">
-                <a16:creationId xmlns:a16="http://schemas.microsoft.com/office/drawing/2014/main" id="{819250D9-7CEA-4D62-8445-EA066541A5AB}"/>
+                <a16:creationId xmlns:a16="http://schemas.microsoft.com/office/drawing/2014/main" id="{638F610B-2CF9-4D0B-B8FB-2B20102B580B}"/>
               </a:ext>
             </a:extLst>
           </p:cNvPr>
@@ -10577,10 +11277,69 @@
       </p:sp>
       <p:sp>
         <p:nvSpPr>
-          <p:cNvPr id="6" name="footer-rule">
-            <a:extLst xmlns:a="http://schemas.openxmlformats.org/drawingml/2006/main">
-              <a:ext uri="{FF2B5EF4-FFF2-40B4-BE49-F238E27FC236}">
-                <a16:creationId xmlns:a16="http://schemas.microsoft.com/office/drawing/2014/main" id="{506568F1-ADE6-483C-94AB-93E4ADF660A4}"/>
+          <p:cNvPr id="6" name="rescue-point-logo-background">
+            <a:extLst xmlns:a="http://schemas.openxmlformats.org/drawingml/2006/main">
+              <a:ext uri="{FF2B5EF4-FFF2-40B4-BE49-F238E27FC236}">
+                <a16:creationId xmlns:a16="http://schemas.microsoft.com/office/drawing/2014/main" id="{FE9B8570-C84A-48D9-A2A1-95AD0BE3BF87}"/>
+              </a:ext>
+            </a:extLst>
+          </p:cNvPr>
+          <p:cNvSpPr>
+            <a:spLocks xmlns:a="http://schemas.openxmlformats.org/drawingml/2006/main" noGrp="1"/>
+          </p:cNvSpPr>
+          <p:nvPr/>
+        </p:nvSpPr>
+        <p:spPr>
+          <a:xfrm xmlns:a="http://schemas.openxmlformats.org/drawingml/2006/main">
+            <a:off x="9772650" y="133350"/>
+            <a:ext cx="1733550" cy="457200"/>
+          </a:xfrm>
+          <a:prstGeom xmlns:a="http://schemas.openxmlformats.org/drawingml/2006/main" prst="roundRect">
+            <a:avLst>
+              <a:gd name="adj" fmla="val 16667"/>
+            </a:avLst>
+          </a:prstGeom>
+          <a:solidFill xmlns:a="http://schemas.openxmlformats.org/drawingml/2006/main">
+            <a:srgbClr val="06142E"/>
+          </a:solidFill>
+          <a:ln xmlns:a="http://schemas.openxmlformats.org/drawingml/2006/main" w="9525">
+            <a:solidFill>
+              <a:srgbClr val="1EC5FF">
+                <a:alpha val="33333"/>
+              </a:srgbClr>
+            </a:solidFill>
+            <a:prstDash val="solid"/>
+          </a:ln>
+        </p:spPr>
+      </p:sp>
+      <p:pic>
+        <p:nvPicPr>
+          <p:cNvPr id="19" name="" descr="Figura oficial da documentação dbt usada para explicar: 2 → 13 — contribuidores reportados pela Inventa."/>
+          <p:cNvPicPr>
+            <a:picLocks xmlns:a="http://schemas.openxmlformats.org/drawingml/2006/main" noChangeAspect="1"/>
+          </p:cNvPicPr>
+          <p:nvPr/>
+        </p:nvPicPr>
+        <p:blipFill>
+          <a:blip xmlns:r="http://schemas.openxmlformats.org/officeDocument/2006/relationships" xmlns:a="http://schemas.openxmlformats.org/drawingml/2006/main" r:embed="R645108f4fcd0422c"/>
+          <a:stretch xmlns:a="http://schemas.openxmlformats.org/drawingml/2006/main"/>
+        </p:blipFill>
+        <p:spPr>
+          <a:xfrm xmlns:a="http://schemas.openxmlformats.org/drawingml/2006/main">
+            <a:off x="9893718" y="209550"/>
+            <a:ext cx="1491414" cy="323850"/>
+          </a:xfrm>
+          <a:prstGeom xmlns:a="http://schemas.openxmlformats.org/drawingml/2006/main" prst="rect">
+            <a:avLst/>
+          </a:prstGeom>
+        </p:spPr>
+      </p:pic>
+      <p:sp>
+        <p:nvSpPr>
+          <p:cNvPr id="8" name="footer-rule">
+            <a:extLst xmlns:a="http://schemas.openxmlformats.org/drawingml/2006/main">
+              <a:ext uri="{FF2B5EF4-FFF2-40B4-BE49-F238E27FC236}">
+                <a16:creationId xmlns:a16="http://schemas.microsoft.com/office/drawing/2014/main" id="{B0D52646-56AB-4B2E-BAAD-250985DE19F5}"/>
               </a:ext>
             </a:extLst>
           </p:cNvPr>
@@ -10610,10 +11369,10 @@
       </p:sp>
       <p:sp>
         <p:nvSpPr>
-          <p:cNvPr id="7" name="footer">
-            <a:extLst xmlns:a="http://schemas.openxmlformats.org/drawingml/2006/main">
-              <a:ext uri="{FF2B5EF4-FFF2-40B4-BE49-F238E27FC236}">
-                <a16:creationId xmlns:a16="http://schemas.microsoft.com/office/drawing/2014/main" id="{B6BDF066-D58C-4C51-9562-09C5ECFB0546}"/>
+          <p:cNvPr id="9" name="footer">
+            <a:extLst xmlns:a="http://schemas.openxmlformats.org/drawingml/2006/main">
+              <a:ext uri="{FF2B5EF4-FFF2-40B4-BE49-F238E27FC236}">
+                <a16:creationId xmlns:a16="http://schemas.microsoft.com/office/drawing/2014/main" id="{AA761C48-1A88-403D-8CB3-476BD2E92FA8}"/>
               </a:ext>
             </a:extLst>
           </p:cNvPr>
@@ -10665,10 +11424,10 @@
       </p:sp>
       <p:sp>
         <p:nvSpPr>
-          <p:cNvPr id="8" name="page-number">
-            <a:extLst xmlns:a="http://schemas.openxmlformats.org/drawingml/2006/main">
-              <a:ext uri="{FF2B5EF4-FFF2-40B4-BE49-F238E27FC236}">
-                <a16:creationId xmlns:a16="http://schemas.microsoft.com/office/drawing/2014/main" id="{53DE4E4C-E7EE-4296-B18C-E52272B69771}"/>
+          <p:cNvPr id="10" name="page-number">
+            <a:extLst xmlns:a="http://schemas.openxmlformats.org/drawingml/2006/main">
+              <a:ext uri="{FF2B5EF4-FFF2-40B4-BE49-F238E27FC236}">
+                <a16:creationId xmlns:a16="http://schemas.microsoft.com/office/drawing/2014/main" id="{338EF432-9204-4267-8012-E9647E81E7C5}"/>
               </a:ext>
             </a:extLst>
           </p:cNvPr>
@@ -10721,7 +11480,7 @@
     </p:spTree>
     <p:extLst>
       <p:ext uri="{BB962C8B-B14F-4D97-AF65-F5344CB8AC3E}">
-        <p14:creationId xmlns:p14="http://schemas.microsoft.com/office/powerpoint/2010/main" val="1978082922"/>
+        <p14:creationId xmlns:p14="http://schemas.microsoft.com/office/powerpoint/2010/main" val="534669482"/>
       </p:ext>
     </p:extLst>
   </p:cSld>
@@ -10749,10 +11508,10 @@
       </p:grpSpPr>
       <p:sp>
         <p:nvSpPr>
-          <p:cNvPr id="10" name="hook">
-            <a:extLst xmlns:a="http://schemas.openxmlformats.org/drawingml/2006/main">
-              <a:ext uri="{FF2B5EF4-FFF2-40B4-BE49-F238E27FC236}">
-                <a16:creationId xmlns:a16="http://schemas.microsoft.com/office/drawing/2014/main" id="{F5B35810-A353-4A6D-8061-9944763B90EE}"/>
+          <p:cNvPr id="12" name="hook">
+            <a:extLst xmlns:a="http://schemas.openxmlformats.org/drawingml/2006/main">
+              <a:ext uri="{FF2B5EF4-FFF2-40B4-BE49-F238E27FC236}">
+                <a16:creationId xmlns:a16="http://schemas.microsoft.com/office/drawing/2014/main" id="{64C03B56-E780-48A4-9B2B-44D724791222}"/>
               </a:ext>
             </a:extLst>
           </p:cNvPr>
@@ -10803,7 +11562,7 @@
           <p:cNvPr id="2" name="hook-rule">
             <a:extLst xmlns:a="http://schemas.openxmlformats.org/drawingml/2006/main">
               <a:ext uri="{FF2B5EF4-FFF2-40B4-BE49-F238E27FC236}">
-                <a16:creationId xmlns:a16="http://schemas.microsoft.com/office/drawing/2014/main" id="{EACB00E3-8592-46A7-A3D5-50B048DD7414}"/>
+                <a16:creationId xmlns:a16="http://schemas.microsoft.com/office/drawing/2014/main" id="{D2C8FE68-9406-49EC-9E59-3404231DB254}"/>
               </a:ext>
             </a:extLst>
           </p:cNvPr>
@@ -10834,7 +11593,7 @@
           <p:cNvPr id="3" name="hook-label">
             <a:extLst xmlns:a="http://schemas.openxmlformats.org/drawingml/2006/main">
               <a:ext uri="{FF2B5EF4-FFF2-40B4-BE49-F238E27FC236}">
-                <a16:creationId xmlns:a16="http://schemas.microsoft.com/office/drawing/2014/main" id="{9E1243CE-703B-466D-8E0E-BF9517697EB2}"/>
+                <a16:creationId xmlns:a16="http://schemas.microsoft.com/office/drawing/2014/main" id="{E1C07699-D2D2-4605-B0CA-CEA9C97CCC1C}"/>
               </a:ext>
             </a:extLst>
           </p:cNvPr>
@@ -10885,7 +11644,7 @@
           <p:cNvPr id="4" name="diagram-surface">
             <a:extLst xmlns:a="http://schemas.openxmlformats.org/drawingml/2006/main">
               <a:ext uri="{FF2B5EF4-FFF2-40B4-BE49-F238E27FC236}">
-                <a16:creationId xmlns:a16="http://schemas.microsoft.com/office/drawing/2014/main" id="{C1A36292-BE24-4526-A023-C6F6B37E3869}"/>
+                <a16:creationId xmlns:a16="http://schemas.microsoft.com/office/drawing/2014/main" id="{84697B06-B7EA-4EBA-8D19-CE374646A7FC}"/>
               </a:ext>
             </a:extLst>
           </p:cNvPr>
@@ -10917,14 +11676,14 @@
       </p:sp>
       <p:pic>
         <p:nvPicPr>
-          <p:cNvPr id="16" name="" descr="Diagrama didático autoral que apresenta: Uma métrica declarada uma vez pode gerar o mesmo SQL para todos os consumidores. — A pergunta que guia a aula."/>
+          <p:cNvPr id="19" name="" descr="Diagrama didático autoral que apresenta: Uma métrica declarada uma vez pode gerar o mesmo SQL para todos os consumidores. — A pergunta que guia a aula."/>
           <p:cNvPicPr>
             <a:picLocks xmlns:a="http://schemas.openxmlformats.org/drawingml/2006/main" noChangeAspect="1"/>
           </p:cNvPicPr>
           <p:nvPr/>
         </p:nvPicPr>
         <p:blipFill>
-          <a:blip xmlns:r="http://schemas.openxmlformats.org/officeDocument/2006/relationships" xmlns:a="http://schemas.openxmlformats.org/drawingml/2006/main" r:embed="Rc44280a881de4edc"/>
+          <a:blip xmlns:r="http://schemas.openxmlformats.org/officeDocument/2006/relationships" xmlns:a="http://schemas.openxmlformats.org/drawingml/2006/main" r:embed="R87c3443be04f4da6"/>
           <a:stretch xmlns:a="http://schemas.openxmlformats.org/drawingml/2006/main"/>
         </p:blipFill>
         <p:spPr>
@@ -10942,7 +11701,7 @@
           <p:cNvPr id="6" name="eyebrow">
             <a:extLst xmlns:a="http://schemas.openxmlformats.org/drawingml/2006/main">
               <a:ext uri="{FF2B5EF4-FFF2-40B4-BE49-F238E27FC236}">
-                <a16:creationId xmlns:a16="http://schemas.microsoft.com/office/drawing/2014/main" id="{2AA7B02E-99F6-4C9C-BA41-7E7C32EE8895}"/>
+                <a16:creationId xmlns:a16="http://schemas.microsoft.com/office/drawing/2014/main" id="{17F94529-2DBE-42D1-A135-C35951445B04}"/>
               </a:ext>
             </a:extLst>
           </p:cNvPr>
@@ -10990,10 +11749,69 @@
       </p:sp>
       <p:sp>
         <p:nvSpPr>
-          <p:cNvPr id="7" name="footer-rule">
-            <a:extLst xmlns:a="http://schemas.openxmlformats.org/drawingml/2006/main">
-              <a:ext uri="{FF2B5EF4-FFF2-40B4-BE49-F238E27FC236}">
-                <a16:creationId xmlns:a16="http://schemas.microsoft.com/office/drawing/2014/main" id="{E7B44F28-477F-4D0B-BCB4-019EC691CA8F}"/>
+          <p:cNvPr id="7" name="rescue-point-logo-background">
+            <a:extLst xmlns:a="http://schemas.openxmlformats.org/drawingml/2006/main">
+              <a:ext uri="{FF2B5EF4-FFF2-40B4-BE49-F238E27FC236}">
+                <a16:creationId xmlns:a16="http://schemas.microsoft.com/office/drawing/2014/main" id="{6BDBCD6D-4A89-4FBB-ACC3-51CD54083613}"/>
+              </a:ext>
+            </a:extLst>
+          </p:cNvPr>
+          <p:cNvSpPr>
+            <a:spLocks xmlns:a="http://schemas.openxmlformats.org/drawingml/2006/main" noGrp="1"/>
+          </p:cNvSpPr>
+          <p:nvPr/>
+        </p:nvSpPr>
+        <p:spPr>
+          <a:xfrm xmlns:a="http://schemas.openxmlformats.org/drawingml/2006/main">
+            <a:off x="9772650" y="133350"/>
+            <a:ext cx="1733550" cy="457200"/>
+          </a:xfrm>
+          <a:prstGeom xmlns:a="http://schemas.openxmlformats.org/drawingml/2006/main" prst="roundRect">
+            <a:avLst>
+              <a:gd name="adj" fmla="val 16667"/>
+            </a:avLst>
+          </a:prstGeom>
+          <a:solidFill xmlns:a="http://schemas.openxmlformats.org/drawingml/2006/main">
+            <a:srgbClr val="06142E"/>
+          </a:solidFill>
+          <a:ln xmlns:a="http://schemas.openxmlformats.org/drawingml/2006/main" w="9525">
+            <a:solidFill>
+              <a:srgbClr val="1EC5FF">
+                <a:alpha val="33333"/>
+              </a:srgbClr>
+            </a:solidFill>
+            <a:prstDash val="solid"/>
+          </a:ln>
+        </p:spPr>
+      </p:sp>
+      <p:pic>
+        <p:nvPicPr>
+          <p:cNvPr id="22" name="" descr="Diagrama didático autoral que apresenta: Uma métrica declarada uma vez pode gerar o mesmo SQL para todos os consumidores. — A pergunta que guia a aula."/>
+          <p:cNvPicPr>
+            <a:picLocks xmlns:a="http://schemas.openxmlformats.org/drawingml/2006/main" noChangeAspect="1"/>
+          </p:cNvPicPr>
+          <p:nvPr/>
+        </p:nvPicPr>
+        <p:blipFill>
+          <a:blip xmlns:r="http://schemas.openxmlformats.org/officeDocument/2006/relationships" xmlns:a="http://schemas.openxmlformats.org/drawingml/2006/main" r:embed="Rd557af7ad79e40e2"/>
+          <a:stretch xmlns:a="http://schemas.openxmlformats.org/drawingml/2006/main"/>
+        </p:blipFill>
+        <p:spPr>
+          <a:xfrm xmlns:a="http://schemas.openxmlformats.org/drawingml/2006/main">
+            <a:off x="9893718" y="209550"/>
+            <a:ext cx="1491414" cy="323850"/>
+          </a:xfrm>
+          <a:prstGeom xmlns:a="http://schemas.openxmlformats.org/drawingml/2006/main" prst="rect">
+            <a:avLst/>
+          </a:prstGeom>
+        </p:spPr>
+      </p:pic>
+      <p:sp>
+        <p:nvSpPr>
+          <p:cNvPr id="9" name="footer-rule">
+            <a:extLst xmlns:a="http://schemas.openxmlformats.org/drawingml/2006/main">
+              <a:ext uri="{FF2B5EF4-FFF2-40B4-BE49-F238E27FC236}">
+                <a16:creationId xmlns:a16="http://schemas.microsoft.com/office/drawing/2014/main" id="{6E21E96C-3DE2-481B-86BD-5E836A555771}"/>
               </a:ext>
             </a:extLst>
           </p:cNvPr>
@@ -11023,10 +11841,10 @@
       </p:sp>
       <p:sp>
         <p:nvSpPr>
-          <p:cNvPr id="8" name="footer">
-            <a:extLst xmlns:a="http://schemas.openxmlformats.org/drawingml/2006/main">
-              <a:ext uri="{FF2B5EF4-FFF2-40B4-BE49-F238E27FC236}">
-                <a16:creationId xmlns:a16="http://schemas.microsoft.com/office/drawing/2014/main" id="{A3DB8FD3-19E1-4019-B30C-A2015F9CFDA8}"/>
+          <p:cNvPr id="10" name="footer">
+            <a:extLst xmlns:a="http://schemas.openxmlformats.org/drawingml/2006/main">
+              <a:ext uri="{FF2B5EF4-FFF2-40B4-BE49-F238E27FC236}">
+                <a16:creationId xmlns:a16="http://schemas.microsoft.com/office/drawing/2014/main" id="{AF687146-6392-4D26-9269-94EFDB3F5135}"/>
               </a:ext>
             </a:extLst>
           </p:cNvPr>
@@ -11078,10 +11896,10 @@
       </p:sp>
       <p:sp>
         <p:nvSpPr>
-          <p:cNvPr id="9" name="page-number">
-            <a:extLst xmlns:a="http://schemas.openxmlformats.org/drawingml/2006/main">
-              <a:ext uri="{FF2B5EF4-FFF2-40B4-BE49-F238E27FC236}">
-                <a16:creationId xmlns:a16="http://schemas.microsoft.com/office/drawing/2014/main" id="{9F510080-B766-448B-8849-140606EB9C17}"/>
+          <p:cNvPr id="11" name="page-number">
+            <a:extLst xmlns:a="http://schemas.openxmlformats.org/drawingml/2006/main">
+              <a:ext uri="{FF2B5EF4-FFF2-40B4-BE49-F238E27FC236}">
+                <a16:creationId xmlns:a16="http://schemas.microsoft.com/office/drawing/2014/main" id="{780E9D27-A3BF-42D4-BEB6-8B98EE89D98D}"/>
               </a:ext>
             </a:extLst>
           </p:cNvPr>
@@ -11134,7 +11952,7 @@
     </p:spTree>
     <p:extLst>
       <p:ext uri="{BB962C8B-B14F-4D97-AF65-F5344CB8AC3E}">
-        <p14:creationId xmlns:p14="http://schemas.microsoft.com/office/powerpoint/2010/main" val="644979457"/>
+        <p14:creationId xmlns:p14="http://schemas.microsoft.com/office/powerpoint/2010/main" val="1928728863"/>
       </p:ext>
     </p:extLst>
   </p:cSld>
@@ -11162,10 +11980,10 @@
       </p:grpSpPr>
       <p:sp>
         <p:nvSpPr>
-          <p:cNvPr id="7" name="slide-title">
-            <a:extLst xmlns:a="http://schemas.openxmlformats.org/drawingml/2006/main">
-              <a:ext uri="{FF2B5EF4-FFF2-40B4-BE49-F238E27FC236}">
-                <a16:creationId xmlns:a16="http://schemas.microsoft.com/office/drawing/2014/main" id="{56E419CD-E643-4B89-ADAE-18E0B68D5EB1}"/>
+          <p:cNvPr id="9" name="slide-title">
+            <a:extLst xmlns:a="http://schemas.openxmlformats.org/drawingml/2006/main">
+              <a:ext uri="{FF2B5EF4-FFF2-40B4-BE49-F238E27FC236}">
+                <a16:creationId xmlns:a16="http://schemas.microsoft.com/office/drawing/2014/main" id="{1EE1682D-7EC8-446A-96BD-B66C142A3A3C}"/>
               </a:ext>
             </a:extLst>
           </p:cNvPr>
@@ -11216,7 +12034,7 @@
           <p:cNvPr id="2" name="bullets">
             <a:extLst xmlns:a="http://schemas.openxmlformats.org/drawingml/2006/main">
               <a:ext uri="{FF2B5EF4-FFF2-40B4-BE49-F238E27FC236}">
-                <a16:creationId xmlns:a16="http://schemas.microsoft.com/office/drawing/2014/main" id="{B1B968AE-2F73-4E6A-BF9B-D5048B310F8F}"/>
+                <a16:creationId xmlns:a16="http://schemas.microsoft.com/office/drawing/2014/main" id="{25C74AD7-EF82-457C-AF5C-DAD86F6E6DFE}"/>
               </a:ext>
             </a:extLst>
           </p:cNvPr>
@@ -11303,7 +12121,7 @@
           <p:cNvPr id="3" name="eyebrow">
             <a:extLst xmlns:a="http://schemas.openxmlformats.org/drawingml/2006/main">
               <a:ext uri="{FF2B5EF4-FFF2-40B4-BE49-F238E27FC236}">
-                <a16:creationId xmlns:a16="http://schemas.microsoft.com/office/drawing/2014/main" id="{97AEF8FD-1EE3-49B0-89A4-F8F4957838E9}"/>
+                <a16:creationId xmlns:a16="http://schemas.microsoft.com/office/drawing/2014/main" id="{A13B5EC5-E84F-4F1C-8C87-394F62D77A06}"/>
               </a:ext>
             </a:extLst>
           </p:cNvPr>
@@ -11351,10 +12169,69 @@
       </p:sp>
       <p:sp>
         <p:nvSpPr>
-          <p:cNvPr id="4" name="footer-rule">
-            <a:extLst xmlns:a="http://schemas.openxmlformats.org/drawingml/2006/main">
-              <a:ext uri="{FF2B5EF4-FFF2-40B4-BE49-F238E27FC236}">
-                <a16:creationId xmlns:a16="http://schemas.microsoft.com/office/drawing/2014/main" id="{C4835122-2A07-49EF-B693-287B8CA3C37D}"/>
+          <p:cNvPr id="4" name="rescue-point-logo-background">
+            <a:extLst xmlns:a="http://schemas.openxmlformats.org/drawingml/2006/main">
+              <a:ext uri="{FF2B5EF4-FFF2-40B4-BE49-F238E27FC236}">
+                <a16:creationId xmlns:a16="http://schemas.microsoft.com/office/drawing/2014/main" id="{DF770728-F004-4E3D-9BAB-3AE28B972C85}"/>
+              </a:ext>
+            </a:extLst>
+          </p:cNvPr>
+          <p:cNvSpPr>
+            <a:spLocks xmlns:a="http://schemas.openxmlformats.org/drawingml/2006/main" noGrp="1"/>
+          </p:cNvSpPr>
+          <p:nvPr/>
+        </p:nvSpPr>
+        <p:spPr>
+          <a:xfrm xmlns:a="http://schemas.openxmlformats.org/drawingml/2006/main">
+            <a:off x="9772650" y="133350"/>
+            <a:ext cx="1733550" cy="457200"/>
+          </a:xfrm>
+          <a:prstGeom xmlns:a="http://schemas.openxmlformats.org/drawingml/2006/main" prst="roundRect">
+            <a:avLst>
+              <a:gd name="adj" fmla="val 16667"/>
+            </a:avLst>
+          </a:prstGeom>
+          <a:solidFill xmlns:a="http://schemas.openxmlformats.org/drawingml/2006/main">
+            <a:srgbClr val="06142E"/>
+          </a:solidFill>
+          <a:ln xmlns:a="http://schemas.openxmlformats.org/drawingml/2006/main" w="9525">
+            <a:solidFill>
+              <a:srgbClr val="1EC5FF">
+                <a:alpha val="33333"/>
+              </a:srgbClr>
+            </a:solidFill>
+            <a:prstDash val="solid"/>
+          </a:ln>
+        </p:spPr>
+      </p:sp>
+      <p:pic>
+        <p:nvPicPr>
+          <p:cNvPr id="15" name="" descr="Figura oficial da documentação dbt usada para explicar: Limitações que precisam permanecer visíveis — • MetricFlow não decide a definição da métrica."/>
+          <p:cNvPicPr>
+            <a:picLocks xmlns:a="http://schemas.openxmlformats.org/drawingml/2006/main" noChangeAspect="1"/>
+          </p:cNvPicPr>
+          <p:nvPr/>
+        </p:nvPicPr>
+        <p:blipFill>
+          <a:blip xmlns:r="http://schemas.openxmlformats.org/officeDocument/2006/relationships" xmlns:a="http://schemas.openxmlformats.org/drawingml/2006/main" r:embed="R8eebca12db2f4535"/>
+          <a:stretch xmlns:a="http://schemas.openxmlformats.org/drawingml/2006/main"/>
+        </p:blipFill>
+        <p:spPr>
+          <a:xfrm xmlns:a="http://schemas.openxmlformats.org/drawingml/2006/main">
+            <a:off x="9893718" y="209550"/>
+            <a:ext cx="1491414" cy="323850"/>
+          </a:xfrm>
+          <a:prstGeom xmlns:a="http://schemas.openxmlformats.org/drawingml/2006/main" prst="rect">
+            <a:avLst/>
+          </a:prstGeom>
+        </p:spPr>
+      </p:pic>
+      <p:sp>
+        <p:nvSpPr>
+          <p:cNvPr id="6" name="footer-rule">
+            <a:extLst xmlns:a="http://schemas.openxmlformats.org/drawingml/2006/main">
+              <a:ext uri="{FF2B5EF4-FFF2-40B4-BE49-F238E27FC236}">
+                <a16:creationId xmlns:a16="http://schemas.microsoft.com/office/drawing/2014/main" id="{7E8C5B42-EBCF-4979-9525-C8FA29CC7AA8}"/>
               </a:ext>
             </a:extLst>
           </p:cNvPr>
@@ -11384,10 +12261,10 @@
       </p:sp>
       <p:sp>
         <p:nvSpPr>
-          <p:cNvPr id="5" name="footer">
-            <a:extLst xmlns:a="http://schemas.openxmlformats.org/drawingml/2006/main">
-              <a:ext uri="{FF2B5EF4-FFF2-40B4-BE49-F238E27FC236}">
-                <a16:creationId xmlns:a16="http://schemas.microsoft.com/office/drawing/2014/main" id="{31C9D9B7-2D6E-4BA3-96F3-E758617899C0}"/>
+          <p:cNvPr id="7" name="footer">
+            <a:extLst xmlns:a="http://schemas.openxmlformats.org/drawingml/2006/main">
+              <a:ext uri="{FF2B5EF4-FFF2-40B4-BE49-F238E27FC236}">
+                <a16:creationId xmlns:a16="http://schemas.microsoft.com/office/drawing/2014/main" id="{EF37246F-2A33-400D-9F78-C2C47246E1E8}"/>
               </a:ext>
             </a:extLst>
           </p:cNvPr>
@@ -11439,10 +12316,10 @@
       </p:sp>
       <p:sp>
         <p:nvSpPr>
-          <p:cNvPr id="6" name="page-number">
-            <a:extLst xmlns:a="http://schemas.openxmlformats.org/drawingml/2006/main">
-              <a:ext uri="{FF2B5EF4-FFF2-40B4-BE49-F238E27FC236}">
-                <a16:creationId xmlns:a16="http://schemas.microsoft.com/office/drawing/2014/main" id="{3FC381C6-6E31-4160-B833-A85D1CC9295A}"/>
+          <p:cNvPr id="8" name="page-number">
+            <a:extLst xmlns:a="http://schemas.openxmlformats.org/drawingml/2006/main">
+              <a:ext uri="{FF2B5EF4-FFF2-40B4-BE49-F238E27FC236}">
+                <a16:creationId xmlns:a16="http://schemas.microsoft.com/office/drawing/2014/main" id="{742F5507-4FD2-47FF-8811-1BEDD313F80D}"/>
               </a:ext>
             </a:extLst>
           </p:cNvPr>
@@ -11495,7 +12372,7 @@
     </p:spTree>
     <p:extLst>
       <p:ext uri="{BB962C8B-B14F-4D97-AF65-F5344CB8AC3E}">
-        <p14:creationId xmlns:p14="http://schemas.microsoft.com/office/powerpoint/2010/main" val="623515687"/>
+        <p14:creationId xmlns:p14="http://schemas.microsoft.com/office/powerpoint/2010/main" val="563398886"/>
       </p:ext>
     </p:extLst>
   </p:cSld>
@@ -11531,10 +12408,10 @@
       </p:grpSpPr>
       <p:sp>
         <p:nvSpPr>
-          <p:cNvPr id="10" name="radar-label">
-            <a:extLst xmlns:a="http://schemas.openxmlformats.org/drawingml/2006/main">
-              <a:ext uri="{FF2B5EF4-FFF2-40B4-BE49-F238E27FC236}">
-                <a16:creationId xmlns:a16="http://schemas.microsoft.com/office/drawing/2014/main" id="{93138910-4031-4DF7-A1A5-020DD3EFCC4A}"/>
+          <p:cNvPr id="12" name="radar-label">
+            <a:extLst xmlns:a="http://schemas.openxmlformats.org/drawingml/2006/main">
+              <a:ext uri="{FF2B5EF4-FFF2-40B4-BE49-F238E27FC236}">
+                <a16:creationId xmlns:a16="http://schemas.microsoft.com/office/drawing/2014/main" id="{B8A4C60F-8F95-48A2-8416-F8F74F97C0BF}"/>
               </a:ext>
             </a:extLst>
           </p:cNvPr>
@@ -11585,7 +12462,7 @@
           <p:cNvPr id="2" name="radar-text">
             <a:extLst xmlns:a="http://schemas.openxmlformats.org/drawingml/2006/main">
               <a:ext uri="{FF2B5EF4-FFF2-40B4-BE49-F238E27FC236}">
-                <a16:creationId xmlns:a16="http://schemas.microsoft.com/office/drawing/2014/main" id="{55A3C57B-9F72-4ABA-8992-D889E00F213C}"/>
+                <a16:creationId xmlns:a16="http://schemas.microsoft.com/office/drawing/2014/main" id="{EB2F1901-F433-48DC-9B2E-3B8BFCF5EF66}"/>
               </a:ext>
             </a:extLst>
           </p:cNvPr>
@@ -11636,7 +12513,7 @@
           <p:cNvPr id="3" name="radar-rule">
             <a:extLst xmlns:a="http://schemas.openxmlformats.org/drawingml/2006/main">
               <a:ext uri="{FF2B5EF4-FFF2-40B4-BE49-F238E27FC236}">
-                <a16:creationId xmlns:a16="http://schemas.microsoft.com/office/drawing/2014/main" id="{7E9BCCAF-7C9A-4090-BD9F-73A4D7851502}"/>
+                <a16:creationId xmlns:a16="http://schemas.microsoft.com/office/drawing/2014/main" id="{293F8256-4354-4A8B-BBBF-CFE0CE50840A}"/>
               </a:ext>
             </a:extLst>
           </p:cNvPr>
@@ -11687,7 +12564,7 @@
           <p:cNvPr id="4" name="ambient-glow">
             <a:extLst xmlns:a="http://schemas.openxmlformats.org/drawingml/2006/main">
               <a:ext uri="{FF2B5EF4-FFF2-40B4-BE49-F238E27FC236}">
-                <a16:creationId xmlns:a16="http://schemas.microsoft.com/office/drawing/2014/main" id="{5BFBA36B-23F5-46AA-B45D-C56B995C6F63}"/>
+                <a16:creationId xmlns:a16="http://schemas.microsoft.com/office/drawing/2014/main" id="{8E8C499D-958B-4992-85BF-F474DA3DFA76}"/>
               </a:ext>
             </a:extLst>
           </p:cNvPr>
@@ -11724,7 +12601,7 @@
           <p:cNvPr id="5" name="ambient-core">
             <a:extLst xmlns:a="http://schemas.openxmlformats.org/drawingml/2006/main">
               <a:ext uri="{FF2B5EF4-FFF2-40B4-BE49-F238E27FC236}">
-                <a16:creationId xmlns:a16="http://schemas.microsoft.com/office/drawing/2014/main" id="{A761E5AD-1ABF-4D56-90F3-5497C914E7B9}"/>
+                <a16:creationId xmlns:a16="http://schemas.microsoft.com/office/drawing/2014/main" id="{7F118147-0E01-4FD2-9ED4-AE5EC103EBD7}"/>
               </a:ext>
             </a:extLst>
           </p:cNvPr>
@@ -11761,7 +12638,7 @@
           <p:cNvPr id="6" name="eyebrow">
             <a:extLst xmlns:a="http://schemas.openxmlformats.org/drawingml/2006/main">
               <a:ext uri="{FF2B5EF4-FFF2-40B4-BE49-F238E27FC236}">
-                <a16:creationId xmlns:a16="http://schemas.microsoft.com/office/drawing/2014/main" id="{77D74314-E319-4E8D-8AA0-88D4A42E2CE0}"/>
+                <a16:creationId xmlns:a16="http://schemas.microsoft.com/office/drawing/2014/main" id="{DFFC2587-7647-44B7-A936-40DB0ECE3B06}"/>
               </a:ext>
             </a:extLst>
           </p:cNvPr>
@@ -11809,10 +12686,69 @@
       </p:sp>
       <p:sp>
         <p:nvSpPr>
-          <p:cNvPr id="7" name="footer-rule">
-            <a:extLst xmlns:a="http://schemas.openxmlformats.org/drawingml/2006/main">
-              <a:ext uri="{FF2B5EF4-FFF2-40B4-BE49-F238E27FC236}">
-                <a16:creationId xmlns:a16="http://schemas.microsoft.com/office/drawing/2014/main" id="{7E158996-ABE1-4CA6-83D6-DC0FBA791D35}"/>
+          <p:cNvPr id="7" name="rescue-point-logo-background">
+            <a:extLst xmlns:a="http://schemas.openxmlformats.org/drawingml/2006/main">
+              <a:ext uri="{FF2B5EF4-FFF2-40B4-BE49-F238E27FC236}">
+                <a16:creationId xmlns:a16="http://schemas.microsoft.com/office/drawing/2014/main" id="{4A8C7A1C-ECB7-4FC9-A9A3-44CBC16E472B}"/>
+              </a:ext>
+            </a:extLst>
+          </p:cNvPr>
+          <p:cNvSpPr>
+            <a:spLocks xmlns:a="http://schemas.openxmlformats.org/drawingml/2006/main" noGrp="1"/>
+          </p:cNvSpPr>
+          <p:nvPr/>
+        </p:nvSpPr>
+        <p:spPr>
+          <a:xfrm xmlns:a="http://schemas.openxmlformats.org/drawingml/2006/main">
+            <a:off x="9772650" y="133350"/>
+            <a:ext cx="1733550" cy="457200"/>
+          </a:xfrm>
+          <a:prstGeom xmlns:a="http://schemas.openxmlformats.org/drawingml/2006/main" prst="roundRect">
+            <a:avLst>
+              <a:gd name="adj" fmla="val 16667"/>
+            </a:avLst>
+          </a:prstGeom>
+          <a:solidFill xmlns:a="http://schemas.openxmlformats.org/drawingml/2006/main">
+            <a:srgbClr val="06142E"/>
+          </a:solidFill>
+          <a:ln xmlns:a="http://schemas.openxmlformats.org/drawingml/2006/main" w="9525">
+            <a:solidFill>
+              <a:srgbClr val="1EC5FF">
+                <a:alpha val="33333"/>
+              </a:srgbClr>
+            </a:solidFill>
+            <a:prstDash val="solid"/>
+          </a:ln>
+        </p:spPr>
+      </p:sp>
+      <p:pic>
+        <p:nvPicPr>
+          <p:cNvPr id="21" name="" descr="Figura oficial da documentação dbt usada para explicar: RADAR — A matriz de suporte do Core 2.0/Fusion não é assumida igual ao Core 1.12.."/>
+          <p:cNvPicPr>
+            <a:picLocks xmlns:a="http://schemas.openxmlformats.org/drawingml/2006/main" noChangeAspect="1"/>
+          </p:cNvPicPr>
+          <p:nvPr/>
+        </p:nvPicPr>
+        <p:blipFill>
+          <a:blip xmlns:r="http://schemas.openxmlformats.org/officeDocument/2006/relationships" xmlns:a="http://schemas.openxmlformats.org/drawingml/2006/main" r:embed="Ra21194d9ffb049c6"/>
+          <a:stretch xmlns:a="http://schemas.openxmlformats.org/drawingml/2006/main"/>
+        </p:blipFill>
+        <p:spPr>
+          <a:xfrm xmlns:a="http://schemas.openxmlformats.org/drawingml/2006/main">
+            <a:off x="9893718" y="209550"/>
+            <a:ext cx="1491414" cy="323850"/>
+          </a:xfrm>
+          <a:prstGeom xmlns:a="http://schemas.openxmlformats.org/drawingml/2006/main" prst="rect">
+            <a:avLst/>
+          </a:prstGeom>
+        </p:spPr>
+      </p:pic>
+      <p:sp>
+        <p:nvSpPr>
+          <p:cNvPr id="9" name="footer-rule">
+            <a:extLst xmlns:a="http://schemas.openxmlformats.org/drawingml/2006/main">
+              <a:ext uri="{FF2B5EF4-FFF2-40B4-BE49-F238E27FC236}">
+                <a16:creationId xmlns:a16="http://schemas.microsoft.com/office/drawing/2014/main" id="{07361009-5DF8-451B-8BFC-E167831FAA92}"/>
               </a:ext>
             </a:extLst>
           </p:cNvPr>
@@ -11842,10 +12778,10 @@
       </p:sp>
       <p:sp>
         <p:nvSpPr>
-          <p:cNvPr id="8" name="footer">
-            <a:extLst xmlns:a="http://schemas.openxmlformats.org/drawingml/2006/main">
-              <a:ext uri="{FF2B5EF4-FFF2-40B4-BE49-F238E27FC236}">
-                <a16:creationId xmlns:a16="http://schemas.microsoft.com/office/drawing/2014/main" id="{DA383831-B679-4B1D-840F-C791D2E59574}"/>
+          <p:cNvPr id="10" name="footer">
+            <a:extLst xmlns:a="http://schemas.openxmlformats.org/drawingml/2006/main">
+              <a:ext uri="{FF2B5EF4-FFF2-40B4-BE49-F238E27FC236}">
+                <a16:creationId xmlns:a16="http://schemas.microsoft.com/office/drawing/2014/main" id="{335F3359-E189-4961-966A-1384DA5F834D}"/>
               </a:ext>
             </a:extLst>
           </p:cNvPr>
@@ -11897,10 +12833,10 @@
       </p:sp>
       <p:sp>
         <p:nvSpPr>
-          <p:cNvPr id="9" name="page-number">
-            <a:extLst xmlns:a="http://schemas.openxmlformats.org/drawingml/2006/main">
-              <a:ext uri="{FF2B5EF4-FFF2-40B4-BE49-F238E27FC236}">
-                <a16:creationId xmlns:a16="http://schemas.microsoft.com/office/drawing/2014/main" id="{DEE3832C-EACA-455C-92C2-344410EAD0EC}"/>
+          <p:cNvPr id="11" name="page-number">
+            <a:extLst xmlns:a="http://schemas.openxmlformats.org/drawingml/2006/main">
+              <a:ext uri="{FF2B5EF4-FFF2-40B4-BE49-F238E27FC236}">
+                <a16:creationId xmlns:a16="http://schemas.microsoft.com/office/drawing/2014/main" id="{E7AD6D3E-D745-4264-8F6B-BD33C5268E50}"/>
               </a:ext>
             </a:extLst>
           </p:cNvPr>
@@ -11953,7 +12889,7 @@
     </p:spTree>
     <p:extLst>
       <p:ext uri="{BB962C8B-B14F-4D97-AF65-F5344CB8AC3E}">
-        <p14:creationId xmlns:p14="http://schemas.microsoft.com/office/powerpoint/2010/main" val="501415834"/>
+        <p14:creationId xmlns:p14="http://schemas.microsoft.com/office/powerpoint/2010/main" val="172247662"/>
       </p:ext>
     </p:extLst>
   </p:cSld>
@@ -11981,10 +12917,10 @@
       </p:grpSpPr>
       <p:sp>
         <p:nvSpPr>
-          <p:cNvPr id="8" name="cta-label">
-            <a:extLst xmlns:a="http://schemas.openxmlformats.org/drawingml/2006/main">
-              <a:ext uri="{FF2B5EF4-FFF2-40B4-BE49-F238E27FC236}">
-                <a16:creationId xmlns:a16="http://schemas.microsoft.com/office/drawing/2014/main" id="{F0C854E1-352F-4FCD-9220-E2C69181E39D}"/>
+          <p:cNvPr id="10" name="cta-label">
+            <a:extLst xmlns:a="http://schemas.openxmlformats.org/drawingml/2006/main">
+              <a:ext uri="{FF2B5EF4-FFF2-40B4-BE49-F238E27FC236}">
+                <a16:creationId xmlns:a16="http://schemas.microsoft.com/office/drawing/2014/main" id="{ED1E69E3-ED15-4390-BD2B-1CBEEE59E970}"/>
               </a:ext>
             </a:extLst>
           </p:cNvPr>
@@ -12035,7 +12971,7 @@
           <p:cNvPr id="2" name="cta">
             <a:extLst xmlns:a="http://schemas.openxmlformats.org/drawingml/2006/main">
               <a:ext uri="{FF2B5EF4-FFF2-40B4-BE49-F238E27FC236}">
-                <a16:creationId xmlns:a16="http://schemas.microsoft.com/office/drawing/2014/main" id="{5975FEAC-6FAC-4E3E-AA5B-8B74C992FB8F}"/>
+                <a16:creationId xmlns:a16="http://schemas.microsoft.com/office/drawing/2014/main" id="{D7C65A69-B4A6-4771-92F6-F17B3C7F6376}"/>
               </a:ext>
             </a:extLst>
           </p:cNvPr>
@@ -12086,7 +13022,7 @@
           <p:cNvPr id="3" name="cta-meta">
             <a:extLst xmlns:a="http://schemas.openxmlformats.org/drawingml/2006/main">
               <a:ext uri="{FF2B5EF4-FFF2-40B4-BE49-F238E27FC236}">
-                <a16:creationId xmlns:a16="http://schemas.microsoft.com/office/drawing/2014/main" id="{27C4CE70-9570-45F0-B753-533197CFE1F6}"/>
+                <a16:creationId xmlns:a16="http://schemas.microsoft.com/office/drawing/2014/main" id="{76C55B18-C411-4542-8881-58F47898807E}"/>
               </a:ext>
             </a:extLst>
           </p:cNvPr>
@@ -12137,7 +13073,7 @@
           <p:cNvPr id="4" name="eyebrow">
             <a:extLst xmlns:a="http://schemas.openxmlformats.org/drawingml/2006/main">
               <a:ext uri="{FF2B5EF4-FFF2-40B4-BE49-F238E27FC236}">
-                <a16:creationId xmlns:a16="http://schemas.microsoft.com/office/drawing/2014/main" id="{2017792B-5897-436F-9C65-FB454AA48AAD}"/>
+                <a16:creationId xmlns:a16="http://schemas.microsoft.com/office/drawing/2014/main" id="{390B8AA3-E652-4380-98CC-FCD0FF245498}"/>
               </a:ext>
             </a:extLst>
           </p:cNvPr>
@@ -12185,10 +13121,69 @@
       </p:sp>
       <p:sp>
         <p:nvSpPr>
-          <p:cNvPr id="5" name="footer-rule">
-            <a:extLst xmlns:a="http://schemas.openxmlformats.org/drawingml/2006/main">
-              <a:ext uri="{FF2B5EF4-FFF2-40B4-BE49-F238E27FC236}">
-                <a16:creationId xmlns:a16="http://schemas.microsoft.com/office/drawing/2014/main" id="{6881DF72-999C-4052-97D5-01BB9DAF04AB}"/>
+          <p:cNvPr id="5" name="rescue-point-logo-background">
+            <a:extLst xmlns:a="http://schemas.openxmlformats.org/drawingml/2006/main">
+              <a:ext uri="{FF2B5EF4-FFF2-40B4-BE49-F238E27FC236}">
+                <a16:creationId xmlns:a16="http://schemas.microsoft.com/office/drawing/2014/main" id="{24B59471-F70F-40ED-8502-AC77F8A24C15}"/>
+              </a:ext>
+            </a:extLst>
+          </p:cNvPr>
+          <p:cNvSpPr>
+            <a:spLocks xmlns:a="http://schemas.openxmlformats.org/drawingml/2006/main" noGrp="1"/>
+          </p:cNvSpPr>
+          <p:nvPr/>
+        </p:nvSpPr>
+        <p:spPr>
+          <a:xfrm xmlns:a="http://schemas.openxmlformats.org/drawingml/2006/main">
+            <a:off x="9772650" y="133350"/>
+            <a:ext cx="1733550" cy="457200"/>
+          </a:xfrm>
+          <a:prstGeom xmlns:a="http://schemas.openxmlformats.org/drawingml/2006/main" prst="roundRect">
+            <a:avLst>
+              <a:gd name="adj" fmla="val 16667"/>
+            </a:avLst>
+          </a:prstGeom>
+          <a:solidFill xmlns:a="http://schemas.openxmlformats.org/drawingml/2006/main">
+            <a:srgbClr val="06142E"/>
+          </a:solidFill>
+          <a:ln xmlns:a="http://schemas.openxmlformats.org/drawingml/2006/main" w="9525">
+            <a:solidFill>
+              <a:srgbClr val="1EC5FF">
+                <a:alpha val="33333"/>
+              </a:srgbClr>
+            </a:solidFill>
+            <a:prstDash val="solid"/>
+          </a:ln>
+        </p:spPr>
+      </p:sp>
+      <p:pic>
+        <p:nvPicPr>
+          <p:cNvPr id="17" name="" descr="Figura oficial da documentação dbt usada para explicar: PRÓXIMO PASSO — Implemente uma métrica simples e uma razão e reconcilie os valores.."/>
+          <p:cNvPicPr>
+            <a:picLocks xmlns:a="http://schemas.openxmlformats.org/drawingml/2006/main" noChangeAspect="1"/>
+          </p:cNvPicPr>
+          <p:nvPr/>
+        </p:nvPicPr>
+        <p:blipFill>
+          <a:blip xmlns:r="http://schemas.openxmlformats.org/officeDocument/2006/relationships" xmlns:a="http://schemas.openxmlformats.org/drawingml/2006/main" r:embed="Rea67029ad65f48b0"/>
+          <a:stretch xmlns:a="http://schemas.openxmlformats.org/drawingml/2006/main"/>
+        </p:blipFill>
+        <p:spPr>
+          <a:xfrm xmlns:a="http://schemas.openxmlformats.org/drawingml/2006/main">
+            <a:off x="9893718" y="209550"/>
+            <a:ext cx="1491414" cy="323850"/>
+          </a:xfrm>
+          <a:prstGeom xmlns:a="http://schemas.openxmlformats.org/drawingml/2006/main" prst="rect">
+            <a:avLst/>
+          </a:prstGeom>
+        </p:spPr>
+      </p:pic>
+      <p:sp>
+        <p:nvSpPr>
+          <p:cNvPr id="7" name="footer-rule">
+            <a:extLst xmlns:a="http://schemas.openxmlformats.org/drawingml/2006/main">
+              <a:ext uri="{FF2B5EF4-FFF2-40B4-BE49-F238E27FC236}">
+                <a16:creationId xmlns:a16="http://schemas.microsoft.com/office/drawing/2014/main" id="{2805E4E3-C0B4-4D03-868B-0E71E945B21B}"/>
               </a:ext>
             </a:extLst>
           </p:cNvPr>
@@ -12218,10 +13213,10 @@
       </p:sp>
       <p:sp>
         <p:nvSpPr>
-          <p:cNvPr id="6" name="footer">
-            <a:extLst xmlns:a="http://schemas.openxmlformats.org/drawingml/2006/main">
-              <a:ext uri="{FF2B5EF4-FFF2-40B4-BE49-F238E27FC236}">
-                <a16:creationId xmlns:a16="http://schemas.microsoft.com/office/drawing/2014/main" id="{712C6B73-7A4B-46E5-B716-4B4CCF276264}"/>
+          <p:cNvPr id="8" name="footer">
+            <a:extLst xmlns:a="http://schemas.openxmlformats.org/drawingml/2006/main">
+              <a:ext uri="{FF2B5EF4-FFF2-40B4-BE49-F238E27FC236}">
+                <a16:creationId xmlns:a16="http://schemas.microsoft.com/office/drawing/2014/main" id="{265D8E31-DA5B-4AFD-950B-CB0C3E6B1F8D}"/>
               </a:ext>
             </a:extLst>
           </p:cNvPr>
@@ -12273,10 +13268,10 @@
       </p:sp>
       <p:sp>
         <p:nvSpPr>
-          <p:cNvPr id="7" name="page-number">
-            <a:extLst xmlns:a="http://schemas.openxmlformats.org/drawingml/2006/main">
-              <a:ext uri="{FF2B5EF4-FFF2-40B4-BE49-F238E27FC236}">
-                <a16:creationId xmlns:a16="http://schemas.microsoft.com/office/drawing/2014/main" id="{0251878B-295F-4DE6-80CE-CDDA842A8526}"/>
+          <p:cNvPr id="9" name="page-number">
+            <a:extLst xmlns:a="http://schemas.openxmlformats.org/drawingml/2006/main">
+              <a:ext uri="{FF2B5EF4-FFF2-40B4-BE49-F238E27FC236}">
+                <a16:creationId xmlns:a16="http://schemas.microsoft.com/office/drawing/2014/main" id="{B9DECF53-024E-40DB-BA27-FF4D2FEC294F}"/>
               </a:ext>
             </a:extLst>
           </p:cNvPr>
@@ -12329,7 +13324,7 @@
     </p:spTree>
     <p:extLst>
       <p:ext uri="{BB962C8B-B14F-4D97-AF65-F5344CB8AC3E}">
-        <p14:creationId xmlns:p14="http://schemas.microsoft.com/office/powerpoint/2010/main" val="419980099"/>
+        <p14:creationId xmlns:p14="http://schemas.microsoft.com/office/powerpoint/2010/main" val="1986243002"/>
       </p:ext>
     </p:extLst>
   </p:cSld>
@@ -12365,10 +13360,10 @@
       </p:grpSpPr>
       <p:sp>
         <p:nvSpPr>
-          <p:cNvPr id="14" name="slide-title">
-            <a:extLst xmlns:a="http://schemas.openxmlformats.org/drawingml/2006/main">
-              <a:ext uri="{FF2B5EF4-FFF2-40B4-BE49-F238E27FC236}">
-                <a16:creationId xmlns:a16="http://schemas.microsoft.com/office/drawing/2014/main" id="{4AAD2F7A-A8A4-441F-8450-C0F642598A96}"/>
+          <p:cNvPr id="16" name="slide-title">
+            <a:extLst xmlns:a="http://schemas.openxmlformats.org/drawingml/2006/main">
+              <a:ext uri="{FF2B5EF4-FFF2-40B4-BE49-F238E27FC236}">
+                <a16:creationId xmlns:a16="http://schemas.microsoft.com/office/drawing/2014/main" id="{0106CDA0-6054-49CE-8F81-B9D3DA1EB356}"/>
               </a:ext>
             </a:extLst>
           </p:cNvPr>
@@ -12419,7 +13414,7 @@
           <p:cNvPr id="2" name="step-num-1">
             <a:extLst xmlns:a="http://schemas.openxmlformats.org/drawingml/2006/main">
               <a:ext uri="{FF2B5EF4-FFF2-40B4-BE49-F238E27FC236}">
-                <a16:creationId xmlns:a16="http://schemas.microsoft.com/office/drawing/2014/main" id="{DAAEA0C5-25ED-4489-88F7-06585D706651}"/>
+                <a16:creationId xmlns:a16="http://schemas.microsoft.com/office/drawing/2014/main" id="{EB0C3F57-7B90-4F40-9CDE-ED98A843E3ED}"/>
               </a:ext>
             </a:extLst>
           </p:cNvPr>
@@ -12470,7 +13465,7 @@
           <p:cNvPr id="3" name="step-label-1">
             <a:extLst xmlns:a="http://schemas.openxmlformats.org/drawingml/2006/main">
               <a:ext uri="{FF2B5EF4-FFF2-40B4-BE49-F238E27FC236}">
-                <a16:creationId xmlns:a16="http://schemas.microsoft.com/office/drawing/2014/main" id="{2F380EBE-C09A-41F9-B477-24BADB2BCCA6}"/>
+                <a16:creationId xmlns:a16="http://schemas.microsoft.com/office/drawing/2014/main" id="{CD360B97-5822-4E6E-82D7-1972FEAEA563}"/>
               </a:ext>
             </a:extLst>
           </p:cNvPr>
@@ -12521,7 +13516,7 @@
           <p:cNvPr id="4" name="step-line-1">
             <a:extLst xmlns:a="http://schemas.openxmlformats.org/drawingml/2006/main">
               <a:ext uri="{FF2B5EF4-FFF2-40B4-BE49-F238E27FC236}">
-                <a16:creationId xmlns:a16="http://schemas.microsoft.com/office/drawing/2014/main" id="{E58AD86D-2AB8-40F0-BE0B-98B181FFEFC1}"/>
+                <a16:creationId xmlns:a16="http://schemas.microsoft.com/office/drawing/2014/main" id="{08F017FD-FA68-4660-9653-5A97371BBEF7}"/>
               </a:ext>
             </a:extLst>
           </p:cNvPr>
@@ -12552,7 +13547,7 @@
           <p:cNvPr id="5" name="step-num-2">
             <a:extLst xmlns:a="http://schemas.openxmlformats.org/drawingml/2006/main">
               <a:ext uri="{FF2B5EF4-FFF2-40B4-BE49-F238E27FC236}">
-                <a16:creationId xmlns:a16="http://schemas.microsoft.com/office/drawing/2014/main" id="{59F863A7-E5D2-4685-8371-479705C5D4C1}"/>
+                <a16:creationId xmlns:a16="http://schemas.microsoft.com/office/drawing/2014/main" id="{1A668BE5-FCA6-462B-8C94-F5808A88653D}"/>
               </a:ext>
             </a:extLst>
           </p:cNvPr>
@@ -12603,7 +13598,7 @@
           <p:cNvPr id="6" name="step-label-2">
             <a:extLst xmlns:a="http://schemas.openxmlformats.org/drawingml/2006/main">
               <a:ext uri="{FF2B5EF4-FFF2-40B4-BE49-F238E27FC236}">
-                <a16:creationId xmlns:a16="http://schemas.microsoft.com/office/drawing/2014/main" id="{6FC07808-DFFB-4D1A-93BB-CA35D3AAF7EF}"/>
+                <a16:creationId xmlns:a16="http://schemas.microsoft.com/office/drawing/2014/main" id="{0BBC0437-C00B-4430-B9A0-64F65B0C9775}"/>
               </a:ext>
             </a:extLst>
           </p:cNvPr>
@@ -12654,7 +13649,7 @@
           <p:cNvPr id="7" name="step-line-2">
             <a:extLst xmlns:a="http://schemas.openxmlformats.org/drawingml/2006/main">
               <a:ext uri="{FF2B5EF4-FFF2-40B4-BE49-F238E27FC236}">
-                <a16:creationId xmlns:a16="http://schemas.microsoft.com/office/drawing/2014/main" id="{4008AE9B-9B57-45BC-A778-1E208F492B0F}"/>
+                <a16:creationId xmlns:a16="http://schemas.microsoft.com/office/drawing/2014/main" id="{DF292806-9A7E-4488-82D5-D7D512C181C7}"/>
               </a:ext>
             </a:extLst>
           </p:cNvPr>
@@ -12685,7 +13680,7 @@
           <p:cNvPr id="8" name="step-num-3">
             <a:extLst xmlns:a="http://schemas.openxmlformats.org/drawingml/2006/main">
               <a:ext uri="{FF2B5EF4-FFF2-40B4-BE49-F238E27FC236}">
-                <a16:creationId xmlns:a16="http://schemas.microsoft.com/office/drawing/2014/main" id="{C7DF6228-7156-4C69-B257-871AC76AE7A6}"/>
+                <a16:creationId xmlns:a16="http://schemas.microsoft.com/office/drawing/2014/main" id="{08F70EAD-8719-4E6E-8340-BD93F9C2A5DC}"/>
               </a:ext>
             </a:extLst>
           </p:cNvPr>
@@ -12736,7 +13731,7 @@
           <p:cNvPr id="9" name="step-label-3">
             <a:extLst xmlns:a="http://schemas.openxmlformats.org/drawingml/2006/main">
               <a:ext uri="{FF2B5EF4-FFF2-40B4-BE49-F238E27FC236}">
-                <a16:creationId xmlns:a16="http://schemas.microsoft.com/office/drawing/2014/main" id="{4C64C03E-6BDE-4D3E-A00F-BA01363424D8}"/>
+                <a16:creationId xmlns:a16="http://schemas.microsoft.com/office/drawing/2014/main" id="{57B35ADC-1AB7-4E4B-87AA-8D08DFBD0D3A}"/>
               </a:ext>
             </a:extLst>
           </p:cNvPr>
@@ -12787,7 +13782,7 @@
           <p:cNvPr id="10" name="eyebrow">
             <a:extLst xmlns:a="http://schemas.openxmlformats.org/drawingml/2006/main">
               <a:ext uri="{FF2B5EF4-FFF2-40B4-BE49-F238E27FC236}">
-                <a16:creationId xmlns:a16="http://schemas.microsoft.com/office/drawing/2014/main" id="{2E92DA50-9F8D-467E-B491-36DFAB2F84D7}"/>
+                <a16:creationId xmlns:a16="http://schemas.microsoft.com/office/drawing/2014/main" id="{B14D5BC7-B4B9-42E9-86CC-B519C847C176}"/>
               </a:ext>
             </a:extLst>
           </p:cNvPr>
@@ -12835,10 +13830,69 @@
       </p:sp>
       <p:sp>
         <p:nvSpPr>
-          <p:cNvPr id="11" name="footer-rule">
-            <a:extLst xmlns:a="http://schemas.openxmlformats.org/drawingml/2006/main">
-              <a:ext uri="{FF2B5EF4-FFF2-40B4-BE49-F238E27FC236}">
-                <a16:creationId xmlns:a16="http://schemas.microsoft.com/office/drawing/2014/main" id="{E2535C39-DC1E-4F4A-859F-B4C6D3A2E652}"/>
+          <p:cNvPr id="11" name="rescue-point-logo-background">
+            <a:extLst xmlns:a="http://schemas.openxmlformats.org/drawingml/2006/main">
+              <a:ext uri="{FF2B5EF4-FFF2-40B4-BE49-F238E27FC236}">
+                <a16:creationId xmlns:a16="http://schemas.microsoft.com/office/drawing/2014/main" id="{5DD8CC48-EC8B-4ADD-BBB7-2C05ED655D59}"/>
+              </a:ext>
+            </a:extLst>
+          </p:cNvPr>
+          <p:cNvSpPr>
+            <a:spLocks xmlns:a="http://schemas.openxmlformats.org/drawingml/2006/main" noGrp="1"/>
+          </p:cNvSpPr>
+          <p:nvPr/>
+        </p:nvSpPr>
+        <p:spPr>
+          <a:xfrm xmlns:a="http://schemas.openxmlformats.org/drawingml/2006/main">
+            <a:off x="9772650" y="133350"/>
+            <a:ext cx="1733550" cy="457200"/>
+          </a:xfrm>
+          <a:prstGeom xmlns:a="http://schemas.openxmlformats.org/drawingml/2006/main" prst="roundRect">
+            <a:avLst>
+              <a:gd name="adj" fmla="val 16667"/>
+            </a:avLst>
+          </a:prstGeom>
+          <a:solidFill xmlns:a="http://schemas.openxmlformats.org/drawingml/2006/main">
+            <a:srgbClr val="06142E"/>
+          </a:solidFill>
+          <a:ln xmlns:a="http://schemas.openxmlformats.org/drawingml/2006/main" w="9525">
+            <a:solidFill>
+              <a:srgbClr val="1EC5FF">
+                <a:alpha val="33333"/>
+              </a:srgbClr>
+            </a:solidFill>
+            <a:prstDash val="solid"/>
+          </a:ln>
+        </p:spPr>
+      </p:sp>
+      <p:pic>
+        <p:nvPicPr>
+          <p:cNvPr id="29" name="" descr="Figura oficial da documentação dbt usada para explicar: Ao final, você consegue... — 01."/>
+          <p:cNvPicPr>
+            <a:picLocks xmlns:a="http://schemas.openxmlformats.org/drawingml/2006/main" noChangeAspect="1"/>
+          </p:cNvPicPr>
+          <p:nvPr/>
+        </p:nvPicPr>
+        <p:blipFill>
+          <a:blip xmlns:r="http://schemas.openxmlformats.org/officeDocument/2006/relationships" xmlns:a="http://schemas.openxmlformats.org/drawingml/2006/main" r:embed="R5e9fd3ec10be4f3b"/>
+          <a:stretch xmlns:a="http://schemas.openxmlformats.org/drawingml/2006/main"/>
+        </p:blipFill>
+        <p:spPr>
+          <a:xfrm xmlns:a="http://schemas.openxmlformats.org/drawingml/2006/main">
+            <a:off x="9893718" y="209550"/>
+            <a:ext cx="1491414" cy="323850"/>
+          </a:xfrm>
+          <a:prstGeom xmlns:a="http://schemas.openxmlformats.org/drawingml/2006/main" prst="rect">
+            <a:avLst/>
+          </a:prstGeom>
+        </p:spPr>
+      </p:pic>
+      <p:sp>
+        <p:nvSpPr>
+          <p:cNvPr id="13" name="footer-rule">
+            <a:extLst xmlns:a="http://schemas.openxmlformats.org/drawingml/2006/main">
+              <a:ext uri="{FF2B5EF4-FFF2-40B4-BE49-F238E27FC236}">
+                <a16:creationId xmlns:a16="http://schemas.microsoft.com/office/drawing/2014/main" id="{88DB8F1F-A938-40D2-AA7D-232F747EBD93}"/>
               </a:ext>
             </a:extLst>
           </p:cNvPr>
@@ -12868,10 +13922,10 @@
       </p:sp>
       <p:sp>
         <p:nvSpPr>
-          <p:cNvPr id="12" name="footer">
-            <a:extLst xmlns:a="http://schemas.openxmlformats.org/drawingml/2006/main">
-              <a:ext uri="{FF2B5EF4-FFF2-40B4-BE49-F238E27FC236}">
-                <a16:creationId xmlns:a16="http://schemas.microsoft.com/office/drawing/2014/main" id="{B0A62CCC-B5C9-44F6-98CA-1D74FBFAC3CB}"/>
+          <p:cNvPr id="14" name="footer">
+            <a:extLst xmlns:a="http://schemas.openxmlformats.org/drawingml/2006/main">
+              <a:ext uri="{FF2B5EF4-FFF2-40B4-BE49-F238E27FC236}">
+                <a16:creationId xmlns:a16="http://schemas.microsoft.com/office/drawing/2014/main" id="{195BC7AA-2174-4197-A075-3DC60234AE37}"/>
               </a:ext>
             </a:extLst>
           </p:cNvPr>
@@ -12923,10 +13977,10 @@
       </p:sp>
       <p:sp>
         <p:nvSpPr>
-          <p:cNvPr id="13" name="page-number">
-            <a:extLst xmlns:a="http://schemas.openxmlformats.org/drawingml/2006/main">
-              <a:ext uri="{FF2B5EF4-FFF2-40B4-BE49-F238E27FC236}">
-                <a16:creationId xmlns:a16="http://schemas.microsoft.com/office/drawing/2014/main" id="{FE087156-3068-4C87-8D3A-49738A68E9AC}"/>
+          <p:cNvPr id="15" name="page-number">
+            <a:extLst xmlns:a="http://schemas.openxmlformats.org/drawingml/2006/main">
+              <a:ext uri="{FF2B5EF4-FFF2-40B4-BE49-F238E27FC236}">
+                <a16:creationId xmlns:a16="http://schemas.microsoft.com/office/drawing/2014/main" id="{DD99B7D0-2052-441C-9ABD-4397C7C48A0E}"/>
               </a:ext>
             </a:extLst>
           </p:cNvPr>
@@ -12979,7 +14033,7 @@
     </p:spTree>
     <p:extLst>
       <p:ext uri="{BB962C8B-B14F-4D97-AF65-F5344CB8AC3E}">
-        <p14:creationId xmlns:p14="http://schemas.microsoft.com/office/powerpoint/2010/main" val="1033450109"/>
+        <p14:creationId xmlns:p14="http://schemas.microsoft.com/office/powerpoint/2010/main" val="530241636"/>
       </p:ext>
     </p:extLst>
   </p:cSld>
@@ -13015,10 +14069,10 @@
       </p:grpSpPr>
       <p:sp>
         <p:nvSpPr>
-          <p:cNvPr id="11" name="slide-title">
-            <a:extLst xmlns:a="http://schemas.openxmlformats.org/drawingml/2006/main">
-              <a:ext uri="{FF2B5EF4-FFF2-40B4-BE49-F238E27FC236}">
-                <a16:creationId xmlns:a16="http://schemas.microsoft.com/office/drawing/2014/main" id="{67E47001-4389-40F8-A032-E88605ECBC1B}"/>
+          <p:cNvPr id="13" name="slide-title">
+            <a:extLst xmlns:a="http://schemas.openxmlformats.org/drawingml/2006/main">
+              <a:ext uri="{FF2B5EF4-FFF2-40B4-BE49-F238E27FC236}">
+                <a16:creationId xmlns:a16="http://schemas.microsoft.com/office/drawing/2014/main" id="{8AEA8990-FDCA-4469-82DC-FF0E17F7EA77}"/>
               </a:ext>
             </a:extLst>
           </p:cNvPr>
@@ -13069,7 +14123,7 @@
           <p:cNvPr id="2" name="slide-subtitle">
             <a:extLst xmlns:a="http://schemas.openxmlformats.org/drawingml/2006/main">
               <a:ext uri="{FF2B5EF4-FFF2-40B4-BE49-F238E27FC236}">
-                <a16:creationId xmlns:a16="http://schemas.microsoft.com/office/drawing/2014/main" id="{841A2410-B1DB-48F7-B0C5-77D9A4285DF5}"/>
+                <a16:creationId xmlns:a16="http://schemas.microsoft.com/office/drawing/2014/main" id="{3221834E-47D9-4102-AF5E-FCF66BAD415D}"/>
               </a:ext>
             </a:extLst>
           </p:cNvPr>
@@ -13120,7 +14174,7 @@
           <p:cNvPr id="3" name="bullets">
             <a:extLst xmlns:a="http://schemas.openxmlformats.org/drawingml/2006/main">
               <a:ext uri="{FF2B5EF4-FFF2-40B4-BE49-F238E27FC236}">
-                <a16:creationId xmlns:a16="http://schemas.microsoft.com/office/drawing/2014/main" id="{89233470-ACD4-4048-9DC4-1E66F49DC5D7}"/>
+                <a16:creationId xmlns:a16="http://schemas.microsoft.com/office/drawing/2014/main" id="{0C35DF36-A6EE-43D7-AD87-BE019CAF58F7}"/>
               </a:ext>
             </a:extLst>
           </p:cNvPr>
@@ -13207,7 +14261,7 @@
           <p:cNvPr id="4" name="ambient-glow">
             <a:extLst xmlns:a="http://schemas.openxmlformats.org/drawingml/2006/main">
               <a:ext uri="{FF2B5EF4-FFF2-40B4-BE49-F238E27FC236}">
-                <a16:creationId xmlns:a16="http://schemas.microsoft.com/office/drawing/2014/main" id="{9F9FD6C1-DCD7-4140-973C-0B9A13F9F14F}"/>
+                <a16:creationId xmlns:a16="http://schemas.microsoft.com/office/drawing/2014/main" id="{71E1DF16-FA2A-4F99-9755-255304AFEC92}"/>
               </a:ext>
             </a:extLst>
           </p:cNvPr>
@@ -13244,7 +14298,7 @@
           <p:cNvPr id="5" name="ambient-core">
             <a:extLst xmlns:a="http://schemas.openxmlformats.org/drawingml/2006/main">
               <a:ext uri="{FF2B5EF4-FFF2-40B4-BE49-F238E27FC236}">
-                <a16:creationId xmlns:a16="http://schemas.microsoft.com/office/drawing/2014/main" id="{32711240-BE3A-45E8-B80C-47AC28F9561E}"/>
+                <a16:creationId xmlns:a16="http://schemas.microsoft.com/office/drawing/2014/main" id="{7CC0683E-8B80-4BEA-AF1B-D6FF2B5D714D}"/>
               </a:ext>
             </a:extLst>
           </p:cNvPr>
@@ -13281,7 +14335,7 @@
           <p:cNvPr id="6" name="section-number">
             <a:extLst xmlns:a="http://schemas.openxmlformats.org/drawingml/2006/main">
               <a:ext uri="{FF2B5EF4-FFF2-40B4-BE49-F238E27FC236}">
-                <a16:creationId xmlns:a16="http://schemas.microsoft.com/office/drawing/2014/main" id="{2C601F8F-6B35-4058-AE2B-807BB15C1B70}"/>
+                <a16:creationId xmlns:a16="http://schemas.microsoft.com/office/drawing/2014/main" id="{64AFE86B-DACF-47D6-A070-3837BEB42ED7}"/>
               </a:ext>
             </a:extLst>
           </p:cNvPr>
@@ -13332,7 +14386,7 @@
           <p:cNvPr id="7" name="eyebrow">
             <a:extLst xmlns:a="http://schemas.openxmlformats.org/drawingml/2006/main">
               <a:ext uri="{FF2B5EF4-FFF2-40B4-BE49-F238E27FC236}">
-                <a16:creationId xmlns:a16="http://schemas.microsoft.com/office/drawing/2014/main" id="{623C6FE9-2A21-4138-99F8-90F792D62674}"/>
+                <a16:creationId xmlns:a16="http://schemas.microsoft.com/office/drawing/2014/main" id="{07F4D9B7-630E-4E2E-AF27-18102FF6086C}"/>
               </a:ext>
             </a:extLst>
           </p:cNvPr>
@@ -13380,10 +14434,69 @@
       </p:sp>
       <p:sp>
         <p:nvSpPr>
-          <p:cNvPr id="8" name="footer-rule">
-            <a:extLst xmlns:a="http://schemas.openxmlformats.org/drawingml/2006/main">
-              <a:ext uri="{FF2B5EF4-FFF2-40B4-BE49-F238E27FC236}">
-                <a16:creationId xmlns:a16="http://schemas.microsoft.com/office/drawing/2014/main" id="{8911C749-95B3-4C86-9516-47C2D2DBEF06}"/>
+          <p:cNvPr id="8" name="rescue-point-logo-background">
+            <a:extLst xmlns:a="http://schemas.openxmlformats.org/drawingml/2006/main">
+              <a:ext uri="{FF2B5EF4-FFF2-40B4-BE49-F238E27FC236}">
+                <a16:creationId xmlns:a16="http://schemas.microsoft.com/office/drawing/2014/main" id="{C1B999C4-7084-466F-8F5C-0F71CCC49AB4}"/>
+              </a:ext>
+            </a:extLst>
+          </p:cNvPr>
+          <p:cNvSpPr>
+            <a:spLocks xmlns:a="http://schemas.openxmlformats.org/drawingml/2006/main" noGrp="1"/>
+          </p:cNvSpPr>
+          <p:nvPr/>
+        </p:nvSpPr>
+        <p:spPr>
+          <a:xfrm xmlns:a="http://schemas.openxmlformats.org/drawingml/2006/main">
+            <a:off x="9772650" y="133350"/>
+            <a:ext cx="1733550" cy="457200"/>
+          </a:xfrm>
+          <a:prstGeom xmlns:a="http://schemas.openxmlformats.org/drawingml/2006/main" prst="roundRect">
+            <a:avLst>
+              <a:gd name="adj" fmla="val 16667"/>
+            </a:avLst>
+          </a:prstGeom>
+          <a:solidFill xmlns:a="http://schemas.openxmlformats.org/drawingml/2006/main">
+            <a:srgbClr val="06142E"/>
+          </a:solidFill>
+          <a:ln xmlns:a="http://schemas.openxmlformats.org/drawingml/2006/main" w="9525">
+            <a:solidFill>
+              <a:srgbClr val="1EC5FF">
+                <a:alpha val="33333"/>
+              </a:srgbClr>
+            </a:solidFill>
+            <a:prstDash val="solid"/>
+          </a:ln>
+        </p:spPr>
+      </p:sp>
+      <p:pic>
+        <p:nvPicPr>
+          <p:cNvPr id="23" name="" descr="Figura oficial da documentação dbt usada para explicar: MetricFlow compila; não adivinha — A força vem de definições explícitas, não de geração probabilística.."/>
+          <p:cNvPicPr>
+            <a:picLocks xmlns:a="http://schemas.openxmlformats.org/drawingml/2006/main" noChangeAspect="1"/>
+          </p:cNvPicPr>
+          <p:nvPr/>
+        </p:nvPicPr>
+        <p:blipFill>
+          <a:blip xmlns:r="http://schemas.openxmlformats.org/officeDocument/2006/relationships" xmlns:a="http://schemas.openxmlformats.org/drawingml/2006/main" r:embed="Ra3b510a2b96a4147"/>
+          <a:stretch xmlns:a="http://schemas.openxmlformats.org/drawingml/2006/main"/>
+        </p:blipFill>
+        <p:spPr>
+          <a:xfrm xmlns:a="http://schemas.openxmlformats.org/drawingml/2006/main">
+            <a:off x="9893718" y="209550"/>
+            <a:ext cx="1491414" cy="323850"/>
+          </a:xfrm>
+          <a:prstGeom xmlns:a="http://schemas.openxmlformats.org/drawingml/2006/main" prst="rect">
+            <a:avLst/>
+          </a:prstGeom>
+        </p:spPr>
+      </p:pic>
+      <p:sp>
+        <p:nvSpPr>
+          <p:cNvPr id="10" name="footer-rule">
+            <a:extLst xmlns:a="http://schemas.openxmlformats.org/drawingml/2006/main">
+              <a:ext uri="{FF2B5EF4-FFF2-40B4-BE49-F238E27FC236}">
+                <a16:creationId xmlns:a16="http://schemas.microsoft.com/office/drawing/2014/main" id="{7526B7A1-6E78-49C7-8D0C-AE47FB209BD3}"/>
               </a:ext>
             </a:extLst>
           </p:cNvPr>
@@ -13413,10 +14526,10 @@
       </p:sp>
       <p:sp>
         <p:nvSpPr>
-          <p:cNvPr id="9" name="footer">
-            <a:extLst xmlns:a="http://schemas.openxmlformats.org/drawingml/2006/main">
-              <a:ext uri="{FF2B5EF4-FFF2-40B4-BE49-F238E27FC236}">
-                <a16:creationId xmlns:a16="http://schemas.microsoft.com/office/drawing/2014/main" id="{F14C2BB2-5D7F-48C8-A6C4-8A674DE85980}"/>
+          <p:cNvPr id="11" name="footer">
+            <a:extLst xmlns:a="http://schemas.openxmlformats.org/drawingml/2006/main">
+              <a:ext uri="{FF2B5EF4-FFF2-40B4-BE49-F238E27FC236}">
+                <a16:creationId xmlns:a16="http://schemas.microsoft.com/office/drawing/2014/main" id="{6C91EF1A-F244-4B67-B7D1-346BEDBEBF52}"/>
               </a:ext>
             </a:extLst>
           </p:cNvPr>
@@ -13468,10 +14581,10 @@
       </p:sp>
       <p:sp>
         <p:nvSpPr>
-          <p:cNvPr id="10" name="page-number">
-            <a:extLst xmlns:a="http://schemas.openxmlformats.org/drawingml/2006/main">
-              <a:ext uri="{FF2B5EF4-FFF2-40B4-BE49-F238E27FC236}">
-                <a16:creationId xmlns:a16="http://schemas.microsoft.com/office/drawing/2014/main" id="{32DC46CB-BBFB-4DEB-9A17-5B2DC0AF04D7}"/>
+          <p:cNvPr id="12" name="page-number">
+            <a:extLst xmlns:a="http://schemas.openxmlformats.org/drawingml/2006/main">
+              <a:ext uri="{FF2B5EF4-FFF2-40B4-BE49-F238E27FC236}">
+                <a16:creationId xmlns:a16="http://schemas.microsoft.com/office/drawing/2014/main" id="{B4268225-67FC-4D0C-B782-5B3031F89A7D}"/>
               </a:ext>
             </a:extLst>
           </p:cNvPr>
@@ -13524,7 +14637,7 @@
     </p:spTree>
     <p:extLst>
       <p:ext uri="{BB962C8B-B14F-4D97-AF65-F5344CB8AC3E}">
-        <p14:creationId xmlns:p14="http://schemas.microsoft.com/office/powerpoint/2010/main" val="1875955175"/>
+        <p14:creationId xmlns:p14="http://schemas.microsoft.com/office/powerpoint/2010/main" val="553972888"/>
       </p:ext>
     </p:extLst>
   </p:cSld>
@@ -13552,10 +14665,10 @@
       </p:grpSpPr>
       <p:sp>
         <p:nvSpPr>
-          <p:cNvPr id="11" name="slide-title">
-            <a:extLst xmlns:a="http://schemas.openxmlformats.org/drawingml/2006/main">
-              <a:ext uri="{FF2B5EF4-FFF2-40B4-BE49-F238E27FC236}">
-                <a16:creationId xmlns:a16="http://schemas.microsoft.com/office/drawing/2014/main" id="{682FF706-08DA-45C6-AF4C-DCD43522663E}"/>
+          <p:cNvPr id="13" name="slide-title">
+            <a:extLst xmlns:a="http://schemas.openxmlformats.org/drawingml/2006/main">
+              <a:ext uri="{FF2B5EF4-FFF2-40B4-BE49-F238E27FC236}">
+                <a16:creationId xmlns:a16="http://schemas.microsoft.com/office/drawing/2014/main" id="{4FEBBAD4-B115-4113-91CC-EEB071C0E912}"/>
               </a:ext>
             </a:extLst>
           </p:cNvPr>
@@ -13606,7 +14719,7 @@
           <p:cNvPr id="2" name="slide-subtitle">
             <a:extLst xmlns:a="http://schemas.openxmlformats.org/drawingml/2006/main">
               <a:ext uri="{FF2B5EF4-FFF2-40B4-BE49-F238E27FC236}">
-                <a16:creationId xmlns:a16="http://schemas.microsoft.com/office/drawing/2014/main" id="{A0D3B9BF-C7FD-48B7-A288-FBA9BB2D57A6}"/>
+                <a16:creationId xmlns:a16="http://schemas.microsoft.com/office/drawing/2014/main" id="{A7808F64-8774-45DF-94F5-AC4270C903AB}"/>
               </a:ext>
             </a:extLst>
           </p:cNvPr>
@@ -13657,7 +14770,7 @@
           <p:cNvPr id="3" name="bullets">
             <a:extLst xmlns:a="http://schemas.openxmlformats.org/drawingml/2006/main">
               <a:ext uri="{FF2B5EF4-FFF2-40B4-BE49-F238E27FC236}">
-                <a16:creationId xmlns:a16="http://schemas.microsoft.com/office/drawing/2014/main" id="{8627BE82-3601-4C91-BC81-7141527146EC}"/>
+                <a16:creationId xmlns:a16="http://schemas.microsoft.com/office/drawing/2014/main" id="{AB5ABD53-6EA1-4EAC-AFBE-62FB70F3C3A6}"/>
               </a:ext>
             </a:extLst>
           </p:cNvPr>
@@ -13744,7 +14857,7 @@
           <p:cNvPr id="4" name="ambient-glow">
             <a:extLst xmlns:a="http://schemas.openxmlformats.org/drawingml/2006/main">
               <a:ext uri="{FF2B5EF4-FFF2-40B4-BE49-F238E27FC236}">
-                <a16:creationId xmlns:a16="http://schemas.microsoft.com/office/drawing/2014/main" id="{7C3815DA-0EAC-4CE3-9447-DB5C1227A726}"/>
+                <a16:creationId xmlns:a16="http://schemas.microsoft.com/office/drawing/2014/main" id="{10341C19-F67E-4113-93B3-29E619E8D46F}"/>
               </a:ext>
             </a:extLst>
           </p:cNvPr>
@@ -13781,7 +14894,7 @@
           <p:cNvPr id="5" name="ambient-core">
             <a:extLst xmlns:a="http://schemas.openxmlformats.org/drawingml/2006/main">
               <a:ext uri="{FF2B5EF4-FFF2-40B4-BE49-F238E27FC236}">
-                <a16:creationId xmlns:a16="http://schemas.microsoft.com/office/drawing/2014/main" id="{A7D48F69-2A3A-4867-B545-448AF7EC7F64}"/>
+                <a16:creationId xmlns:a16="http://schemas.microsoft.com/office/drawing/2014/main" id="{9A0B8312-FEAA-4AEA-919F-DD3B57159F0A}"/>
               </a:ext>
             </a:extLst>
           </p:cNvPr>
@@ -13818,7 +14931,7 @@
           <p:cNvPr id="6" name="section-number">
             <a:extLst xmlns:a="http://schemas.openxmlformats.org/drawingml/2006/main">
               <a:ext uri="{FF2B5EF4-FFF2-40B4-BE49-F238E27FC236}">
-                <a16:creationId xmlns:a16="http://schemas.microsoft.com/office/drawing/2014/main" id="{31F6184C-EFBF-43BE-94D4-1834216D433A}"/>
+                <a16:creationId xmlns:a16="http://schemas.microsoft.com/office/drawing/2014/main" id="{07C9495C-C279-4C6C-8230-04434BF95EEE}"/>
               </a:ext>
             </a:extLst>
           </p:cNvPr>
@@ -13869,7 +14982,7 @@
           <p:cNvPr id="7" name="eyebrow">
             <a:extLst xmlns:a="http://schemas.openxmlformats.org/drawingml/2006/main">
               <a:ext uri="{FF2B5EF4-FFF2-40B4-BE49-F238E27FC236}">
-                <a16:creationId xmlns:a16="http://schemas.microsoft.com/office/drawing/2014/main" id="{37A2B704-3A44-417E-B3D7-6EFC1475FA67}"/>
+                <a16:creationId xmlns:a16="http://schemas.microsoft.com/office/drawing/2014/main" id="{3C228E65-8FAD-4EC3-84C3-5DEDECC6A3A2}"/>
               </a:ext>
             </a:extLst>
           </p:cNvPr>
@@ -13917,10 +15030,69 @@
       </p:sp>
       <p:sp>
         <p:nvSpPr>
-          <p:cNvPr id="8" name="footer-rule">
-            <a:extLst xmlns:a="http://schemas.openxmlformats.org/drawingml/2006/main">
-              <a:ext uri="{FF2B5EF4-FFF2-40B4-BE49-F238E27FC236}">
-                <a16:creationId xmlns:a16="http://schemas.microsoft.com/office/drawing/2014/main" id="{069175BC-22C7-49E8-B5BA-7ADEBC45E33A}"/>
+          <p:cNvPr id="8" name="rescue-point-logo-background">
+            <a:extLst xmlns:a="http://schemas.openxmlformats.org/drawingml/2006/main">
+              <a:ext uri="{FF2B5EF4-FFF2-40B4-BE49-F238E27FC236}">
+                <a16:creationId xmlns:a16="http://schemas.microsoft.com/office/drawing/2014/main" id="{0755CA54-F952-4983-8B57-9B000E110444}"/>
+              </a:ext>
+            </a:extLst>
+          </p:cNvPr>
+          <p:cNvSpPr>
+            <a:spLocks xmlns:a="http://schemas.openxmlformats.org/drawingml/2006/main" noGrp="1"/>
+          </p:cNvSpPr>
+          <p:nvPr/>
+        </p:nvSpPr>
+        <p:spPr>
+          <a:xfrm xmlns:a="http://schemas.openxmlformats.org/drawingml/2006/main">
+            <a:off x="9772650" y="133350"/>
+            <a:ext cx="1733550" cy="457200"/>
+          </a:xfrm>
+          <a:prstGeom xmlns:a="http://schemas.openxmlformats.org/drawingml/2006/main" prst="roundRect">
+            <a:avLst>
+              <a:gd name="adj" fmla="val 16667"/>
+            </a:avLst>
+          </a:prstGeom>
+          <a:solidFill xmlns:a="http://schemas.openxmlformats.org/drawingml/2006/main">
+            <a:srgbClr val="06142E"/>
+          </a:solidFill>
+          <a:ln xmlns:a="http://schemas.openxmlformats.org/drawingml/2006/main" w="9525">
+            <a:solidFill>
+              <a:srgbClr val="1EC5FF">
+                <a:alpha val="33333"/>
+              </a:srgbClr>
+            </a:solidFill>
+            <a:prstDash val="solid"/>
+          </a:ln>
+        </p:spPr>
+      </p:sp>
+      <p:pic>
+        <p:nvPicPr>
+          <p:cNvPr id="23" name="" descr="Figura oficial da documentação dbt usada para explicar: Entidade começa pelo grão — order_id só pode ser primary se o modelo tiver uma linha por pedido.."/>
+          <p:cNvPicPr>
+            <a:picLocks xmlns:a="http://schemas.openxmlformats.org/drawingml/2006/main" noChangeAspect="1"/>
+          </p:cNvPicPr>
+          <p:nvPr/>
+        </p:nvPicPr>
+        <p:blipFill>
+          <a:blip xmlns:r="http://schemas.openxmlformats.org/officeDocument/2006/relationships" xmlns:a="http://schemas.openxmlformats.org/drawingml/2006/main" r:embed="Rb82a11de3acc4f07"/>
+          <a:stretch xmlns:a="http://schemas.openxmlformats.org/drawingml/2006/main"/>
+        </p:blipFill>
+        <p:spPr>
+          <a:xfrm xmlns:a="http://schemas.openxmlformats.org/drawingml/2006/main">
+            <a:off x="9893718" y="209550"/>
+            <a:ext cx="1491414" cy="323850"/>
+          </a:xfrm>
+          <a:prstGeom xmlns:a="http://schemas.openxmlformats.org/drawingml/2006/main" prst="rect">
+            <a:avLst/>
+          </a:prstGeom>
+        </p:spPr>
+      </p:pic>
+      <p:sp>
+        <p:nvSpPr>
+          <p:cNvPr id="10" name="footer-rule">
+            <a:extLst xmlns:a="http://schemas.openxmlformats.org/drawingml/2006/main">
+              <a:ext uri="{FF2B5EF4-FFF2-40B4-BE49-F238E27FC236}">
+                <a16:creationId xmlns:a16="http://schemas.microsoft.com/office/drawing/2014/main" id="{4CF2FD6B-0BA8-4145-829D-823B80CB874C}"/>
               </a:ext>
             </a:extLst>
           </p:cNvPr>
@@ -13950,10 +15122,10 @@
       </p:sp>
       <p:sp>
         <p:nvSpPr>
-          <p:cNvPr id="9" name="footer">
-            <a:extLst xmlns:a="http://schemas.openxmlformats.org/drawingml/2006/main">
-              <a:ext uri="{FF2B5EF4-FFF2-40B4-BE49-F238E27FC236}">
-                <a16:creationId xmlns:a16="http://schemas.microsoft.com/office/drawing/2014/main" id="{98D49D9F-BEA3-4F4F-942D-B9695A708731}"/>
+          <p:cNvPr id="11" name="footer">
+            <a:extLst xmlns:a="http://schemas.openxmlformats.org/drawingml/2006/main">
+              <a:ext uri="{FF2B5EF4-FFF2-40B4-BE49-F238E27FC236}">
+                <a16:creationId xmlns:a16="http://schemas.microsoft.com/office/drawing/2014/main" id="{1FC81AF8-1CF6-4569-AED9-58E95CBAF684}"/>
               </a:ext>
             </a:extLst>
           </p:cNvPr>
@@ -14005,10 +15177,10 @@
       </p:sp>
       <p:sp>
         <p:nvSpPr>
-          <p:cNvPr id="10" name="page-number">
-            <a:extLst xmlns:a="http://schemas.openxmlformats.org/drawingml/2006/main">
-              <a:ext uri="{FF2B5EF4-FFF2-40B4-BE49-F238E27FC236}">
-                <a16:creationId xmlns:a16="http://schemas.microsoft.com/office/drawing/2014/main" id="{11A588DF-6AB6-4F6C-9D41-AB97289F2FBF}"/>
+          <p:cNvPr id="12" name="page-number">
+            <a:extLst xmlns:a="http://schemas.openxmlformats.org/drawingml/2006/main">
+              <a:ext uri="{FF2B5EF4-FFF2-40B4-BE49-F238E27FC236}">
+                <a16:creationId xmlns:a16="http://schemas.microsoft.com/office/drawing/2014/main" id="{3CB0D379-6A3E-4ABD-BCC4-85CCE9027477}"/>
               </a:ext>
             </a:extLst>
           </p:cNvPr>
@@ -14061,7 +15233,7 @@
     </p:spTree>
     <p:extLst>
       <p:ext uri="{BB962C8B-B14F-4D97-AF65-F5344CB8AC3E}">
-        <p14:creationId xmlns:p14="http://schemas.microsoft.com/office/powerpoint/2010/main" val="1420529421"/>
+        <p14:creationId xmlns:p14="http://schemas.microsoft.com/office/powerpoint/2010/main" val="2136970882"/>
       </p:ext>
     </p:extLst>
   </p:cSld>
@@ -14097,10 +15269,10 @@
       </p:grpSpPr>
       <p:sp>
         <p:nvSpPr>
-          <p:cNvPr id="11" name="slide-title">
-            <a:extLst xmlns:a="http://schemas.openxmlformats.org/drawingml/2006/main">
-              <a:ext uri="{FF2B5EF4-FFF2-40B4-BE49-F238E27FC236}">
-                <a16:creationId xmlns:a16="http://schemas.microsoft.com/office/drawing/2014/main" id="{EC46C395-6BAA-4F71-AF60-CFE9C6AEB545}"/>
+          <p:cNvPr id="13" name="slide-title">
+            <a:extLst xmlns:a="http://schemas.openxmlformats.org/drawingml/2006/main">
+              <a:ext uri="{FF2B5EF4-FFF2-40B4-BE49-F238E27FC236}">
+                <a16:creationId xmlns:a16="http://schemas.microsoft.com/office/drawing/2014/main" id="{2BA89D38-B226-4582-9EC1-70156B342C1E}"/>
               </a:ext>
             </a:extLst>
           </p:cNvPr>
@@ -14151,7 +15323,7 @@
           <p:cNvPr id="2" name="compare-left-title">
             <a:extLst xmlns:a="http://schemas.openxmlformats.org/drawingml/2006/main">
               <a:ext uri="{FF2B5EF4-FFF2-40B4-BE49-F238E27FC236}">
-                <a16:creationId xmlns:a16="http://schemas.microsoft.com/office/drawing/2014/main" id="{87DE78D2-9D56-4D61-A1FB-DB39355F5006}"/>
+                <a16:creationId xmlns:a16="http://schemas.microsoft.com/office/drawing/2014/main" id="{D0F4809F-C32A-4480-8C08-0CA20ED5E78B}"/>
               </a:ext>
             </a:extLst>
           </p:cNvPr>
@@ -14202,7 +15374,7 @@
           <p:cNvPr id="3" name="compare-right-title">
             <a:extLst xmlns:a="http://schemas.openxmlformats.org/drawingml/2006/main">
               <a:ext uri="{FF2B5EF4-FFF2-40B4-BE49-F238E27FC236}">
-                <a16:creationId xmlns:a16="http://schemas.microsoft.com/office/drawing/2014/main" id="{32B41D9D-E536-4F7D-A14D-84EF0A2F6F03}"/>
+                <a16:creationId xmlns:a16="http://schemas.microsoft.com/office/drawing/2014/main" id="{8C6F7283-47F7-4161-9848-2F5BF6F62FFE}"/>
               </a:ext>
             </a:extLst>
           </p:cNvPr>
@@ -14253,7 +15425,7 @@
           <p:cNvPr id="4" name="compare-divider">
             <a:extLst xmlns:a="http://schemas.openxmlformats.org/drawingml/2006/main">
               <a:ext uri="{FF2B5EF4-FFF2-40B4-BE49-F238E27FC236}">
-                <a16:creationId xmlns:a16="http://schemas.microsoft.com/office/drawing/2014/main" id="{95E25561-4F22-4CC6-B745-48DE7D54DA73}"/>
+                <a16:creationId xmlns:a16="http://schemas.microsoft.com/office/drawing/2014/main" id="{DA248121-21CC-4C8E-AC7C-77C1A3FC4008}"/>
               </a:ext>
             </a:extLst>
           </p:cNvPr>
@@ -14286,7 +15458,7 @@
           <p:cNvPr id="5" name="bullets">
             <a:extLst xmlns:a="http://schemas.openxmlformats.org/drawingml/2006/main">
               <a:ext uri="{FF2B5EF4-FFF2-40B4-BE49-F238E27FC236}">
-                <a16:creationId xmlns:a16="http://schemas.microsoft.com/office/drawing/2014/main" id="{E006C977-61EC-48F9-A70F-0F3913D9365A}"/>
+                <a16:creationId xmlns:a16="http://schemas.microsoft.com/office/drawing/2014/main" id="{E08AFB75-DD96-44DA-BC34-1FE8D62FD22A}"/>
               </a:ext>
             </a:extLst>
           </p:cNvPr>
@@ -14355,7 +15527,7 @@
           <p:cNvPr id="6" name="bullets">
             <a:extLst xmlns:a="http://schemas.openxmlformats.org/drawingml/2006/main">
               <a:ext uri="{FF2B5EF4-FFF2-40B4-BE49-F238E27FC236}">
-                <a16:creationId xmlns:a16="http://schemas.microsoft.com/office/drawing/2014/main" id="{EDDCDE0C-BB44-49B1-ABFD-286D2ACF344E}"/>
+                <a16:creationId xmlns:a16="http://schemas.microsoft.com/office/drawing/2014/main" id="{6054DD7A-069C-46F1-AE09-0A6CFA1BE48E}"/>
               </a:ext>
             </a:extLst>
           </p:cNvPr>
@@ -14406,7 +15578,7 @@
           <p:cNvPr id="7" name="eyebrow">
             <a:extLst xmlns:a="http://schemas.openxmlformats.org/drawingml/2006/main">
               <a:ext uri="{FF2B5EF4-FFF2-40B4-BE49-F238E27FC236}">
-                <a16:creationId xmlns:a16="http://schemas.microsoft.com/office/drawing/2014/main" id="{B4E365F3-031F-473D-A350-5DB4EAA4D541}"/>
+                <a16:creationId xmlns:a16="http://schemas.microsoft.com/office/drawing/2014/main" id="{FCB3C914-49F6-4E07-8D91-C2D5C2E77073}"/>
               </a:ext>
             </a:extLst>
           </p:cNvPr>
@@ -14454,10 +15626,69 @@
       </p:sp>
       <p:sp>
         <p:nvSpPr>
-          <p:cNvPr id="8" name="footer-rule">
-            <a:extLst xmlns:a="http://schemas.openxmlformats.org/drawingml/2006/main">
-              <a:ext uri="{FF2B5EF4-FFF2-40B4-BE49-F238E27FC236}">
-                <a16:creationId xmlns:a16="http://schemas.microsoft.com/office/drawing/2014/main" id="{32CF8E1D-A083-4110-869C-453127E167B0}"/>
+          <p:cNvPr id="8" name="rescue-point-logo-background">
+            <a:extLst xmlns:a="http://schemas.openxmlformats.org/drawingml/2006/main">
+              <a:ext uri="{FF2B5EF4-FFF2-40B4-BE49-F238E27FC236}">
+                <a16:creationId xmlns:a16="http://schemas.microsoft.com/office/drawing/2014/main" id="{ABE635F6-CC14-4B24-9AF3-D3F2F24E9A32}"/>
+              </a:ext>
+            </a:extLst>
+          </p:cNvPr>
+          <p:cNvSpPr>
+            <a:spLocks xmlns:a="http://schemas.openxmlformats.org/drawingml/2006/main" noGrp="1"/>
+          </p:cNvSpPr>
+          <p:nvPr/>
+        </p:nvSpPr>
+        <p:spPr>
+          <a:xfrm xmlns:a="http://schemas.openxmlformats.org/drawingml/2006/main">
+            <a:off x="9772650" y="133350"/>
+            <a:ext cx="1733550" cy="457200"/>
+          </a:xfrm>
+          <a:prstGeom xmlns:a="http://schemas.openxmlformats.org/drawingml/2006/main" prst="roundRect">
+            <a:avLst>
+              <a:gd name="adj" fmla="val 16667"/>
+            </a:avLst>
+          </a:prstGeom>
+          <a:solidFill xmlns:a="http://schemas.openxmlformats.org/drawingml/2006/main">
+            <a:srgbClr val="06142E"/>
+          </a:solidFill>
+          <a:ln xmlns:a="http://schemas.openxmlformats.org/drawingml/2006/main" w="9525">
+            <a:solidFill>
+              <a:srgbClr val="1EC5FF">
+                <a:alpha val="33333"/>
+              </a:srgbClr>
+            </a:solidFill>
+            <a:prstDash val="solid"/>
+          </a:ln>
+        </p:spPr>
+      </p:sp>
+      <p:pic>
+        <p:nvPicPr>
+          <p:cNvPr id="23" name="" descr="Figura oficial da documentação dbt usada para explicar: Entidade começa pelo grão — Entidade."/>
+          <p:cNvPicPr>
+            <a:picLocks xmlns:a="http://schemas.openxmlformats.org/drawingml/2006/main" noChangeAspect="1"/>
+          </p:cNvPicPr>
+          <p:nvPr/>
+        </p:nvPicPr>
+        <p:blipFill>
+          <a:blip xmlns:r="http://schemas.openxmlformats.org/officeDocument/2006/relationships" xmlns:a="http://schemas.openxmlformats.org/drawingml/2006/main" r:embed="R5de603636325445b"/>
+          <a:stretch xmlns:a="http://schemas.openxmlformats.org/drawingml/2006/main"/>
+        </p:blipFill>
+        <p:spPr>
+          <a:xfrm xmlns:a="http://schemas.openxmlformats.org/drawingml/2006/main">
+            <a:off x="9893718" y="209550"/>
+            <a:ext cx="1491414" cy="323850"/>
+          </a:xfrm>
+          <a:prstGeom xmlns:a="http://schemas.openxmlformats.org/drawingml/2006/main" prst="rect">
+            <a:avLst/>
+          </a:prstGeom>
+        </p:spPr>
+      </p:pic>
+      <p:sp>
+        <p:nvSpPr>
+          <p:cNvPr id="10" name="footer-rule">
+            <a:extLst xmlns:a="http://schemas.openxmlformats.org/drawingml/2006/main">
+              <a:ext uri="{FF2B5EF4-FFF2-40B4-BE49-F238E27FC236}">
+                <a16:creationId xmlns:a16="http://schemas.microsoft.com/office/drawing/2014/main" id="{2A8B3AC8-CF43-49D4-B186-C5AE00096F9D}"/>
               </a:ext>
             </a:extLst>
           </p:cNvPr>
@@ -14487,10 +15718,10 @@
       </p:sp>
       <p:sp>
         <p:nvSpPr>
-          <p:cNvPr id="9" name="footer">
-            <a:extLst xmlns:a="http://schemas.openxmlformats.org/drawingml/2006/main">
-              <a:ext uri="{FF2B5EF4-FFF2-40B4-BE49-F238E27FC236}">
-                <a16:creationId xmlns:a16="http://schemas.microsoft.com/office/drawing/2014/main" id="{CC6216E2-8475-44B3-A45C-DC6C405393E9}"/>
+          <p:cNvPr id="11" name="footer">
+            <a:extLst xmlns:a="http://schemas.openxmlformats.org/drawingml/2006/main">
+              <a:ext uri="{FF2B5EF4-FFF2-40B4-BE49-F238E27FC236}">
+                <a16:creationId xmlns:a16="http://schemas.microsoft.com/office/drawing/2014/main" id="{046213DC-4828-48D4-82D3-67ED60472F2C}"/>
               </a:ext>
             </a:extLst>
           </p:cNvPr>
@@ -14542,10 +15773,10 @@
       </p:sp>
       <p:sp>
         <p:nvSpPr>
-          <p:cNvPr id="10" name="page-number">
-            <a:extLst xmlns:a="http://schemas.openxmlformats.org/drawingml/2006/main">
-              <a:ext uri="{FF2B5EF4-FFF2-40B4-BE49-F238E27FC236}">
-                <a16:creationId xmlns:a16="http://schemas.microsoft.com/office/drawing/2014/main" id="{C50CD091-87FF-40B4-BC8F-3A4494FB2CCF}"/>
+          <p:cNvPr id="12" name="page-number">
+            <a:extLst xmlns:a="http://schemas.openxmlformats.org/drawingml/2006/main">
+              <a:ext uri="{FF2B5EF4-FFF2-40B4-BE49-F238E27FC236}">
+                <a16:creationId xmlns:a16="http://schemas.microsoft.com/office/drawing/2014/main" id="{6A6ECD6D-E817-4181-87C9-F1376B395BAE}"/>
               </a:ext>
             </a:extLst>
           </p:cNvPr>
@@ -14598,7 +15829,7 @@
     </p:spTree>
     <p:extLst>
       <p:ext uri="{BB962C8B-B14F-4D97-AF65-F5344CB8AC3E}">
-        <p14:creationId xmlns:p14="http://schemas.microsoft.com/office/powerpoint/2010/main" val="788712744"/>
+        <p14:creationId xmlns:p14="http://schemas.microsoft.com/office/powerpoint/2010/main" val="744995812"/>
       </p:ext>
     </p:extLst>
   </p:cSld>
@@ -14634,10 +15865,10 @@
       </p:grpSpPr>
       <p:sp>
         <p:nvSpPr>
-          <p:cNvPr id="11" name="slide-title">
-            <a:extLst xmlns:a="http://schemas.openxmlformats.org/drawingml/2006/main">
-              <a:ext uri="{FF2B5EF4-FFF2-40B4-BE49-F238E27FC236}">
-                <a16:creationId xmlns:a16="http://schemas.microsoft.com/office/drawing/2014/main" id="{3593D3AA-16D0-475D-AB52-7384BF0C2560}"/>
+          <p:cNvPr id="13" name="slide-title">
+            <a:extLst xmlns:a="http://schemas.openxmlformats.org/drawingml/2006/main">
+              <a:ext uri="{FF2B5EF4-FFF2-40B4-BE49-F238E27FC236}">
+                <a16:creationId xmlns:a16="http://schemas.microsoft.com/office/drawing/2014/main" id="{8D3CF81C-C643-40B9-99FA-A3BB03291D1A}"/>
               </a:ext>
             </a:extLst>
           </p:cNvPr>
@@ -14688,7 +15919,7 @@
           <p:cNvPr id="2" name="slide-subtitle">
             <a:extLst xmlns:a="http://schemas.openxmlformats.org/drawingml/2006/main">
               <a:ext uri="{FF2B5EF4-FFF2-40B4-BE49-F238E27FC236}">
-                <a16:creationId xmlns:a16="http://schemas.microsoft.com/office/drawing/2014/main" id="{20DC0593-F172-4109-8560-7A0B6FE3DC96}"/>
+                <a16:creationId xmlns:a16="http://schemas.microsoft.com/office/drawing/2014/main" id="{78DF9F82-6F31-42C8-BDAC-29E786E02A75}"/>
               </a:ext>
             </a:extLst>
           </p:cNvPr>
@@ -14739,7 +15970,7 @@
           <p:cNvPr id="3" name="bullets">
             <a:extLst xmlns:a="http://schemas.openxmlformats.org/drawingml/2006/main">
               <a:ext uri="{FF2B5EF4-FFF2-40B4-BE49-F238E27FC236}">
-                <a16:creationId xmlns:a16="http://schemas.microsoft.com/office/drawing/2014/main" id="{4DA67DBB-61B3-41FB-AE83-C4A47E682852}"/>
+                <a16:creationId xmlns:a16="http://schemas.microsoft.com/office/drawing/2014/main" id="{A2E03647-786A-4A0E-B16F-A79F59BF2C3E}"/>
               </a:ext>
             </a:extLst>
           </p:cNvPr>
@@ -14826,7 +16057,7 @@
           <p:cNvPr id="4" name="ambient-glow">
             <a:extLst xmlns:a="http://schemas.openxmlformats.org/drawingml/2006/main">
               <a:ext uri="{FF2B5EF4-FFF2-40B4-BE49-F238E27FC236}">
-                <a16:creationId xmlns:a16="http://schemas.microsoft.com/office/drawing/2014/main" id="{C7437032-4C6C-498A-8616-9D7C117C1629}"/>
+                <a16:creationId xmlns:a16="http://schemas.microsoft.com/office/drawing/2014/main" id="{8AAE5266-CC17-4F9F-A9A4-7215CDED2070}"/>
               </a:ext>
             </a:extLst>
           </p:cNvPr>
@@ -14863,7 +16094,7 @@
           <p:cNvPr id="5" name="ambient-core">
             <a:extLst xmlns:a="http://schemas.openxmlformats.org/drawingml/2006/main">
               <a:ext uri="{FF2B5EF4-FFF2-40B4-BE49-F238E27FC236}">
-                <a16:creationId xmlns:a16="http://schemas.microsoft.com/office/drawing/2014/main" id="{3EAE0FD4-52E8-4969-811C-86796B1509DD}"/>
+                <a16:creationId xmlns:a16="http://schemas.microsoft.com/office/drawing/2014/main" id="{B30B80D4-7BCF-4EC6-A750-9391A27E88FC}"/>
               </a:ext>
             </a:extLst>
           </p:cNvPr>
@@ -14900,7 +16131,7 @@
           <p:cNvPr id="6" name="section-number">
             <a:extLst xmlns:a="http://schemas.openxmlformats.org/drawingml/2006/main">
               <a:ext uri="{FF2B5EF4-FFF2-40B4-BE49-F238E27FC236}">
-                <a16:creationId xmlns:a16="http://schemas.microsoft.com/office/drawing/2014/main" id="{1896241B-2C03-4A73-B167-71CB436BD104}"/>
+                <a16:creationId xmlns:a16="http://schemas.microsoft.com/office/drawing/2014/main" id="{9E02EE0A-658B-4556-A305-A73340B3AB92}"/>
               </a:ext>
             </a:extLst>
           </p:cNvPr>
@@ -14951,7 +16182,7 @@
           <p:cNvPr id="7" name="eyebrow">
             <a:extLst xmlns:a="http://schemas.openxmlformats.org/drawingml/2006/main">
               <a:ext uri="{FF2B5EF4-FFF2-40B4-BE49-F238E27FC236}">
-                <a16:creationId xmlns:a16="http://schemas.microsoft.com/office/drawing/2014/main" id="{5FB43A1B-3B7C-4E25-A45D-975953F02A82}"/>
+                <a16:creationId xmlns:a16="http://schemas.microsoft.com/office/drawing/2014/main" id="{D04ECD25-2399-4231-BD8E-EB7D704B8B36}"/>
               </a:ext>
             </a:extLst>
           </p:cNvPr>
@@ -14999,10 +16230,69 @@
       </p:sp>
       <p:sp>
         <p:nvSpPr>
-          <p:cNvPr id="8" name="footer-rule">
-            <a:extLst xmlns:a="http://schemas.openxmlformats.org/drawingml/2006/main">
-              <a:ext uri="{FF2B5EF4-FFF2-40B4-BE49-F238E27FC236}">
-                <a16:creationId xmlns:a16="http://schemas.microsoft.com/office/drawing/2014/main" id="{28383F0B-956E-4D51-8FF6-AE5B352B3BAE}"/>
+          <p:cNvPr id="8" name="rescue-point-logo-background">
+            <a:extLst xmlns:a="http://schemas.openxmlformats.org/drawingml/2006/main">
+              <a:ext uri="{FF2B5EF4-FFF2-40B4-BE49-F238E27FC236}">
+                <a16:creationId xmlns:a16="http://schemas.microsoft.com/office/drawing/2014/main" id="{37079C3C-312F-4CB8-9BF2-08F96309F3AF}"/>
+              </a:ext>
+            </a:extLst>
+          </p:cNvPr>
+          <p:cNvSpPr>
+            <a:spLocks xmlns:a="http://schemas.openxmlformats.org/drawingml/2006/main" noGrp="1"/>
+          </p:cNvSpPr>
+          <p:nvPr/>
+        </p:nvSpPr>
+        <p:spPr>
+          <a:xfrm xmlns:a="http://schemas.openxmlformats.org/drawingml/2006/main">
+            <a:off x="9772650" y="133350"/>
+            <a:ext cx="1733550" cy="457200"/>
+          </a:xfrm>
+          <a:prstGeom xmlns:a="http://schemas.openxmlformats.org/drawingml/2006/main" prst="roundRect">
+            <a:avLst>
+              <a:gd name="adj" fmla="val 16667"/>
+            </a:avLst>
+          </a:prstGeom>
+          <a:solidFill xmlns:a="http://schemas.openxmlformats.org/drawingml/2006/main">
+            <a:srgbClr val="06142E"/>
+          </a:solidFill>
+          <a:ln xmlns:a="http://schemas.openxmlformats.org/drawingml/2006/main" w="9525">
+            <a:solidFill>
+              <a:srgbClr val="1EC5FF">
+                <a:alpha val="33333"/>
+              </a:srgbClr>
+            </a:solidFill>
+            <a:prstDash val="solid"/>
+          </a:ln>
+        </p:spPr>
+      </p:sp>
+      <p:pic>
+        <p:nvPicPr>
+          <p:cNvPr id="23" name="" descr="Figura oficial da documentação dbt usada para explicar: O exemplo oficial conecta schema e métricas — Chaves e tipos de coluna sustentam os caminhos do grafo.."/>
+          <p:cNvPicPr>
+            <a:picLocks xmlns:a="http://schemas.openxmlformats.org/drawingml/2006/main" noChangeAspect="1"/>
+          </p:cNvPicPr>
+          <p:nvPr/>
+        </p:nvPicPr>
+        <p:blipFill>
+          <a:blip xmlns:r="http://schemas.openxmlformats.org/officeDocument/2006/relationships" xmlns:a="http://schemas.openxmlformats.org/drawingml/2006/main" r:embed="R9fd92f6ad4e443e0"/>
+          <a:stretch xmlns:a="http://schemas.openxmlformats.org/drawingml/2006/main"/>
+        </p:blipFill>
+        <p:spPr>
+          <a:xfrm xmlns:a="http://schemas.openxmlformats.org/drawingml/2006/main">
+            <a:off x="9893718" y="209550"/>
+            <a:ext cx="1491414" cy="323850"/>
+          </a:xfrm>
+          <a:prstGeom xmlns:a="http://schemas.openxmlformats.org/drawingml/2006/main" prst="rect">
+            <a:avLst/>
+          </a:prstGeom>
+        </p:spPr>
+      </p:pic>
+      <p:sp>
+        <p:nvSpPr>
+          <p:cNvPr id="10" name="footer-rule">
+            <a:extLst xmlns:a="http://schemas.openxmlformats.org/drawingml/2006/main">
+              <a:ext uri="{FF2B5EF4-FFF2-40B4-BE49-F238E27FC236}">
+                <a16:creationId xmlns:a16="http://schemas.microsoft.com/office/drawing/2014/main" id="{1990305A-1CEB-4384-8F7D-E0298E711C3D}"/>
               </a:ext>
             </a:extLst>
           </p:cNvPr>
@@ -15032,10 +16322,10 @@
       </p:sp>
       <p:sp>
         <p:nvSpPr>
-          <p:cNvPr id="9" name="footer">
-            <a:extLst xmlns:a="http://schemas.openxmlformats.org/drawingml/2006/main">
-              <a:ext uri="{FF2B5EF4-FFF2-40B4-BE49-F238E27FC236}">
-                <a16:creationId xmlns:a16="http://schemas.microsoft.com/office/drawing/2014/main" id="{113B9538-AF4F-4208-BAEA-A4C252CAB3A1}"/>
+          <p:cNvPr id="11" name="footer">
+            <a:extLst xmlns:a="http://schemas.openxmlformats.org/drawingml/2006/main">
+              <a:ext uri="{FF2B5EF4-FFF2-40B4-BE49-F238E27FC236}">
+                <a16:creationId xmlns:a16="http://schemas.microsoft.com/office/drawing/2014/main" id="{B79CCA9A-C764-4D30-BAAF-4C5FA5D41380}"/>
               </a:ext>
             </a:extLst>
           </p:cNvPr>
@@ -15087,10 +16377,10 @@
       </p:sp>
       <p:sp>
         <p:nvSpPr>
-          <p:cNvPr id="10" name="page-number">
-            <a:extLst xmlns:a="http://schemas.openxmlformats.org/drawingml/2006/main">
-              <a:ext uri="{FF2B5EF4-FFF2-40B4-BE49-F238E27FC236}">
-                <a16:creationId xmlns:a16="http://schemas.microsoft.com/office/drawing/2014/main" id="{F59712AD-83D8-45DF-98A7-67C719962AC2}"/>
+          <p:cNvPr id="12" name="page-number">
+            <a:extLst xmlns:a="http://schemas.openxmlformats.org/drawingml/2006/main">
+              <a:ext uri="{FF2B5EF4-FFF2-40B4-BE49-F238E27FC236}">
+                <a16:creationId xmlns:a16="http://schemas.microsoft.com/office/drawing/2014/main" id="{1C20FCB0-1227-4434-962A-C567929C2B09}"/>
               </a:ext>
             </a:extLst>
           </p:cNvPr>
@@ -15143,7 +16433,7 @@
     </p:spTree>
     <p:extLst>
       <p:ext uri="{BB962C8B-B14F-4D97-AF65-F5344CB8AC3E}">
-        <p14:creationId xmlns:p14="http://schemas.microsoft.com/office/powerpoint/2010/main" val="2087285518"/>
+        <p14:creationId xmlns:p14="http://schemas.microsoft.com/office/powerpoint/2010/main" val="1930140735"/>
       </p:ext>
     </p:extLst>
   </p:cSld>
@@ -15171,10 +16461,10 @@
       </p:grpSpPr>
       <p:sp>
         <p:nvSpPr>
-          <p:cNvPr id="10" name="slide-title">
-            <a:extLst xmlns:a="http://schemas.openxmlformats.org/drawingml/2006/main">
-              <a:ext uri="{FF2B5EF4-FFF2-40B4-BE49-F238E27FC236}">
-                <a16:creationId xmlns:a16="http://schemas.microsoft.com/office/drawing/2014/main" id="{0057E2AA-3208-4892-8E9F-CC2C565043EF}"/>
+          <p:cNvPr id="12" name="slide-title">
+            <a:extLst xmlns:a="http://schemas.openxmlformats.org/drawingml/2006/main">
+              <a:ext uri="{FF2B5EF4-FFF2-40B4-BE49-F238E27FC236}">
+                <a16:creationId xmlns:a16="http://schemas.microsoft.com/office/drawing/2014/main" id="{366D7137-9878-4E36-8E7D-511E4F8914C2}"/>
               </a:ext>
             </a:extLst>
           </p:cNvPr>
@@ -15225,7 +16515,7 @@
           <p:cNvPr id="2" name="visual-claim">
             <a:extLst xmlns:a="http://schemas.openxmlformats.org/drawingml/2006/main">
               <a:ext uri="{FF2B5EF4-FFF2-40B4-BE49-F238E27FC236}">
-                <a16:creationId xmlns:a16="http://schemas.microsoft.com/office/drawing/2014/main" id="{6A59DBD2-16D0-493E-B2D4-D39A25A45355}"/>
+                <a16:creationId xmlns:a16="http://schemas.microsoft.com/office/drawing/2014/main" id="{88F51AC8-5EED-4C94-BF35-22A51DBD2206}"/>
               </a:ext>
             </a:extLst>
           </p:cNvPr>
@@ -15276,7 +16566,7 @@
           <p:cNvPr id="3" name="image-surface">
             <a:extLst xmlns:a="http://schemas.openxmlformats.org/drawingml/2006/main">
               <a:ext uri="{FF2B5EF4-FFF2-40B4-BE49-F238E27FC236}">
-                <a16:creationId xmlns:a16="http://schemas.microsoft.com/office/drawing/2014/main" id="{6DCED061-158B-4C55-9549-FDC736569412}"/>
+                <a16:creationId xmlns:a16="http://schemas.microsoft.com/office/drawing/2014/main" id="{275FB48D-A4E2-484E-95C0-1F5636997FC1}"/>
               </a:ext>
             </a:extLst>
           </p:cNvPr>
@@ -15308,14 +16598,14 @@
       </p:sp>
       <p:pic>
         <p:nvPicPr>
-          <p:cNvPr id="15" name="" descr="Figura oficial da documentação dbt usada para explicar: O exemplo oficial conecta schema e métricas — Chaves e tipos de coluna sustentam os caminhos do grafo.."/>
+          <p:cNvPr id="18" name="" descr="Figura oficial da documentação dbt usada para explicar: O exemplo oficial conecta schema e métricas — Chaves e tipos de coluna sustentam os caminhos do grafo.."/>
           <p:cNvPicPr>
             <a:picLocks xmlns:a="http://schemas.openxmlformats.org/drawingml/2006/main" noChangeAspect="1"/>
           </p:cNvPicPr>
           <p:nvPr/>
         </p:nvPicPr>
         <p:blipFill>
-          <a:blip xmlns:r="http://schemas.openxmlformats.org/officeDocument/2006/relationships" xmlns:a="http://schemas.openxmlformats.org/drawingml/2006/main" r:embed="R80a541c2a01b47d3"/>
+          <a:blip xmlns:r="http://schemas.openxmlformats.org/officeDocument/2006/relationships" xmlns:a="http://schemas.openxmlformats.org/drawingml/2006/main" r:embed="R766dc297c86b468d"/>
           <a:stretch xmlns:a="http://schemas.openxmlformats.org/drawingml/2006/main"/>
         </p:blipFill>
         <p:spPr>
@@ -15333,7 +16623,7 @@
           <p:cNvPr id="5" name="image-caption">
             <a:extLst xmlns:a="http://schemas.openxmlformats.org/drawingml/2006/main">
               <a:ext uri="{FF2B5EF4-FFF2-40B4-BE49-F238E27FC236}">
-                <a16:creationId xmlns:a16="http://schemas.microsoft.com/office/drawing/2014/main" id="{623BA476-74F2-45DD-A8E5-CEB4B3AB45C9}"/>
+                <a16:creationId xmlns:a16="http://schemas.microsoft.com/office/drawing/2014/main" id="{49BF3F51-3474-4A29-A62D-AC7CE45CE609}"/>
               </a:ext>
             </a:extLst>
           </p:cNvPr>
@@ -15384,7 +16674,7 @@
           <p:cNvPr id="6" name="eyebrow">
             <a:extLst xmlns:a="http://schemas.openxmlformats.org/drawingml/2006/main">
               <a:ext uri="{FF2B5EF4-FFF2-40B4-BE49-F238E27FC236}">
-                <a16:creationId xmlns:a16="http://schemas.microsoft.com/office/drawing/2014/main" id="{944D75C6-FE7F-4BE2-8D48-7021C6B0E405}"/>
+                <a16:creationId xmlns:a16="http://schemas.microsoft.com/office/drawing/2014/main" id="{C6733A24-187A-4D71-ABF8-7E45829F4732}"/>
               </a:ext>
             </a:extLst>
           </p:cNvPr>
@@ -15432,10 +16722,69 @@
       </p:sp>
       <p:sp>
         <p:nvSpPr>
-          <p:cNvPr id="7" name="footer-rule">
-            <a:extLst xmlns:a="http://schemas.openxmlformats.org/drawingml/2006/main">
-              <a:ext uri="{FF2B5EF4-FFF2-40B4-BE49-F238E27FC236}">
-                <a16:creationId xmlns:a16="http://schemas.microsoft.com/office/drawing/2014/main" id="{B3799451-10BD-4B57-86ED-A3D2F4C95CA1}"/>
+          <p:cNvPr id="7" name="rescue-point-logo-background">
+            <a:extLst xmlns:a="http://schemas.openxmlformats.org/drawingml/2006/main">
+              <a:ext uri="{FF2B5EF4-FFF2-40B4-BE49-F238E27FC236}">
+                <a16:creationId xmlns:a16="http://schemas.microsoft.com/office/drawing/2014/main" id="{B43BBC8D-9CBE-4FC6-AAD9-B41471BF7300}"/>
+              </a:ext>
+            </a:extLst>
+          </p:cNvPr>
+          <p:cNvSpPr>
+            <a:spLocks xmlns:a="http://schemas.openxmlformats.org/drawingml/2006/main" noGrp="1"/>
+          </p:cNvSpPr>
+          <p:nvPr/>
+        </p:nvSpPr>
+        <p:spPr>
+          <a:xfrm xmlns:a="http://schemas.openxmlformats.org/drawingml/2006/main">
+            <a:off x="9772650" y="133350"/>
+            <a:ext cx="1733550" cy="457200"/>
+          </a:xfrm>
+          <a:prstGeom xmlns:a="http://schemas.openxmlformats.org/drawingml/2006/main" prst="roundRect">
+            <a:avLst>
+              <a:gd name="adj" fmla="val 16667"/>
+            </a:avLst>
+          </a:prstGeom>
+          <a:solidFill xmlns:a="http://schemas.openxmlformats.org/drawingml/2006/main">
+            <a:srgbClr val="06142E"/>
+          </a:solidFill>
+          <a:ln xmlns:a="http://schemas.openxmlformats.org/drawingml/2006/main" w="9525">
+            <a:solidFill>
+              <a:srgbClr val="1EC5FF">
+                <a:alpha val="33333"/>
+              </a:srgbClr>
+            </a:solidFill>
+            <a:prstDash val="solid"/>
+          </a:ln>
+        </p:spPr>
+      </p:sp>
+      <p:pic>
+        <p:nvPicPr>
+          <p:cNvPr id="22" name="" descr="Figura oficial da documentação dbt usada para explicar: O exemplo oficial conecta schema e métricas — Chaves e tipos de coluna sustentam os caminhos do grafo.."/>
+          <p:cNvPicPr>
+            <a:picLocks xmlns:a="http://schemas.openxmlformats.org/drawingml/2006/main" noChangeAspect="1"/>
+          </p:cNvPicPr>
+          <p:nvPr/>
+        </p:nvPicPr>
+        <p:blipFill>
+          <a:blip xmlns:r="http://schemas.openxmlformats.org/officeDocument/2006/relationships" xmlns:a="http://schemas.openxmlformats.org/drawingml/2006/main" r:embed="Reb800e5f1381401c"/>
+          <a:stretch xmlns:a="http://schemas.openxmlformats.org/drawingml/2006/main"/>
+        </p:blipFill>
+        <p:spPr>
+          <a:xfrm xmlns:a="http://schemas.openxmlformats.org/drawingml/2006/main">
+            <a:off x="9893718" y="209550"/>
+            <a:ext cx="1491414" cy="323850"/>
+          </a:xfrm>
+          <a:prstGeom xmlns:a="http://schemas.openxmlformats.org/drawingml/2006/main" prst="rect">
+            <a:avLst/>
+          </a:prstGeom>
+        </p:spPr>
+      </p:pic>
+      <p:sp>
+        <p:nvSpPr>
+          <p:cNvPr id="9" name="footer-rule">
+            <a:extLst xmlns:a="http://schemas.openxmlformats.org/drawingml/2006/main">
+              <a:ext uri="{FF2B5EF4-FFF2-40B4-BE49-F238E27FC236}">
+                <a16:creationId xmlns:a16="http://schemas.microsoft.com/office/drawing/2014/main" id="{471488A5-D3FD-4E4E-AA7E-C2D77710C3EB}"/>
               </a:ext>
             </a:extLst>
           </p:cNvPr>
@@ -15465,10 +16814,10 @@
       </p:sp>
       <p:sp>
         <p:nvSpPr>
-          <p:cNvPr id="8" name="footer">
-            <a:extLst xmlns:a="http://schemas.openxmlformats.org/drawingml/2006/main">
-              <a:ext uri="{FF2B5EF4-FFF2-40B4-BE49-F238E27FC236}">
-                <a16:creationId xmlns:a16="http://schemas.microsoft.com/office/drawing/2014/main" id="{1DBF67BB-7FA9-4A06-929B-56B77ACABE10}"/>
+          <p:cNvPr id="10" name="footer">
+            <a:extLst xmlns:a="http://schemas.openxmlformats.org/drawingml/2006/main">
+              <a:ext uri="{FF2B5EF4-FFF2-40B4-BE49-F238E27FC236}">
+                <a16:creationId xmlns:a16="http://schemas.microsoft.com/office/drawing/2014/main" id="{A59BE6EC-B7EA-4B3A-96DC-964FA4BE7BE3}"/>
               </a:ext>
             </a:extLst>
           </p:cNvPr>
@@ -15520,10 +16869,10 @@
       </p:sp>
       <p:sp>
         <p:nvSpPr>
-          <p:cNvPr id="9" name="page-number">
-            <a:extLst xmlns:a="http://schemas.openxmlformats.org/drawingml/2006/main">
-              <a:ext uri="{FF2B5EF4-FFF2-40B4-BE49-F238E27FC236}">
-                <a16:creationId xmlns:a16="http://schemas.microsoft.com/office/drawing/2014/main" id="{3BB34ECA-2AE3-4D0E-9465-A25C74671849}"/>
+          <p:cNvPr id="11" name="page-number">
+            <a:extLst xmlns:a="http://schemas.openxmlformats.org/drawingml/2006/main">
+              <a:ext uri="{FF2B5EF4-FFF2-40B4-BE49-F238E27FC236}">
+                <a16:creationId xmlns:a16="http://schemas.microsoft.com/office/drawing/2014/main" id="{3A1CB00C-D5AD-4B6A-A6F7-30BE8E2747FE}"/>
               </a:ext>
             </a:extLst>
           </p:cNvPr>
@@ -15576,7 +16925,7 @@
     </p:spTree>
     <p:extLst>
       <p:ext uri="{BB962C8B-B14F-4D97-AF65-F5344CB8AC3E}">
-        <p14:creationId xmlns:p14="http://schemas.microsoft.com/office/powerpoint/2010/main" val="1494434836"/>
+        <p14:creationId xmlns:p14="http://schemas.microsoft.com/office/powerpoint/2010/main" val="2045711948"/>
       </p:ext>
     </p:extLst>
   </p:cSld>
@@ -15604,10 +16953,10 @@
       </p:grpSpPr>
       <p:sp>
         <p:nvSpPr>
-          <p:cNvPr id="11" name="slide-title">
-            <a:extLst xmlns:a="http://schemas.openxmlformats.org/drawingml/2006/main">
-              <a:ext uri="{FF2B5EF4-FFF2-40B4-BE49-F238E27FC236}">
-                <a16:creationId xmlns:a16="http://schemas.microsoft.com/office/drawing/2014/main" id="{88E128C6-7022-40B0-B078-47189C49A7DF}"/>
+          <p:cNvPr id="13" name="slide-title">
+            <a:extLst xmlns:a="http://schemas.openxmlformats.org/drawingml/2006/main">
+              <a:ext uri="{FF2B5EF4-FFF2-40B4-BE49-F238E27FC236}">
+                <a16:creationId xmlns:a16="http://schemas.microsoft.com/office/drawing/2014/main" id="{B5F2A19A-D494-4D21-AD66-66B925EE1DCB}"/>
               </a:ext>
             </a:extLst>
           </p:cNvPr>
@@ -15658,7 +17007,7 @@
           <p:cNvPr id="2" name="slide-subtitle">
             <a:extLst xmlns:a="http://schemas.openxmlformats.org/drawingml/2006/main">
               <a:ext uri="{FF2B5EF4-FFF2-40B4-BE49-F238E27FC236}">
-                <a16:creationId xmlns:a16="http://schemas.microsoft.com/office/drawing/2014/main" id="{ACADE553-E47A-4621-98E5-B2EF2C0A88E7}"/>
+                <a16:creationId xmlns:a16="http://schemas.microsoft.com/office/drawing/2014/main" id="{C72DC58E-2D5C-45EE-9C41-02F5E5461079}"/>
               </a:ext>
             </a:extLst>
           </p:cNvPr>
@@ -15709,7 +17058,7 @@
           <p:cNvPr id="3" name="bullets">
             <a:extLst xmlns:a="http://schemas.openxmlformats.org/drawingml/2006/main">
               <a:ext uri="{FF2B5EF4-FFF2-40B4-BE49-F238E27FC236}">
-                <a16:creationId xmlns:a16="http://schemas.microsoft.com/office/drawing/2014/main" id="{45427AE3-3718-4036-8864-40A40D877091}"/>
+                <a16:creationId xmlns:a16="http://schemas.microsoft.com/office/drawing/2014/main" id="{26A34304-5DDC-4C50-B6EB-C02EDD98ADE7}"/>
               </a:ext>
             </a:extLst>
           </p:cNvPr>
@@ -15796,7 +17145,7 @@
           <p:cNvPr id="4" name="ambient-glow">
             <a:extLst xmlns:a="http://schemas.openxmlformats.org/drawingml/2006/main">
               <a:ext uri="{FF2B5EF4-FFF2-40B4-BE49-F238E27FC236}">
-                <a16:creationId xmlns:a16="http://schemas.microsoft.com/office/drawing/2014/main" id="{4F8FFD0C-23EA-4C84-876A-A2CD9B88EC11}"/>
+                <a16:creationId xmlns:a16="http://schemas.microsoft.com/office/drawing/2014/main" id="{845BAB4F-C4FD-4C90-A3F6-F0B227BE704C}"/>
               </a:ext>
             </a:extLst>
           </p:cNvPr>
@@ -15833,7 +17182,7 @@
           <p:cNvPr id="5" name="ambient-core">
             <a:extLst xmlns:a="http://schemas.openxmlformats.org/drawingml/2006/main">
               <a:ext uri="{FF2B5EF4-FFF2-40B4-BE49-F238E27FC236}">
-                <a16:creationId xmlns:a16="http://schemas.microsoft.com/office/drawing/2014/main" id="{A756B27C-B34F-41F8-BAD6-074E7F968E4F}"/>
+                <a16:creationId xmlns:a16="http://schemas.microsoft.com/office/drawing/2014/main" id="{3CF15EA7-7A62-4312-9360-F6CE3B62345D}"/>
               </a:ext>
             </a:extLst>
           </p:cNvPr>
@@ -15870,7 +17219,7 @@
           <p:cNvPr id="6" name="section-number">
             <a:extLst xmlns:a="http://schemas.openxmlformats.org/drawingml/2006/main">
               <a:ext uri="{FF2B5EF4-FFF2-40B4-BE49-F238E27FC236}">
-                <a16:creationId xmlns:a16="http://schemas.microsoft.com/office/drawing/2014/main" id="{3CC74693-F1B6-4BCF-9571-A2079CAFB66B}"/>
+                <a16:creationId xmlns:a16="http://schemas.microsoft.com/office/drawing/2014/main" id="{CEA38E63-E885-46AF-8939-930A46C3DE36}"/>
               </a:ext>
             </a:extLst>
           </p:cNvPr>
@@ -15921,7 +17270,7 @@
           <p:cNvPr id="7" name="eyebrow">
             <a:extLst xmlns:a="http://schemas.openxmlformats.org/drawingml/2006/main">
               <a:ext uri="{FF2B5EF4-FFF2-40B4-BE49-F238E27FC236}">
-                <a16:creationId xmlns:a16="http://schemas.microsoft.com/office/drawing/2014/main" id="{1AA39E4E-BE7A-4843-B1FD-AB5380DA4CE9}"/>
+                <a16:creationId xmlns:a16="http://schemas.microsoft.com/office/drawing/2014/main" id="{F0B56C6C-8DBF-4BAD-BE3D-3E9F70F472DE}"/>
               </a:ext>
             </a:extLst>
           </p:cNvPr>
@@ -15969,10 +17318,69 @@
       </p:sp>
       <p:sp>
         <p:nvSpPr>
-          <p:cNvPr id="8" name="footer-rule">
-            <a:extLst xmlns:a="http://schemas.openxmlformats.org/drawingml/2006/main">
-              <a:ext uri="{FF2B5EF4-FFF2-40B4-BE49-F238E27FC236}">
-                <a16:creationId xmlns:a16="http://schemas.microsoft.com/office/drawing/2014/main" id="{44423991-C95F-4821-B8C4-0B958A06283A}"/>
+          <p:cNvPr id="8" name="rescue-point-logo-background">
+            <a:extLst xmlns:a="http://schemas.openxmlformats.org/drawingml/2006/main">
+              <a:ext uri="{FF2B5EF4-FFF2-40B4-BE49-F238E27FC236}">
+                <a16:creationId xmlns:a16="http://schemas.microsoft.com/office/drawing/2014/main" id="{91294B41-7E3E-42C5-8452-6D7248A60E20}"/>
+              </a:ext>
+            </a:extLst>
+          </p:cNvPr>
+          <p:cNvSpPr>
+            <a:spLocks xmlns:a="http://schemas.openxmlformats.org/drawingml/2006/main" noGrp="1"/>
+          </p:cNvSpPr>
+          <p:nvPr/>
+        </p:nvSpPr>
+        <p:spPr>
+          <a:xfrm xmlns:a="http://schemas.openxmlformats.org/drawingml/2006/main">
+            <a:off x="9772650" y="133350"/>
+            <a:ext cx="1733550" cy="457200"/>
+          </a:xfrm>
+          <a:prstGeom xmlns:a="http://schemas.openxmlformats.org/drawingml/2006/main" prst="roundRect">
+            <a:avLst>
+              <a:gd name="adj" fmla="val 16667"/>
+            </a:avLst>
+          </a:prstGeom>
+          <a:solidFill xmlns:a="http://schemas.openxmlformats.org/drawingml/2006/main">
+            <a:srgbClr val="06142E"/>
+          </a:solidFill>
+          <a:ln xmlns:a="http://schemas.openxmlformats.org/drawingml/2006/main" w="9525">
+            <a:solidFill>
+              <a:srgbClr val="1EC5FF">
+                <a:alpha val="33333"/>
+              </a:srgbClr>
+            </a:solidFill>
+            <a:prstDash val="solid"/>
+          </a:ln>
+        </p:spPr>
+      </p:sp>
+      <p:pic>
+        <p:nvPicPr>
+          <p:cNvPr id="23" name="" descr="Figura oficial da documentação dbt usada para explicar: Tempo também é contrato — A dimensão padrão precisa refletir a pergunta de negócio.."/>
+          <p:cNvPicPr>
+            <a:picLocks xmlns:a="http://schemas.openxmlformats.org/drawingml/2006/main" noChangeAspect="1"/>
+          </p:cNvPicPr>
+          <p:nvPr/>
+        </p:nvPicPr>
+        <p:blipFill>
+          <a:blip xmlns:r="http://schemas.openxmlformats.org/officeDocument/2006/relationships" xmlns:a="http://schemas.openxmlformats.org/drawingml/2006/main" r:embed="R5289a6cc9ca340af"/>
+          <a:stretch xmlns:a="http://schemas.openxmlformats.org/drawingml/2006/main"/>
+        </p:blipFill>
+        <p:spPr>
+          <a:xfrm xmlns:a="http://schemas.openxmlformats.org/drawingml/2006/main">
+            <a:off x="9893718" y="209550"/>
+            <a:ext cx="1491414" cy="323850"/>
+          </a:xfrm>
+          <a:prstGeom xmlns:a="http://schemas.openxmlformats.org/drawingml/2006/main" prst="rect">
+            <a:avLst/>
+          </a:prstGeom>
+        </p:spPr>
+      </p:pic>
+      <p:sp>
+        <p:nvSpPr>
+          <p:cNvPr id="10" name="footer-rule">
+            <a:extLst xmlns:a="http://schemas.openxmlformats.org/drawingml/2006/main">
+              <a:ext uri="{FF2B5EF4-FFF2-40B4-BE49-F238E27FC236}">
+                <a16:creationId xmlns:a16="http://schemas.microsoft.com/office/drawing/2014/main" id="{145A652F-400D-4CA0-999B-2FCD38CF661E}"/>
               </a:ext>
             </a:extLst>
           </p:cNvPr>
@@ -16002,10 +17410,10 @@
       </p:sp>
       <p:sp>
         <p:nvSpPr>
-          <p:cNvPr id="9" name="footer">
-            <a:extLst xmlns:a="http://schemas.openxmlformats.org/drawingml/2006/main">
-              <a:ext uri="{FF2B5EF4-FFF2-40B4-BE49-F238E27FC236}">
-                <a16:creationId xmlns:a16="http://schemas.microsoft.com/office/drawing/2014/main" id="{EAE5E2AB-F79D-4C80-84F7-8BC425E47CA7}"/>
+          <p:cNvPr id="11" name="footer">
+            <a:extLst xmlns:a="http://schemas.openxmlformats.org/drawingml/2006/main">
+              <a:ext uri="{FF2B5EF4-FFF2-40B4-BE49-F238E27FC236}">
+                <a16:creationId xmlns:a16="http://schemas.microsoft.com/office/drawing/2014/main" id="{1581A844-8D08-4DA9-9D94-63B2344CF181}"/>
               </a:ext>
             </a:extLst>
           </p:cNvPr>
@@ -16057,10 +17465,10 @@
       </p:sp>
       <p:sp>
         <p:nvSpPr>
-          <p:cNvPr id="10" name="page-number">
-            <a:extLst xmlns:a="http://schemas.openxmlformats.org/drawingml/2006/main">
-              <a:ext uri="{FF2B5EF4-FFF2-40B4-BE49-F238E27FC236}">
-                <a16:creationId xmlns:a16="http://schemas.microsoft.com/office/drawing/2014/main" id="{C1C1424C-4E1B-4F37-A0FF-3C4B91932AD3}"/>
+          <p:cNvPr id="12" name="page-number">
+            <a:extLst xmlns:a="http://schemas.openxmlformats.org/drawingml/2006/main">
+              <a:ext uri="{FF2B5EF4-FFF2-40B4-BE49-F238E27FC236}">
+                <a16:creationId xmlns:a16="http://schemas.microsoft.com/office/drawing/2014/main" id="{47F34C54-ED04-442E-9083-B3115C7DCAFD}"/>
               </a:ext>
             </a:extLst>
           </p:cNvPr>
@@ -16113,7 +17521,7 @@
     </p:spTree>
     <p:extLst>
       <p:ext uri="{BB962C8B-B14F-4D97-AF65-F5344CB8AC3E}">
-        <p14:creationId xmlns:p14="http://schemas.microsoft.com/office/powerpoint/2010/main" val="245235287"/>
+        <p14:creationId xmlns:p14="http://schemas.microsoft.com/office/powerpoint/2010/main" val="211374860"/>
       </p:ext>
     </p:extLst>
   </p:cSld>
